--- a/docs/Cafe.pi_쉬운_사용자매뉴얼_세로.pptx
+++ b/docs/Cafe.pi_쉬운_사용자매뉴얼_세로.pptx
@@ -6310,7 +6310,7 @@
         <p:spPr>
           <a:xfrm>
             <a:off x="1389888" y="365760"/>
-            <a:ext cx="5056632" cy="822960"/>
+            <a:ext cx="5056632" cy="1005840"/>
           </a:xfrm>
           <a:prstGeom prst="rect">
             <a:avLst/>
@@ -7661,7 +7661,7 @@
         <p:spPr>
           <a:xfrm>
             <a:off x="1389888" y="365760"/>
-            <a:ext cx="5056632" cy="822960"/>
+            <a:ext cx="5056632" cy="1005840"/>
           </a:xfrm>
           <a:prstGeom prst="rect">
             <a:avLst/>
@@ -8106,6 +8106,89 @@
         </p:nvSpPr>
         <p:spPr>
           <a:xfrm>
+            <a:off x="5257800" y="5158587"/>
+            <a:ext cx="1005840" cy="365760"/>
+          </a:xfrm>
+          <a:prstGeom prst="roundRect">
+            <a:avLst>
+              <a:gd name="adj" fmla="val 50000"/>
+            </a:avLst>
+          </a:prstGeom>
+          <a:solidFill>
+            <a:srgbClr val="3B2A20"/>
+          </a:solidFill>
+          <a:ln>
+            <a:noFill/>
+          </a:ln>
+          <a:effectLst/>
+        </p:spPr>
+        <p:style>
+          <a:lnRef idx="1">
+            <a:schemeClr val="accent1"/>
+          </a:lnRef>
+          <a:fillRef idx="3">
+            <a:schemeClr val="accent1"/>
+          </a:fillRef>
+          <a:effectRef idx="2">
+            <a:schemeClr val="accent1"/>
+          </a:effectRef>
+          <a:fontRef idx="minor">
+            <a:schemeClr val="lt1"/>
+          </a:fontRef>
+        </p:style>
+        <p:txBody>
+          <a:bodyPr rtlCol="0" anchor="ctr"/>
+          <a:lstStyle/>
+          <a:p>
+            <a:pPr algn="ctr"/>
+          </a:p>
+        </p:txBody>
+      </p:sp>
+      <p:sp>
+        <p:nvSpPr>
+          <p:cNvPr id="18" name="TextBox 17"/>
+          <p:cNvSpPr txBox="1"/>
+          <p:nvPr/>
+        </p:nvSpPr>
+        <p:spPr>
+          <a:xfrm>
+            <a:off x="5257800" y="5158587"/>
+            <a:ext cx="1005840" cy="365760"/>
+          </a:xfrm>
+          <a:prstGeom prst="rect">
+            <a:avLst/>
+          </a:prstGeom>
+          <a:noFill/>
+        </p:spPr>
+        <p:txBody>
+          <a:bodyPr wrap="square" anchor="ctr" lIns="25400" rIns="25400" tIns="12700" bIns="12700">
+            <a:spAutoFit/>
+          </a:bodyPr>
+          <a:lstStyle/>
+          <a:p>
+            <a:pPr algn="ctr" marL="0" indent="0">
+              <a:buNone/>
+            </a:pPr>
+            <a:r>
+              <a:rPr sz="1000" b="1" i="0">
+                <a:solidFill>
+                  <a:srgbClr val="F4A52A"/>
+                </a:solidFill>
+                <a:latin typeface="Malgun Gothic"/>
+              </a:rPr>
+              <a:t>🔗 PiRC1</a:t>
+            </a:r>
+          </a:p>
+        </p:txBody>
+      </p:sp>
+      <p:sp>
+        <p:nvSpPr>
+          <p:cNvPr id="19" name="Rounded Rectangle 18"/>
+          <p:cNvSpPr/>
+          <p:nvPr/>
+        </p:nvSpPr>
+        <p:spPr>
+          <a:xfrm>
             <a:off x="411480" y="8442654"/>
             <a:ext cx="6035040" cy="2286000"/>
           </a:xfrm>
@@ -8148,7 +8231,7 @@
       </p:sp>
       <p:sp>
         <p:nvSpPr>
-          <p:cNvPr id="18" name="Oval 17"/>
+          <p:cNvPr id="20" name="Oval 19"/>
           <p:cNvSpPr/>
           <p:nvPr/>
         </p:nvSpPr>
@@ -8192,7 +8275,7 @@
       </p:sp>
       <p:sp>
         <p:nvSpPr>
-          <p:cNvPr id="19" name="TextBox 18"/>
+          <p:cNvPr id="21" name="TextBox 20"/>
           <p:cNvSpPr txBox="1"/>
           <p:nvPr/>
         </p:nvSpPr>
@@ -8229,7 +8312,7 @@
       </p:sp>
       <p:sp>
         <p:nvSpPr>
-          <p:cNvPr id="20" name="TextBox 19"/>
+          <p:cNvPr id="22" name="TextBox 21"/>
           <p:cNvSpPr txBox="1"/>
           <p:nvPr/>
         </p:nvSpPr>
@@ -8286,7 +8369,7 @@
       </p:sp>
       <p:sp>
         <p:nvSpPr>
-          <p:cNvPr id="21" name="Rounded Rectangle 20"/>
+          <p:cNvPr id="23" name="Rounded Rectangle 22"/>
           <p:cNvSpPr/>
           <p:nvPr/>
         </p:nvSpPr>
@@ -8332,7 +8415,7 @@
       </p:sp>
       <p:sp>
         <p:nvSpPr>
-          <p:cNvPr id="22" name="Rectangle 21"/>
+          <p:cNvPr id="24" name="Rectangle 23"/>
           <p:cNvSpPr/>
           <p:nvPr/>
         </p:nvSpPr>
@@ -8376,7 +8459,7 @@
       </p:sp>
       <p:sp>
         <p:nvSpPr>
-          <p:cNvPr id="23" name="TextBox 22"/>
+          <p:cNvPr id="25" name="TextBox 24"/>
           <p:cNvSpPr txBox="1"/>
           <p:nvPr/>
         </p:nvSpPr>
@@ -8422,7 +8505,7 @@
       </p:sp>
       <p:sp>
         <p:nvSpPr>
-          <p:cNvPr id="24" name="TextBox 23"/>
+          <p:cNvPr id="26" name="TextBox 25"/>
           <p:cNvSpPr txBox="1"/>
           <p:nvPr/>
         </p:nvSpPr>
@@ -8459,7 +8542,7 @@
       </p:sp>
       <p:sp>
         <p:nvSpPr>
-          <p:cNvPr id="25" name="TextBox 24"/>
+          <p:cNvPr id="27" name="TextBox 26"/>
           <p:cNvSpPr txBox="1"/>
           <p:nvPr/>
         </p:nvSpPr>
@@ -8727,14 +8810,60 @@
       </p:sp>
       <p:sp>
         <p:nvSpPr>
-          <p:cNvPr id="7" name="TextBox 6"/>
+          <p:cNvPr id="7" name="Rounded Rectangle 6"/>
+          <p:cNvSpPr/>
+          <p:nvPr/>
+        </p:nvSpPr>
+        <p:spPr>
+          <a:xfrm>
+            <a:off x="5349240" y="420624"/>
+            <a:ext cx="1097280" cy="384048"/>
+          </a:xfrm>
+          <a:prstGeom prst="roundRect">
+            <a:avLst>
+              <a:gd name="adj" fmla="val 50000"/>
+            </a:avLst>
+          </a:prstGeom>
+          <a:solidFill>
+            <a:srgbClr val="3B2A20"/>
+          </a:solidFill>
+          <a:ln>
+            <a:noFill/>
+          </a:ln>
+          <a:effectLst/>
+        </p:spPr>
+        <p:style>
+          <a:lnRef idx="1">
+            <a:schemeClr val="accent1"/>
+          </a:lnRef>
+          <a:fillRef idx="3">
+            <a:schemeClr val="accent1"/>
+          </a:fillRef>
+          <a:effectRef idx="2">
+            <a:schemeClr val="accent1"/>
+          </a:effectRef>
+          <a:fontRef idx="minor">
+            <a:schemeClr val="lt1"/>
+          </a:fontRef>
+        </p:style>
+        <p:txBody>
+          <a:bodyPr rtlCol="0" anchor="ctr"/>
+          <a:lstStyle/>
+          <a:p>
+            <a:pPr algn="ctr"/>
+          </a:p>
+        </p:txBody>
+      </p:sp>
+      <p:sp>
+        <p:nvSpPr>
+          <p:cNvPr id="8" name="TextBox 7"/>
           <p:cNvSpPr txBox="1"/>
           <p:nvPr/>
         </p:nvSpPr>
         <p:spPr>
           <a:xfrm>
-            <a:off x="1389888" y="365760"/>
-            <a:ext cx="5056632" cy="822960"/>
+            <a:off x="5349240" y="420624"/>
+            <a:ext cx="1097280" cy="384048"/>
           </a:xfrm>
           <a:prstGeom prst="rect">
             <a:avLst/>
@@ -8747,31 +8876,31 @@
           </a:bodyPr>
           <a:lstStyle/>
           <a:p>
-            <a:pPr algn="l" marL="0" indent="0">
-              <a:buNone/>
-            </a:pPr>
-            <a:r>
-              <a:rPr sz="1900" b="1" i="0">
-                <a:solidFill>
-                  <a:srgbClr val="3B2A20"/>
-                </a:solidFill>
-                <a:latin typeface="Malgun Gothic"/>
-              </a:rPr>
-              <a:t>🎫  구독 요금제 — Bean으로 결제</a:t>
-            </a:r>
-          </a:p>
-        </p:txBody>
-      </p:sp>
-      <p:sp>
-        <p:nvSpPr>
-          <p:cNvPr id="8" name="TextBox 7"/>
+            <a:pPr algn="ctr" marL="0" indent="0">
+              <a:buNone/>
+            </a:pPr>
+            <a:r>
+              <a:rPr sz="1100" b="1" i="0">
+                <a:solidFill>
+                  <a:srgbClr val="F4A52A"/>
+                </a:solidFill>
+                <a:latin typeface="Malgun Gothic"/>
+              </a:rPr>
+              <a:t>🔗 PiRC2</a:t>
+            </a:r>
+          </a:p>
+        </p:txBody>
+      </p:sp>
+      <p:sp>
+        <p:nvSpPr>
+          <p:cNvPr id="9" name="TextBox 8"/>
           <p:cNvSpPr txBox="1"/>
           <p:nvPr/>
         </p:nvSpPr>
         <p:spPr>
           <a:xfrm>
-            <a:off x="411480" y="1188720"/>
-            <a:ext cx="6035040" cy="502920"/>
+            <a:off x="1389888" y="365760"/>
+            <a:ext cx="3822192" cy="1005840"/>
           </a:xfrm>
           <a:prstGeom prst="rect">
             <a:avLst/>
@@ -8788,6 +8917,43 @@
               <a:buNone/>
             </a:pPr>
             <a:r>
+              <a:rPr sz="1900" b="1" i="0">
+                <a:solidFill>
+                  <a:srgbClr val="3B2A20"/>
+                </a:solidFill>
+                <a:latin typeface="Malgun Gothic"/>
+              </a:rPr>
+              <a:t>🎫  구독 요금제 — Bean으로 결제</a:t>
+            </a:r>
+          </a:p>
+        </p:txBody>
+      </p:sp>
+      <p:sp>
+        <p:nvSpPr>
+          <p:cNvPr id="10" name="TextBox 9"/>
+          <p:cNvSpPr txBox="1"/>
+          <p:nvPr/>
+        </p:nvSpPr>
+        <p:spPr>
+          <a:xfrm>
+            <a:off x="411480" y="1188720"/>
+            <a:ext cx="6035040" cy="502920"/>
+          </a:xfrm>
+          <a:prstGeom prst="rect">
+            <a:avLst/>
+          </a:prstGeom>
+          <a:noFill/>
+        </p:spPr>
+        <p:txBody>
+          <a:bodyPr wrap="square" anchor="ctr" lIns="25400" rIns="25400" tIns="12700" bIns="12700">
+            <a:spAutoFit/>
+          </a:bodyPr>
+          <a:lstStyle/>
+          <a:p>
+            <a:pPr algn="l" marL="0" indent="0">
+              <a:buNone/>
+            </a:pPr>
+            <a:r>
               <a:rPr sz="1200" b="0" i="0">
                 <a:solidFill>
                   <a:srgbClr val="8A7A6D"/>
@@ -8801,7 +8967,7 @@
       </p:sp>
       <p:sp>
         <p:nvSpPr>
-          <p:cNvPr id="9" name="Rounded Rectangle 8"/>
+          <p:cNvPr id="11" name="Rounded Rectangle 10"/>
           <p:cNvSpPr/>
           <p:nvPr/>
         </p:nvSpPr>
@@ -8849,7 +9015,7 @@
       </p:sp>
       <p:sp>
         <p:nvSpPr>
-          <p:cNvPr id="10" name="Rectangle 9"/>
+          <p:cNvPr id="12" name="Rectangle 11"/>
           <p:cNvSpPr/>
           <p:nvPr/>
         </p:nvSpPr>
@@ -8893,7 +9059,7 @@
       </p:sp>
       <p:sp>
         <p:nvSpPr>
-          <p:cNvPr id="11" name="TextBox 10"/>
+          <p:cNvPr id="13" name="TextBox 12"/>
           <p:cNvSpPr txBox="1"/>
           <p:nvPr/>
         </p:nvSpPr>
@@ -8930,7 +9096,7 @@
       </p:sp>
       <p:sp>
         <p:nvSpPr>
-          <p:cNvPr id="12" name="TextBox 11"/>
+          <p:cNvPr id="14" name="TextBox 13"/>
           <p:cNvSpPr txBox="1"/>
           <p:nvPr/>
         </p:nvSpPr>
@@ -8967,7 +9133,7 @@
       </p:sp>
       <p:sp>
         <p:nvSpPr>
-          <p:cNvPr id="13" name="TextBox 12"/>
+          <p:cNvPr id="15" name="TextBox 14"/>
           <p:cNvSpPr txBox="1"/>
           <p:nvPr/>
         </p:nvSpPr>
@@ -9004,7 +9170,7 @@
       </p:sp>
       <p:sp>
         <p:nvSpPr>
-          <p:cNvPr id="14" name="Rectangle 13"/>
+          <p:cNvPr id="16" name="Rectangle 15"/>
           <p:cNvSpPr/>
           <p:nvPr/>
         </p:nvSpPr>
@@ -9048,7 +9214,7 @@
       </p:sp>
       <p:sp>
         <p:nvSpPr>
-          <p:cNvPr id="15" name="TextBox 14"/>
+          <p:cNvPr id="17" name="TextBox 16"/>
           <p:cNvSpPr txBox="1"/>
           <p:nvPr/>
         </p:nvSpPr>
@@ -9085,7 +9251,7 @@
       </p:sp>
       <p:sp>
         <p:nvSpPr>
-          <p:cNvPr id="16" name="Rounded Rectangle 15"/>
+          <p:cNvPr id="18" name="Rounded Rectangle 17"/>
           <p:cNvSpPr/>
           <p:nvPr/>
         </p:nvSpPr>
@@ -9133,7 +9299,7 @@
       </p:sp>
       <p:sp>
         <p:nvSpPr>
-          <p:cNvPr id="17" name="Rectangle 16"/>
+          <p:cNvPr id="19" name="Rectangle 18"/>
           <p:cNvSpPr/>
           <p:nvPr/>
         </p:nvSpPr>
@@ -9177,7 +9343,7 @@
       </p:sp>
       <p:sp>
         <p:nvSpPr>
-          <p:cNvPr id="18" name="TextBox 17"/>
+          <p:cNvPr id="20" name="TextBox 19"/>
           <p:cNvSpPr txBox="1"/>
           <p:nvPr/>
         </p:nvSpPr>
@@ -9214,7 +9380,7 @@
       </p:sp>
       <p:sp>
         <p:nvSpPr>
-          <p:cNvPr id="19" name="TextBox 18"/>
+          <p:cNvPr id="21" name="TextBox 20"/>
           <p:cNvSpPr txBox="1"/>
           <p:nvPr/>
         </p:nvSpPr>
@@ -9251,7 +9417,7 @@
       </p:sp>
       <p:sp>
         <p:nvSpPr>
-          <p:cNvPr id="20" name="TextBox 19"/>
+          <p:cNvPr id="22" name="TextBox 21"/>
           <p:cNvSpPr txBox="1"/>
           <p:nvPr/>
         </p:nvSpPr>
@@ -9288,7 +9454,7 @@
       </p:sp>
       <p:sp>
         <p:nvSpPr>
-          <p:cNvPr id="21" name="Rectangle 20"/>
+          <p:cNvPr id="23" name="Rectangle 22"/>
           <p:cNvSpPr/>
           <p:nvPr/>
         </p:nvSpPr>
@@ -9332,7 +9498,7 @@
       </p:sp>
       <p:sp>
         <p:nvSpPr>
-          <p:cNvPr id="22" name="TextBox 21"/>
+          <p:cNvPr id="24" name="TextBox 23"/>
           <p:cNvSpPr txBox="1"/>
           <p:nvPr/>
         </p:nvSpPr>
@@ -9369,7 +9535,7 @@
       </p:sp>
       <p:sp>
         <p:nvSpPr>
-          <p:cNvPr id="23" name="Rounded Rectangle 22"/>
+          <p:cNvPr id="25" name="Rounded Rectangle 24"/>
           <p:cNvSpPr/>
           <p:nvPr/>
         </p:nvSpPr>
@@ -9415,7 +9581,7 @@
       </p:sp>
       <p:sp>
         <p:nvSpPr>
-          <p:cNvPr id="24" name="TextBox 23"/>
+          <p:cNvPr id="26" name="TextBox 25"/>
           <p:cNvSpPr txBox="1"/>
           <p:nvPr/>
         </p:nvSpPr>
@@ -9452,7 +9618,7 @@
       </p:sp>
       <p:sp>
         <p:nvSpPr>
-          <p:cNvPr id="25" name="Rounded Rectangle 24"/>
+          <p:cNvPr id="27" name="Rounded Rectangle 26"/>
           <p:cNvSpPr/>
           <p:nvPr/>
         </p:nvSpPr>
@@ -9500,7 +9666,7 @@
       </p:sp>
       <p:sp>
         <p:nvSpPr>
-          <p:cNvPr id="26" name="Rectangle 25"/>
+          <p:cNvPr id="28" name="Rectangle 27"/>
           <p:cNvSpPr/>
           <p:nvPr/>
         </p:nvSpPr>
@@ -9544,7 +9710,7 @@
       </p:sp>
       <p:sp>
         <p:nvSpPr>
-          <p:cNvPr id="27" name="TextBox 26"/>
+          <p:cNvPr id="29" name="TextBox 28"/>
           <p:cNvSpPr txBox="1"/>
           <p:nvPr/>
         </p:nvSpPr>
@@ -9581,7 +9747,7 @@
       </p:sp>
       <p:sp>
         <p:nvSpPr>
-          <p:cNvPr id="28" name="TextBox 27"/>
+          <p:cNvPr id="30" name="TextBox 29"/>
           <p:cNvSpPr txBox="1"/>
           <p:nvPr/>
         </p:nvSpPr>
@@ -9618,7 +9784,7 @@
       </p:sp>
       <p:sp>
         <p:nvSpPr>
-          <p:cNvPr id="29" name="TextBox 28"/>
+          <p:cNvPr id="31" name="TextBox 30"/>
           <p:cNvSpPr txBox="1"/>
           <p:nvPr/>
         </p:nvSpPr>
@@ -9655,7 +9821,7 @@
       </p:sp>
       <p:sp>
         <p:nvSpPr>
-          <p:cNvPr id="30" name="Rectangle 29"/>
+          <p:cNvPr id="32" name="Rectangle 31"/>
           <p:cNvSpPr/>
           <p:nvPr/>
         </p:nvSpPr>
@@ -9699,7 +9865,7 @@
       </p:sp>
       <p:sp>
         <p:nvSpPr>
-          <p:cNvPr id="31" name="TextBox 30"/>
+          <p:cNvPr id="33" name="TextBox 32"/>
           <p:cNvSpPr txBox="1"/>
           <p:nvPr/>
         </p:nvSpPr>
@@ -9736,7 +9902,7 @@
       </p:sp>
       <p:sp>
         <p:nvSpPr>
-          <p:cNvPr id="32" name="Rounded Rectangle 31"/>
+          <p:cNvPr id="34" name="Rounded Rectangle 33"/>
           <p:cNvSpPr/>
           <p:nvPr/>
         </p:nvSpPr>
@@ -9784,7 +9950,7 @@
       </p:sp>
       <p:sp>
         <p:nvSpPr>
-          <p:cNvPr id="33" name="Rectangle 32"/>
+          <p:cNvPr id="35" name="Rectangle 34"/>
           <p:cNvSpPr/>
           <p:nvPr/>
         </p:nvSpPr>
@@ -9828,7 +9994,7 @@
       </p:sp>
       <p:sp>
         <p:nvSpPr>
-          <p:cNvPr id="34" name="TextBox 33"/>
+          <p:cNvPr id="36" name="TextBox 35"/>
           <p:cNvSpPr txBox="1"/>
           <p:nvPr/>
         </p:nvSpPr>
@@ -9865,7 +10031,7 @@
       </p:sp>
       <p:sp>
         <p:nvSpPr>
-          <p:cNvPr id="35" name="TextBox 34"/>
+          <p:cNvPr id="37" name="TextBox 36"/>
           <p:cNvSpPr txBox="1"/>
           <p:nvPr/>
         </p:nvSpPr>
@@ -9902,7 +10068,7 @@
       </p:sp>
       <p:sp>
         <p:nvSpPr>
-          <p:cNvPr id="36" name="TextBox 35"/>
+          <p:cNvPr id="38" name="TextBox 37"/>
           <p:cNvSpPr txBox="1"/>
           <p:nvPr/>
         </p:nvSpPr>
@@ -9939,7 +10105,7 @@
       </p:sp>
       <p:sp>
         <p:nvSpPr>
-          <p:cNvPr id="37" name="Rectangle 36"/>
+          <p:cNvPr id="39" name="Rectangle 38"/>
           <p:cNvSpPr/>
           <p:nvPr/>
         </p:nvSpPr>
@@ -9983,7 +10149,7 @@
       </p:sp>
       <p:sp>
         <p:nvSpPr>
-          <p:cNvPr id="38" name="TextBox 37"/>
+          <p:cNvPr id="40" name="TextBox 39"/>
           <p:cNvSpPr txBox="1"/>
           <p:nvPr/>
         </p:nvSpPr>
@@ -10020,7 +10186,7 @@
       </p:sp>
       <p:sp>
         <p:nvSpPr>
-          <p:cNvPr id="39" name="Rounded Rectangle 38"/>
+          <p:cNvPr id="41" name="Rounded Rectangle 40"/>
           <p:cNvSpPr/>
           <p:nvPr/>
         </p:nvSpPr>
@@ -10066,7 +10232,7 @@
       </p:sp>
       <p:sp>
         <p:nvSpPr>
-          <p:cNvPr id="40" name="Rectangle 39"/>
+          <p:cNvPr id="42" name="Rectangle 41"/>
           <p:cNvSpPr/>
           <p:nvPr/>
         </p:nvSpPr>
@@ -10110,7 +10276,7 @@
       </p:sp>
       <p:sp>
         <p:nvSpPr>
-          <p:cNvPr id="41" name="TextBox 40"/>
+          <p:cNvPr id="43" name="TextBox 42"/>
           <p:cNvSpPr txBox="1"/>
           <p:nvPr/>
         </p:nvSpPr>
@@ -10156,7 +10322,7 @@
       </p:sp>
       <p:sp>
         <p:nvSpPr>
-          <p:cNvPr id="42" name="TextBox 41"/>
+          <p:cNvPr id="44" name="TextBox 43"/>
           <p:cNvSpPr txBox="1"/>
           <p:nvPr/>
         </p:nvSpPr>
@@ -10193,7 +10359,7 @@
       </p:sp>
       <p:sp>
         <p:nvSpPr>
-          <p:cNvPr id="43" name="TextBox 42"/>
+          <p:cNvPr id="45" name="TextBox 44"/>
           <p:cNvSpPr txBox="1"/>
           <p:nvPr/>
         </p:nvSpPr>
@@ -10468,7 +10634,7 @@
         <p:spPr>
           <a:xfrm>
             <a:off x="1389888" y="365760"/>
-            <a:ext cx="5056632" cy="822960"/>
+            <a:ext cx="5056632" cy="1005840"/>
           </a:xfrm>
           <a:prstGeom prst="rect">
             <a:avLst/>
@@ -11534,14 +11700,60 @@
       </p:sp>
       <p:sp>
         <p:nvSpPr>
-          <p:cNvPr id="7" name="TextBox 6"/>
+          <p:cNvPr id="7" name="Rounded Rectangle 6"/>
+          <p:cNvSpPr/>
+          <p:nvPr/>
+        </p:nvSpPr>
+        <p:spPr>
+          <a:xfrm>
+            <a:off x="5349240" y="420624"/>
+            <a:ext cx="1097280" cy="384048"/>
+          </a:xfrm>
+          <a:prstGeom prst="roundRect">
+            <a:avLst>
+              <a:gd name="adj" fmla="val 50000"/>
+            </a:avLst>
+          </a:prstGeom>
+          <a:solidFill>
+            <a:srgbClr val="3B2A20"/>
+          </a:solidFill>
+          <a:ln>
+            <a:noFill/>
+          </a:ln>
+          <a:effectLst/>
+        </p:spPr>
+        <p:style>
+          <a:lnRef idx="1">
+            <a:schemeClr val="accent1"/>
+          </a:lnRef>
+          <a:fillRef idx="3">
+            <a:schemeClr val="accent1"/>
+          </a:fillRef>
+          <a:effectRef idx="2">
+            <a:schemeClr val="accent1"/>
+          </a:effectRef>
+          <a:fontRef idx="minor">
+            <a:schemeClr val="lt1"/>
+          </a:fontRef>
+        </p:style>
+        <p:txBody>
+          <a:bodyPr rtlCol="0" anchor="ctr"/>
+          <a:lstStyle/>
+          <a:p>
+            <a:pPr algn="ctr"/>
+          </a:p>
+        </p:txBody>
+      </p:sp>
+      <p:sp>
+        <p:nvSpPr>
+          <p:cNvPr id="8" name="TextBox 7"/>
           <p:cNvSpPr txBox="1"/>
           <p:nvPr/>
         </p:nvSpPr>
         <p:spPr>
           <a:xfrm>
-            <a:off x="1389888" y="365760"/>
-            <a:ext cx="5056632" cy="822960"/>
+            <a:off x="5349240" y="420624"/>
+            <a:ext cx="1097280" cy="384048"/>
           </a:xfrm>
           <a:prstGeom prst="rect">
             <a:avLst/>
@@ -11554,31 +11766,31 @@
           </a:bodyPr>
           <a:lstStyle/>
           <a:p>
-            <a:pPr algn="l" marL="0" indent="0">
-              <a:buNone/>
-            </a:pPr>
-            <a:r>
-              <a:rPr sz="1900" b="1" i="0">
-                <a:solidFill>
-                  <a:srgbClr val="3B2A20"/>
-                </a:solidFill>
-                <a:latin typeface="Malgun Gothic"/>
-              </a:rPr>
-              <a:t>📦  중고장터 — 안전한 P2P 거래</a:t>
-            </a:r>
-          </a:p>
-        </p:txBody>
-      </p:sp>
-      <p:sp>
-        <p:nvSpPr>
-          <p:cNvPr id="8" name="TextBox 7"/>
+            <a:pPr algn="ctr" marL="0" indent="0">
+              <a:buNone/>
+            </a:pPr>
+            <a:r>
+              <a:rPr sz="1100" b="1" i="0">
+                <a:solidFill>
+                  <a:srgbClr val="F4A52A"/>
+                </a:solidFill>
+                <a:latin typeface="Malgun Gothic"/>
+              </a:rPr>
+              <a:t>🔗 PiRC3</a:t>
+            </a:r>
+          </a:p>
+        </p:txBody>
+      </p:sp>
+      <p:sp>
+        <p:nvSpPr>
+          <p:cNvPr id="9" name="TextBox 8"/>
           <p:cNvSpPr txBox="1"/>
           <p:nvPr/>
         </p:nvSpPr>
         <p:spPr>
           <a:xfrm>
-            <a:off x="411480" y="1188720"/>
-            <a:ext cx="6035040" cy="502920"/>
+            <a:off x="1389888" y="365760"/>
+            <a:ext cx="3822192" cy="1005840"/>
           </a:xfrm>
           <a:prstGeom prst="rect">
             <a:avLst/>
@@ -11595,6 +11807,43 @@
               <a:buNone/>
             </a:pPr>
             <a:r>
+              <a:rPr sz="1900" b="1" i="0">
+                <a:solidFill>
+                  <a:srgbClr val="3B2A20"/>
+                </a:solidFill>
+                <a:latin typeface="Malgun Gothic"/>
+              </a:rPr>
+              <a:t>📦  중고장터 — 안전한 P2P 거래</a:t>
+            </a:r>
+          </a:p>
+        </p:txBody>
+      </p:sp>
+      <p:sp>
+        <p:nvSpPr>
+          <p:cNvPr id="10" name="TextBox 9"/>
+          <p:cNvSpPr txBox="1"/>
+          <p:nvPr/>
+        </p:nvSpPr>
+        <p:spPr>
+          <a:xfrm>
+            <a:off x="411480" y="1188720"/>
+            <a:ext cx="6035040" cy="502920"/>
+          </a:xfrm>
+          <a:prstGeom prst="rect">
+            <a:avLst/>
+          </a:prstGeom>
+          <a:noFill/>
+        </p:spPr>
+        <p:txBody>
+          <a:bodyPr wrap="square" anchor="ctr" lIns="25400" rIns="25400" tIns="12700" bIns="12700">
+            <a:spAutoFit/>
+          </a:bodyPr>
+          <a:lstStyle/>
+          <a:p>
+            <a:pPr algn="l" marL="0" indent="0">
+              <a:buNone/>
+            </a:pPr>
+            <a:r>
               <a:rPr sz="1200" b="0" i="0">
                 <a:solidFill>
                   <a:srgbClr val="8A7A6D"/>
@@ -11608,7 +11857,7 @@
       </p:sp>
       <p:sp>
         <p:nvSpPr>
-          <p:cNvPr id="9" name="Rounded Rectangle 8"/>
+          <p:cNvPr id="11" name="Rounded Rectangle 10"/>
           <p:cNvSpPr/>
           <p:nvPr/>
         </p:nvSpPr>
@@ -11656,7 +11905,7 @@
       </p:sp>
       <p:sp>
         <p:nvSpPr>
-          <p:cNvPr id="10" name="Oval 9"/>
+          <p:cNvPr id="12" name="Oval 11"/>
           <p:cNvSpPr/>
           <p:nvPr/>
         </p:nvSpPr>
@@ -11700,7 +11949,7 @@
       </p:sp>
       <p:sp>
         <p:nvSpPr>
-          <p:cNvPr id="11" name="TextBox 10"/>
+          <p:cNvPr id="13" name="TextBox 12"/>
           <p:cNvSpPr txBox="1"/>
           <p:nvPr/>
         </p:nvSpPr>
@@ -11737,7 +11986,7 @@
       </p:sp>
       <p:sp>
         <p:nvSpPr>
-          <p:cNvPr id="12" name="TextBox 11"/>
+          <p:cNvPr id="14" name="TextBox 13"/>
           <p:cNvSpPr txBox="1"/>
           <p:nvPr/>
         </p:nvSpPr>
@@ -11794,7 +12043,7 @@
       </p:sp>
       <p:sp>
         <p:nvSpPr>
-          <p:cNvPr id="13" name="Rounded Rectangle 12"/>
+          <p:cNvPr id="15" name="Rounded Rectangle 14"/>
           <p:cNvSpPr/>
           <p:nvPr/>
         </p:nvSpPr>
@@ -11842,7 +12091,7 @@
       </p:sp>
       <p:sp>
         <p:nvSpPr>
-          <p:cNvPr id="14" name="Oval 13"/>
+          <p:cNvPr id="16" name="Oval 15"/>
           <p:cNvSpPr/>
           <p:nvPr/>
         </p:nvSpPr>
@@ -11886,7 +12135,7 @@
       </p:sp>
       <p:sp>
         <p:nvSpPr>
-          <p:cNvPr id="15" name="TextBox 14"/>
+          <p:cNvPr id="17" name="TextBox 16"/>
           <p:cNvSpPr txBox="1"/>
           <p:nvPr/>
         </p:nvSpPr>
@@ -11923,7 +12172,7 @@
       </p:sp>
       <p:sp>
         <p:nvSpPr>
-          <p:cNvPr id="16" name="TextBox 15"/>
+          <p:cNvPr id="18" name="TextBox 17"/>
           <p:cNvSpPr txBox="1"/>
           <p:nvPr/>
         </p:nvSpPr>
@@ -11980,7 +12229,7 @@
       </p:sp>
       <p:sp>
         <p:nvSpPr>
-          <p:cNvPr id="17" name="Rounded Rectangle 16"/>
+          <p:cNvPr id="19" name="Rounded Rectangle 18"/>
           <p:cNvSpPr/>
           <p:nvPr/>
         </p:nvSpPr>
@@ -12028,7 +12277,7 @@
       </p:sp>
       <p:sp>
         <p:nvSpPr>
-          <p:cNvPr id="18" name="Oval 17"/>
+          <p:cNvPr id="20" name="Oval 19"/>
           <p:cNvSpPr/>
           <p:nvPr/>
         </p:nvSpPr>
@@ -12072,7 +12321,7 @@
       </p:sp>
       <p:sp>
         <p:nvSpPr>
-          <p:cNvPr id="19" name="TextBox 18"/>
+          <p:cNvPr id="21" name="TextBox 20"/>
           <p:cNvSpPr txBox="1"/>
           <p:nvPr/>
         </p:nvSpPr>
@@ -12109,7 +12358,7 @@
       </p:sp>
       <p:sp>
         <p:nvSpPr>
-          <p:cNvPr id="20" name="TextBox 19"/>
+          <p:cNvPr id="22" name="TextBox 21"/>
           <p:cNvSpPr txBox="1"/>
           <p:nvPr/>
         </p:nvSpPr>
@@ -12166,7 +12415,7 @@
       </p:sp>
       <p:sp>
         <p:nvSpPr>
-          <p:cNvPr id="21" name="Rounded Rectangle 20"/>
+          <p:cNvPr id="23" name="Rounded Rectangle 22"/>
           <p:cNvSpPr/>
           <p:nvPr/>
         </p:nvSpPr>
@@ -12212,7 +12461,7 @@
       </p:sp>
       <p:sp>
         <p:nvSpPr>
-          <p:cNvPr id="22" name="Rectangle 21"/>
+          <p:cNvPr id="24" name="Rectangle 23"/>
           <p:cNvSpPr/>
           <p:nvPr/>
         </p:nvSpPr>
@@ -12256,7 +12505,7 @@
       </p:sp>
       <p:sp>
         <p:nvSpPr>
-          <p:cNvPr id="23" name="TextBox 22"/>
+          <p:cNvPr id="25" name="TextBox 24"/>
           <p:cNvSpPr txBox="1"/>
           <p:nvPr/>
         </p:nvSpPr>
@@ -12302,7 +12551,7 @@
       </p:sp>
       <p:sp>
         <p:nvSpPr>
-          <p:cNvPr id="24" name="TextBox 23"/>
+          <p:cNvPr id="26" name="TextBox 25"/>
           <p:cNvSpPr txBox="1"/>
           <p:nvPr/>
         </p:nvSpPr>
@@ -12339,7 +12588,7 @@
       </p:sp>
       <p:sp>
         <p:nvSpPr>
-          <p:cNvPr id="25" name="TextBox 24"/>
+          <p:cNvPr id="27" name="TextBox 26"/>
           <p:cNvSpPr txBox="1"/>
           <p:nvPr/>
         </p:nvSpPr>
@@ -12614,7 +12863,7 @@
         <p:spPr>
           <a:xfrm>
             <a:off x="1389888" y="365760"/>
-            <a:ext cx="5056632" cy="822960"/>
+            <a:ext cx="5056632" cy="1005840"/>
           </a:xfrm>
           <a:prstGeom prst="rect">
             <a:avLst/>

--- a/docs/Cafe.pi_쉬운_사용자매뉴얼_세로.pptx
+++ b/docs/Cafe.pi_쉬운_사용자매뉴얼_세로.pptx
@@ -15,6 +15,8 @@
     <p:sldId id="263" r:id="rId14"/>
     <p:sldId id="264" r:id="rId15"/>
     <p:sldId id="265" r:id="rId16"/>
+    <p:sldId id="266" r:id="rId17"/>
+    <p:sldId id="267" r:id="rId18"/>
   </p:sldIdLst>
   <p:sldSz cx="6858000" cy="12191695" type="screen4x3"/>
   <p:notesSz cx="6858000" cy="9144000"/>
@@ -3607,6 +3609,2100 @@
 </file>
 
 <file path=ppt/slides/slide10.xml><?xml version="1.0" encoding="utf-8"?>
+<p:sld xmlns:a="http://schemas.openxmlformats.org/drawingml/2006/main" xmlns:p="http://schemas.openxmlformats.org/presentationml/2006/main" xmlns:r="http://schemas.openxmlformats.org/officeDocument/2006/relationships">
+  <p:cSld>
+    <p:spTree>
+      <p:nvGrpSpPr>
+        <p:cNvPr id="1" name=""/>
+        <p:cNvGrpSpPr/>
+        <p:nvPr/>
+      </p:nvGrpSpPr>
+      <p:grpSpPr/>
+      <p:sp>
+        <p:nvSpPr>
+          <p:cNvPr id="2" name="Rectangle 1"/>
+          <p:cNvSpPr/>
+          <p:nvPr/>
+        </p:nvSpPr>
+        <p:spPr>
+          <a:xfrm>
+            <a:off x="0" y="0"/>
+            <a:ext cx="6858000" cy="12191695"/>
+          </a:xfrm>
+          <a:prstGeom prst="rect">
+            <a:avLst/>
+          </a:prstGeom>
+          <a:solidFill>
+            <a:srgbClr val="FFFFFF"/>
+          </a:solidFill>
+          <a:ln>
+            <a:noFill/>
+          </a:ln>
+          <a:effectLst/>
+        </p:spPr>
+        <p:style>
+          <a:lnRef idx="1">
+            <a:schemeClr val="accent1"/>
+          </a:lnRef>
+          <a:fillRef idx="3">
+            <a:schemeClr val="accent1"/>
+          </a:fillRef>
+          <a:effectRef idx="2">
+            <a:schemeClr val="accent1"/>
+          </a:effectRef>
+          <a:fontRef idx="minor">
+            <a:schemeClr val="lt1"/>
+          </a:fontRef>
+        </p:style>
+        <p:txBody>
+          <a:bodyPr rtlCol="0" anchor="ctr"/>
+          <a:lstStyle/>
+          <a:p>
+            <a:pPr algn="ctr"/>
+          </a:p>
+        </p:txBody>
+      </p:sp>
+      <p:sp>
+        <p:nvSpPr>
+          <p:cNvPr id="3" name="Rectangle 2"/>
+          <p:cNvSpPr/>
+          <p:nvPr/>
+        </p:nvSpPr>
+        <p:spPr>
+          <a:xfrm>
+            <a:off x="0" y="0"/>
+            <a:ext cx="6858000" cy="1874519"/>
+          </a:xfrm>
+          <a:prstGeom prst="rect">
+            <a:avLst/>
+          </a:prstGeom>
+          <a:solidFill>
+            <a:srgbClr val="3B2A20"/>
+          </a:solidFill>
+          <a:ln>
+            <a:noFill/>
+          </a:ln>
+          <a:effectLst/>
+        </p:spPr>
+        <p:style>
+          <a:lnRef idx="1">
+            <a:schemeClr val="accent1"/>
+          </a:lnRef>
+          <a:fillRef idx="3">
+            <a:schemeClr val="accent1"/>
+          </a:fillRef>
+          <a:effectRef idx="2">
+            <a:schemeClr val="accent1"/>
+          </a:effectRef>
+          <a:fontRef idx="minor">
+            <a:schemeClr val="lt1"/>
+          </a:fontRef>
+        </p:style>
+        <p:txBody>
+          <a:bodyPr rtlCol="0" anchor="ctr"/>
+          <a:lstStyle/>
+          <a:p>
+            <a:pPr algn="ctr"/>
+          </a:p>
+        </p:txBody>
+      </p:sp>
+      <p:sp>
+        <p:nvSpPr>
+          <p:cNvPr id="4" name="Rectangle 3"/>
+          <p:cNvSpPr/>
+          <p:nvPr/>
+        </p:nvSpPr>
+        <p:spPr>
+          <a:xfrm>
+            <a:off x="0" y="1874519"/>
+            <a:ext cx="6858000" cy="38100"/>
+          </a:xfrm>
+          <a:prstGeom prst="rect">
+            <a:avLst/>
+          </a:prstGeom>
+          <a:solidFill>
+            <a:srgbClr val="F4A52A"/>
+          </a:solidFill>
+          <a:ln>
+            <a:noFill/>
+          </a:ln>
+          <a:effectLst/>
+        </p:spPr>
+        <p:style>
+          <a:lnRef idx="1">
+            <a:schemeClr val="accent1"/>
+          </a:lnRef>
+          <a:fillRef idx="3">
+            <a:schemeClr val="accent1"/>
+          </a:fillRef>
+          <a:effectRef idx="2">
+            <a:schemeClr val="accent1"/>
+          </a:effectRef>
+          <a:fontRef idx="minor">
+            <a:schemeClr val="lt1"/>
+          </a:fontRef>
+        </p:style>
+        <p:txBody>
+          <a:bodyPr rtlCol="0" anchor="ctr"/>
+          <a:lstStyle/>
+          <a:p>
+            <a:pPr algn="ctr"/>
+          </a:p>
+        </p:txBody>
+      </p:sp>
+      <p:sp>
+        <p:nvSpPr>
+          <p:cNvPr id="5" name="Oval 4"/>
+          <p:cNvSpPr/>
+          <p:nvPr/>
+        </p:nvSpPr>
+        <p:spPr>
+          <a:xfrm>
+            <a:off x="5394960" y="-1005840"/>
+            <a:ext cx="2194560" cy="2194560"/>
+          </a:xfrm>
+          <a:prstGeom prst="ellipse">
+            <a:avLst/>
+          </a:prstGeom>
+          <a:solidFill>
+            <a:srgbClr val="4A3528"/>
+          </a:solidFill>
+          <a:ln>
+            <a:noFill/>
+          </a:ln>
+          <a:effectLst/>
+        </p:spPr>
+        <p:style>
+          <a:lnRef idx="1">
+            <a:schemeClr val="accent1"/>
+          </a:lnRef>
+          <a:fillRef idx="3">
+            <a:schemeClr val="accent1"/>
+          </a:fillRef>
+          <a:effectRef idx="2">
+            <a:schemeClr val="accent1"/>
+          </a:effectRef>
+          <a:fontRef idx="minor">
+            <a:schemeClr val="lt1"/>
+          </a:fontRef>
+        </p:style>
+        <p:txBody>
+          <a:bodyPr rtlCol="0" anchor="ctr"/>
+          <a:lstStyle/>
+          <a:p>
+            <a:pPr algn="ctr"/>
+          </a:p>
+        </p:txBody>
+      </p:sp>
+      <p:sp>
+        <p:nvSpPr>
+          <p:cNvPr id="6" name="Rounded Rectangle 5"/>
+          <p:cNvSpPr/>
+          <p:nvPr/>
+        </p:nvSpPr>
+        <p:spPr>
+          <a:xfrm>
+            <a:off x="411480" y="292608"/>
+            <a:ext cx="1691640" cy="457200"/>
+          </a:xfrm>
+          <a:prstGeom prst="roundRect">
+            <a:avLst>
+              <a:gd name="adj" fmla="val 50000"/>
+            </a:avLst>
+          </a:prstGeom>
+          <a:solidFill>
+            <a:srgbClr val="F4A52A"/>
+          </a:solidFill>
+          <a:ln>
+            <a:noFill/>
+          </a:ln>
+          <a:effectLst/>
+        </p:spPr>
+        <p:style>
+          <a:lnRef idx="1">
+            <a:schemeClr val="accent1"/>
+          </a:lnRef>
+          <a:fillRef idx="3">
+            <a:schemeClr val="accent1"/>
+          </a:fillRef>
+          <a:effectRef idx="2">
+            <a:schemeClr val="accent1"/>
+          </a:effectRef>
+          <a:fontRef idx="minor">
+            <a:schemeClr val="lt1"/>
+          </a:fontRef>
+        </p:style>
+        <p:txBody>
+          <a:bodyPr rtlCol="0" anchor="ctr"/>
+          <a:lstStyle/>
+          <a:p>
+            <a:pPr algn="ctr"/>
+          </a:p>
+        </p:txBody>
+      </p:sp>
+      <p:sp>
+        <p:nvSpPr>
+          <p:cNvPr id="7" name="TextBox 6"/>
+          <p:cNvSpPr txBox="1"/>
+          <p:nvPr/>
+        </p:nvSpPr>
+        <p:spPr>
+          <a:xfrm>
+            <a:off x="411480" y="292608"/>
+            <a:ext cx="1691640" cy="457200"/>
+          </a:xfrm>
+          <a:prstGeom prst="rect">
+            <a:avLst/>
+          </a:prstGeom>
+          <a:noFill/>
+        </p:spPr>
+        <p:txBody>
+          <a:bodyPr wrap="square" anchor="ctr" lIns="25400" rIns="25400" tIns="12700" bIns="12700">
+            <a:spAutoFit/>
+          </a:bodyPr>
+          <a:lstStyle/>
+          <a:p>
+            <a:pPr algn="ctr" marL="0" indent="0">
+              <a:buNone/>
+            </a:pPr>
+            <a:r>
+              <a:rPr sz="1300" b="1" i="0">
+                <a:solidFill>
+                  <a:srgbClr val="3B2A20"/>
+                </a:solidFill>
+                <a:latin typeface="Malgun Gothic"/>
+              </a:rPr>
+              <a:t>🎁 EVENT #1</a:t>
+            </a:r>
+          </a:p>
+        </p:txBody>
+      </p:sp>
+      <p:sp>
+        <p:nvSpPr>
+          <p:cNvPr id="8" name="TextBox 7"/>
+          <p:cNvSpPr txBox="1"/>
+          <p:nvPr/>
+        </p:nvSpPr>
+        <p:spPr>
+          <a:xfrm>
+            <a:off x="411480" y="822960"/>
+            <a:ext cx="6035040" cy="640080"/>
+          </a:xfrm>
+          <a:prstGeom prst="rect">
+            <a:avLst/>
+          </a:prstGeom>
+          <a:noFill/>
+        </p:spPr>
+        <p:txBody>
+          <a:bodyPr wrap="square" anchor="ctr" lIns="25400" rIns="25400" tIns="12700" bIns="12700">
+            <a:spAutoFit/>
+          </a:bodyPr>
+          <a:lstStyle/>
+          <a:p>
+            <a:pPr algn="l" marL="0" indent="0">
+              <a:buNone/>
+            </a:pPr>
+            <a:r>
+              <a:rPr sz="2300" b="1" i="0">
+                <a:solidFill>
+                  <a:srgbClr val="FFFFFF"/>
+                </a:solidFill>
+                <a:latin typeface="Malgun Gothic"/>
+              </a:rPr>
+              <a:t>10미션 수행 이벤트</a:t>
+            </a:r>
+          </a:p>
+        </p:txBody>
+      </p:sp>
+      <p:sp>
+        <p:nvSpPr>
+          <p:cNvPr id="9" name="TextBox 8"/>
+          <p:cNvSpPr txBox="1"/>
+          <p:nvPr/>
+        </p:nvSpPr>
+        <p:spPr>
+          <a:xfrm>
+            <a:off x="411480" y="1417320"/>
+            <a:ext cx="6035040" cy="411480"/>
+          </a:xfrm>
+          <a:prstGeom prst="rect">
+            <a:avLst/>
+          </a:prstGeom>
+          <a:noFill/>
+        </p:spPr>
+        <p:txBody>
+          <a:bodyPr wrap="square" anchor="ctr" lIns="25400" rIns="25400" tIns="12700" bIns="12700">
+            <a:spAutoFit/>
+          </a:bodyPr>
+          <a:lstStyle/>
+          <a:p>
+            <a:pPr algn="l" marL="0" indent="0">
+              <a:buNone/>
+            </a:pPr>
+            <a:r>
+              <a:rPr sz="1200" b="0" i="0">
+                <a:solidFill>
+                  <a:srgbClr val="E9DED3"/>
+                </a:solidFill>
+                <a:latin typeface="Malgun Gothic"/>
+              </a:rPr>
+              <a:t>테스트파이로 충전하고, 미션 깨고, Bean 선물 받자!</a:t>
+            </a:r>
+          </a:p>
+        </p:txBody>
+      </p:sp>
+      <p:sp>
+        <p:nvSpPr>
+          <p:cNvPr id="10" name="Rounded Rectangle 9"/>
+          <p:cNvSpPr/>
+          <p:nvPr/>
+        </p:nvSpPr>
+        <p:spPr>
+          <a:xfrm>
+            <a:off x="411480" y="9430207"/>
+            <a:ext cx="6035040" cy="2194560"/>
+          </a:xfrm>
+          <a:prstGeom prst="roundRect">
+            <a:avLst>
+              <a:gd name="adj" fmla="val 8000"/>
+            </a:avLst>
+          </a:prstGeom>
+          <a:solidFill>
+            <a:srgbClr val="F4A52A"/>
+          </a:solidFill>
+          <a:ln>
+            <a:noFill/>
+          </a:ln>
+          <a:effectLst/>
+        </p:spPr>
+        <p:style>
+          <a:lnRef idx="1">
+            <a:schemeClr val="accent1"/>
+          </a:lnRef>
+          <a:fillRef idx="3">
+            <a:schemeClr val="accent1"/>
+          </a:fillRef>
+          <a:effectRef idx="2">
+            <a:schemeClr val="accent1"/>
+          </a:effectRef>
+          <a:fontRef idx="minor">
+            <a:schemeClr val="lt1"/>
+          </a:fontRef>
+        </p:style>
+        <p:txBody>
+          <a:bodyPr rtlCol="0" anchor="ctr"/>
+          <a:lstStyle/>
+          <a:p>
+            <a:pPr algn="ctr"/>
+          </a:p>
+        </p:txBody>
+      </p:sp>
+      <p:sp>
+        <p:nvSpPr>
+          <p:cNvPr id="11" name="TextBox 10"/>
+          <p:cNvSpPr txBox="1"/>
+          <p:nvPr/>
+        </p:nvSpPr>
+        <p:spPr>
+          <a:xfrm>
+            <a:off x="411480" y="9722815"/>
+            <a:ext cx="6035040" cy="411480"/>
+          </a:xfrm>
+          <a:prstGeom prst="rect">
+            <a:avLst/>
+          </a:prstGeom>
+          <a:noFill/>
+        </p:spPr>
+        <p:txBody>
+          <a:bodyPr wrap="square" anchor="ctr" lIns="25400" rIns="25400" tIns="12700" bIns="12700">
+            <a:spAutoFit/>
+          </a:bodyPr>
+          <a:lstStyle/>
+          <a:p>
+            <a:pPr algn="ctr" marL="0" indent="0">
+              <a:buNone/>
+            </a:pPr>
+            <a:r>
+              <a:rPr sz="1500" b="1" i="0">
+                <a:solidFill>
+                  <a:srgbClr val="3B2A20"/>
+                </a:solidFill>
+                <a:latin typeface="Malgun Gothic"/>
+              </a:rPr>
+              <a:t>🎁 10미션 완료 보상</a:t>
+            </a:r>
+          </a:p>
+        </p:txBody>
+      </p:sp>
+      <p:sp>
+        <p:nvSpPr>
+          <p:cNvPr id="12" name="TextBox 11"/>
+          <p:cNvSpPr txBox="1"/>
+          <p:nvPr/>
+        </p:nvSpPr>
+        <p:spPr>
+          <a:xfrm>
+            <a:off x="411480" y="10161727"/>
+            <a:ext cx="6035040" cy="960120"/>
+          </a:xfrm>
+          <a:prstGeom prst="rect">
+            <a:avLst/>
+          </a:prstGeom>
+          <a:noFill/>
+        </p:spPr>
+        <p:txBody>
+          <a:bodyPr wrap="square" anchor="ctr" lIns="25400" rIns="25400" tIns="12700" bIns="12700">
+            <a:spAutoFit/>
+          </a:bodyPr>
+          <a:lstStyle/>
+          <a:p>
+            <a:pPr algn="ctr" marL="0" indent="0">
+              <a:buNone/>
+            </a:pPr>
+            <a:r>
+              <a:rPr sz="4600" b="1" i="0">
+                <a:solidFill>
+                  <a:srgbClr val="3B2A20"/>
+                </a:solidFill>
+                <a:latin typeface="Malgun Gothic"/>
+              </a:rPr>
+              <a:t>5,000 Bean</a:t>
+            </a:r>
+          </a:p>
+        </p:txBody>
+      </p:sp>
+      <p:sp>
+        <p:nvSpPr>
+          <p:cNvPr id="13" name="TextBox 12"/>
+          <p:cNvSpPr txBox="1"/>
+          <p:nvPr/>
+        </p:nvSpPr>
+        <p:spPr>
+          <a:xfrm>
+            <a:off x="411480" y="11094415"/>
+            <a:ext cx="6035040" cy="411480"/>
+          </a:xfrm>
+          <a:prstGeom prst="rect">
+            <a:avLst/>
+          </a:prstGeom>
+          <a:noFill/>
+        </p:spPr>
+        <p:txBody>
+          <a:bodyPr wrap="square" anchor="ctr" lIns="25400" rIns="25400" tIns="12700" bIns="12700">
+            <a:spAutoFit/>
+          </a:bodyPr>
+          <a:lstStyle/>
+          <a:p>
+            <a:pPr algn="ctr" marL="0" indent="0">
+              <a:buNone/>
+            </a:pPr>
+            <a:r>
+              <a:rPr sz="1350" b="1" i="0">
+                <a:solidFill>
+                  <a:srgbClr val="3B2A20"/>
+                </a:solidFill>
+                <a:latin typeface="Malgun Gothic"/>
+              </a:rPr>
+              <a:t>테스트파이 충전 + 미션 10개 완료 시 선물! ☕</a:t>
+            </a:r>
+          </a:p>
+        </p:txBody>
+      </p:sp>
+      <p:sp>
+        <p:nvSpPr>
+          <p:cNvPr id="14" name="Rounded Rectangle 13"/>
+          <p:cNvSpPr/>
+          <p:nvPr/>
+        </p:nvSpPr>
+        <p:spPr>
+          <a:xfrm>
+            <a:off x="411480" y="2240280"/>
+            <a:ext cx="6035040" cy="2103120"/>
+          </a:xfrm>
+          <a:prstGeom prst="roundRect">
+            <a:avLst>
+              <a:gd name="adj" fmla="val 7000"/>
+            </a:avLst>
+          </a:prstGeom>
+          <a:solidFill>
+            <a:srgbClr val="FFF7E8"/>
+          </a:solidFill>
+          <a:ln w="12700">
+            <a:solidFill>
+              <a:srgbClr val="EFE2D0"/>
+            </a:solidFill>
+          </a:ln>
+          <a:effectLst/>
+        </p:spPr>
+        <p:style>
+          <a:lnRef idx="1">
+            <a:schemeClr val="accent1"/>
+          </a:lnRef>
+          <a:fillRef idx="3">
+            <a:schemeClr val="accent1"/>
+          </a:fillRef>
+          <a:effectRef idx="2">
+            <a:schemeClr val="accent1"/>
+          </a:effectRef>
+          <a:fontRef idx="minor">
+            <a:schemeClr val="lt1"/>
+          </a:fontRef>
+        </p:style>
+        <p:txBody>
+          <a:bodyPr rtlCol="0" anchor="ctr"/>
+          <a:lstStyle/>
+          <a:p>
+            <a:pPr algn="ctr"/>
+          </a:p>
+        </p:txBody>
+      </p:sp>
+      <p:sp>
+        <p:nvSpPr>
+          <p:cNvPr id="15" name="Oval 14"/>
+          <p:cNvSpPr/>
+          <p:nvPr/>
+        </p:nvSpPr>
+        <p:spPr>
+          <a:xfrm>
+            <a:off x="612648" y="3063240"/>
+            <a:ext cx="457200" cy="457200"/>
+          </a:xfrm>
+          <a:prstGeom prst="ellipse">
+            <a:avLst/>
+          </a:prstGeom>
+          <a:solidFill>
+            <a:srgbClr val="F4A52A"/>
+          </a:solidFill>
+          <a:ln>
+            <a:noFill/>
+          </a:ln>
+          <a:effectLst/>
+        </p:spPr>
+        <p:style>
+          <a:lnRef idx="1">
+            <a:schemeClr val="accent1"/>
+          </a:lnRef>
+          <a:fillRef idx="3">
+            <a:schemeClr val="accent1"/>
+          </a:fillRef>
+          <a:effectRef idx="2">
+            <a:schemeClr val="accent1"/>
+          </a:effectRef>
+          <a:fontRef idx="minor">
+            <a:schemeClr val="lt1"/>
+          </a:fontRef>
+        </p:style>
+        <p:txBody>
+          <a:bodyPr rtlCol="0" anchor="ctr"/>
+          <a:lstStyle/>
+          <a:p>
+            <a:pPr algn="ctr"/>
+          </a:p>
+        </p:txBody>
+      </p:sp>
+      <p:sp>
+        <p:nvSpPr>
+          <p:cNvPr id="16" name="TextBox 15"/>
+          <p:cNvSpPr txBox="1"/>
+          <p:nvPr/>
+        </p:nvSpPr>
+        <p:spPr>
+          <a:xfrm>
+            <a:off x="612648" y="3063240"/>
+            <a:ext cx="457200" cy="457200"/>
+          </a:xfrm>
+          <a:prstGeom prst="rect">
+            <a:avLst/>
+          </a:prstGeom>
+          <a:noFill/>
+        </p:spPr>
+        <p:txBody>
+          <a:bodyPr wrap="square" anchor="ctr" lIns="25400" rIns="25400" tIns="12700" bIns="12700">
+            <a:spAutoFit/>
+          </a:bodyPr>
+          <a:lstStyle/>
+          <a:p>
+            <a:pPr algn="ctr" marL="0" indent="0">
+              <a:buNone/>
+            </a:pPr>
+            <a:r>
+              <a:rPr sz="1500" b="1" i="0">
+                <a:solidFill>
+                  <a:srgbClr val="FFFFFF"/>
+                </a:solidFill>
+                <a:latin typeface="Malgun Gothic"/>
+              </a:rPr>
+              <a:t>1</a:t>
+            </a:r>
+          </a:p>
+        </p:txBody>
+      </p:sp>
+      <p:sp>
+        <p:nvSpPr>
+          <p:cNvPr id="17" name="TextBox 16"/>
+          <p:cNvSpPr txBox="1"/>
+          <p:nvPr/>
+        </p:nvSpPr>
+        <p:spPr>
+          <a:xfrm>
+            <a:off x="1280160" y="2377440"/>
+            <a:ext cx="4892040" cy="1828800"/>
+          </a:xfrm>
+          <a:prstGeom prst="rect">
+            <a:avLst/>
+          </a:prstGeom>
+          <a:noFill/>
+        </p:spPr>
+        <p:txBody>
+          <a:bodyPr wrap="square" anchor="ctr" lIns="25400" rIns="25400" tIns="12700" bIns="12700">
+            <a:spAutoFit/>
+          </a:bodyPr>
+          <a:lstStyle/>
+          <a:p>
+            <a:pPr algn="l" marL="0" indent="0">
+              <a:spcAft>
+                <a:spcPts val="500"/>
+              </a:spcAft>
+              <a:buNone/>
+            </a:pPr>
+            <a:r>
+              <a:rPr sz="1550" b="1" i="0">
+                <a:solidFill>
+                  <a:srgbClr val="3B2A20"/>
+                </a:solidFill>
+                <a:latin typeface="Malgun Gothic"/>
+              </a:rPr>
+              <a:t>테스트파이로 토큰 충전</a:t>
+            </a:r>
+          </a:p>
+          <a:p>
+            <a:pPr algn="l" marL="0" indent="0">
+              <a:spcAft>
+                <a:spcPts val="500"/>
+              </a:spcAft>
+              <a:buNone/>
+            </a:pPr>
+            <a:r>
+              <a:rPr sz="1250" b="0" i="0">
+                <a:solidFill>
+                  <a:srgbClr val="2B2018"/>
+                </a:solidFill>
+                <a:latin typeface="Malgun Gothic"/>
+              </a:rPr>
+              <a:t>Test-Pi(테스트 파이)로 Bean을 충전해 이벤트를 준비해요.</a:t>
+            </a:r>
+          </a:p>
+        </p:txBody>
+      </p:sp>
+      <p:sp>
+        <p:nvSpPr>
+          <p:cNvPr id="18" name="Rounded Rectangle 17"/>
+          <p:cNvSpPr/>
+          <p:nvPr/>
+        </p:nvSpPr>
+        <p:spPr>
+          <a:xfrm>
+            <a:off x="411480" y="7052767"/>
+            <a:ext cx="6035040" cy="2103120"/>
+          </a:xfrm>
+          <a:prstGeom prst="roundRect">
+            <a:avLst>
+              <a:gd name="adj" fmla="val 7000"/>
+            </a:avLst>
+          </a:prstGeom>
+          <a:solidFill>
+            <a:srgbClr val="FFF7E8"/>
+          </a:solidFill>
+          <a:ln w="12700">
+            <a:solidFill>
+              <a:srgbClr val="EFE2D0"/>
+            </a:solidFill>
+          </a:ln>
+          <a:effectLst/>
+        </p:spPr>
+        <p:style>
+          <a:lnRef idx="1">
+            <a:schemeClr val="accent1"/>
+          </a:lnRef>
+          <a:fillRef idx="3">
+            <a:schemeClr val="accent1"/>
+          </a:fillRef>
+          <a:effectRef idx="2">
+            <a:schemeClr val="accent1"/>
+          </a:effectRef>
+          <a:fontRef idx="minor">
+            <a:schemeClr val="lt1"/>
+          </a:fontRef>
+        </p:style>
+        <p:txBody>
+          <a:bodyPr rtlCol="0" anchor="ctr"/>
+          <a:lstStyle/>
+          <a:p>
+            <a:pPr algn="ctr"/>
+          </a:p>
+        </p:txBody>
+      </p:sp>
+      <p:sp>
+        <p:nvSpPr>
+          <p:cNvPr id="19" name="Oval 18"/>
+          <p:cNvSpPr/>
+          <p:nvPr/>
+        </p:nvSpPr>
+        <p:spPr>
+          <a:xfrm>
+            <a:off x="612648" y="7875727"/>
+            <a:ext cx="457200" cy="457200"/>
+          </a:xfrm>
+          <a:prstGeom prst="ellipse">
+            <a:avLst/>
+          </a:prstGeom>
+          <a:solidFill>
+            <a:srgbClr val="F4A52A"/>
+          </a:solidFill>
+          <a:ln>
+            <a:noFill/>
+          </a:ln>
+          <a:effectLst/>
+        </p:spPr>
+        <p:style>
+          <a:lnRef idx="1">
+            <a:schemeClr val="accent1"/>
+          </a:lnRef>
+          <a:fillRef idx="3">
+            <a:schemeClr val="accent1"/>
+          </a:fillRef>
+          <a:effectRef idx="2">
+            <a:schemeClr val="accent1"/>
+          </a:effectRef>
+          <a:fontRef idx="minor">
+            <a:schemeClr val="lt1"/>
+          </a:fontRef>
+        </p:style>
+        <p:txBody>
+          <a:bodyPr rtlCol="0" anchor="ctr"/>
+          <a:lstStyle/>
+          <a:p>
+            <a:pPr algn="ctr"/>
+          </a:p>
+        </p:txBody>
+      </p:sp>
+      <p:sp>
+        <p:nvSpPr>
+          <p:cNvPr id="20" name="TextBox 19"/>
+          <p:cNvSpPr txBox="1"/>
+          <p:nvPr/>
+        </p:nvSpPr>
+        <p:spPr>
+          <a:xfrm>
+            <a:off x="612648" y="7875727"/>
+            <a:ext cx="457200" cy="457200"/>
+          </a:xfrm>
+          <a:prstGeom prst="rect">
+            <a:avLst/>
+          </a:prstGeom>
+          <a:noFill/>
+        </p:spPr>
+        <p:txBody>
+          <a:bodyPr wrap="square" anchor="ctr" lIns="25400" rIns="25400" tIns="12700" bIns="12700">
+            <a:spAutoFit/>
+          </a:bodyPr>
+          <a:lstStyle/>
+          <a:p>
+            <a:pPr algn="ctr" marL="0" indent="0">
+              <a:buNone/>
+            </a:pPr>
+            <a:r>
+              <a:rPr sz="1500" b="1" i="0">
+                <a:solidFill>
+                  <a:srgbClr val="FFFFFF"/>
+                </a:solidFill>
+                <a:latin typeface="Malgun Gothic"/>
+              </a:rPr>
+              <a:t>2</a:t>
+            </a:r>
+          </a:p>
+        </p:txBody>
+      </p:sp>
+      <p:sp>
+        <p:nvSpPr>
+          <p:cNvPr id="21" name="TextBox 20"/>
+          <p:cNvSpPr txBox="1"/>
+          <p:nvPr/>
+        </p:nvSpPr>
+        <p:spPr>
+          <a:xfrm>
+            <a:off x="1280160" y="7189927"/>
+            <a:ext cx="4892040" cy="1828800"/>
+          </a:xfrm>
+          <a:prstGeom prst="rect">
+            <a:avLst/>
+          </a:prstGeom>
+          <a:noFill/>
+        </p:spPr>
+        <p:txBody>
+          <a:bodyPr wrap="square" anchor="ctr" lIns="25400" rIns="25400" tIns="12700" bIns="12700">
+            <a:spAutoFit/>
+          </a:bodyPr>
+          <a:lstStyle/>
+          <a:p>
+            <a:pPr algn="l" marL="0" indent="0">
+              <a:spcAft>
+                <a:spcPts val="500"/>
+              </a:spcAft>
+              <a:buNone/>
+            </a:pPr>
+            <a:r>
+              <a:rPr sz="1550" b="1" i="0">
+                <a:solidFill>
+                  <a:srgbClr val="3B2A20"/>
+                </a:solidFill>
+                <a:latin typeface="Malgun Gothic"/>
+              </a:rPr>
+              <a:t>10가지 미션 수행</a:t>
+            </a:r>
+          </a:p>
+          <a:p>
+            <a:pPr algn="l" marL="0" indent="0">
+              <a:spcAft>
+                <a:spcPts val="500"/>
+              </a:spcAft>
+              <a:buNone/>
+            </a:pPr>
+            <a:r>
+              <a:rPr sz="1250" b="0" i="0">
+                <a:solidFill>
+                  <a:srgbClr val="2B2018"/>
+                </a:solidFill>
+                <a:latin typeface="Malgun Gothic"/>
+              </a:rPr>
+              <a:t>이벤트 페이지의 미션 10개를 차례대로 완료해요.</a:t>
+            </a:r>
+          </a:p>
+        </p:txBody>
+      </p:sp>
+      <p:sp>
+        <p:nvSpPr>
+          <p:cNvPr id="22" name="TextBox 21"/>
+          <p:cNvSpPr txBox="1"/>
+          <p:nvPr/>
+        </p:nvSpPr>
+        <p:spPr>
+          <a:xfrm>
+            <a:off x="411480" y="11807647"/>
+            <a:ext cx="4572000" cy="274320"/>
+          </a:xfrm>
+          <a:prstGeom prst="rect">
+            <a:avLst/>
+          </a:prstGeom>
+          <a:noFill/>
+        </p:spPr>
+        <p:txBody>
+          <a:bodyPr wrap="square" anchor="ctr" lIns="25400" rIns="25400" tIns="12700" bIns="12700">
+            <a:spAutoFit/>
+          </a:bodyPr>
+          <a:lstStyle/>
+          <a:p>
+            <a:pPr algn="l" marL="0" indent="0">
+              <a:buNone/>
+            </a:pPr>
+            <a:r>
+              <a:rPr sz="900" b="0" i="0">
+                <a:solidFill>
+                  <a:srgbClr val="8A7A6D"/>
+                </a:solidFill>
+                <a:latin typeface="Malgun Gothic"/>
+              </a:rPr>
+              <a:t>☕ Cafe.pi  ·  쉬운 사용 설명서</a:t>
+            </a:r>
+          </a:p>
+        </p:txBody>
+      </p:sp>
+      <p:sp>
+        <p:nvSpPr>
+          <p:cNvPr id="23" name="TextBox 22"/>
+          <p:cNvSpPr txBox="1"/>
+          <p:nvPr/>
+        </p:nvSpPr>
+        <p:spPr>
+          <a:xfrm>
+            <a:off x="5852160" y="11807647"/>
+            <a:ext cx="548640" cy="274320"/>
+          </a:xfrm>
+          <a:prstGeom prst="rect">
+            <a:avLst/>
+          </a:prstGeom>
+          <a:noFill/>
+        </p:spPr>
+        <p:txBody>
+          <a:bodyPr wrap="square" anchor="ctr" lIns="25400" rIns="25400" tIns="12700" bIns="12700">
+            <a:spAutoFit/>
+          </a:bodyPr>
+          <a:lstStyle/>
+          <a:p>
+            <a:pPr algn="r" marL="0" indent="0">
+              <a:buNone/>
+            </a:pPr>
+            <a:r>
+              <a:rPr sz="900" b="1" i="0">
+                <a:solidFill>
+                  <a:srgbClr val="8A7A6D"/>
+                </a:solidFill>
+                <a:latin typeface="Malgun Gothic"/>
+              </a:rPr>
+              <a:t>10</a:t>
+            </a:r>
+          </a:p>
+        </p:txBody>
+      </p:sp>
+    </p:spTree>
+  </p:cSld>
+  <p:clrMapOvr>
+    <a:masterClrMapping/>
+  </p:clrMapOvr>
+</p:sld>
+</file>
+
+<file path=ppt/slides/slide11.xml><?xml version="1.0" encoding="utf-8"?>
+<p:sld xmlns:a="http://schemas.openxmlformats.org/drawingml/2006/main" xmlns:p="http://schemas.openxmlformats.org/presentationml/2006/main" xmlns:r="http://schemas.openxmlformats.org/officeDocument/2006/relationships">
+  <p:cSld>
+    <p:spTree>
+      <p:nvGrpSpPr>
+        <p:cNvPr id="1" name=""/>
+        <p:cNvGrpSpPr/>
+        <p:nvPr/>
+      </p:nvGrpSpPr>
+      <p:grpSpPr/>
+      <p:sp>
+        <p:nvSpPr>
+          <p:cNvPr id="2" name="Rectangle 1"/>
+          <p:cNvSpPr/>
+          <p:nvPr/>
+        </p:nvSpPr>
+        <p:spPr>
+          <a:xfrm>
+            <a:off x="0" y="0"/>
+            <a:ext cx="6858000" cy="12191695"/>
+          </a:xfrm>
+          <a:prstGeom prst="rect">
+            <a:avLst/>
+          </a:prstGeom>
+          <a:solidFill>
+            <a:srgbClr val="FFFFFF"/>
+          </a:solidFill>
+          <a:ln>
+            <a:noFill/>
+          </a:ln>
+          <a:effectLst/>
+        </p:spPr>
+        <p:style>
+          <a:lnRef idx="1">
+            <a:schemeClr val="accent1"/>
+          </a:lnRef>
+          <a:fillRef idx="3">
+            <a:schemeClr val="accent1"/>
+          </a:fillRef>
+          <a:effectRef idx="2">
+            <a:schemeClr val="accent1"/>
+          </a:effectRef>
+          <a:fontRef idx="minor">
+            <a:schemeClr val="lt1"/>
+          </a:fontRef>
+        </p:style>
+        <p:txBody>
+          <a:bodyPr rtlCol="0" anchor="ctr"/>
+          <a:lstStyle/>
+          <a:p>
+            <a:pPr algn="ctr"/>
+          </a:p>
+        </p:txBody>
+      </p:sp>
+      <p:sp>
+        <p:nvSpPr>
+          <p:cNvPr id="3" name="Rectangle 2"/>
+          <p:cNvSpPr/>
+          <p:nvPr/>
+        </p:nvSpPr>
+        <p:spPr>
+          <a:xfrm>
+            <a:off x="0" y="0"/>
+            <a:ext cx="6858000" cy="1874519"/>
+          </a:xfrm>
+          <a:prstGeom prst="rect">
+            <a:avLst/>
+          </a:prstGeom>
+          <a:solidFill>
+            <a:srgbClr val="3B2A20"/>
+          </a:solidFill>
+          <a:ln>
+            <a:noFill/>
+          </a:ln>
+          <a:effectLst/>
+        </p:spPr>
+        <p:style>
+          <a:lnRef idx="1">
+            <a:schemeClr val="accent1"/>
+          </a:lnRef>
+          <a:fillRef idx="3">
+            <a:schemeClr val="accent1"/>
+          </a:fillRef>
+          <a:effectRef idx="2">
+            <a:schemeClr val="accent1"/>
+          </a:effectRef>
+          <a:fontRef idx="minor">
+            <a:schemeClr val="lt1"/>
+          </a:fontRef>
+        </p:style>
+        <p:txBody>
+          <a:bodyPr rtlCol="0" anchor="ctr"/>
+          <a:lstStyle/>
+          <a:p>
+            <a:pPr algn="ctr"/>
+          </a:p>
+        </p:txBody>
+      </p:sp>
+      <p:sp>
+        <p:nvSpPr>
+          <p:cNvPr id="4" name="Rectangle 3"/>
+          <p:cNvSpPr/>
+          <p:nvPr/>
+        </p:nvSpPr>
+        <p:spPr>
+          <a:xfrm>
+            <a:off x="0" y="1874519"/>
+            <a:ext cx="6858000" cy="38100"/>
+          </a:xfrm>
+          <a:prstGeom prst="rect">
+            <a:avLst/>
+          </a:prstGeom>
+          <a:solidFill>
+            <a:srgbClr val="F4A52A"/>
+          </a:solidFill>
+          <a:ln>
+            <a:noFill/>
+          </a:ln>
+          <a:effectLst/>
+        </p:spPr>
+        <p:style>
+          <a:lnRef idx="1">
+            <a:schemeClr val="accent1"/>
+          </a:lnRef>
+          <a:fillRef idx="3">
+            <a:schemeClr val="accent1"/>
+          </a:fillRef>
+          <a:effectRef idx="2">
+            <a:schemeClr val="accent1"/>
+          </a:effectRef>
+          <a:fontRef idx="minor">
+            <a:schemeClr val="lt1"/>
+          </a:fontRef>
+        </p:style>
+        <p:txBody>
+          <a:bodyPr rtlCol="0" anchor="ctr"/>
+          <a:lstStyle/>
+          <a:p>
+            <a:pPr algn="ctr"/>
+          </a:p>
+        </p:txBody>
+      </p:sp>
+      <p:sp>
+        <p:nvSpPr>
+          <p:cNvPr id="5" name="Oval 4"/>
+          <p:cNvSpPr/>
+          <p:nvPr/>
+        </p:nvSpPr>
+        <p:spPr>
+          <a:xfrm>
+            <a:off x="5394960" y="-1005840"/>
+            <a:ext cx="2194560" cy="2194560"/>
+          </a:xfrm>
+          <a:prstGeom prst="ellipse">
+            <a:avLst/>
+          </a:prstGeom>
+          <a:solidFill>
+            <a:srgbClr val="4A3528"/>
+          </a:solidFill>
+          <a:ln>
+            <a:noFill/>
+          </a:ln>
+          <a:effectLst/>
+        </p:spPr>
+        <p:style>
+          <a:lnRef idx="1">
+            <a:schemeClr val="accent1"/>
+          </a:lnRef>
+          <a:fillRef idx="3">
+            <a:schemeClr val="accent1"/>
+          </a:fillRef>
+          <a:effectRef idx="2">
+            <a:schemeClr val="accent1"/>
+          </a:effectRef>
+          <a:fontRef idx="minor">
+            <a:schemeClr val="lt1"/>
+          </a:fontRef>
+        </p:style>
+        <p:txBody>
+          <a:bodyPr rtlCol="0" anchor="ctr"/>
+          <a:lstStyle/>
+          <a:p>
+            <a:pPr algn="ctr"/>
+          </a:p>
+        </p:txBody>
+      </p:sp>
+      <p:sp>
+        <p:nvSpPr>
+          <p:cNvPr id="6" name="Rounded Rectangle 5"/>
+          <p:cNvSpPr/>
+          <p:nvPr/>
+        </p:nvSpPr>
+        <p:spPr>
+          <a:xfrm>
+            <a:off x="411480" y="292608"/>
+            <a:ext cx="1691640" cy="457200"/>
+          </a:xfrm>
+          <a:prstGeom prst="roundRect">
+            <a:avLst>
+              <a:gd name="adj" fmla="val 50000"/>
+            </a:avLst>
+          </a:prstGeom>
+          <a:solidFill>
+            <a:srgbClr val="F4A52A"/>
+          </a:solidFill>
+          <a:ln>
+            <a:noFill/>
+          </a:ln>
+          <a:effectLst/>
+        </p:spPr>
+        <p:style>
+          <a:lnRef idx="1">
+            <a:schemeClr val="accent1"/>
+          </a:lnRef>
+          <a:fillRef idx="3">
+            <a:schemeClr val="accent1"/>
+          </a:fillRef>
+          <a:effectRef idx="2">
+            <a:schemeClr val="accent1"/>
+          </a:effectRef>
+          <a:fontRef idx="minor">
+            <a:schemeClr val="lt1"/>
+          </a:fontRef>
+        </p:style>
+        <p:txBody>
+          <a:bodyPr rtlCol="0" anchor="ctr"/>
+          <a:lstStyle/>
+          <a:p>
+            <a:pPr algn="ctr"/>
+          </a:p>
+        </p:txBody>
+      </p:sp>
+      <p:sp>
+        <p:nvSpPr>
+          <p:cNvPr id="7" name="TextBox 6"/>
+          <p:cNvSpPr txBox="1"/>
+          <p:nvPr/>
+        </p:nvSpPr>
+        <p:spPr>
+          <a:xfrm>
+            <a:off x="411480" y="292608"/>
+            <a:ext cx="1691640" cy="457200"/>
+          </a:xfrm>
+          <a:prstGeom prst="rect">
+            <a:avLst/>
+          </a:prstGeom>
+          <a:noFill/>
+        </p:spPr>
+        <p:txBody>
+          <a:bodyPr wrap="square" anchor="ctr" lIns="25400" rIns="25400" tIns="12700" bIns="12700">
+            <a:spAutoFit/>
+          </a:bodyPr>
+          <a:lstStyle/>
+          <a:p>
+            <a:pPr algn="ctr" marL="0" indent="0">
+              <a:buNone/>
+            </a:pPr>
+            <a:r>
+              <a:rPr sz="1300" b="1" i="0">
+                <a:solidFill>
+                  <a:srgbClr val="3B2A20"/>
+                </a:solidFill>
+                <a:latin typeface="Malgun Gothic"/>
+              </a:rPr>
+              <a:t>🎁 EVENT #2</a:t>
+            </a:r>
+          </a:p>
+        </p:txBody>
+      </p:sp>
+      <p:sp>
+        <p:nvSpPr>
+          <p:cNvPr id="8" name="TextBox 7"/>
+          <p:cNvSpPr txBox="1"/>
+          <p:nvPr/>
+        </p:nvSpPr>
+        <p:spPr>
+          <a:xfrm>
+            <a:off x="411480" y="822960"/>
+            <a:ext cx="6035040" cy="640080"/>
+          </a:xfrm>
+          <a:prstGeom prst="rect">
+            <a:avLst/>
+          </a:prstGeom>
+          <a:noFill/>
+        </p:spPr>
+        <p:txBody>
+          <a:bodyPr wrap="square" anchor="ctr" lIns="25400" rIns="25400" tIns="12700" bIns="12700">
+            <a:spAutoFit/>
+          </a:bodyPr>
+          <a:lstStyle/>
+          <a:p>
+            <a:pPr algn="l" marL="0" indent="0">
+              <a:buNone/>
+            </a:pPr>
+            <a:r>
+              <a:rPr sz="2300" b="1" i="0">
+                <a:solidFill>
+                  <a:srgbClr val="FFFFFF"/>
+                </a:solidFill>
+                <a:latin typeface="Malgun Gothic"/>
+              </a:rPr>
+              <a:t>내 매장 등록 이벤트</a:t>
+            </a:r>
+          </a:p>
+        </p:txBody>
+      </p:sp>
+      <p:sp>
+        <p:nvSpPr>
+          <p:cNvPr id="9" name="TextBox 8"/>
+          <p:cNvSpPr txBox="1"/>
+          <p:nvPr/>
+        </p:nvSpPr>
+        <p:spPr>
+          <a:xfrm>
+            <a:off x="411480" y="1417320"/>
+            <a:ext cx="6035040" cy="411480"/>
+          </a:xfrm>
+          <a:prstGeom prst="rect">
+            <a:avLst/>
+          </a:prstGeom>
+          <a:noFill/>
+        </p:spPr>
+        <p:txBody>
+          <a:bodyPr wrap="square" anchor="ctr" lIns="25400" rIns="25400" tIns="12700" bIns="12700">
+            <a:spAutoFit/>
+          </a:bodyPr>
+          <a:lstStyle/>
+          <a:p>
+            <a:pPr algn="l" marL="0" indent="0">
+              <a:buNone/>
+            </a:pPr>
+            <a:r>
+              <a:rPr sz="1200" b="0" i="0">
+                <a:solidFill>
+                  <a:srgbClr val="E9DED3"/>
+                </a:solidFill>
+                <a:latin typeface="Malgun Gothic"/>
+              </a:rPr>
+              <a:t>내 매장을 등록하고 거래까지 테스트하면 Bean 선물!</a:t>
+            </a:r>
+          </a:p>
+        </p:txBody>
+      </p:sp>
+      <p:sp>
+        <p:nvSpPr>
+          <p:cNvPr id="10" name="Rounded Rectangle 9"/>
+          <p:cNvSpPr/>
+          <p:nvPr/>
+        </p:nvSpPr>
+        <p:spPr>
+          <a:xfrm>
+            <a:off x="411480" y="9430207"/>
+            <a:ext cx="6035040" cy="2194560"/>
+          </a:xfrm>
+          <a:prstGeom prst="roundRect">
+            <a:avLst>
+              <a:gd name="adj" fmla="val 8000"/>
+            </a:avLst>
+          </a:prstGeom>
+          <a:solidFill>
+            <a:srgbClr val="F4A52A"/>
+          </a:solidFill>
+          <a:ln>
+            <a:noFill/>
+          </a:ln>
+          <a:effectLst/>
+        </p:spPr>
+        <p:style>
+          <a:lnRef idx="1">
+            <a:schemeClr val="accent1"/>
+          </a:lnRef>
+          <a:fillRef idx="3">
+            <a:schemeClr val="accent1"/>
+          </a:fillRef>
+          <a:effectRef idx="2">
+            <a:schemeClr val="accent1"/>
+          </a:effectRef>
+          <a:fontRef idx="minor">
+            <a:schemeClr val="lt1"/>
+          </a:fontRef>
+        </p:style>
+        <p:txBody>
+          <a:bodyPr rtlCol="0" anchor="ctr"/>
+          <a:lstStyle/>
+          <a:p>
+            <a:pPr algn="ctr"/>
+          </a:p>
+        </p:txBody>
+      </p:sp>
+      <p:sp>
+        <p:nvSpPr>
+          <p:cNvPr id="11" name="TextBox 10"/>
+          <p:cNvSpPr txBox="1"/>
+          <p:nvPr/>
+        </p:nvSpPr>
+        <p:spPr>
+          <a:xfrm>
+            <a:off x="411480" y="9722815"/>
+            <a:ext cx="6035040" cy="411480"/>
+          </a:xfrm>
+          <a:prstGeom prst="rect">
+            <a:avLst/>
+          </a:prstGeom>
+          <a:noFill/>
+        </p:spPr>
+        <p:txBody>
+          <a:bodyPr wrap="square" anchor="ctr" lIns="25400" rIns="25400" tIns="12700" bIns="12700">
+            <a:spAutoFit/>
+          </a:bodyPr>
+          <a:lstStyle/>
+          <a:p>
+            <a:pPr algn="ctr" marL="0" indent="0">
+              <a:buNone/>
+            </a:pPr>
+            <a:r>
+              <a:rPr sz="1500" b="1" i="0">
+                <a:solidFill>
+                  <a:srgbClr val="3B2A20"/>
+                </a:solidFill>
+                <a:latin typeface="Malgun Gothic"/>
+              </a:rPr>
+              <a:t>🎁 매장 등록 보상</a:t>
+            </a:r>
+          </a:p>
+        </p:txBody>
+      </p:sp>
+      <p:sp>
+        <p:nvSpPr>
+          <p:cNvPr id="12" name="TextBox 11"/>
+          <p:cNvSpPr txBox="1"/>
+          <p:nvPr/>
+        </p:nvSpPr>
+        <p:spPr>
+          <a:xfrm>
+            <a:off x="411480" y="10161727"/>
+            <a:ext cx="6035040" cy="960120"/>
+          </a:xfrm>
+          <a:prstGeom prst="rect">
+            <a:avLst/>
+          </a:prstGeom>
+          <a:noFill/>
+        </p:spPr>
+        <p:txBody>
+          <a:bodyPr wrap="square" anchor="ctr" lIns="25400" rIns="25400" tIns="12700" bIns="12700">
+            <a:spAutoFit/>
+          </a:bodyPr>
+          <a:lstStyle/>
+          <a:p>
+            <a:pPr algn="ctr" marL="0" indent="0">
+              <a:buNone/>
+            </a:pPr>
+            <a:r>
+              <a:rPr sz="4600" b="1" i="0">
+                <a:solidFill>
+                  <a:srgbClr val="3B2A20"/>
+                </a:solidFill>
+                <a:latin typeface="Malgun Gothic"/>
+              </a:rPr>
+              <a:t>10,000 Bean</a:t>
+            </a:r>
+          </a:p>
+        </p:txBody>
+      </p:sp>
+      <p:sp>
+        <p:nvSpPr>
+          <p:cNvPr id="13" name="TextBox 12"/>
+          <p:cNvSpPr txBox="1"/>
+          <p:nvPr/>
+        </p:nvSpPr>
+        <p:spPr>
+          <a:xfrm>
+            <a:off x="411480" y="11094415"/>
+            <a:ext cx="6035040" cy="411480"/>
+          </a:xfrm>
+          <a:prstGeom prst="rect">
+            <a:avLst/>
+          </a:prstGeom>
+          <a:noFill/>
+        </p:spPr>
+        <p:txBody>
+          <a:bodyPr wrap="square" anchor="ctr" lIns="25400" rIns="25400" tIns="12700" bIns="12700">
+            <a:spAutoFit/>
+          </a:bodyPr>
+          <a:lstStyle/>
+          <a:p>
+            <a:pPr algn="ctr" marL="0" indent="0">
+              <a:buNone/>
+            </a:pPr>
+            <a:r>
+              <a:rPr sz="1350" b="1" i="0">
+                <a:solidFill>
+                  <a:srgbClr val="3B2A20"/>
+                </a:solidFill>
+                <a:latin typeface="Malgun Gothic"/>
+              </a:rPr>
+              <a:t>등록 + 메뉴 + 거래 테스트 완료 시 선물! ☕</a:t>
+            </a:r>
+          </a:p>
+        </p:txBody>
+      </p:sp>
+      <p:sp>
+        <p:nvSpPr>
+          <p:cNvPr id="14" name="Rounded Rectangle 13"/>
+          <p:cNvSpPr/>
+          <p:nvPr/>
+        </p:nvSpPr>
+        <p:spPr>
+          <a:xfrm>
+            <a:off x="411480" y="2240280"/>
+            <a:ext cx="6035040" cy="2103120"/>
+          </a:xfrm>
+          <a:prstGeom prst="roundRect">
+            <a:avLst>
+              <a:gd name="adj" fmla="val 7000"/>
+            </a:avLst>
+          </a:prstGeom>
+          <a:solidFill>
+            <a:srgbClr val="FFF7E8"/>
+          </a:solidFill>
+          <a:ln w="12700">
+            <a:solidFill>
+              <a:srgbClr val="EFE2D0"/>
+            </a:solidFill>
+          </a:ln>
+          <a:effectLst/>
+        </p:spPr>
+        <p:style>
+          <a:lnRef idx="1">
+            <a:schemeClr val="accent1"/>
+          </a:lnRef>
+          <a:fillRef idx="3">
+            <a:schemeClr val="accent1"/>
+          </a:fillRef>
+          <a:effectRef idx="2">
+            <a:schemeClr val="accent1"/>
+          </a:effectRef>
+          <a:fontRef idx="minor">
+            <a:schemeClr val="lt1"/>
+          </a:fontRef>
+        </p:style>
+        <p:txBody>
+          <a:bodyPr rtlCol="0" anchor="ctr"/>
+          <a:lstStyle/>
+          <a:p>
+            <a:pPr algn="ctr"/>
+          </a:p>
+        </p:txBody>
+      </p:sp>
+      <p:sp>
+        <p:nvSpPr>
+          <p:cNvPr id="15" name="Oval 14"/>
+          <p:cNvSpPr/>
+          <p:nvPr/>
+        </p:nvSpPr>
+        <p:spPr>
+          <a:xfrm>
+            <a:off x="612648" y="3063240"/>
+            <a:ext cx="457200" cy="457200"/>
+          </a:xfrm>
+          <a:prstGeom prst="ellipse">
+            <a:avLst/>
+          </a:prstGeom>
+          <a:solidFill>
+            <a:srgbClr val="F4A52A"/>
+          </a:solidFill>
+          <a:ln>
+            <a:noFill/>
+          </a:ln>
+          <a:effectLst/>
+        </p:spPr>
+        <p:style>
+          <a:lnRef idx="1">
+            <a:schemeClr val="accent1"/>
+          </a:lnRef>
+          <a:fillRef idx="3">
+            <a:schemeClr val="accent1"/>
+          </a:fillRef>
+          <a:effectRef idx="2">
+            <a:schemeClr val="accent1"/>
+          </a:effectRef>
+          <a:fontRef idx="minor">
+            <a:schemeClr val="lt1"/>
+          </a:fontRef>
+        </p:style>
+        <p:txBody>
+          <a:bodyPr rtlCol="0" anchor="ctr"/>
+          <a:lstStyle/>
+          <a:p>
+            <a:pPr algn="ctr"/>
+          </a:p>
+        </p:txBody>
+      </p:sp>
+      <p:sp>
+        <p:nvSpPr>
+          <p:cNvPr id="16" name="TextBox 15"/>
+          <p:cNvSpPr txBox="1"/>
+          <p:nvPr/>
+        </p:nvSpPr>
+        <p:spPr>
+          <a:xfrm>
+            <a:off x="612648" y="3063240"/>
+            <a:ext cx="457200" cy="457200"/>
+          </a:xfrm>
+          <a:prstGeom prst="rect">
+            <a:avLst/>
+          </a:prstGeom>
+          <a:noFill/>
+        </p:spPr>
+        <p:txBody>
+          <a:bodyPr wrap="square" anchor="ctr" lIns="25400" rIns="25400" tIns="12700" bIns="12700">
+            <a:spAutoFit/>
+          </a:bodyPr>
+          <a:lstStyle/>
+          <a:p>
+            <a:pPr algn="ctr" marL="0" indent="0">
+              <a:buNone/>
+            </a:pPr>
+            <a:r>
+              <a:rPr sz="1500" b="1" i="0">
+                <a:solidFill>
+                  <a:srgbClr val="FFFFFF"/>
+                </a:solidFill>
+                <a:latin typeface="Malgun Gothic"/>
+              </a:rPr>
+              <a:t>1</a:t>
+            </a:r>
+          </a:p>
+        </p:txBody>
+      </p:sp>
+      <p:sp>
+        <p:nvSpPr>
+          <p:cNvPr id="17" name="TextBox 16"/>
+          <p:cNvSpPr txBox="1"/>
+          <p:nvPr/>
+        </p:nvSpPr>
+        <p:spPr>
+          <a:xfrm>
+            <a:off x="1280160" y="2377440"/>
+            <a:ext cx="4892040" cy="1828800"/>
+          </a:xfrm>
+          <a:prstGeom prst="rect">
+            <a:avLst/>
+          </a:prstGeom>
+          <a:noFill/>
+        </p:spPr>
+        <p:txBody>
+          <a:bodyPr wrap="square" anchor="ctr" lIns="25400" rIns="25400" tIns="12700" bIns="12700">
+            <a:spAutoFit/>
+          </a:bodyPr>
+          <a:lstStyle/>
+          <a:p>
+            <a:pPr algn="l" marL="0" indent="0">
+              <a:spcAft>
+                <a:spcPts val="500"/>
+              </a:spcAft>
+              <a:buNone/>
+            </a:pPr>
+            <a:r>
+              <a:rPr sz="1550" b="1" i="0">
+                <a:solidFill>
+                  <a:srgbClr val="3B2A20"/>
+                </a:solidFill>
+                <a:latin typeface="Malgun Gothic"/>
+              </a:rPr>
+              <a:t>내 매장 찾아 PiShop 등록</a:t>
+            </a:r>
+          </a:p>
+          <a:p>
+            <a:pPr algn="l" marL="0" indent="0">
+              <a:spcAft>
+                <a:spcPts val="500"/>
+              </a:spcAft>
+              <a:buNone/>
+            </a:pPr>
+            <a:r>
+              <a:rPr sz="1250" b="0" i="0">
+                <a:solidFill>
+                  <a:srgbClr val="2B2018"/>
+                </a:solidFill>
+                <a:latin typeface="Malgun Gothic"/>
+              </a:rPr>
+              <a:t>구글맵에 등록된 내 매장을 찾아 PiShop에 등록해요.</a:t>
+            </a:r>
+          </a:p>
+        </p:txBody>
+      </p:sp>
+      <p:sp>
+        <p:nvSpPr>
+          <p:cNvPr id="18" name="Rounded Rectangle 17"/>
+          <p:cNvSpPr/>
+          <p:nvPr/>
+        </p:nvSpPr>
+        <p:spPr>
+          <a:xfrm>
+            <a:off x="411480" y="4646523"/>
+            <a:ext cx="6035040" cy="2103120"/>
+          </a:xfrm>
+          <a:prstGeom prst="roundRect">
+            <a:avLst>
+              <a:gd name="adj" fmla="val 7000"/>
+            </a:avLst>
+          </a:prstGeom>
+          <a:solidFill>
+            <a:srgbClr val="FFF7E8"/>
+          </a:solidFill>
+          <a:ln w="12700">
+            <a:solidFill>
+              <a:srgbClr val="EFE2D0"/>
+            </a:solidFill>
+          </a:ln>
+          <a:effectLst/>
+        </p:spPr>
+        <p:style>
+          <a:lnRef idx="1">
+            <a:schemeClr val="accent1"/>
+          </a:lnRef>
+          <a:fillRef idx="3">
+            <a:schemeClr val="accent1"/>
+          </a:fillRef>
+          <a:effectRef idx="2">
+            <a:schemeClr val="accent1"/>
+          </a:effectRef>
+          <a:fontRef idx="minor">
+            <a:schemeClr val="lt1"/>
+          </a:fontRef>
+        </p:style>
+        <p:txBody>
+          <a:bodyPr rtlCol="0" anchor="ctr"/>
+          <a:lstStyle/>
+          <a:p>
+            <a:pPr algn="ctr"/>
+          </a:p>
+        </p:txBody>
+      </p:sp>
+      <p:sp>
+        <p:nvSpPr>
+          <p:cNvPr id="19" name="Oval 18"/>
+          <p:cNvSpPr/>
+          <p:nvPr/>
+        </p:nvSpPr>
+        <p:spPr>
+          <a:xfrm>
+            <a:off x="612648" y="5469483"/>
+            <a:ext cx="457200" cy="457200"/>
+          </a:xfrm>
+          <a:prstGeom prst="ellipse">
+            <a:avLst/>
+          </a:prstGeom>
+          <a:solidFill>
+            <a:srgbClr val="F4A52A"/>
+          </a:solidFill>
+          <a:ln>
+            <a:noFill/>
+          </a:ln>
+          <a:effectLst/>
+        </p:spPr>
+        <p:style>
+          <a:lnRef idx="1">
+            <a:schemeClr val="accent1"/>
+          </a:lnRef>
+          <a:fillRef idx="3">
+            <a:schemeClr val="accent1"/>
+          </a:fillRef>
+          <a:effectRef idx="2">
+            <a:schemeClr val="accent1"/>
+          </a:effectRef>
+          <a:fontRef idx="minor">
+            <a:schemeClr val="lt1"/>
+          </a:fontRef>
+        </p:style>
+        <p:txBody>
+          <a:bodyPr rtlCol="0" anchor="ctr"/>
+          <a:lstStyle/>
+          <a:p>
+            <a:pPr algn="ctr"/>
+          </a:p>
+        </p:txBody>
+      </p:sp>
+      <p:sp>
+        <p:nvSpPr>
+          <p:cNvPr id="20" name="TextBox 19"/>
+          <p:cNvSpPr txBox="1"/>
+          <p:nvPr/>
+        </p:nvSpPr>
+        <p:spPr>
+          <a:xfrm>
+            <a:off x="612648" y="5469483"/>
+            <a:ext cx="457200" cy="457200"/>
+          </a:xfrm>
+          <a:prstGeom prst="rect">
+            <a:avLst/>
+          </a:prstGeom>
+          <a:noFill/>
+        </p:spPr>
+        <p:txBody>
+          <a:bodyPr wrap="square" anchor="ctr" lIns="25400" rIns="25400" tIns="12700" bIns="12700">
+            <a:spAutoFit/>
+          </a:bodyPr>
+          <a:lstStyle/>
+          <a:p>
+            <a:pPr algn="ctr" marL="0" indent="0">
+              <a:buNone/>
+            </a:pPr>
+            <a:r>
+              <a:rPr sz="1500" b="1" i="0">
+                <a:solidFill>
+                  <a:srgbClr val="FFFFFF"/>
+                </a:solidFill>
+                <a:latin typeface="Malgun Gothic"/>
+              </a:rPr>
+              <a:t>2</a:t>
+            </a:r>
+          </a:p>
+        </p:txBody>
+      </p:sp>
+      <p:sp>
+        <p:nvSpPr>
+          <p:cNvPr id="21" name="TextBox 20"/>
+          <p:cNvSpPr txBox="1"/>
+          <p:nvPr/>
+        </p:nvSpPr>
+        <p:spPr>
+          <a:xfrm>
+            <a:off x="1280160" y="4783683"/>
+            <a:ext cx="4892040" cy="1828800"/>
+          </a:xfrm>
+          <a:prstGeom prst="rect">
+            <a:avLst/>
+          </a:prstGeom>
+          <a:noFill/>
+        </p:spPr>
+        <p:txBody>
+          <a:bodyPr wrap="square" anchor="ctr" lIns="25400" rIns="25400" tIns="12700" bIns="12700">
+            <a:spAutoFit/>
+          </a:bodyPr>
+          <a:lstStyle/>
+          <a:p>
+            <a:pPr algn="l" marL="0" indent="0">
+              <a:spcAft>
+                <a:spcPts val="500"/>
+              </a:spcAft>
+              <a:buNone/>
+            </a:pPr>
+            <a:r>
+              <a:rPr sz="1550" b="1" i="0">
+                <a:solidFill>
+                  <a:srgbClr val="3B2A20"/>
+                </a:solidFill>
+                <a:latin typeface="Malgun Gothic"/>
+              </a:rPr>
+              <a:t>내 PiShop에 메뉴 등록</a:t>
+            </a:r>
+          </a:p>
+          <a:p>
+            <a:pPr algn="l" marL="0" indent="0">
+              <a:spcAft>
+                <a:spcPts val="500"/>
+              </a:spcAft>
+              <a:buNone/>
+            </a:pPr>
+            <a:r>
+              <a:rPr sz="1250" b="0" i="0">
+                <a:solidFill>
+                  <a:srgbClr val="2B2018"/>
+                </a:solidFill>
+                <a:latin typeface="Malgun Gothic"/>
+              </a:rPr>
+              <a:t>판매할 메뉴(상품)의 사진·가격을 올려요.</a:t>
+            </a:r>
+          </a:p>
+        </p:txBody>
+      </p:sp>
+      <p:sp>
+        <p:nvSpPr>
+          <p:cNvPr id="22" name="Rounded Rectangle 21"/>
+          <p:cNvSpPr/>
+          <p:nvPr/>
+        </p:nvSpPr>
+        <p:spPr>
+          <a:xfrm>
+            <a:off x="411480" y="7052766"/>
+            <a:ext cx="6035040" cy="2103120"/>
+          </a:xfrm>
+          <a:prstGeom prst="roundRect">
+            <a:avLst>
+              <a:gd name="adj" fmla="val 7000"/>
+            </a:avLst>
+          </a:prstGeom>
+          <a:solidFill>
+            <a:srgbClr val="FFF7E8"/>
+          </a:solidFill>
+          <a:ln w="12700">
+            <a:solidFill>
+              <a:srgbClr val="EFE2D0"/>
+            </a:solidFill>
+          </a:ln>
+          <a:effectLst/>
+        </p:spPr>
+        <p:style>
+          <a:lnRef idx="1">
+            <a:schemeClr val="accent1"/>
+          </a:lnRef>
+          <a:fillRef idx="3">
+            <a:schemeClr val="accent1"/>
+          </a:fillRef>
+          <a:effectRef idx="2">
+            <a:schemeClr val="accent1"/>
+          </a:effectRef>
+          <a:fontRef idx="minor">
+            <a:schemeClr val="lt1"/>
+          </a:fontRef>
+        </p:style>
+        <p:txBody>
+          <a:bodyPr rtlCol="0" anchor="ctr"/>
+          <a:lstStyle/>
+          <a:p>
+            <a:pPr algn="ctr"/>
+          </a:p>
+        </p:txBody>
+      </p:sp>
+      <p:sp>
+        <p:nvSpPr>
+          <p:cNvPr id="23" name="Oval 22"/>
+          <p:cNvSpPr/>
+          <p:nvPr/>
+        </p:nvSpPr>
+        <p:spPr>
+          <a:xfrm>
+            <a:off x="612648" y="7875726"/>
+            <a:ext cx="457200" cy="457200"/>
+          </a:xfrm>
+          <a:prstGeom prst="ellipse">
+            <a:avLst/>
+          </a:prstGeom>
+          <a:solidFill>
+            <a:srgbClr val="F4A52A"/>
+          </a:solidFill>
+          <a:ln>
+            <a:noFill/>
+          </a:ln>
+          <a:effectLst/>
+        </p:spPr>
+        <p:style>
+          <a:lnRef idx="1">
+            <a:schemeClr val="accent1"/>
+          </a:lnRef>
+          <a:fillRef idx="3">
+            <a:schemeClr val="accent1"/>
+          </a:fillRef>
+          <a:effectRef idx="2">
+            <a:schemeClr val="accent1"/>
+          </a:effectRef>
+          <a:fontRef idx="minor">
+            <a:schemeClr val="lt1"/>
+          </a:fontRef>
+        </p:style>
+        <p:txBody>
+          <a:bodyPr rtlCol="0" anchor="ctr"/>
+          <a:lstStyle/>
+          <a:p>
+            <a:pPr algn="ctr"/>
+          </a:p>
+        </p:txBody>
+      </p:sp>
+      <p:sp>
+        <p:nvSpPr>
+          <p:cNvPr id="24" name="TextBox 23"/>
+          <p:cNvSpPr txBox="1"/>
+          <p:nvPr/>
+        </p:nvSpPr>
+        <p:spPr>
+          <a:xfrm>
+            <a:off x="612648" y="7875726"/>
+            <a:ext cx="457200" cy="457200"/>
+          </a:xfrm>
+          <a:prstGeom prst="rect">
+            <a:avLst/>
+          </a:prstGeom>
+          <a:noFill/>
+        </p:spPr>
+        <p:txBody>
+          <a:bodyPr wrap="square" anchor="ctr" lIns="25400" rIns="25400" tIns="12700" bIns="12700">
+            <a:spAutoFit/>
+          </a:bodyPr>
+          <a:lstStyle/>
+          <a:p>
+            <a:pPr algn="ctr" marL="0" indent="0">
+              <a:buNone/>
+            </a:pPr>
+            <a:r>
+              <a:rPr sz="1500" b="1" i="0">
+                <a:solidFill>
+                  <a:srgbClr val="FFFFFF"/>
+                </a:solidFill>
+                <a:latin typeface="Malgun Gothic"/>
+              </a:rPr>
+              <a:t>3</a:t>
+            </a:r>
+          </a:p>
+        </p:txBody>
+      </p:sp>
+      <p:sp>
+        <p:nvSpPr>
+          <p:cNvPr id="25" name="TextBox 24"/>
+          <p:cNvSpPr txBox="1"/>
+          <p:nvPr/>
+        </p:nvSpPr>
+        <p:spPr>
+          <a:xfrm>
+            <a:off x="1280160" y="7189926"/>
+            <a:ext cx="4892040" cy="1828800"/>
+          </a:xfrm>
+          <a:prstGeom prst="rect">
+            <a:avLst/>
+          </a:prstGeom>
+          <a:noFill/>
+        </p:spPr>
+        <p:txBody>
+          <a:bodyPr wrap="square" anchor="ctr" lIns="25400" rIns="25400" tIns="12700" bIns="12700">
+            <a:spAutoFit/>
+          </a:bodyPr>
+          <a:lstStyle/>
+          <a:p>
+            <a:pPr algn="l" marL="0" indent="0">
+              <a:spcAft>
+                <a:spcPts val="500"/>
+              </a:spcAft>
+              <a:buNone/>
+            </a:pPr>
+            <a:r>
+              <a:rPr sz="1550" b="1" i="0">
+                <a:solidFill>
+                  <a:srgbClr val="3B2A20"/>
+                </a:solidFill>
+                <a:latin typeface="Malgun Gothic"/>
+              </a:rPr>
+              <a:t>텔레그램 알림 + 거래 테스트</a:t>
+            </a:r>
+          </a:p>
+          <a:p>
+            <a:pPr algn="l" marL="0" indent="0">
+              <a:spcAft>
+                <a:spcPts val="500"/>
+              </a:spcAft>
+              <a:buNone/>
+            </a:pPr>
+            <a:r>
+              <a:rPr sz="1250" b="0" i="0">
+                <a:solidFill>
+                  <a:srgbClr val="2B2018"/>
+                </a:solidFill>
+                <a:latin typeface="Malgun Gothic"/>
+              </a:rPr>
+              <a:t>텔레그램 알림을 켜고 판매·구매를 직접 테스트해요.</a:t>
+            </a:r>
+          </a:p>
+        </p:txBody>
+      </p:sp>
+      <p:sp>
+        <p:nvSpPr>
+          <p:cNvPr id="26" name="TextBox 25"/>
+          <p:cNvSpPr txBox="1"/>
+          <p:nvPr/>
+        </p:nvSpPr>
+        <p:spPr>
+          <a:xfrm>
+            <a:off x="411480" y="11807647"/>
+            <a:ext cx="4572000" cy="274320"/>
+          </a:xfrm>
+          <a:prstGeom prst="rect">
+            <a:avLst/>
+          </a:prstGeom>
+          <a:noFill/>
+        </p:spPr>
+        <p:txBody>
+          <a:bodyPr wrap="square" anchor="ctr" lIns="25400" rIns="25400" tIns="12700" bIns="12700">
+            <a:spAutoFit/>
+          </a:bodyPr>
+          <a:lstStyle/>
+          <a:p>
+            <a:pPr algn="l" marL="0" indent="0">
+              <a:buNone/>
+            </a:pPr>
+            <a:r>
+              <a:rPr sz="900" b="0" i="0">
+                <a:solidFill>
+                  <a:srgbClr val="8A7A6D"/>
+                </a:solidFill>
+                <a:latin typeface="Malgun Gothic"/>
+              </a:rPr>
+              <a:t>☕ Cafe.pi  ·  쉬운 사용 설명서</a:t>
+            </a:r>
+          </a:p>
+        </p:txBody>
+      </p:sp>
+      <p:sp>
+        <p:nvSpPr>
+          <p:cNvPr id="27" name="TextBox 26"/>
+          <p:cNvSpPr txBox="1"/>
+          <p:nvPr/>
+        </p:nvSpPr>
+        <p:spPr>
+          <a:xfrm>
+            <a:off x="5852160" y="11807647"/>
+            <a:ext cx="548640" cy="274320"/>
+          </a:xfrm>
+          <a:prstGeom prst="rect">
+            <a:avLst/>
+          </a:prstGeom>
+          <a:noFill/>
+        </p:spPr>
+        <p:txBody>
+          <a:bodyPr wrap="square" anchor="ctr" lIns="25400" rIns="25400" tIns="12700" bIns="12700">
+            <a:spAutoFit/>
+          </a:bodyPr>
+          <a:lstStyle/>
+          <a:p>
+            <a:pPr algn="r" marL="0" indent="0">
+              <a:buNone/>
+            </a:pPr>
+            <a:r>
+              <a:rPr sz="900" b="1" i="0">
+                <a:solidFill>
+                  <a:srgbClr val="8A7A6D"/>
+                </a:solidFill>
+                <a:latin typeface="Malgun Gothic"/>
+              </a:rPr>
+              <a:t>11</a:t>
+            </a:r>
+          </a:p>
+        </p:txBody>
+      </p:sp>
+    </p:spTree>
+  </p:cSld>
+  <p:clrMapOvr>
+    <a:masterClrMapping/>
+  </p:clrMapOvr>
+</p:sld>
+</file>
+
+<file path=ppt/slides/slide12.xml><?xml version="1.0" encoding="utf-8"?>
 <p:sld xmlns:a="http://schemas.openxmlformats.org/drawingml/2006/main" xmlns:p="http://schemas.openxmlformats.org/presentationml/2006/main" xmlns:r="http://schemas.openxmlformats.org/officeDocument/2006/relationships">
   <p:cSld>
     <p:spTree>

--- a/docs/Cafe.pi_쉬운_사용자매뉴얼_세로.pptx
+++ b/docs/Cafe.pi_쉬운_사용자매뉴얼_세로.pptx
@@ -5,20 +5,20 @@
     <p:sldMasterId id="2147483648" r:id="rId1"/>
   </p:sldMasterIdLst>
   <p:sldIdLst>
-    <p:sldId id="256" r:id="rId7"/>
-    <p:sldId id="257" r:id="rId8"/>
-    <p:sldId id="258" r:id="rId9"/>
-    <p:sldId id="259" r:id="rId10"/>
-    <p:sldId id="260" r:id="rId11"/>
-    <p:sldId id="261" r:id="rId12"/>
-    <p:sldId id="262" r:id="rId13"/>
-    <p:sldId id="263" r:id="rId14"/>
-    <p:sldId id="264" r:id="rId15"/>
-    <p:sldId id="265" r:id="rId16"/>
-    <p:sldId id="266" r:id="rId17"/>
-    <p:sldId id="267" r:id="rId18"/>
+    <p:sldId id="256" r:id="rId2"/>
+    <p:sldId id="257" r:id="rId3"/>
+    <p:sldId id="258" r:id="rId4"/>
+    <p:sldId id="259" r:id="rId5"/>
+    <p:sldId id="260" r:id="rId6"/>
+    <p:sldId id="261" r:id="rId7"/>
+    <p:sldId id="262" r:id="rId8"/>
+    <p:sldId id="263" r:id="rId9"/>
+    <p:sldId id="264" r:id="rId10"/>
+    <p:sldId id="265" r:id="rId11"/>
+    <p:sldId id="266" r:id="rId12"/>
+    <p:sldId id="267" r:id="rId13"/>
   </p:sldIdLst>
-  <p:sldSz cx="6858000" cy="12191695" type="screen4x3"/>
+  <p:sldSz cx="6858000" cy="12192000"/>
   <p:notesSz cx="6858000" cy="9144000"/>
   <p:defaultTextStyle>
     <a:defPPr>
@@ -115,6 +115,22 @@
       </a:defRPr>
     </a:lvl9pPr>
   </p:defaultTextStyle>
+  <p:extLst>
+    <p:ext uri="{EFAFB233-063F-42B5-8137-9DF3F51BA10A}">
+      <p15:sldGuideLst xmlns:p15="http://schemas.microsoft.com/office/powerpoint/2012/main">
+        <p15:guide id="1" orient="horz" pos="2160">
+          <p15:clr>
+            <a:srgbClr val="A4A3A4"/>
+          </p15:clr>
+        </p15:guide>
+        <p15:guide id="2" pos="2880">
+          <p15:clr>
+            <a:srgbClr val="A4A3A4"/>
+          </p15:clr>
+        </p15:guide>
+      </p15:sldGuideLst>
+    </p:ext>
+  </p:extLst>
 </p:presentation>
 </file>
 
@@ -156,10 +172,9 @@
           <a:lstStyle/>
           <a:p>
             <a:r>
-              <a:rPr lang="en-US" smtClean="0"/>
+              <a:rPr lang="en-US"/>
               <a:t>Click to edit Master title style</a:t>
             </a:r>
-            <a:endParaRPr lang="en-US"/>
           </a:p>
         </p:txBody>
       </p:sp>
@@ -275,10 +290,9 @@
           </a:lstStyle>
           <a:p>
             <a:r>
-              <a:rPr lang="en-US" smtClean="0"/>
+              <a:rPr lang="en-US"/>
               <a:t>Click to edit Master subtitle style</a:t>
             </a:r>
-            <a:endParaRPr lang="en-US"/>
           </a:p>
         </p:txBody>
       </p:sp>
@@ -299,7 +313,7 @@
           <a:p>
             <a:fld id="{5BCAD085-E8A6-8845-BD4E-CB4CCA059FC4}" type="datetimeFigureOut">
               <a:rPr lang="en-US" smtClean="0"/>
-              <a:t>1/27/13</a:t>
+              <a:t>6/24/2026</a:t>
             </a:fld>
             <a:endParaRPr lang="en-US"/>
           </a:p>
@@ -393,10 +407,9 @@
           <a:lstStyle/>
           <a:p>
             <a:r>
-              <a:rPr lang="en-US" smtClean="0"/>
+              <a:rPr lang="en-US"/>
               <a:t>Click to edit Master title style</a:t>
             </a:r>
-            <a:endParaRPr lang="en-US"/>
           </a:p>
         </p:txBody>
       </p:sp>
@@ -417,38 +430,37 @@
           <a:p>
             <a:pPr lvl="0"/>
             <a:r>
-              <a:rPr lang="en-US" smtClean="0"/>
+              <a:rPr lang="en-US"/>
               <a:t>Click to edit Master text styles</a:t>
             </a:r>
           </a:p>
           <a:p>
             <a:pPr lvl="1"/>
             <a:r>
-              <a:rPr lang="en-US" smtClean="0"/>
+              <a:rPr lang="en-US"/>
               <a:t>Second level</a:t>
             </a:r>
           </a:p>
           <a:p>
             <a:pPr lvl="2"/>
             <a:r>
-              <a:rPr lang="en-US" smtClean="0"/>
+              <a:rPr lang="en-US"/>
               <a:t>Third level</a:t>
             </a:r>
           </a:p>
           <a:p>
             <a:pPr lvl="3"/>
             <a:r>
-              <a:rPr lang="en-US" smtClean="0"/>
+              <a:rPr lang="en-US"/>
               <a:t>Fourth level</a:t>
             </a:r>
           </a:p>
           <a:p>
             <a:pPr lvl="4"/>
             <a:r>
-              <a:rPr lang="en-US" smtClean="0"/>
+              <a:rPr lang="en-US"/>
               <a:t>Fifth level</a:t>
             </a:r>
-            <a:endParaRPr lang="en-US"/>
           </a:p>
         </p:txBody>
       </p:sp>
@@ -469,7 +481,7 @@
           <a:p>
             <a:fld id="{5BCAD085-E8A6-8845-BD4E-CB4CCA059FC4}" type="datetimeFigureOut">
               <a:rPr lang="en-US" smtClean="0"/>
-              <a:t>1/27/13</a:t>
+              <a:t>6/24/2026</a:t>
             </a:fld>
             <a:endParaRPr lang="en-US"/>
           </a:p>
@@ -568,10 +580,9 @@
           <a:lstStyle/>
           <a:p>
             <a:r>
-              <a:rPr lang="en-US" smtClean="0"/>
+              <a:rPr lang="en-US"/>
               <a:t>Click to edit Master title style</a:t>
             </a:r>
-            <a:endParaRPr lang="en-US"/>
           </a:p>
         </p:txBody>
       </p:sp>
@@ -597,38 +608,37 @@
           <a:p>
             <a:pPr lvl="0"/>
             <a:r>
-              <a:rPr lang="en-US" smtClean="0"/>
+              <a:rPr lang="en-US"/>
               <a:t>Click to edit Master text styles</a:t>
             </a:r>
           </a:p>
           <a:p>
             <a:pPr lvl="1"/>
             <a:r>
-              <a:rPr lang="en-US" smtClean="0"/>
+              <a:rPr lang="en-US"/>
               <a:t>Second level</a:t>
             </a:r>
           </a:p>
           <a:p>
             <a:pPr lvl="2"/>
             <a:r>
-              <a:rPr lang="en-US" smtClean="0"/>
+              <a:rPr lang="en-US"/>
               <a:t>Third level</a:t>
             </a:r>
           </a:p>
           <a:p>
             <a:pPr lvl="3"/>
             <a:r>
-              <a:rPr lang="en-US" smtClean="0"/>
+              <a:rPr lang="en-US"/>
               <a:t>Fourth level</a:t>
             </a:r>
           </a:p>
           <a:p>
             <a:pPr lvl="4"/>
             <a:r>
-              <a:rPr lang="en-US" smtClean="0"/>
+              <a:rPr lang="en-US"/>
               <a:t>Fifth level</a:t>
             </a:r>
-            <a:endParaRPr lang="en-US"/>
           </a:p>
         </p:txBody>
       </p:sp>
@@ -649,7 +659,7 @@
           <a:p>
             <a:fld id="{5BCAD085-E8A6-8845-BD4E-CB4CCA059FC4}" type="datetimeFigureOut">
               <a:rPr lang="en-US" smtClean="0"/>
-              <a:t>1/27/13</a:t>
+              <a:t>6/24/2026</a:t>
             </a:fld>
             <a:endParaRPr lang="en-US"/>
           </a:p>
@@ -743,10 +753,9 @@
           <a:lstStyle/>
           <a:p>
             <a:r>
-              <a:rPr lang="en-US" smtClean="0"/>
+              <a:rPr lang="en-US"/>
               <a:t>Click to edit Master title style</a:t>
             </a:r>
-            <a:endParaRPr lang="en-US"/>
           </a:p>
         </p:txBody>
       </p:sp>
@@ -767,38 +776,37 @@
           <a:p>
             <a:pPr lvl="0"/>
             <a:r>
-              <a:rPr lang="en-US" smtClean="0"/>
+              <a:rPr lang="en-US"/>
               <a:t>Click to edit Master text styles</a:t>
             </a:r>
           </a:p>
           <a:p>
             <a:pPr lvl="1"/>
             <a:r>
-              <a:rPr lang="en-US" smtClean="0"/>
+              <a:rPr lang="en-US"/>
               <a:t>Second level</a:t>
             </a:r>
           </a:p>
           <a:p>
             <a:pPr lvl="2"/>
             <a:r>
-              <a:rPr lang="en-US" smtClean="0"/>
+              <a:rPr lang="en-US"/>
               <a:t>Third level</a:t>
             </a:r>
           </a:p>
           <a:p>
             <a:pPr lvl="3"/>
             <a:r>
-              <a:rPr lang="en-US" smtClean="0"/>
+              <a:rPr lang="en-US"/>
               <a:t>Fourth level</a:t>
             </a:r>
           </a:p>
           <a:p>
             <a:pPr lvl="4"/>
             <a:r>
-              <a:rPr lang="en-US" smtClean="0"/>
+              <a:rPr lang="en-US"/>
               <a:t>Fifth level</a:t>
             </a:r>
-            <a:endParaRPr lang="en-US"/>
           </a:p>
         </p:txBody>
       </p:sp>
@@ -819,7 +827,7 @@
           <a:p>
             <a:fld id="{5BCAD085-E8A6-8845-BD4E-CB4CCA059FC4}" type="datetimeFigureOut">
               <a:rPr lang="en-US" smtClean="0"/>
-              <a:t>1/27/13</a:t>
+              <a:t>6/24/2026</a:t>
             </a:fld>
             <a:endParaRPr lang="en-US"/>
           </a:p>
@@ -922,10 +930,9 @@
           </a:lstStyle>
           <a:p>
             <a:r>
-              <a:rPr lang="en-US" smtClean="0"/>
+              <a:rPr lang="en-US"/>
               <a:t>Click to edit Master title style</a:t>
             </a:r>
-            <a:endParaRPr lang="en-US"/>
           </a:p>
         </p:txBody>
       </p:sp>
@@ -1042,7 +1049,7 @@
           <a:p>
             <a:pPr lvl="0"/>
             <a:r>
-              <a:rPr lang="en-US" smtClean="0"/>
+              <a:rPr lang="en-US"/>
               <a:t>Click to edit Master text styles</a:t>
             </a:r>
           </a:p>
@@ -1065,7 +1072,7 @@
           <a:p>
             <a:fld id="{5BCAD085-E8A6-8845-BD4E-CB4CCA059FC4}" type="datetimeFigureOut">
               <a:rPr lang="en-US" smtClean="0"/>
-              <a:t>1/27/13</a:t>
+              <a:t>6/24/2026</a:t>
             </a:fld>
             <a:endParaRPr lang="en-US"/>
           </a:p>
@@ -1159,10 +1166,9 @@
           <a:lstStyle/>
           <a:p>
             <a:r>
-              <a:rPr lang="en-US" smtClean="0"/>
+              <a:rPr lang="en-US"/>
               <a:t>Click to edit Master title style</a:t>
             </a:r>
-            <a:endParaRPr lang="en-US"/>
           </a:p>
         </p:txBody>
       </p:sp>
@@ -1216,38 +1222,37 @@
           <a:p>
             <a:pPr lvl="0"/>
             <a:r>
-              <a:rPr lang="en-US" smtClean="0"/>
+              <a:rPr lang="en-US"/>
               <a:t>Click to edit Master text styles</a:t>
             </a:r>
           </a:p>
           <a:p>
             <a:pPr lvl="1"/>
             <a:r>
-              <a:rPr lang="en-US" smtClean="0"/>
+              <a:rPr lang="en-US"/>
               <a:t>Second level</a:t>
             </a:r>
           </a:p>
           <a:p>
             <a:pPr lvl="2"/>
             <a:r>
-              <a:rPr lang="en-US" smtClean="0"/>
+              <a:rPr lang="en-US"/>
               <a:t>Third level</a:t>
             </a:r>
           </a:p>
           <a:p>
             <a:pPr lvl="3"/>
             <a:r>
-              <a:rPr lang="en-US" smtClean="0"/>
+              <a:rPr lang="en-US"/>
               <a:t>Fourth level</a:t>
             </a:r>
           </a:p>
           <a:p>
             <a:pPr lvl="4"/>
             <a:r>
-              <a:rPr lang="en-US" smtClean="0"/>
+              <a:rPr lang="en-US"/>
               <a:t>Fifth level</a:t>
             </a:r>
-            <a:endParaRPr lang="en-US"/>
           </a:p>
         </p:txBody>
       </p:sp>
@@ -1301,38 +1306,37 @@
           <a:p>
             <a:pPr lvl="0"/>
             <a:r>
-              <a:rPr lang="en-US" smtClean="0"/>
+              <a:rPr lang="en-US"/>
               <a:t>Click to edit Master text styles</a:t>
             </a:r>
           </a:p>
           <a:p>
             <a:pPr lvl="1"/>
             <a:r>
-              <a:rPr lang="en-US" smtClean="0"/>
+              <a:rPr lang="en-US"/>
               <a:t>Second level</a:t>
             </a:r>
           </a:p>
           <a:p>
             <a:pPr lvl="2"/>
             <a:r>
-              <a:rPr lang="en-US" smtClean="0"/>
+              <a:rPr lang="en-US"/>
               <a:t>Third level</a:t>
             </a:r>
           </a:p>
           <a:p>
             <a:pPr lvl="3"/>
             <a:r>
-              <a:rPr lang="en-US" smtClean="0"/>
+              <a:rPr lang="en-US"/>
               <a:t>Fourth level</a:t>
             </a:r>
           </a:p>
           <a:p>
             <a:pPr lvl="4"/>
             <a:r>
-              <a:rPr lang="en-US" smtClean="0"/>
+              <a:rPr lang="en-US"/>
               <a:t>Fifth level</a:t>
             </a:r>
-            <a:endParaRPr lang="en-US"/>
           </a:p>
         </p:txBody>
       </p:sp>
@@ -1353,7 +1357,7 @@
           <a:p>
             <a:fld id="{5BCAD085-E8A6-8845-BD4E-CB4CCA059FC4}" type="datetimeFigureOut">
               <a:rPr lang="en-US" smtClean="0"/>
-              <a:t>1/27/13</a:t>
+              <a:t>6/24/2026</a:t>
             </a:fld>
             <a:endParaRPr lang="en-US"/>
           </a:p>
@@ -1451,10 +1455,9 @@
           </a:lstStyle>
           <a:p>
             <a:r>
-              <a:rPr lang="en-US" smtClean="0"/>
+              <a:rPr lang="en-US"/>
               <a:t>Click to edit Master title style</a:t>
             </a:r>
-            <a:endParaRPr lang="en-US"/>
           </a:p>
         </p:txBody>
       </p:sp>
@@ -1517,7 +1520,7 @@
           <a:p>
             <a:pPr lvl="0"/>
             <a:r>
-              <a:rPr lang="en-US" smtClean="0"/>
+              <a:rPr lang="en-US"/>
               <a:t>Click to edit Master text styles</a:t>
             </a:r>
           </a:p>
@@ -1573,38 +1576,37 @@
           <a:p>
             <a:pPr lvl="0"/>
             <a:r>
-              <a:rPr lang="en-US" smtClean="0"/>
+              <a:rPr lang="en-US"/>
               <a:t>Click to edit Master text styles</a:t>
             </a:r>
           </a:p>
           <a:p>
             <a:pPr lvl="1"/>
             <a:r>
-              <a:rPr lang="en-US" smtClean="0"/>
+              <a:rPr lang="en-US"/>
               <a:t>Second level</a:t>
             </a:r>
           </a:p>
           <a:p>
             <a:pPr lvl="2"/>
             <a:r>
-              <a:rPr lang="en-US" smtClean="0"/>
+              <a:rPr lang="en-US"/>
               <a:t>Third level</a:t>
             </a:r>
           </a:p>
           <a:p>
             <a:pPr lvl="3"/>
             <a:r>
-              <a:rPr lang="en-US" smtClean="0"/>
+              <a:rPr lang="en-US"/>
               <a:t>Fourth level</a:t>
             </a:r>
           </a:p>
           <a:p>
             <a:pPr lvl="4"/>
             <a:r>
-              <a:rPr lang="en-US" smtClean="0"/>
+              <a:rPr lang="en-US"/>
               <a:t>Fifth level</a:t>
             </a:r>
-            <a:endParaRPr lang="en-US"/>
           </a:p>
         </p:txBody>
       </p:sp>
@@ -1667,7 +1669,7 @@
           <a:p>
             <a:pPr lvl="0"/>
             <a:r>
-              <a:rPr lang="en-US" smtClean="0"/>
+              <a:rPr lang="en-US"/>
               <a:t>Click to edit Master text styles</a:t>
             </a:r>
           </a:p>
@@ -1723,38 +1725,37 @@
           <a:p>
             <a:pPr lvl="0"/>
             <a:r>
-              <a:rPr lang="en-US" smtClean="0"/>
+              <a:rPr lang="en-US"/>
               <a:t>Click to edit Master text styles</a:t>
             </a:r>
           </a:p>
           <a:p>
             <a:pPr lvl="1"/>
             <a:r>
-              <a:rPr lang="en-US" smtClean="0"/>
+              <a:rPr lang="en-US"/>
               <a:t>Second level</a:t>
             </a:r>
           </a:p>
           <a:p>
             <a:pPr lvl="2"/>
             <a:r>
-              <a:rPr lang="en-US" smtClean="0"/>
+              <a:rPr lang="en-US"/>
               <a:t>Third level</a:t>
             </a:r>
           </a:p>
           <a:p>
             <a:pPr lvl="3"/>
             <a:r>
-              <a:rPr lang="en-US" smtClean="0"/>
+              <a:rPr lang="en-US"/>
               <a:t>Fourth level</a:t>
             </a:r>
           </a:p>
           <a:p>
             <a:pPr lvl="4"/>
             <a:r>
-              <a:rPr lang="en-US" smtClean="0"/>
+              <a:rPr lang="en-US"/>
               <a:t>Fifth level</a:t>
             </a:r>
-            <a:endParaRPr lang="en-US"/>
           </a:p>
         </p:txBody>
       </p:sp>
@@ -1775,7 +1776,7 @@
           <a:p>
             <a:fld id="{5BCAD085-E8A6-8845-BD4E-CB4CCA059FC4}" type="datetimeFigureOut">
               <a:rPr lang="en-US" smtClean="0"/>
-              <a:t>1/27/13</a:t>
+              <a:t>6/24/2026</a:t>
             </a:fld>
             <a:endParaRPr lang="en-US"/>
           </a:p>
@@ -1869,10 +1870,9 @@
           <a:lstStyle/>
           <a:p>
             <a:r>
-              <a:rPr lang="en-US" smtClean="0"/>
+              <a:rPr lang="en-US"/>
               <a:t>Click to edit Master title style</a:t>
             </a:r>
-            <a:endParaRPr lang="en-US"/>
           </a:p>
         </p:txBody>
       </p:sp>
@@ -1893,7 +1893,7 @@
           <a:p>
             <a:fld id="{5BCAD085-E8A6-8845-BD4E-CB4CCA059FC4}" type="datetimeFigureOut">
               <a:rPr lang="en-US" smtClean="0"/>
-              <a:t>1/27/13</a:t>
+              <a:t>6/24/2026</a:t>
             </a:fld>
             <a:endParaRPr lang="en-US"/>
           </a:p>
@@ -1988,7 +1988,7 @@
           <a:p>
             <a:fld id="{5BCAD085-E8A6-8845-BD4E-CB4CCA059FC4}" type="datetimeFigureOut">
               <a:rPr lang="en-US" smtClean="0"/>
-              <a:t>1/27/13</a:t>
+              <a:t>6/24/2026</a:t>
             </a:fld>
             <a:endParaRPr lang="en-US"/>
           </a:p>
@@ -2091,10 +2091,9 @@
           </a:lstStyle>
           <a:p>
             <a:r>
-              <a:rPr lang="en-US" smtClean="0"/>
+              <a:rPr lang="en-US"/>
               <a:t>Click to edit Master title style</a:t>
             </a:r>
-            <a:endParaRPr lang="en-US"/>
           </a:p>
         </p:txBody>
       </p:sp>
@@ -2148,38 +2147,37 @@
           <a:p>
             <a:pPr lvl="0"/>
             <a:r>
-              <a:rPr lang="en-US" smtClean="0"/>
+              <a:rPr lang="en-US"/>
               <a:t>Click to edit Master text styles</a:t>
             </a:r>
           </a:p>
           <a:p>
             <a:pPr lvl="1"/>
             <a:r>
-              <a:rPr lang="en-US" smtClean="0"/>
+              <a:rPr lang="en-US"/>
               <a:t>Second level</a:t>
             </a:r>
           </a:p>
           <a:p>
             <a:pPr lvl="2"/>
             <a:r>
-              <a:rPr lang="en-US" smtClean="0"/>
+              <a:rPr lang="en-US"/>
               <a:t>Third level</a:t>
             </a:r>
           </a:p>
           <a:p>
             <a:pPr lvl="3"/>
             <a:r>
-              <a:rPr lang="en-US" smtClean="0"/>
+              <a:rPr lang="en-US"/>
               <a:t>Fourth level</a:t>
             </a:r>
           </a:p>
           <a:p>
             <a:pPr lvl="4"/>
             <a:r>
-              <a:rPr lang="en-US" smtClean="0"/>
+              <a:rPr lang="en-US"/>
               <a:t>Fifth level</a:t>
             </a:r>
-            <a:endParaRPr lang="en-US"/>
           </a:p>
         </p:txBody>
       </p:sp>
@@ -2242,7 +2240,7 @@
           <a:p>
             <a:pPr lvl="0"/>
             <a:r>
-              <a:rPr lang="en-US" smtClean="0"/>
+              <a:rPr lang="en-US"/>
               <a:t>Click to edit Master text styles</a:t>
             </a:r>
           </a:p>
@@ -2265,7 +2263,7 @@
           <a:p>
             <a:fld id="{5BCAD085-E8A6-8845-BD4E-CB4CCA059FC4}" type="datetimeFigureOut">
               <a:rPr lang="en-US" smtClean="0"/>
-              <a:t>1/27/13</a:t>
+              <a:t>6/24/2026</a:t>
             </a:fld>
             <a:endParaRPr lang="en-US"/>
           </a:p>
@@ -2368,10 +2366,9 @@
           </a:lstStyle>
           <a:p>
             <a:r>
-              <a:rPr lang="en-US" smtClean="0"/>
+              <a:rPr lang="en-US"/>
               <a:t>Click to edit Master title style</a:t>
             </a:r>
-            <a:endParaRPr lang="en-US"/>
           </a:p>
         </p:txBody>
       </p:sp>
@@ -2495,7 +2492,7 @@
           <a:p>
             <a:pPr lvl="0"/>
             <a:r>
-              <a:rPr lang="en-US" smtClean="0"/>
+              <a:rPr lang="en-US"/>
               <a:t>Click to edit Master text styles</a:t>
             </a:r>
           </a:p>
@@ -2518,7 +2515,7 @@
           <a:p>
             <a:fld id="{5BCAD085-E8A6-8845-BD4E-CB4CCA059FC4}" type="datetimeFigureOut">
               <a:rPr lang="en-US" smtClean="0"/>
-              <a:t>1/27/13</a:t>
+              <a:t>6/24/2026</a:t>
             </a:fld>
             <a:endParaRPr lang="en-US"/>
           </a:p>
@@ -2627,10 +2624,9 @@
           <a:lstStyle/>
           <a:p>
             <a:r>
-              <a:rPr lang="en-US" smtClean="0"/>
+              <a:rPr lang="en-US"/>
               <a:t>Click to edit Master title style</a:t>
             </a:r>
-            <a:endParaRPr lang="en-US"/>
           </a:p>
         </p:txBody>
       </p:sp>
@@ -2661,38 +2657,37 @@
           <a:p>
             <a:pPr lvl="0"/>
             <a:r>
-              <a:rPr lang="en-US" smtClean="0"/>
+              <a:rPr lang="en-US"/>
               <a:t>Click to edit Master text styles</a:t>
             </a:r>
           </a:p>
           <a:p>
             <a:pPr lvl="1"/>
             <a:r>
-              <a:rPr lang="en-US" smtClean="0"/>
+              <a:rPr lang="en-US"/>
               <a:t>Second level</a:t>
             </a:r>
           </a:p>
           <a:p>
             <a:pPr lvl="2"/>
             <a:r>
-              <a:rPr lang="en-US" smtClean="0"/>
+              <a:rPr lang="en-US"/>
               <a:t>Third level</a:t>
             </a:r>
           </a:p>
           <a:p>
             <a:pPr lvl="3"/>
             <a:r>
-              <a:rPr lang="en-US" smtClean="0"/>
+              <a:rPr lang="en-US"/>
               <a:t>Fourth level</a:t>
             </a:r>
           </a:p>
           <a:p>
             <a:pPr lvl="4"/>
             <a:r>
-              <a:rPr lang="en-US" smtClean="0"/>
+              <a:rPr lang="en-US"/>
               <a:t>Fifth level</a:t>
             </a:r>
-            <a:endParaRPr lang="en-US"/>
           </a:p>
         </p:txBody>
       </p:sp>
@@ -2731,7 +2726,7 @@
           <a:p>
             <a:fld id="{5BCAD085-E8A6-8845-BD4E-CB4CCA059FC4}" type="datetimeFigureOut">
               <a:rPr lang="en-US" smtClean="0"/>
-              <a:t>1/27/13</a:t>
+              <a:t>6/24/2026</a:t>
             </a:fld>
             <a:endParaRPr lang="en-US"/>
           </a:p>
@@ -3090,7 +3085,7 @@
 </file>
 
 <file path=ppt/slides/slide1.xml><?xml version="1.0" encoding="utf-8"?>
-<p:sld xmlns:a="http://schemas.openxmlformats.org/drawingml/2006/main" xmlns:p="http://schemas.openxmlformats.org/presentationml/2006/main" xmlns:r="http://schemas.openxmlformats.org/officeDocument/2006/relationships">
+<p:sld xmlns:a="http://schemas.openxmlformats.org/drawingml/2006/main" xmlns:r="http://schemas.openxmlformats.org/officeDocument/2006/relationships" xmlns:p="http://schemas.openxmlformats.org/presentationml/2006/main">
   <p:cSld>
     <p:spTree>
       <p:nvGrpSpPr>
@@ -3098,7 +3093,14 @@
         <p:cNvGrpSpPr/>
         <p:nvPr/>
       </p:nvGrpSpPr>
-      <p:grpSpPr/>
+      <p:grpSpPr>
+        <a:xfrm>
+          <a:off x="0" y="0"/>
+          <a:ext cx="0" cy="0"/>
+          <a:chOff x="0" y="0"/>
+          <a:chExt cx="0" cy="0"/>
+        </a:xfrm>
+      </p:grpSpPr>
       <p:sp>
         <p:nvSpPr>
           <p:cNvPr id="2" name="Rectangle 1"/>
@@ -3140,6 +3142,7 @@
           <a:lstStyle/>
           <a:p>
             <a:pPr algn="ctr"/>
+            <a:endParaRPr/>
           </a:p>
         </p:txBody>
       </p:sp>
@@ -3184,6 +3187,7 @@
           <a:lstStyle/>
           <a:p>
             <a:pPr algn="ctr"/>
+            <a:endParaRPr/>
           </a:p>
         </p:txBody>
       </p:sp>
@@ -3228,6 +3232,7 @@
           <a:lstStyle/>
           <a:p>
             <a:pPr algn="ctr"/>
+            <a:endParaRPr/>
           </a:p>
         </p:txBody>
       </p:sp>
@@ -3272,6 +3277,7 @@
           <a:lstStyle/>
           <a:p>
             <a:pPr algn="ctr"/>
+            <a:endParaRPr/>
           </a:p>
         </p:txBody>
       </p:sp>
@@ -3292,12 +3298,12 @@
           <a:noFill/>
         </p:spPr>
         <p:txBody>
-          <a:bodyPr wrap="square" anchor="ctr" lIns="25400" rIns="25400" tIns="12700" bIns="12700">
+          <a:bodyPr wrap="square" lIns="25400" tIns="12700" rIns="25400" bIns="12700" anchor="ctr">
             <a:spAutoFit/>
           </a:bodyPr>
           <a:lstStyle/>
           <a:p>
-            <a:pPr algn="ctr" marL="0" indent="0">
+            <a:pPr marL="0" indent="0" algn="ctr">
               <a:buNone/>
             </a:pPr>
             <a:r>
@@ -3329,12 +3335,12 @@
           <a:noFill/>
         </p:spPr>
         <p:txBody>
-          <a:bodyPr wrap="square" anchor="t" lIns="25400" rIns="25400" tIns="12700" bIns="12700">
+          <a:bodyPr wrap="square" lIns="25400" tIns="12700" rIns="25400" bIns="12700" anchor="t">
             <a:spAutoFit/>
           </a:bodyPr>
           <a:lstStyle/>
           <a:p>
-            <a:pPr algn="l" marL="0" indent="0">
+            <a:pPr marL="0" indent="0" algn="l">
               <a:buNone/>
             </a:pPr>
             <a:r>
@@ -3366,12 +3372,12 @@
           <a:noFill/>
         </p:spPr>
         <p:txBody>
-          <a:bodyPr wrap="square" anchor="t" lIns="25400" rIns="25400" tIns="12700" bIns="12700">
+          <a:bodyPr wrap="square" lIns="25400" tIns="12700" rIns="25400" bIns="12700" anchor="t">
             <a:spAutoFit/>
           </a:bodyPr>
           <a:lstStyle/>
           <a:p>
-            <a:pPr algn="l" marL="0" indent="0">
+            <a:pPr marL="0" indent="0" algn="l">
               <a:buNone/>
             </a:pPr>
             <a:r>
@@ -3403,12 +3409,12 @@
           <a:noFill/>
         </p:spPr>
         <p:txBody>
-          <a:bodyPr wrap="square" anchor="t" lIns="25400" rIns="25400" tIns="12700" bIns="12700">
+          <a:bodyPr wrap="square" lIns="25400" tIns="12700" rIns="25400" bIns="12700" anchor="t">
             <a:spAutoFit/>
           </a:bodyPr>
           <a:lstStyle/>
           <a:p>
-            <a:pPr algn="l" marL="0" indent="0">
+            <a:pPr marL="0" indent="0" algn="l">
               <a:spcAft>
                 <a:spcPts val="400"/>
               </a:spcAft>
@@ -3425,7 +3431,7 @@
             </a:r>
           </a:p>
           <a:p>
-            <a:pPr algn="l" marL="0" indent="0">
+            <a:pPr marL="0" indent="0" algn="l">
               <a:spcAft>
                 <a:spcPts val="400"/>
               </a:spcAft>
@@ -3486,6 +3492,7 @@
           <a:lstStyle/>
           <a:p>
             <a:pPr algn="ctr"/>
+            <a:endParaRPr/>
           </a:p>
         </p:txBody>
       </p:sp>
@@ -3506,12 +3513,12 @@
           <a:noFill/>
         </p:spPr>
         <p:txBody>
-          <a:bodyPr wrap="square" anchor="ctr" lIns="25400" rIns="25400" tIns="12700" bIns="12700">
+          <a:bodyPr wrap="square" lIns="25400" tIns="12700" rIns="25400" bIns="12700" anchor="ctr">
             <a:spAutoFit/>
           </a:bodyPr>
           <a:lstStyle/>
           <a:p>
-            <a:pPr algn="l" marL="0" indent="0">
+            <a:pPr marL="0" indent="0" algn="l">
               <a:spcAft>
                 <a:spcPts val="500"/>
               </a:spcAft>
@@ -3528,7 +3535,7 @@
             </a:r>
           </a:p>
           <a:p>
-            <a:pPr algn="l" marL="0" indent="0">
+            <a:pPr marL="0" indent="0" algn="l">
               <a:spcAft>
                 <a:spcPts val="500"/>
               </a:spcAft>
@@ -3545,7 +3552,7 @@
             </a:r>
           </a:p>
           <a:p>
-            <a:pPr algn="l" marL="0" indent="0">
+            <a:pPr marL="0" indent="0" algn="l">
               <a:spcAft>
                 <a:spcPts val="500"/>
               </a:spcAft>
@@ -3580,12 +3587,12 @@
           <a:noFill/>
         </p:spPr>
         <p:txBody>
-          <a:bodyPr wrap="square" anchor="t" lIns="25400" rIns="25400" tIns="12700" bIns="12700">
+          <a:bodyPr wrap="square" lIns="25400" tIns="12700" rIns="25400" bIns="12700" anchor="t">
             <a:spAutoFit/>
           </a:bodyPr>
           <a:lstStyle/>
           <a:p>
-            <a:pPr algn="l" marL="0" indent="0">
+            <a:pPr marL="0" indent="0" algn="l">
               <a:buNone/>
             </a:pPr>
             <a:r>
@@ -3609,7 +3616,7 @@
 </file>
 
 <file path=ppt/slides/slide10.xml><?xml version="1.0" encoding="utf-8"?>
-<p:sld xmlns:a="http://schemas.openxmlformats.org/drawingml/2006/main" xmlns:p="http://schemas.openxmlformats.org/presentationml/2006/main" xmlns:r="http://schemas.openxmlformats.org/officeDocument/2006/relationships">
+<p:sld xmlns:a="http://schemas.openxmlformats.org/drawingml/2006/main" xmlns:r="http://schemas.openxmlformats.org/officeDocument/2006/relationships" xmlns:p="http://schemas.openxmlformats.org/presentationml/2006/main">
   <p:cSld>
     <p:spTree>
       <p:nvGrpSpPr>
@@ -3617,7 +3624,14 @@
         <p:cNvGrpSpPr/>
         <p:nvPr/>
       </p:nvGrpSpPr>
-      <p:grpSpPr/>
+      <p:grpSpPr>
+        <a:xfrm>
+          <a:off x="0" y="0"/>
+          <a:ext cx="0" cy="0"/>
+          <a:chOff x="0" y="0"/>
+          <a:chExt cx="0" cy="0"/>
+        </a:xfrm>
+      </p:grpSpPr>
       <p:sp>
         <p:nvSpPr>
           <p:cNvPr id="2" name="Rectangle 1"/>
@@ -3659,6 +3673,7 @@
           <a:lstStyle/>
           <a:p>
             <a:pPr algn="ctr"/>
+            <a:endParaRPr/>
           </a:p>
         </p:txBody>
       </p:sp>
@@ -3703,6 +3718,7 @@
           <a:lstStyle/>
           <a:p>
             <a:pPr algn="ctr"/>
+            <a:endParaRPr/>
           </a:p>
         </p:txBody>
       </p:sp>
@@ -3747,6 +3763,7 @@
           <a:lstStyle/>
           <a:p>
             <a:pPr algn="ctr"/>
+            <a:endParaRPr/>
           </a:p>
         </p:txBody>
       </p:sp>
@@ -3791,6 +3808,7 @@
           <a:lstStyle/>
           <a:p>
             <a:pPr algn="ctr"/>
+            <a:endParaRPr/>
           </a:p>
         </p:txBody>
       </p:sp>
@@ -3837,6 +3855,7 @@
           <a:lstStyle/>
           <a:p>
             <a:pPr algn="ctr"/>
+            <a:endParaRPr/>
           </a:p>
         </p:txBody>
       </p:sp>
@@ -3857,12 +3876,12 @@
           <a:noFill/>
         </p:spPr>
         <p:txBody>
-          <a:bodyPr wrap="square" anchor="ctr" lIns="25400" rIns="25400" tIns="12700" bIns="12700">
+          <a:bodyPr wrap="square" lIns="25400" tIns="12700" rIns="25400" bIns="12700" anchor="ctr">
             <a:spAutoFit/>
           </a:bodyPr>
           <a:lstStyle/>
           <a:p>
-            <a:pPr algn="ctr" marL="0" indent="0">
+            <a:pPr marL="0" indent="0" algn="ctr">
               <a:buNone/>
             </a:pPr>
             <a:r>
@@ -3894,12 +3913,12 @@
           <a:noFill/>
         </p:spPr>
         <p:txBody>
-          <a:bodyPr wrap="square" anchor="ctr" lIns="25400" rIns="25400" tIns="12700" bIns="12700">
+          <a:bodyPr wrap="square" lIns="25400" tIns="12700" rIns="25400" bIns="12700" anchor="ctr">
             <a:spAutoFit/>
           </a:bodyPr>
           <a:lstStyle/>
           <a:p>
-            <a:pPr algn="l" marL="0" indent="0">
+            <a:pPr marL="0" indent="0" algn="l">
               <a:buNone/>
             </a:pPr>
             <a:r>
@@ -3931,12 +3950,12 @@
           <a:noFill/>
         </p:spPr>
         <p:txBody>
-          <a:bodyPr wrap="square" anchor="ctr" lIns="25400" rIns="25400" tIns="12700" bIns="12700">
+          <a:bodyPr wrap="square" lIns="25400" tIns="12700" rIns="25400" bIns="12700" anchor="ctr">
             <a:spAutoFit/>
           </a:bodyPr>
           <a:lstStyle/>
           <a:p>
-            <a:pPr algn="l" marL="0" indent="0">
+            <a:pPr marL="0" indent="0" algn="l">
               <a:buNone/>
             </a:pPr>
             <a:r>
@@ -3994,6 +4013,7 @@
           <a:lstStyle/>
           <a:p>
             <a:pPr algn="ctr"/>
+            <a:endParaRPr/>
           </a:p>
         </p:txBody>
       </p:sp>
@@ -4014,12 +4034,12 @@
           <a:noFill/>
         </p:spPr>
         <p:txBody>
-          <a:bodyPr wrap="square" anchor="ctr" lIns="25400" rIns="25400" tIns="12700" bIns="12700">
+          <a:bodyPr wrap="square" lIns="25400" tIns="12700" rIns="25400" bIns="12700" anchor="ctr">
             <a:spAutoFit/>
           </a:bodyPr>
           <a:lstStyle/>
           <a:p>
-            <a:pPr algn="ctr" marL="0" indent="0">
+            <a:pPr marL="0" indent="0" algn="ctr">
               <a:buNone/>
             </a:pPr>
             <a:r>
@@ -4051,12 +4071,12 @@
           <a:noFill/>
         </p:spPr>
         <p:txBody>
-          <a:bodyPr wrap="square" anchor="ctr" lIns="25400" rIns="25400" tIns="12700" bIns="12700">
+          <a:bodyPr wrap="square" lIns="25400" tIns="12700" rIns="25400" bIns="12700" anchor="ctr">
             <a:spAutoFit/>
           </a:bodyPr>
           <a:lstStyle/>
           <a:p>
-            <a:pPr algn="ctr" marL="0" indent="0">
+            <a:pPr marL="0" indent="0" algn="ctr">
               <a:buNone/>
             </a:pPr>
             <a:r>
@@ -4088,12 +4108,12 @@
           <a:noFill/>
         </p:spPr>
         <p:txBody>
-          <a:bodyPr wrap="square" anchor="ctr" lIns="25400" rIns="25400" tIns="12700" bIns="12700">
+          <a:bodyPr wrap="square" lIns="25400" tIns="12700" rIns="25400" bIns="12700" anchor="ctr">
             <a:spAutoFit/>
           </a:bodyPr>
           <a:lstStyle/>
           <a:p>
-            <a:pPr algn="ctr" marL="0" indent="0">
+            <a:pPr marL="0" indent="0" algn="ctr">
               <a:buNone/>
             </a:pPr>
             <a:r>
@@ -4153,6 +4173,7 @@
           <a:lstStyle/>
           <a:p>
             <a:pPr algn="ctr"/>
+            <a:endParaRPr/>
           </a:p>
         </p:txBody>
       </p:sp>
@@ -4197,6 +4218,7 @@
           <a:lstStyle/>
           <a:p>
             <a:pPr algn="ctr"/>
+            <a:endParaRPr/>
           </a:p>
         </p:txBody>
       </p:sp>
@@ -4217,12 +4239,12 @@
           <a:noFill/>
         </p:spPr>
         <p:txBody>
-          <a:bodyPr wrap="square" anchor="ctr" lIns="25400" rIns="25400" tIns="12700" bIns="12700">
+          <a:bodyPr wrap="square" lIns="25400" tIns="12700" rIns="25400" bIns="12700" anchor="ctr">
             <a:spAutoFit/>
           </a:bodyPr>
           <a:lstStyle/>
           <a:p>
-            <a:pPr algn="ctr" marL="0" indent="0">
+            <a:pPr marL="0" indent="0" algn="ctr">
               <a:buNone/>
             </a:pPr>
             <a:r>
@@ -4254,12 +4276,12 @@
           <a:noFill/>
         </p:spPr>
         <p:txBody>
-          <a:bodyPr wrap="square" anchor="ctr" lIns="25400" rIns="25400" tIns="12700" bIns="12700">
+          <a:bodyPr wrap="square" lIns="25400" tIns="12700" rIns="25400" bIns="12700" anchor="ctr">
             <a:spAutoFit/>
           </a:bodyPr>
           <a:lstStyle/>
           <a:p>
-            <a:pPr algn="l" marL="0" indent="0">
+            <a:pPr marL="0" indent="0" algn="l">
               <a:spcAft>
                 <a:spcPts val="500"/>
               </a:spcAft>
@@ -4276,7 +4298,7 @@
             </a:r>
           </a:p>
           <a:p>
-            <a:pPr algn="l" marL="0" indent="0">
+            <a:pPr marL="0" indent="0" algn="l">
               <a:spcAft>
                 <a:spcPts val="500"/>
               </a:spcAft>
@@ -4339,6 +4361,7 @@
           <a:lstStyle/>
           <a:p>
             <a:pPr algn="ctr"/>
+            <a:endParaRPr/>
           </a:p>
         </p:txBody>
       </p:sp>
@@ -4383,6 +4406,7 @@
           <a:lstStyle/>
           <a:p>
             <a:pPr algn="ctr"/>
+            <a:endParaRPr/>
           </a:p>
         </p:txBody>
       </p:sp>
@@ -4403,12 +4427,12 @@
           <a:noFill/>
         </p:spPr>
         <p:txBody>
-          <a:bodyPr wrap="square" anchor="ctr" lIns="25400" rIns="25400" tIns="12700" bIns="12700">
+          <a:bodyPr wrap="square" lIns="25400" tIns="12700" rIns="25400" bIns="12700" anchor="ctr">
             <a:spAutoFit/>
           </a:bodyPr>
           <a:lstStyle/>
           <a:p>
-            <a:pPr algn="ctr" marL="0" indent="0">
+            <a:pPr marL="0" indent="0" algn="ctr">
               <a:buNone/>
             </a:pPr>
             <a:r>
@@ -4440,12 +4464,12 @@
           <a:noFill/>
         </p:spPr>
         <p:txBody>
-          <a:bodyPr wrap="square" anchor="ctr" lIns="25400" rIns="25400" tIns="12700" bIns="12700">
+          <a:bodyPr wrap="square" lIns="25400" tIns="12700" rIns="25400" bIns="12700" anchor="ctr">
             <a:spAutoFit/>
           </a:bodyPr>
           <a:lstStyle/>
           <a:p>
-            <a:pPr algn="l" marL="0" indent="0">
+            <a:pPr marL="0" indent="0" algn="l">
               <a:spcAft>
                 <a:spcPts val="500"/>
               </a:spcAft>
@@ -4462,7 +4486,7 @@
             </a:r>
           </a:p>
           <a:p>
-            <a:pPr algn="l" marL="0" indent="0">
+            <a:pPr marL="0" indent="0" algn="l">
               <a:spcAft>
                 <a:spcPts val="500"/>
               </a:spcAft>
@@ -4497,12 +4521,12 @@
           <a:noFill/>
         </p:spPr>
         <p:txBody>
-          <a:bodyPr wrap="square" anchor="ctr" lIns="25400" rIns="25400" tIns="12700" bIns="12700">
+          <a:bodyPr wrap="square" lIns="25400" tIns="12700" rIns="25400" bIns="12700" anchor="ctr">
             <a:spAutoFit/>
           </a:bodyPr>
           <a:lstStyle/>
           <a:p>
-            <a:pPr algn="l" marL="0" indent="0">
+            <a:pPr marL="0" indent="0" algn="l">
               <a:buNone/>
             </a:pPr>
             <a:r>
@@ -4534,12 +4558,12 @@
           <a:noFill/>
         </p:spPr>
         <p:txBody>
-          <a:bodyPr wrap="square" anchor="ctr" lIns="25400" rIns="25400" tIns="12700" bIns="12700">
+          <a:bodyPr wrap="square" lIns="25400" tIns="12700" rIns="25400" bIns="12700" anchor="ctr">
             <a:spAutoFit/>
           </a:bodyPr>
           <a:lstStyle/>
           <a:p>
-            <a:pPr algn="r" marL="0" indent="0">
+            <a:pPr marL="0" indent="0" algn="r">
               <a:buNone/>
             </a:pPr>
             <a:r>
@@ -4563,7 +4587,7 @@
 </file>
 
 <file path=ppt/slides/slide11.xml><?xml version="1.0" encoding="utf-8"?>
-<p:sld xmlns:a="http://schemas.openxmlformats.org/drawingml/2006/main" xmlns:p="http://schemas.openxmlformats.org/presentationml/2006/main" xmlns:r="http://schemas.openxmlformats.org/officeDocument/2006/relationships">
+<p:sld xmlns:a="http://schemas.openxmlformats.org/drawingml/2006/main" xmlns:r="http://schemas.openxmlformats.org/officeDocument/2006/relationships" xmlns:p="http://schemas.openxmlformats.org/presentationml/2006/main">
   <p:cSld>
     <p:spTree>
       <p:nvGrpSpPr>
@@ -4571,7 +4595,14 @@
         <p:cNvGrpSpPr/>
         <p:nvPr/>
       </p:nvGrpSpPr>
-      <p:grpSpPr/>
+      <p:grpSpPr>
+        <a:xfrm>
+          <a:off x="0" y="0"/>
+          <a:ext cx="0" cy="0"/>
+          <a:chOff x="0" y="0"/>
+          <a:chExt cx="0" cy="0"/>
+        </a:xfrm>
+      </p:grpSpPr>
       <p:sp>
         <p:nvSpPr>
           <p:cNvPr id="2" name="Rectangle 1"/>
@@ -4613,6 +4644,7 @@
           <a:lstStyle/>
           <a:p>
             <a:pPr algn="ctr"/>
+            <a:endParaRPr/>
           </a:p>
         </p:txBody>
       </p:sp>
@@ -4657,6 +4689,7 @@
           <a:lstStyle/>
           <a:p>
             <a:pPr algn="ctr"/>
+            <a:endParaRPr/>
           </a:p>
         </p:txBody>
       </p:sp>
@@ -4701,6 +4734,7 @@
           <a:lstStyle/>
           <a:p>
             <a:pPr algn="ctr"/>
+            <a:endParaRPr/>
           </a:p>
         </p:txBody>
       </p:sp>
@@ -4745,6 +4779,7 @@
           <a:lstStyle/>
           <a:p>
             <a:pPr algn="ctr"/>
+            <a:endParaRPr/>
           </a:p>
         </p:txBody>
       </p:sp>
@@ -4791,6 +4826,7 @@
           <a:lstStyle/>
           <a:p>
             <a:pPr algn="ctr"/>
+            <a:endParaRPr/>
           </a:p>
         </p:txBody>
       </p:sp>
@@ -4811,12 +4847,12 @@
           <a:noFill/>
         </p:spPr>
         <p:txBody>
-          <a:bodyPr wrap="square" anchor="ctr" lIns="25400" rIns="25400" tIns="12700" bIns="12700">
+          <a:bodyPr wrap="square" lIns="25400" tIns="12700" rIns="25400" bIns="12700" anchor="ctr">
             <a:spAutoFit/>
           </a:bodyPr>
           <a:lstStyle/>
           <a:p>
-            <a:pPr algn="ctr" marL="0" indent="0">
+            <a:pPr marL="0" indent="0" algn="ctr">
               <a:buNone/>
             </a:pPr>
             <a:r>
@@ -4848,12 +4884,12 @@
           <a:noFill/>
         </p:spPr>
         <p:txBody>
-          <a:bodyPr wrap="square" anchor="ctr" lIns="25400" rIns="25400" tIns="12700" bIns="12700">
+          <a:bodyPr wrap="square" lIns="25400" tIns="12700" rIns="25400" bIns="12700" anchor="ctr">
             <a:spAutoFit/>
           </a:bodyPr>
           <a:lstStyle/>
           <a:p>
-            <a:pPr algn="l" marL="0" indent="0">
+            <a:pPr marL="0" indent="0" algn="l">
               <a:buNone/>
             </a:pPr>
             <a:r>
@@ -4885,12 +4921,12 @@
           <a:noFill/>
         </p:spPr>
         <p:txBody>
-          <a:bodyPr wrap="square" anchor="ctr" lIns="25400" rIns="25400" tIns="12700" bIns="12700">
+          <a:bodyPr wrap="square" lIns="25400" tIns="12700" rIns="25400" bIns="12700" anchor="ctr">
             <a:spAutoFit/>
           </a:bodyPr>
           <a:lstStyle/>
           <a:p>
-            <a:pPr algn="l" marL="0" indent="0">
+            <a:pPr marL="0" indent="0" algn="l">
               <a:buNone/>
             </a:pPr>
             <a:r>
@@ -4948,6 +4984,7 @@
           <a:lstStyle/>
           <a:p>
             <a:pPr algn="ctr"/>
+            <a:endParaRPr/>
           </a:p>
         </p:txBody>
       </p:sp>
@@ -4968,12 +5005,12 @@
           <a:noFill/>
         </p:spPr>
         <p:txBody>
-          <a:bodyPr wrap="square" anchor="ctr" lIns="25400" rIns="25400" tIns="12700" bIns="12700">
+          <a:bodyPr wrap="square" lIns="25400" tIns="12700" rIns="25400" bIns="12700" anchor="ctr">
             <a:spAutoFit/>
           </a:bodyPr>
           <a:lstStyle/>
           <a:p>
-            <a:pPr algn="ctr" marL="0" indent="0">
+            <a:pPr marL="0" indent="0" algn="ctr">
               <a:buNone/>
             </a:pPr>
             <a:r>
@@ -5005,12 +5042,12 @@
           <a:noFill/>
         </p:spPr>
         <p:txBody>
-          <a:bodyPr wrap="square" anchor="ctr" lIns="25400" rIns="25400" tIns="12700" bIns="12700">
+          <a:bodyPr wrap="square" lIns="25400" tIns="12700" rIns="25400" bIns="12700" anchor="ctr">
             <a:spAutoFit/>
           </a:bodyPr>
           <a:lstStyle/>
           <a:p>
-            <a:pPr algn="ctr" marL="0" indent="0">
+            <a:pPr marL="0" indent="0" algn="ctr">
               <a:buNone/>
             </a:pPr>
             <a:r>
@@ -5042,12 +5079,12 @@
           <a:noFill/>
         </p:spPr>
         <p:txBody>
-          <a:bodyPr wrap="square" anchor="ctr" lIns="25400" rIns="25400" tIns="12700" bIns="12700">
+          <a:bodyPr wrap="square" lIns="25400" tIns="12700" rIns="25400" bIns="12700" anchor="ctr">
             <a:spAutoFit/>
           </a:bodyPr>
           <a:lstStyle/>
           <a:p>
-            <a:pPr algn="ctr" marL="0" indent="0">
+            <a:pPr marL="0" indent="0" algn="ctr">
               <a:buNone/>
             </a:pPr>
             <a:r>
@@ -5107,6 +5144,7 @@
           <a:lstStyle/>
           <a:p>
             <a:pPr algn="ctr"/>
+            <a:endParaRPr/>
           </a:p>
         </p:txBody>
       </p:sp>
@@ -5151,6 +5189,7 @@
           <a:lstStyle/>
           <a:p>
             <a:pPr algn="ctr"/>
+            <a:endParaRPr/>
           </a:p>
         </p:txBody>
       </p:sp>
@@ -5171,12 +5210,12 @@
           <a:noFill/>
         </p:spPr>
         <p:txBody>
-          <a:bodyPr wrap="square" anchor="ctr" lIns="25400" rIns="25400" tIns="12700" bIns="12700">
+          <a:bodyPr wrap="square" lIns="25400" tIns="12700" rIns="25400" bIns="12700" anchor="ctr">
             <a:spAutoFit/>
           </a:bodyPr>
           <a:lstStyle/>
           <a:p>
-            <a:pPr algn="ctr" marL="0" indent="0">
+            <a:pPr marL="0" indent="0" algn="ctr">
               <a:buNone/>
             </a:pPr>
             <a:r>
@@ -5208,12 +5247,12 @@
           <a:noFill/>
         </p:spPr>
         <p:txBody>
-          <a:bodyPr wrap="square" anchor="ctr" lIns="25400" rIns="25400" tIns="12700" bIns="12700">
+          <a:bodyPr wrap="square" lIns="25400" tIns="12700" rIns="25400" bIns="12700" anchor="ctr">
             <a:spAutoFit/>
           </a:bodyPr>
           <a:lstStyle/>
           <a:p>
-            <a:pPr algn="l" marL="0" indent="0">
+            <a:pPr marL="0" indent="0" algn="l">
               <a:spcAft>
                 <a:spcPts val="500"/>
               </a:spcAft>
@@ -5230,7 +5269,7 @@
             </a:r>
           </a:p>
           <a:p>
-            <a:pPr algn="l" marL="0" indent="0">
+            <a:pPr marL="0" indent="0" algn="l">
               <a:spcAft>
                 <a:spcPts val="500"/>
               </a:spcAft>
@@ -5293,6 +5332,7 @@
           <a:lstStyle/>
           <a:p>
             <a:pPr algn="ctr"/>
+            <a:endParaRPr/>
           </a:p>
         </p:txBody>
       </p:sp>
@@ -5337,6 +5377,7 @@
           <a:lstStyle/>
           <a:p>
             <a:pPr algn="ctr"/>
+            <a:endParaRPr/>
           </a:p>
         </p:txBody>
       </p:sp>
@@ -5357,12 +5398,12 @@
           <a:noFill/>
         </p:spPr>
         <p:txBody>
-          <a:bodyPr wrap="square" anchor="ctr" lIns="25400" rIns="25400" tIns="12700" bIns="12700">
+          <a:bodyPr wrap="square" lIns="25400" tIns="12700" rIns="25400" bIns="12700" anchor="ctr">
             <a:spAutoFit/>
           </a:bodyPr>
           <a:lstStyle/>
           <a:p>
-            <a:pPr algn="ctr" marL="0" indent="0">
+            <a:pPr marL="0" indent="0" algn="ctr">
               <a:buNone/>
             </a:pPr>
             <a:r>
@@ -5394,12 +5435,12 @@
           <a:noFill/>
         </p:spPr>
         <p:txBody>
-          <a:bodyPr wrap="square" anchor="ctr" lIns="25400" rIns="25400" tIns="12700" bIns="12700">
+          <a:bodyPr wrap="square" lIns="25400" tIns="12700" rIns="25400" bIns="12700" anchor="ctr">
             <a:spAutoFit/>
           </a:bodyPr>
           <a:lstStyle/>
           <a:p>
-            <a:pPr algn="l" marL="0" indent="0">
+            <a:pPr marL="0" indent="0" algn="l">
               <a:spcAft>
                 <a:spcPts val="500"/>
               </a:spcAft>
@@ -5416,7 +5457,7 @@
             </a:r>
           </a:p>
           <a:p>
-            <a:pPr algn="l" marL="0" indent="0">
+            <a:pPr marL="0" indent="0" algn="l">
               <a:spcAft>
                 <a:spcPts val="500"/>
               </a:spcAft>
@@ -5479,6 +5520,7 @@
           <a:lstStyle/>
           <a:p>
             <a:pPr algn="ctr"/>
+            <a:endParaRPr/>
           </a:p>
         </p:txBody>
       </p:sp>
@@ -5523,6 +5565,7 @@
           <a:lstStyle/>
           <a:p>
             <a:pPr algn="ctr"/>
+            <a:endParaRPr/>
           </a:p>
         </p:txBody>
       </p:sp>
@@ -5543,12 +5586,12 @@
           <a:noFill/>
         </p:spPr>
         <p:txBody>
-          <a:bodyPr wrap="square" anchor="ctr" lIns="25400" rIns="25400" tIns="12700" bIns="12700">
+          <a:bodyPr wrap="square" lIns="25400" tIns="12700" rIns="25400" bIns="12700" anchor="ctr">
             <a:spAutoFit/>
           </a:bodyPr>
           <a:lstStyle/>
           <a:p>
-            <a:pPr algn="ctr" marL="0" indent="0">
+            <a:pPr marL="0" indent="0" algn="ctr">
               <a:buNone/>
             </a:pPr>
             <a:r>
@@ -5580,12 +5623,12 @@
           <a:noFill/>
         </p:spPr>
         <p:txBody>
-          <a:bodyPr wrap="square" anchor="ctr" lIns="25400" rIns="25400" tIns="12700" bIns="12700">
+          <a:bodyPr wrap="square" lIns="25400" tIns="12700" rIns="25400" bIns="12700" anchor="ctr">
             <a:spAutoFit/>
           </a:bodyPr>
           <a:lstStyle/>
           <a:p>
-            <a:pPr algn="l" marL="0" indent="0">
+            <a:pPr marL="0" indent="0" algn="l">
               <a:spcAft>
                 <a:spcPts val="500"/>
               </a:spcAft>
@@ -5602,7 +5645,7 @@
             </a:r>
           </a:p>
           <a:p>
-            <a:pPr algn="l" marL="0" indent="0">
+            <a:pPr marL="0" indent="0" algn="l">
               <a:spcAft>
                 <a:spcPts val="500"/>
               </a:spcAft>
@@ -5637,12 +5680,12 @@
           <a:noFill/>
         </p:spPr>
         <p:txBody>
-          <a:bodyPr wrap="square" anchor="ctr" lIns="25400" rIns="25400" tIns="12700" bIns="12700">
+          <a:bodyPr wrap="square" lIns="25400" tIns="12700" rIns="25400" bIns="12700" anchor="ctr">
             <a:spAutoFit/>
           </a:bodyPr>
           <a:lstStyle/>
           <a:p>
-            <a:pPr algn="l" marL="0" indent="0">
+            <a:pPr marL="0" indent="0" algn="l">
               <a:buNone/>
             </a:pPr>
             <a:r>
@@ -5674,12 +5717,12 @@
           <a:noFill/>
         </p:spPr>
         <p:txBody>
-          <a:bodyPr wrap="square" anchor="ctr" lIns="25400" rIns="25400" tIns="12700" bIns="12700">
+          <a:bodyPr wrap="square" lIns="25400" tIns="12700" rIns="25400" bIns="12700" anchor="ctr">
             <a:spAutoFit/>
           </a:bodyPr>
           <a:lstStyle/>
           <a:p>
-            <a:pPr algn="r" marL="0" indent="0">
+            <a:pPr marL="0" indent="0" algn="r">
               <a:buNone/>
             </a:pPr>
             <a:r>
@@ -5703,7 +5746,7 @@
 </file>
 
 <file path=ppt/slides/slide12.xml><?xml version="1.0" encoding="utf-8"?>
-<p:sld xmlns:a="http://schemas.openxmlformats.org/drawingml/2006/main" xmlns:p="http://schemas.openxmlformats.org/presentationml/2006/main" xmlns:r="http://schemas.openxmlformats.org/officeDocument/2006/relationships">
+<p:sld xmlns:a="http://schemas.openxmlformats.org/drawingml/2006/main" xmlns:r="http://schemas.openxmlformats.org/officeDocument/2006/relationships" xmlns:p="http://schemas.openxmlformats.org/presentationml/2006/main">
   <p:cSld>
     <p:spTree>
       <p:nvGrpSpPr>
@@ -5711,7 +5754,14 @@
         <p:cNvGrpSpPr/>
         <p:nvPr/>
       </p:nvGrpSpPr>
-      <p:grpSpPr/>
+      <p:grpSpPr>
+        <a:xfrm>
+          <a:off x="0" y="0"/>
+          <a:ext cx="0" cy="0"/>
+          <a:chOff x="0" y="0"/>
+          <a:chExt cx="0" cy="0"/>
+        </a:xfrm>
+      </p:grpSpPr>
       <p:sp>
         <p:nvSpPr>
           <p:cNvPr id="2" name="Rectangle 1"/>
@@ -5753,6 +5803,7 @@
           <a:lstStyle/>
           <a:p>
             <a:pPr algn="ctr"/>
+            <a:endParaRPr/>
           </a:p>
         </p:txBody>
       </p:sp>
@@ -5797,6 +5848,7 @@
           <a:lstStyle/>
           <a:p>
             <a:pPr algn="ctr"/>
+            <a:endParaRPr/>
           </a:p>
         </p:txBody>
       </p:sp>
@@ -5817,12 +5869,12 @@
           <a:noFill/>
         </p:spPr>
         <p:txBody>
-          <a:bodyPr wrap="square" anchor="t" lIns="25400" rIns="25400" tIns="12700" bIns="12700">
+          <a:bodyPr wrap="square" lIns="25400" tIns="12700" rIns="25400" bIns="12700" anchor="t">
             <a:spAutoFit/>
           </a:bodyPr>
           <a:lstStyle/>
           <a:p>
-            <a:pPr algn="l" marL="0" indent="0">
+            <a:pPr marL="0" indent="0" algn="l">
               <a:buNone/>
             </a:pPr>
             <a:r>
@@ -5854,12 +5906,12 @@
           <a:noFill/>
         </p:spPr>
         <p:txBody>
-          <a:bodyPr wrap="square" anchor="t" lIns="25400" rIns="25400" tIns="12700" bIns="12700">
+          <a:bodyPr wrap="square" lIns="25400" tIns="12700" rIns="25400" bIns="12700" anchor="t">
             <a:spAutoFit/>
           </a:bodyPr>
           <a:lstStyle/>
           <a:p>
-            <a:pPr algn="l" marL="0" indent="0">
+            <a:pPr marL="0" indent="0" algn="l">
               <a:buNone/>
             </a:pPr>
             <a:r>
@@ -5917,6 +5969,7 @@
           <a:lstStyle/>
           <a:p>
             <a:pPr algn="ctr"/>
+            <a:endParaRPr/>
           </a:p>
         </p:txBody>
       </p:sp>
@@ -5961,6 +6014,7 @@
           <a:lstStyle/>
           <a:p>
             <a:pPr algn="ctr"/>
+            <a:endParaRPr/>
           </a:p>
         </p:txBody>
       </p:sp>
@@ -5981,12 +6035,12 @@
           <a:noFill/>
         </p:spPr>
         <p:txBody>
-          <a:bodyPr wrap="square" anchor="ctr" lIns="25400" rIns="25400" tIns="12700" bIns="12700">
+          <a:bodyPr wrap="square" lIns="25400" tIns="12700" rIns="25400" bIns="12700" anchor="ctr">
             <a:spAutoFit/>
           </a:bodyPr>
           <a:lstStyle/>
           <a:p>
-            <a:pPr algn="ctr" marL="0" indent="0">
+            <a:pPr marL="0" indent="0" algn="ctr">
               <a:buNone/>
             </a:pPr>
             <a:r>
@@ -6018,12 +6072,12 @@
           <a:noFill/>
         </p:spPr>
         <p:txBody>
-          <a:bodyPr wrap="square" anchor="ctr" lIns="25400" rIns="25400" tIns="12700" bIns="12700">
+          <a:bodyPr wrap="square" lIns="25400" tIns="12700" rIns="25400" bIns="12700" anchor="ctr">
             <a:spAutoFit/>
           </a:bodyPr>
           <a:lstStyle/>
           <a:p>
-            <a:pPr algn="l" marL="0" indent="0">
+            <a:pPr marL="0" indent="0" algn="l">
               <a:spcAft>
                 <a:spcPts val="400"/>
               </a:spcAft>
@@ -6040,7 +6094,7 @@
             </a:r>
           </a:p>
           <a:p>
-            <a:pPr algn="l" marL="0" indent="0">
+            <a:pPr marL="0" indent="0" algn="l">
               <a:spcAft>
                 <a:spcPts val="400"/>
               </a:spcAft>
@@ -6101,6 +6155,7 @@
           <a:lstStyle/>
           <a:p>
             <a:pPr algn="ctr"/>
+            <a:endParaRPr/>
           </a:p>
         </p:txBody>
       </p:sp>
@@ -6145,6 +6200,7 @@
           <a:lstStyle/>
           <a:p>
             <a:pPr algn="ctr"/>
+            <a:endParaRPr/>
           </a:p>
         </p:txBody>
       </p:sp>
@@ -6165,12 +6221,12 @@
           <a:noFill/>
         </p:spPr>
         <p:txBody>
-          <a:bodyPr wrap="square" anchor="ctr" lIns="25400" rIns="25400" tIns="12700" bIns="12700">
+          <a:bodyPr wrap="square" lIns="25400" tIns="12700" rIns="25400" bIns="12700" anchor="ctr">
             <a:spAutoFit/>
           </a:bodyPr>
           <a:lstStyle/>
           <a:p>
-            <a:pPr algn="ctr" marL="0" indent="0">
+            <a:pPr marL="0" indent="0" algn="ctr">
               <a:buNone/>
             </a:pPr>
             <a:r>
@@ -6202,12 +6258,12 @@
           <a:noFill/>
         </p:spPr>
         <p:txBody>
-          <a:bodyPr wrap="square" anchor="ctr" lIns="25400" rIns="25400" tIns="12700" bIns="12700">
+          <a:bodyPr wrap="square" lIns="25400" tIns="12700" rIns="25400" bIns="12700" anchor="ctr">
             <a:spAutoFit/>
           </a:bodyPr>
           <a:lstStyle/>
           <a:p>
-            <a:pPr algn="l" marL="0" indent="0">
+            <a:pPr marL="0" indent="0" algn="l">
               <a:spcAft>
                 <a:spcPts val="400"/>
               </a:spcAft>
@@ -6224,7 +6280,7 @@
             </a:r>
           </a:p>
           <a:p>
-            <a:pPr algn="l" marL="0" indent="0">
+            <a:pPr marL="0" indent="0" algn="l">
               <a:spcAft>
                 <a:spcPts val="400"/>
               </a:spcAft>
@@ -6285,6 +6341,7 @@
           <a:lstStyle/>
           <a:p>
             <a:pPr algn="ctr"/>
+            <a:endParaRPr/>
           </a:p>
         </p:txBody>
       </p:sp>
@@ -6329,6 +6386,7 @@
           <a:lstStyle/>
           <a:p>
             <a:pPr algn="ctr"/>
+            <a:endParaRPr/>
           </a:p>
         </p:txBody>
       </p:sp>
@@ -6349,12 +6407,12 @@
           <a:noFill/>
         </p:spPr>
         <p:txBody>
-          <a:bodyPr wrap="square" anchor="ctr" lIns="25400" rIns="25400" tIns="12700" bIns="12700">
+          <a:bodyPr wrap="square" lIns="25400" tIns="12700" rIns="25400" bIns="12700" anchor="ctr">
             <a:spAutoFit/>
           </a:bodyPr>
           <a:lstStyle/>
           <a:p>
-            <a:pPr algn="ctr" marL="0" indent="0">
+            <a:pPr marL="0" indent="0" algn="ctr">
               <a:buNone/>
             </a:pPr>
             <a:r>
@@ -6386,12 +6444,12 @@
           <a:noFill/>
         </p:spPr>
         <p:txBody>
-          <a:bodyPr wrap="square" anchor="ctr" lIns="25400" rIns="25400" tIns="12700" bIns="12700">
+          <a:bodyPr wrap="square" lIns="25400" tIns="12700" rIns="25400" bIns="12700" anchor="ctr">
             <a:spAutoFit/>
           </a:bodyPr>
           <a:lstStyle/>
           <a:p>
-            <a:pPr algn="l" marL="0" indent="0">
+            <a:pPr marL="0" indent="0" algn="l">
               <a:spcAft>
                 <a:spcPts val="400"/>
               </a:spcAft>
@@ -6408,7 +6466,7 @@
             </a:r>
           </a:p>
           <a:p>
-            <a:pPr algn="l" marL="0" indent="0">
+            <a:pPr marL="0" indent="0" algn="l">
               <a:spcAft>
                 <a:spcPts val="400"/>
               </a:spcAft>
@@ -6469,6 +6527,7 @@
           <a:lstStyle/>
           <a:p>
             <a:pPr algn="ctr"/>
+            <a:endParaRPr/>
           </a:p>
         </p:txBody>
       </p:sp>
@@ -6489,12 +6548,12 @@
           <a:noFill/>
         </p:spPr>
         <p:txBody>
-          <a:bodyPr wrap="square" anchor="ctr" lIns="25400" rIns="25400" tIns="12700" bIns="12700">
+          <a:bodyPr wrap="square" lIns="25400" tIns="12700" rIns="25400" bIns="12700" anchor="ctr">
             <a:spAutoFit/>
           </a:bodyPr>
           <a:lstStyle/>
           <a:p>
-            <a:pPr algn="ctr" marL="0" indent="0">
+            <a:pPr marL="0" indent="0" algn="ctr">
               <a:spcAft>
                 <a:spcPts val="300"/>
               </a:spcAft>
@@ -6511,7 +6570,7 @@
             </a:r>
           </a:p>
           <a:p>
-            <a:pPr algn="ctr" marL="0" indent="0">
+            <a:pPr marL="0" indent="0" algn="ctr">
               <a:spcAft>
                 <a:spcPts val="300"/>
               </a:spcAft>
@@ -6546,12 +6605,12 @@
           <a:noFill/>
         </p:spPr>
         <p:txBody>
-          <a:bodyPr wrap="square" anchor="t" lIns="25400" rIns="25400" tIns="12700" bIns="12700">
+          <a:bodyPr wrap="square" lIns="25400" tIns="12700" rIns="25400" bIns="12700" anchor="t">
             <a:spAutoFit/>
           </a:bodyPr>
           <a:lstStyle/>
           <a:p>
-            <a:pPr algn="ctr" marL="0" indent="0">
+            <a:pPr marL="0" indent="0" algn="ctr">
               <a:buNone/>
             </a:pPr>
             <a:r>
@@ -6575,7 +6634,7 @@
 </file>
 
 <file path=ppt/slides/slide2.xml><?xml version="1.0" encoding="utf-8"?>
-<p:sld xmlns:a="http://schemas.openxmlformats.org/drawingml/2006/main" xmlns:p="http://schemas.openxmlformats.org/presentationml/2006/main" xmlns:r="http://schemas.openxmlformats.org/officeDocument/2006/relationships">
+<p:sld xmlns:a="http://schemas.openxmlformats.org/drawingml/2006/main" xmlns:r="http://schemas.openxmlformats.org/officeDocument/2006/relationships" xmlns:p="http://schemas.openxmlformats.org/presentationml/2006/main">
   <p:cSld>
     <p:spTree>
       <p:nvGrpSpPr>
@@ -6583,7 +6642,14 @@
         <p:cNvGrpSpPr/>
         <p:nvPr/>
       </p:nvGrpSpPr>
-      <p:grpSpPr/>
+      <p:grpSpPr>
+        <a:xfrm>
+          <a:off x="0" y="0"/>
+          <a:ext cx="0" cy="0"/>
+          <a:chOff x="0" y="0"/>
+          <a:chExt cx="0" cy="0"/>
+        </a:xfrm>
+      </p:grpSpPr>
       <p:sp>
         <p:nvSpPr>
           <p:cNvPr id="2" name="Rectangle 1"/>
@@ -6625,6 +6691,7 @@
           <a:lstStyle/>
           <a:p>
             <a:pPr algn="ctr"/>
+            <a:endParaRPr/>
           </a:p>
         </p:txBody>
       </p:sp>
@@ -6669,6 +6736,7 @@
           <a:lstStyle/>
           <a:p>
             <a:pPr algn="ctr"/>
+            <a:endParaRPr/>
           </a:p>
         </p:txBody>
       </p:sp>
@@ -6713,6 +6781,7 @@
           <a:lstStyle/>
           <a:p>
             <a:pPr algn="ctr"/>
+            <a:endParaRPr/>
           </a:p>
         </p:txBody>
       </p:sp>
@@ -6733,12 +6802,12 @@
           <a:noFill/>
         </p:spPr>
         <p:txBody>
-          <a:bodyPr wrap="square" anchor="t" lIns="25400" rIns="25400" tIns="12700" bIns="12700">
+          <a:bodyPr wrap="square" lIns="25400" tIns="12700" rIns="25400" bIns="12700" anchor="t">
             <a:spAutoFit/>
           </a:bodyPr>
           <a:lstStyle/>
           <a:p>
-            <a:pPr algn="l" marL="0" indent="0">
+            <a:pPr marL="0" indent="0" algn="l">
               <a:buNone/>
             </a:pPr>
             <a:r>
@@ -6770,12 +6839,12 @@
           <a:noFill/>
         </p:spPr>
         <p:txBody>
-          <a:bodyPr wrap="square" anchor="t" lIns="25400" rIns="25400" tIns="12700" bIns="12700">
+          <a:bodyPr wrap="square" lIns="25400" tIns="12700" rIns="25400" bIns="12700" anchor="t">
             <a:spAutoFit/>
           </a:bodyPr>
           <a:lstStyle/>
           <a:p>
-            <a:pPr algn="l" marL="0" indent="0">
+            <a:pPr marL="0" indent="0" algn="l">
               <a:buNone/>
             </a:pPr>
             <a:r>
@@ -6835,6 +6904,7 @@
           <a:lstStyle/>
           <a:p>
             <a:pPr algn="ctr"/>
+            <a:endParaRPr/>
           </a:p>
         </p:txBody>
       </p:sp>
@@ -6879,6 +6949,7 @@
           <a:lstStyle/>
           <a:p>
             <a:pPr algn="ctr"/>
+            <a:endParaRPr/>
           </a:p>
         </p:txBody>
       </p:sp>
@@ -6899,12 +6970,12 @@
           <a:noFill/>
         </p:spPr>
         <p:txBody>
-          <a:bodyPr wrap="square" anchor="ctr" lIns="25400" rIns="25400" tIns="12700" bIns="12700">
+          <a:bodyPr wrap="square" lIns="25400" tIns="12700" rIns="25400" bIns="12700" anchor="ctr">
             <a:spAutoFit/>
           </a:bodyPr>
           <a:lstStyle/>
           <a:p>
-            <a:pPr algn="ctr" marL="0" indent="0">
+            <a:pPr marL="0" indent="0" algn="ctr">
               <a:buNone/>
             </a:pPr>
             <a:r>
@@ -6936,12 +7007,12 @@
           <a:noFill/>
         </p:spPr>
         <p:txBody>
-          <a:bodyPr wrap="square" anchor="ctr" lIns="25400" rIns="25400" tIns="12700" bIns="12700">
+          <a:bodyPr wrap="square" lIns="25400" tIns="12700" rIns="25400" bIns="12700" anchor="ctr">
             <a:spAutoFit/>
           </a:bodyPr>
           <a:lstStyle/>
           <a:p>
-            <a:pPr algn="l" marL="0" indent="0">
+            <a:pPr marL="0" indent="0" algn="l">
               <a:spcAft>
                 <a:spcPts val="300"/>
               </a:spcAft>
@@ -6958,7 +7029,7 @@
             </a:r>
           </a:p>
           <a:p>
-            <a:pPr algn="l" marL="0" indent="0">
+            <a:pPr marL="0" indent="0" algn="l">
               <a:spcAft>
                 <a:spcPts val="300"/>
               </a:spcAft>
@@ -7021,6 +7092,7 @@
           <a:lstStyle/>
           <a:p>
             <a:pPr algn="ctr"/>
+            <a:endParaRPr/>
           </a:p>
         </p:txBody>
       </p:sp>
@@ -7065,6 +7137,7 @@
           <a:lstStyle/>
           <a:p>
             <a:pPr algn="ctr"/>
+            <a:endParaRPr/>
           </a:p>
         </p:txBody>
       </p:sp>
@@ -7085,12 +7158,12 @@
           <a:noFill/>
         </p:spPr>
         <p:txBody>
-          <a:bodyPr wrap="square" anchor="ctr" lIns="25400" rIns="25400" tIns="12700" bIns="12700">
+          <a:bodyPr wrap="square" lIns="25400" tIns="12700" rIns="25400" bIns="12700" anchor="ctr">
             <a:spAutoFit/>
           </a:bodyPr>
           <a:lstStyle/>
           <a:p>
-            <a:pPr algn="ctr" marL="0" indent="0">
+            <a:pPr marL="0" indent="0" algn="ctr">
               <a:buNone/>
             </a:pPr>
             <a:r>
@@ -7113,8 +7186,8 @@
         </p:nvSpPr>
         <p:spPr>
           <a:xfrm>
-            <a:off x="1399032" y="3202098"/>
-            <a:ext cx="4892040" cy="1254426"/>
+            <a:off x="1399032" y="3577960"/>
+            <a:ext cx="4892040" cy="502702"/>
           </a:xfrm>
           <a:prstGeom prst="rect">
             <a:avLst/>
@@ -7122,43 +7195,181 @@
           <a:noFill/>
         </p:spPr>
         <p:txBody>
-          <a:bodyPr wrap="square" anchor="ctr" lIns="25400" rIns="25400" tIns="12700" bIns="12700">
+          <a:bodyPr wrap="square" lIns="25400" tIns="12700" rIns="25400" bIns="12700" anchor="ctr">
             <a:spAutoFit/>
           </a:bodyPr>
           <a:lstStyle/>
           <a:p>
-            <a:pPr algn="l" marL="0" indent="0">
+            <a:pPr marL="0" indent="0" algn="l">
               <a:spcAft>
                 <a:spcPts val="300"/>
               </a:spcAft>
               <a:buNone/>
             </a:pPr>
             <a:r>
-              <a:rPr sz="1600" b="1" i="0">
+              <a:rPr sz="1600" b="1" i="0" dirty="0">
                 <a:solidFill>
                   <a:srgbClr val="3B2A20"/>
                 </a:solidFill>
                 <a:latin typeface="Malgun Gothic"/>
               </a:rPr>
-              <a:t>2. Bean 알기</a:t>
-            </a:r>
-          </a:p>
-          <a:p>
-            <a:pPr algn="l" marL="0" indent="0">
+              <a:t>2. Bean </a:t>
+            </a:r>
+            <a:r>
+              <a:rPr lang="en-US" sz="1600" b="1" i="0" dirty="0" err="1">
+                <a:solidFill>
+                  <a:srgbClr val="3B2A20"/>
+                </a:solidFill>
+                <a:latin typeface="Malgun Gothic"/>
+              </a:rPr>
+              <a:t>Token</a:t>
+            </a:r>
+            <a:r>
+              <a:rPr sz="1600" b="1" i="0" dirty="0" err="1">
+                <a:solidFill>
+                  <a:srgbClr val="3B2A20"/>
+                </a:solidFill>
+                <a:latin typeface="Malgun Gothic"/>
+              </a:rPr>
+              <a:t>알기</a:t>
+            </a:r>
+            <a:r>
+              <a:rPr lang="en-US" sz="1600" b="1" i="0" dirty="0">
+                <a:solidFill>
+                  <a:srgbClr val="3B2A20"/>
+                </a:solidFill>
+                <a:latin typeface="Malgun Gothic"/>
+              </a:rPr>
+              <a:t> (PiRC1-</a:t>
+            </a:r>
+            <a:r>
+              <a:rPr lang="ko-KR" altLang="en-US" sz="1600" b="1" i="0" dirty="0">
+                <a:solidFill>
+                  <a:srgbClr val="3B2A20"/>
+                </a:solidFill>
+                <a:latin typeface="Malgun Gothic"/>
+              </a:rPr>
+              <a:t>토큰발행</a:t>
+            </a:r>
+            <a:r>
+              <a:rPr lang="en-US" sz="1600" b="1" i="0" dirty="0">
+                <a:solidFill>
+                  <a:srgbClr val="3B2A20"/>
+                </a:solidFill>
+                <a:latin typeface="Malgun Gothic"/>
+              </a:rPr>
+              <a:t>)</a:t>
+            </a:r>
+            <a:endParaRPr sz="1600" b="1" i="0" dirty="0">
+              <a:solidFill>
+                <a:srgbClr val="3B2A20"/>
+              </a:solidFill>
+              <a:latin typeface="Malgun Gothic"/>
+            </a:endParaRPr>
+          </a:p>
+          <a:p>
+            <a:pPr marL="0" indent="0" algn="l">
               <a:spcAft>
                 <a:spcPts val="300"/>
               </a:spcAft>
               <a:buNone/>
             </a:pPr>
             <a:r>
-              <a:rPr sz="1250" b="0" i="0">
+              <a:rPr lang="ko-KR" altLang="en-US" sz="1250" b="0" i="0" dirty="0">
                 <a:solidFill>
                   <a:srgbClr val="8A7A6D"/>
                 </a:solidFill>
                 <a:latin typeface="Malgun Gothic"/>
               </a:rPr>
-              <a:t>커피빈 토큰 — 충전하고 마음 전하기</a:t>
-            </a:r>
+              <a:t>카페</a:t>
+            </a:r>
+            <a:r>
+              <a:rPr sz="1250" b="0" i="0" dirty="0">
+                <a:solidFill>
+                  <a:srgbClr val="8A7A6D"/>
+                </a:solidFill>
+                <a:latin typeface="Malgun Gothic"/>
+              </a:rPr>
+              <a:t>빈 </a:t>
+            </a:r>
+            <a:r>
+              <a:rPr sz="1250" b="0" i="0" dirty="0" err="1">
+                <a:solidFill>
+                  <a:srgbClr val="8A7A6D"/>
+                </a:solidFill>
+                <a:latin typeface="Malgun Gothic"/>
+              </a:rPr>
+              <a:t>토큰</a:t>
+            </a:r>
+            <a:r>
+              <a:rPr sz="1250" b="0" i="0" dirty="0">
+                <a:solidFill>
+                  <a:srgbClr val="8A7A6D"/>
+                </a:solidFill>
+                <a:latin typeface="Malgun Gothic"/>
+              </a:rPr>
+              <a:t> — </a:t>
+            </a:r>
+            <a:r>
+              <a:rPr lang="ko-KR" altLang="en-US" sz="1250" b="0" i="0" dirty="0">
+                <a:solidFill>
+                  <a:srgbClr val="8A7A6D"/>
+                </a:solidFill>
+                <a:latin typeface="Malgun Gothic"/>
+              </a:rPr>
+              <a:t>발행</a:t>
+            </a:r>
+            <a:r>
+              <a:rPr sz="1250" b="0" i="0" dirty="0" err="1">
+                <a:solidFill>
+                  <a:srgbClr val="8A7A6D"/>
+                </a:solidFill>
+                <a:latin typeface="Malgun Gothic"/>
+              </a:rPr>
+              <a:t>하고</a:t>
+            </a:r>
+            <a:r>
+              <a:rPr sz="1250" b="0" i="0" dirty="0">
+                <a:solidFill>
+                  <a:srgbClr val="8A7A6D"/>
+                </a:solidFill>
+                <a:latin typeface="Malgun Gothic"/>
+              </a:rPr>
+              <a:t> </a:t>
+            </a:r>
+            <a:r>
+              <a:rPr sz="1250" b="0" i="0" dirty="0" err="1">
+                <a:solidFill>
+                  <a:srgbClr val="8A7A6D"/>
+                </a:solidFill>
+                <a:latin typeface="Malgun Gothic"/>
+              </a:rPr>
+              <a:t>마음</a:t>
+            </a:r>
+            <a:r>
+              <a:rPr sz="1250" b="0" i="0" dirty="0">
+                <a:solidFill>
+                  <a:srgbClr val="8A7A6D"/>
+                </a:solidFill>
+                <a:latin typeface="Malgun Gothic"/>
+              </a:rPr>
+              <a:t> </a:t>
+            </a:r>
+            <a:r>
+              <a:rPr sz="1250" b="0" i="0" dirty="0" err="1">
+                <a:solidFill>
+                  <a:srgbClr val="8A7A6D"/>
+                </a:solidFill>
+                <a:latin typeface="Malgun Gothic"/>
+              </a:rPr>
+              <a:t>전하기</a:t>
+            </a:r>
+            <a:endParaRPr sz="1250" b="0" i="0" dirty="0">
+              <a:solidFill>
+                <a:srgbClr val="8A7A6D"/>
+              </a:solidFill>
+              <a:latin typeface="Malgun Gothic"/>
+            </a:endParaRPr>
           </a:p>
         </p:txBody>
       </p:sp>
@@ -7207,6 +7418,7 @@
           <a:lstStyle/>
           <a:p>
             <a:pPr algn="ctr"/>
+            <a:endParaRPr/>
           </a:p>
         </p:txBody>
       </p:sp>
@@ -7251,6 +7463,7 @@
           <a:lstStyle/>
           <a:p>
             <a:pPr algn="ctr"/>
+            <a:endParaRPr/>
           </a:p>
         </p:txBody>
       </p:sp>
@@ -7271,12 +7484,12 @@
           <a:noFill/>
         </p:spPr>
         <p:txBody>
-          <a:bodyPr wrap="square" anchor="ctr" lIns="25400" rIns="25400" tIns="12700" bIns="12700">
+          <a:bodyPr wrap="square" lIns="25400" tIns="12700" rIns="25400" bIns="12700" anchor="ctr">
             <a:spAutoFit/>
           </a:bodyPr>
           <a:lstStyle/>
           <a:p>
-            <a:pPr algn="ctr" marL="0" indent="0">
+            <a:pPr marL="0" indent="0" algn="ctr">
               <a:buNone/>
             </a:pPr>
             <a:r>
@@ -7299,8 +7512,8 @@
         </p:nvSpPr>
         <p:spPr>
           <a:xfrm>
-            <a:off x="1399032" y="4621116"/>
-            <a:ext cx="4892040" cy="1254426"/>
+            <a:off x="1399032" y="4996978"/>
+            <a:ext cx="4892040" cy="502702"/>
           </a:xfrm>
           <a:prstGeom prst="rect">
             <a:avLst/>
@@ -7308,43 +7521,154 @@
           <a:noFill/>
         </p:spPr>
         <p:txBody>
-          <a:bodyPr wrap="square" anchor="ctr" lIns="25400" rIns="25400" tIns="12700" bIns="12700">
+          <a:bodyPr wrap="square" lIns="25400" tIns="12700" rIns="25400" bIns="12700" anchor="ctr">
             <a:spAutoFit/>
           </a:bodyPr>
           <a:lstStyle/>
           <a:p>
-            <a:pPr algn="l" marL="0" indent="0">
+            <a:pPr marL="0" indent="0" algn="l">
               <a:spcAft>
                 <a:spcPts val="300"/>
               </a:spcAft>
               <a:buNone/>
             </a:pPr>
             <a:r>
-              <a:rPr sz="1600" b="1" i="0">
+              <a:rPr sz="1600" b="1" i="0" dirty="0">
                 <a:solidFill>
                   <a:srgbClr val="3B2A20"/>
                 </a:solidFill>
                 <a:latin typeface="Malgun Gothic"/>
               </a:rPr>
-              <a:t>3. 구독(이용권)</a:t>
-            </a:r>
-          </a:p>
-          <a:p>
-            <a:pPr algn="l" marL="0" indent="0">
+              <a:t>3. </a:t>
+            </a:r>
+            <a:r>
+              <a:rPr sz="1600" b="1" i="0" dirty="0" err="1">
+                <a:solidFill>
+                  <a:srgbClr val="3B2A20"/>
+                </a:solidFill>
+                <a:latin typeface="Malgun Gothic"/>
+              </a:rPr>
+              <a:t>구독</a:t>
+            </a:r>
+            <a:r>
+              <a:rPr sz="1600" b="1" i="0" dirty="0">
+                <a:solidFill>
+                  <a:srgbClr val="3B2A20"/>
+                </a:solidFill>
+                <a:latin typeface="Malgun Gothic"/>
+              </a:rPr>
+              <a:t>(</a:t>
+            </a:r>
+            <a:r>
+              <a:rPr sz="1600" b="1" i="0" dirty="0" err="1">
+                <a:solidFill>
+                  <a:srgbClr val="3B2A20"/>
+                </a:solidFill>
+                <a:latin typeface="Malgun Gothic"/>
+              </a:rPr>
+              <a:t>이용권</a:t>
+            </a:r>
+            <a:r>
+              <a:rPr sz="1600" b="1" i="0" dirty="0">
+                <a:solidFill>
+                  <a:srgbClr val="3B2A20"/>
+                </a:solidFill>
+                <a:latin typeface="Malgun Gothic"/>
+              </a:rPr>
+              <a:t>)</a:t>
+            </a:r>
+            <a:r>
+              <a:rPr lang="en-US" sz="1600" b="1" i="0" dirty="0">
+                <a:solidFill>
+                  <a:srgbClr val="3B2A20"/>
+                </a:solidFill>
+                <a:latin typeface="Malgun Gothic"/>
+              </a:rPr>
+              <a:t> (PiRC2-</a:t>
+            </a:r>
+            <a:r>
+              <a:rPr lang="ko-KR" altLang="en-US" sz="1600" b="1" i="0" dirty="0">
+                <a:solidFill>
+                  <a:srgbClr val="3B2A20"/>
+                </a:solidFill>
+                <a:latin typeface="Malgun Gothic"/>
+              </a:rPr>
+              <a:t>구독서비스</a:t>
+            </a:r>
+            <a:r>
+              <a:rPr lang="en-US" sz="1600" b="1" i="0" dirty="0">
+                <a:solidFill>
+                  <a:srgbClr val="3B2A20"/>
+                </a:solidFill>
+                <a:latin typeface="Malgun Gothic"/>
+              </a:rPr>
+              <a:t>)</a:t>
+            </a:r>
+            <a:endParaRPr sz="1600" b="1" i="0" dirty="0">
+              <a:solidFill>
+                <a:srgbClr val="3B2A20"/>
+              </a:solidFill>
+              <a:latin typeface="Malgun Gothic"/>
+            </a:endParaRPr>
+          </a:p>
+          <a:p>
+            <a:pPr marL="0" indent="0" algn="l">
               <a:spcAft>
                 <a:spcPts val="300"/>
               </a:spcAft>
               <a:buNone/>
             </a:pPr>
             <a:r>
-              <a:rPr sz="1250" b="0" i="0">
+              <a:rPr sz="1250" b="0" i="0" dirty="0" err="1">
                 <a:solidFill>
                   <a:srgbClr val="8A7A6D"/>
                 </a:solidFill>
                 <a:latin typeface="Malgun Gothic"/>
               </a:rPr>
-              <a:t>카페용·매장용 이용권 구분</a:t>
-            </a:r>
+              <a:t>카페용·매장용</a:t>
+            </a:r>
+            <a:r>
+              <a:rPr sz="1250" b="0" i="0" dirty="0">
+                <a:solidFill>
+                  <a:srgbClr val="8A7A6D"/>
+                </a:solidFill>
+                <a:latin typeface="Malgun Gothic"/>
+              </a:rPr>
+              <a:t> </a:t>
+            </a:r>
+            <a:r>
+              <a:rPr sz="1250" b="0" i="0" dirty="0" err="1">
+                <a:solidFill>
+                  <a:srgbClr val="8A7A6D"/>
+                </a:solidFill>
+                <a:latin typeface="Malgun Gothic"/>
+              </a:rPr>
+              <a:t>이용권</a:t>
+            </a:r>
+            <a:r>
+              <a:rPr sz="1250" b="0" i="0" dirty="0">
+                <a:solidFill>
+                  <a:srgbClr val="8A7A6D"/>
+                </a:solidFill>
+                <a:latin typeface="Malgun Gothic"/>
+              </a:rPr>
+              <a:t> </a:t>
+            </a:r>
+            <a:r>
+              <a:rPr sz="1250" b="0" i="0" dirty="0" err="1">
+                <a:solidFill>
+                  <a:srgbClr val="8A7A6D"/>
+                </a:solidFill>
+                <a:latin typeface="Malgun Gothic"/>
+              </a:rPr>
+              <a:t>구분</a:t>
+            </a:r>
+            <a:endParaRPr sz="1250" b="0" i="0" dirty="0">
+              <a:solidFill>
+                <a:srgbClr val="8A7A6D"/>
+              </a:solidFill>
+              <a:latin typeface="Malgun Gothic"/>
+            </a:endParaRPr>
           </a:p>
         </p:txBody>
       </p:sp>
@@ -7393,6 +7717,7 @@
           <a:lstStyle/>
           <a:p>
             <a:pPr algn="ctr"/>
+            <a:endParaRPr/>
           </a:p>
         </p:txBody>
       </p:sp>
@@ -7437,6 +7762,7 @@
           <a:lstStyle/>
           <a:p>
             <a:pPr algn="ctr"/>
+            <a:endParaRPr/>
           </a:p>
         </p:txBody>
       </p:sp>
@@ -7457,12 +7783,12 @@
           <a:noFill/>
         </p:spPr>
         <p:txBody>
-          <a:bodyPr wrap="square" anchor="ctr" lIns="25400" rIns="25400" tIns="12700" bIns="12700">
+          <a:bodyPr wrap="square" lIns="25400" tIns="12700" rIns="25400" bIns="12700" anchor="ctr">
             <a:spAutoFit/>
           </a:bodyPr>
           <a:lstStyle/>
           <a:p>
-            <a:pPr algn="ctr" marL="0" indent="0">
+            <a:pPr marL="0" indent="0" algn="ctr">
               <a:buNone/>
             </a:pPr>
             <a:r>
@@ -7494,12 +7820,12 @@
           <a:noFill/>
         </p:spPr>
         <p:txBody>
-          <a:bodyPr wrap="square" anchor="ctr" lIns="25400" rIns="25400" tIns="12700" bIns="12700">
+          <a:bodyPr wrap="square" lIns="25400" tIns="12700" rIns="25400" bIns="12700" anchor="ctr">
             <a:spAutoFit/>
           </a:bodyPr>
           <a:lstStyle/>
           <a:p>
-            <a:pPr algn="l" marL="0" indent="0">
+            <a:pPr marL="0" indent="0" algn="l">
               <a:spcAft>
                 <a:spcPts val="300"/>
               </a:spcAft>
@@ -7516,7 +7842,7 @@
             </a:r>
           </a:p>
           <a:p>
-            <a:pPr algn="l" marL="0" indent="0">
+            <a:pPr marL="0" indent="0" algn="l">
               <a:spcAft>
                 <a:spcPts val="300"/>
               </a:spcAft>
@@ -7579,6 +7905,7 @@
           <a:lstStyle/>
           <a:p>
             <a:pPr algn="ctr"/>
+            <a:endParaRPr/>
           </a:p>
         </p:txBody>
       </p:sp>
@@ -7623,6 +7950,7 @@
           <a:lstStyle/>
           <a:p>
             <a:pPr algn="ctr"/>
+            <a:endParaRPr/>
           </a:p>
         </p:txBody>
       </p:sp>
@@ -7643,12 +7971,12 @@
           <a:noFill/>
         </p:spPr>
         <p:txBody>
-          <a:bodyPr wrap="square" anchor="ctr" lIns="25400" rIns="25400" tIns="12700" bIns="12700">
+          <a:bodyPr wrap="square" lIns="25400" tIns="12700" rIns="25400" bIns="12700" anchor="ctr">
             <a:spAutoFit/>
           </a:bodyPr>
           <a:lstStyle/>
           <a:p>
-            <a:pPr algn="ctr" marL="0" indent="0">
+            <a:pPr marL="0" indent="0" algn="ctr">
               <a:buNone/>
             </a:pPr>
             <a:r>
@@ -7671,8 +7999,8 @@
         </p:nvSpPr>
         <p:spPr>
           <a:xfrm>
-            <a:off x="1399032" y="7459152"/>
-            <a:ext cx="4892040" cy="1254426"/>
+            <a:off x="1399032" y="7835014"/>
+            <a:ext cx="4892040" cy="502702"/>
           </a:xfrm>
           <a:prstGeom prst="rect">
             <a:avLst/>
@@ -7680,43 +8008,163 @@
           <a:noFill/>
         </p:spPr>
         <p:txBody>
-          <a:bodyPr wrap="square" anchor="ctr" lIns="25400" rIns="25400" tIns="12700" bIns="12700">
+          <a:bodyPr wrap="square" lIns="25400" tIns="12700" rIns="25400" bIns="12700" anchor="ctr">
             <a:spAutoFit/>
           </a:bodyPr>
           <a:lstStyle/>
           <a:p>
-            <a:pPr algn="l" marL="0" indent="0">
+            <a:pPr marL="0" indent="0" algn="l">
               <a:spcAft>
                 <a:spcPts val="300"/>
               </a:spcAft>
               <a:buNone/>
             </a:pPr>
             <a:r>
-              <a:rPr sz="1600" b="1" i="0">
+              <a:rPr sz="1600" b="1" i="0" dirty="0">
                 <a:solidFill>
                   <a:srgbClr val="3B2A20"/>
                 </a:solidFill>
                 <a:latin typeface="Malgun Gothic"/>
               </a:rPr>
-              <a:t>5. 중고장터</a:t>
-            </a:r>
-          </a:p>
-          <a:p>
-            <a:pPr algn="l" marL="0" indent="0">
+              <a:t>5. </a:t>
+            </a:r>
+            <a:r>
+              <a:rPr sz="1600" b="1" i="0" dirty="0" err="1">
+                <a:solidFill>
+                  <a:srgbClr val="3B2A20"/>
+                </a:solidFill>
+                <a:latin typeface="Malgun Gothic"/>
+              </a:rPr>
+              <a:t>중고장터</a:t>
+            </a:r>
+            <a:r>
+              <a:rPr lang="en-US" sz="1600" b="1" i="0" dirty="0">
+                <a:solidFill>
+                  <a:srgbClr val="3B2A20"/>
+                </a:solidFill>
+                <a:latin typeface="Malgun Gothic"/>
+              </a:rPr>
+              <a:t> (PiRC3,</a:t>
+            </a:r>
+            <a:r>
+              <a:rPr lang="ko-KR" altLang="en-US" sz="1600" b="1" dirty="0" err="1">
+                <a:solidFill>
+                  <a:srgbClr val="3B2A20"/>
+                </a:solidFill>
+                <a:latin typeface="Malgun Gothic"/>
+              </a:rPr>
+              <a:t>에스크로</a:t>
+            </a:r>
+            <a:r>
+              <a:rPr lang="en-US" altLang="ko-KR" sz="1600" b="1" dirty="0">
+                <a:solidFill>
+                  <a:srgbClr val="3B2A20"/>
+                </a:solidFill>
+                <a:latin typeface="Malgun Gothic"/>
+              </a:rPr>
+              <a:t>-</a:t>
+            </a:r>
+            <a:r>
+              <a:rPr lang="ko-KR" altLang="en-US" sz="1600" b="1" dirty="0">
+                <a:solidFill>
+                  <a:srgbClr val="3B2A20"/>
+                </a:solidFill>
+                <a:latin typeface="Malgun Gothic"/>
+              </a:rPr>
+              <a:t>안전거래</a:t>
+            </a:r>
+            <a:r>
+              <a:rPr lang="en-US" sz="1600" b="1" i="0" dirty="0">
+                <a:solidFill>
+                  <a:srgbClr val="3B2A20"/>
+                </a:solidFill>
+                <a:latin typeface="Malgun Gothic"/>
+              </a:rPr>
+              <a:t>)</a:t>
+            </a:r>
+            <a:endParaRPr sz="1600" b="1" i="0" dirty="0">
+              <a:solidFill>
+                <a:srgbClr val="3B2A20"/>
+              </a:solidFill>
+              <a:latin typeface="Malgun Gothic"/>
+            </a:endParaRPr>
+          </a:p>
+          <a:p>
+            <a:pPr marL="0" indent="0" algn="l">
               <a:spcAft>
                 <a:spcPts val="300"/>
               </a:spcAft>
               <a:buNone/>
             </a:pPr>
             <a:r>
-              <a:rPr sz="1250" b="0" i="0">
+              <a:rPr sz="1250" b="0" i="0" dirty="0" err="1">
                 <a:solidFill>
                   <a:srgbClr val="8A7A6D"/>
                 </a:solidFill>
                 <a:latin typeface="Malgun Gothic"/>
               </a:rPr>
-              <a:t>가게 없이 누구나 사고팔기</a:t>
-            </a:r>
+              <a:t>가게</a:t>
+            </a:r>
+            <a:r>
+              <a:rPr sz="1250" b="0" i="0" dirty="0">
+                <a:solidFill>
+                  <a:srgbClr val="8A7A6D"/>
+                </a:solidFill>
+                <a:latin typeface="Malgun Gothic"/>
+              </a:rPr>
+              <a:t> </a:t>
+            </a:r>
+            <a:r>
+              <a:rPr sz="1250" b="0" i="0" dirty="0" err="1">
+                <a:solidFill>
+                  <a:srgbClr val="8A7A6D"/>
+                </a:solidFill>
+                <a:latin typeface="Malgun Gothic"/>
+              </a:rPr>
+              <a:t>없이</a:t>
+            </a:r>
+            <a:r>
+              <a:rPr sz="1250" b="0" i="0" dirty="0">
+                <a:solidFill>
+                  <a:srgbClr val="8A7A6D"/>
+                </a:solidFill>
+                <a:latin typeface="Malgun Gothic"/>
+              </a:rPr>
+              <a:t> </a:t>
+            </a:r>
+            <a:r>
+              <a:rPr sz="1250" b="0" i="0" dirty="0" err="1">
+                <a:solidFill>
+                  <a:srgbClr val="8A7A6D"/>
+                </a:solidFill>
+                <a:latin typeface="Malgun Gothic"/>
+              </a:rPr>
+              <a:t>누구나</a:t>
+            </a:r>
+            <a:r>
+              <a:rPr sz="1250" b="0" i="0" dirty="0">
+                <a:solidFill>
+                  <a:srgbClr val="8A7A6D"/>
+                </a:solidFill>
+                <a:latin typeface="Malgun Gothic"/>
+              </a:rPr>
+              <a:t> </a:t>
+            </a:r>
+            <a:r>
+              <a:rPr sz="1250" b="0" i="0" dirty="0" err="1">
+                <a:solidFill>
+                  <a:srgbClr val="8A7A6D"/>
+                </a:solidFill>
+                <a:latin typeface="Malgun Gothic"/>
+              </a:rPr>
+              <a:t>사고팔기</a:t>
+            </a:r>
+            <a:endParaRPr sz="1250" b="0" i="0" dirty="0">
+              <a:solidFill>
+                <a:srgbClr val="8A7A6D"/>
+              </a:solidFill>
+              <a:latin typeface="Malgun Gothic"/>
+            </a:endParaRPr>
           </a:p>
         </p:txBody>
       </p:sp>
@@ -7765,6 +8213,7 @@
           <a:lstStyle/>
           <a:p>
             <a:pPr algn="ctr"/>
+            <a:endParaRPr/>
           </a:p>
         </p:txBody>
       </p:sp>
@@ -7809,6 +8258,7 @@
           <a:lstStyle/>
           <a:p>
             <a:pPr algn="ctr"/>
+            <a:endParaRPr/>
           </a:p>
         </p:txBody>
       </p:sp>
@@ -7829,12 +8279,12 @@
           <a:noFill/>
         </p:spPr>
         <p:txBody>
-          <a:bodyPr wrap="square" anchor="ctr" lIns="25400" rIns="25400" tIns="12700" bIns="12700">
+          <a:bodyPr wrap="square" lIns="25400" tIns="12700" rIns="25400" bIns="12700" anchor="ctr">
             <a:spAutoFit/>
           </a:bodyPr>
           <a:lstStyle/>
           <a:p>
-            <a:pPr algn="ctr" marL="0" indent="0">
+            <a:pPr marL="0" indent="0" algn="ctr">
               <a:buNone/>
             </a:pPr>
             <a:r>
@@ -7857,8 +8307,8 @@
         </p:nvSpPr>
         <p:spPr>
           <a:xfrm>
-            <a:off x="1399032" y="8878170"/>
-            <a:ext cx="4892040" cy="1254426"/>
+            <a:off x="1399032" y="9254032"/>
+            <a:ext cx="4892040" cy="502702"/>
           </a:xfrm>
           <a:prstGeom prst="rect">
             <a:avLst/>
@@ -7866,43 +8316,189 @@
           <a:noFill/>
         </p:spPr>
         <p:txBody>
-          <a:bodyPr wrap="square" anchor="ctr" lIns="25400" rIns="25400" tIns="12700" bIns="12700">
+          <a:bodyPr wrap="square" lIns="25400" tIns="12700" rIns="25400" bIns="12700" anchor="ctr">
             <a:spAutoFit/>
           </a:bodyPr>
           <a:lstStyle/>
           <a:p>
-            <a:pPr algn="l" marL="0" indent="0">
+            <a:pPr>
               <a:spcAft>
                 <a:spcPts val="300"/>
               </a:spcAft>
-              <a:buNone/>
-            </a:pPr>
-            <a:r>
-              <a:rPr sz="1600" b="1" i="0">
+            </a:pPr>
+            <a:r>
+              <a:rPr sz="1600" b="1" i="0" dirty="0">
                 <a:solidFill>
                   <a:srgbClr val="3B2A20"/>
                 </a:solidFill>
                 <a:latin typeface="Malgun Gothic"/>
               </a:rPr>
-              <a:t>6. 내 가게(O2O)</a:t>
-            </a:r>
-          </a:p>
-          <a:p>
-            <a:pPr algn="l" marL="0" indent="0">
+              <a:t>6. 내 </a:t>
+            </a:r>
+            <a:r>
+              <a:rPr sz="1600" b="1" i="0" dirty="0" err="1">
+                <a:solidFill>
+                  <a:srgbClr val="3B2A20"/>
+                </a:solidFill>
+                <a:latin typeface="Malgun Gothic"/>
+              </a:rPr>
+              <a:t>가게</a:t>
+            </a:r>
+            <a:r>
+              <a:rPr sz="1600" b="1" i="0" dirty="0">
+                <a:solidFill>
+                  <a:srgbClr val="3B2A20"/>
+                </a:solidFill>
+                <a:latin typeface="Malgun Gothic"/>
+              </a:rPr>
+              <a:t>(O2O)</a:t>
+            </a:r>
+            <a:r>
+              <a:rPr lang="en-US" altLang="ko-KR" sz="1600" b="1" dirty="0">
+                <a:solidFill>
+                  <a:srgbClr val="3B2A20"/>
+                </a:solidFill>
+                <a:latin typeface="Malgun Gothic"/>
+              </a:rPr>
+              <a:t> (PiRC3,</a:t>
+            </a:r>
+            <a:r>
+              <a:rPr lang="ko-KR" altLang="en-US" sz="1600" b="1" dirty="0" err="1">
+                <a:solidFill>
+                  <a:srgbClr val="3B2A20"/>
+                </a:solidFill>
+                <a:latin typeface="Malgun Gothic"/>
+              </a:rPr>
+              <a:t>에스크로</a:t>
+            </a:r>
+            <a:r>
+              <a:rPr lang="en-US" altLang="ko-KR" sz="1600" b="1" dirty="0">
+                <a:solidFill>
+                  <a:srgbClr val="3B2A20"/>
+                </a:solidFill>
+                <a:latin typeface="Malgun Gothic"/>
+              </a:rPr>
+              <a:t>-</a:t>
+            </a:r>
+            <a:r>
+              <a:rPr lang="ko-KR" altLang="en-US" sz="1600" b="1" dirty="0">
+                <a:solidFill>
+                  <a:srgbClr val="3B2A20"/>
+                </a:solidFill>
+                <a:latin typeface="Malgun Gothic"/>
+              </a:rPr>
+              <a:t>안전거래</a:t>
+            </a:r>
+            <a:r>
+              <a:rPr lang="en-US" altLang="ko-KR" sz="1600" b="1" dirty="0">
+                <a:solidFill>
+                  <a:srgbClr val="3B2A20"/>
+                </a:solidFill>
+                <a:latin typeface="Malgun Gothic"/>
+              </a:rPr>
+              <a:t>)</a:t>
+            </a:r>
+            <a:endParaRPr sz="1600" b="1" i="0" dirty="0">
+              <a:solidFill>
+                <a:srgbClr val="3B2A20"/>
+              </a:solidFill>
+              <a:latin typeface="Malgun Gothic"/>
+            </a:endParaRPr>
+          </a:p>
+          <a:p>
+            <a:pPr marL="0" indent="0" algn="l">
               <a:spcAft>
                 <a:spcPts val="300"/>
               </a:spcAft>
               <a:buNone/>
             </a:pPr>
             <a:r>
-              <a:rPr sz="1250" b="0" i="0">
+              <a:rPr sz="1250" b="0" i="0" dirty="0" err="1">
                 <a:solidFill>
                   <a:srgbClr val="8A7A6D"/>
                 </a:solidFill>
                 <a:latin typeface="Malgun Gothic"/>
               </a:rPr>
-              <a:t>가게 만들고 메뉴 올리고 주문받기</a:t>
-            </a:r>
+              <a:t>가게</a:t>
+            </a:r>
+            <a:r>
+              <a:rPr sz="1250" b="0" i="0" dirty="0">
+                <a:solidFill>
+                  <a:srgbClr val="8A7A6D"/>
+                </a:solidFill>
+                <a:latin typeface="Malgun Gothic"/>
+              </a:rPr>
+              <a:t> </a:t>
+            </a:r>
+            <a:r>
+              <a:rPr sz="1250" b="0" i="0" dirty="0" err="1">
+                <a:solidFill>
+                  <a:srgbClr val="8A7A6D"/>
+                </a:solidFill>
+                <a:latin typeface="Malgun Gothic"/>
+              </a:rPr>
+              <a:t>만들고</a:t>
+            </a:r>
+            <a:r>
+              <a:rPr sz="1250" b="0" i="0" dirty="0">
+                <a:solidFill>
+                  <a:srgbClr val="8A7A6D"/>
+                </a:solidFill>
+                <a:latin typeface="Malgun Gothic"/>
+              </a:rPr>
+              <a:t> </a:t>
+            </a:r>
+            <a:r>
+              <a:rPr sz="1250" b="0" i="0" dirty="0" err="1">
+                <a:solidFill>
+                  <a:srgbClr val="8A7A6D"/>
+                </a:solidFill>
+                <a:latin typeface="Malgun Gothic"/>
+              </a:rPr>
+              <a:t>메뉴</a:t>
+            </a:r>
+            <a:r>
+              <a:rPr sz="1250" b="0" i="0" dirty="0">
+                <a:solidFill>
+                  <a:srgbClr val="8A7A6D"/>
+                </a:solidFill>
+                <a:latin typeface="Malgun Gothic"/>
+              </a:rPr>
+              <a:t> </a:t>
+            </a:r>
+            <a:r>
+              <a:rPr sz="1250" b="0" i="0" dirty="0" err="1">
+                <a:solidFill>
+                  <a:srgbClr val="8A7A6D"/>
+                </a:solidFill>
+                <a:latin typeface="Malgun Gothic"/>
+              </a:rPr>
+              <a:t>올리고</a:t>
+            </a:r>
+            <a:r>
+              <a:rPr sz="1250" b="0" i="0" dirty="0">
+                <a:solidFill>
+                  <a:srgbClr val="8A7A6D"/>
+                </a:solidFill>
+                <a:latin typeface="Malgun Gothic"/>
+              </a:rPr>
+              <a:t> </a:t>
+            </a:r>
+            <a:r>
+              <a:rPr sz="1250" b="0" i="0" dirty="0" err="1">
+                <a:solidFill>
+                  <a:srgbClr val="8A7A6D"/>
+                </a:solidFill>
+                <a:latin typeface="Malgun Gothic"/>
+              </a:rPr>
+              <a:t>주문받기</a:t>
+            </a:r>
+            <a:endParaRPr sz="1250" b="0" i="0" dirty="0">
+              <a:solidFill>
+                <a:srgbClr val="8A7A6D"/>
+              </a:solidFill>
+              <a:latin typeface="Malgun Gothic"/>
+            </a:endParaRPr>
           </a:p>
         </p:txBody>
       </p:sp>
@@ -7951,6 +8547,7 @@
           <a:lstStyle/>
           <a:p>
             <a:pPr algn="ctr"/>
+            <a:endParaRPr/>
           </a:p>
         </p:txBody>
       </p:sp>
@@ -7995,6 +8592,7 @@
           <a:lstStyle/>
           <a:p>
             <a:pPr algn="ctr"/>
+            <a:endParaRPr/>
           </a:p>
         </p:txBody>
       </p:sp>
@@ -8015,12 +8613,12 @@
           <a:noFill/>
         </p:spPr>
         <p:txBody>
-          <a:bodyPr wrap="square" anchor="ctr" lIns="25400" rIns="25400" tIns="12700" bIns="12700">
+          <a:bodyPr wrap="square" lIns="25400" tIns="12700" rIns="25400" bIns="12700" anchor="ctr">
             <a:spAutoFit/>
           </a:bodyPr>
           <a:lstStyle/>
           <a:p>
-            <a:pPr algn="ctr" marL="0" indent="0">
+            <a:pPr marL="0" indent="0" algn="ctr">
               <a:buNone/>
             </a:pPr>
             <a:r>
@@ -8052,12 +8650,12 @@
           <a:noFill/>
         </p:spPr>
         <p:txBody>
-          <a:bodyPr wrap="square" anchor="ctr" lIns="25400" rIns="25400" tIns="12700" bIns="12700">
+          <a:bodyPr wrap="square" lIns="25400" tIns="12700" rIns="25400" bIns="12700" anchor="ctr">
             <a:spAutoFit/>
           </a:bodyPr>
           <a:lstStyle/>
           <a:p>
-            <a:pPr algn="l" marL="0" indent="0">
+            <a:pPr marL="0" indent="0" algn="l">
               <a:spcAft>
                 <a:spcPts val="300"/>
               </a:spcAft>
@@ -8074,7 +8672,7 @@
             </a:r>
           </a:p>
           <a:p>
-            <a:pPr algn="l" marL="0" indent="0">
+            <a:pPr marL="0" indent="0" algn="l">
               <a:spcAft>
                 <a:spcPts val="300"/>
               </a:spcAft>
@@ -8109,12 +8707,12 @@
           <a:noFill/>
         </p:spPr>
         <p:txBody>
-          <a:bodyPr wrap="square" anchor="ctr" lIns="25400" rIns="25400" tIns="12700" bIns="12700">
+          <a:bodyPr wrap="square" lIns="25400" tIns="12700" rIns="25400" bIns="12700" anchor="ctr">
             <a:spAutoFit/>
           </a:bodyPr>
           <a:lstStyle/>
           <a:p>
-            <a:pPr algn="l" marL="0" indent="0">
+            <a:pPr marL="0" indent="0" algn="l">
               <a:buNone/>
             </a:pPr>
             <a:r>
@@ -8146,12 +8744,12 @@
           <a:noFill/>
         </p:spPr>
         <p:txBody>
-          <a:bodyPr wrap="square" anchor="ctr" lIns="25400" rIns="25400" tIns="12700" bIns="12700">
+          <a:bodyPr wrap="square" lIns="25400" tIns="12700" rIns="25400" bIns="12700" anchor="ctr">
             <a:spAutoFit/>
           </a:bodyPr>
           <a:lstStyle/>
           <a:p>
-            <a:pPr algn="r" marL="0" indent="0">
+            <a:pPr marL="0" indent="0" algn="r">
               <a:buNone/>
             </a:pPr>
             <a:r>
@@ -8175,7 +8773,7 @@
 </file>
 
 <file path=ppt/slides/slide3.xml><?xml version="1.0" encoding="utf-8"?>
-<p:sld xmlns:a="http://schemas.openxmlformats.org/drawingml/2006/main" xmlns:p="http://schemas.openxmlformats.org/presentationml/2006/main" xmlns:r="http://schemas.openxmlformats.org/officeDocument/2006/relationships">
+<p:sld xmlns:a="http://schemas.openxmlformats.org/drawingml/2006/main" xmlns:r="http://schemas.openxmlformats.org/officeDocument/2006/relationships" xmlns:p="http://schemas.openxmlformats.org/presentationml/2006/main">
   <p:cSld>
     <p:spTree>
       <p:nvGrpSpPr>
@@ -8183,7 +8781,14 @@
         <p:cNvGrpSpPr/>
         <p:nvPr/>
       </p:nvGrpSpPr>
-      <p:grpSpPr/>
+      <p:grpSpPr>
+        <a:xfrm>
+          <a:off x="0" y="0"/>
+          <a:ext cx="0" cy="0"/>
+          <a:chOff x="0" y="0"/>
+          <a:chExt cx="0" cy="0"/>
+        </a:xfrm>
+      </p:grpSpPr>
       <p:sp>
         <p:nvSpPr>
           <p:cNvPr id="2" name="Rectangle 1"/>
@@ -8225,6 +8830,7 @@
           <a:lstStyle/>
           <a:p>
             <a:pPr algn="ctr"/>
+            <a:endParaRPr/>
           </a:p>
         </p:txBody>
       </p:sp>
@@ -8269,6 +8875,7 @@
           <a:lstStyle/>
           <a:p>
             <a:pPr algn="ctr"/>
+            <a:endParaRPr/>
           </a:p>
         </p:txBody>
       </p:sp>
@@ -8313,6 +8920,7 @@
           <a:lstStyle/>
           <a:p>
             <a:pPr algn="ctr"/>
+            <a:endParaRPr/>
           </a:p>
         </p:txBody>
       </p:sp>
@@ -8357,6 +8965,7 @@
           <a:lstStyle/>
           <a:p>
             <a:pPr algn="ctr"/>
+            <a:endParaRPr/>
           </a:p>
         </p:txBody>
       </p:sp>
@@ -8377,12 +8986,12 @@
           <a:noFill/>
         </p:spPr>
         <p:txBody>
-          <a:bodyPr wrap="square" anchor="ctr" lIns="25400" rIns="25400" tIns="12700" bIns="12700">
+          <a:bodyPr wrap="square" lIns="25400" tIns="12700" rIns="25400" bIns="12700" anchor="ctr">
             <a:spAutoFit/>
           </a:bodyPr>
           <a:lstStyle/>
           <a:p>
-            <a:pPr algn="ctr" marL="0" indent="0">
+            <a:pPr marL="0" indent="0" algn="ctr">
               <a:buNone/>
             </a:pPr>
             <a:r>
@@ -8414,12 +9023,12 @@
           <a:noFill/>
         </p:spPr>
         <p:txBody>
-          <a:bodyPr wrap="square" anchor="ctr" lIns="25400" rIns="25400" tIns="12700" bIns="12700">
+          <a:bodyPr wrap="square" lIns="25400" tIns="12700" rIns="25400" bIns="12700" anchor="ctr">
             <a:spAutoFit/>
           </a:bodyPr>
           <a:lstStyle/>
           <a:p>
-            <a:pPr algn="l" marL="0" indent="0">
+            <a:pPr marL="0" indent="0" algn="l">
               <a:buNone/>
             </a:pPr>
             <a:r>
@@ -8451,12 +9060,12 @@
           <a:noFill/>
         </p:spPr>
         <p:txBody>
-          <a:bodyPr wrap="square" anchor="ctr" lIns="25400" rIns="25400" tIns="12700" bIns="12700">
+          <a:bodyPr wrap="square" lIns="25400" tIns="12700" rIns="25400" bIns="12700" anchor="ctr">
             <a:spAutoFit/>
           </a:bodyPr>
           <a:lstStyle/>
           <a:p>
-            <a:pPr algn="l" marL="0" indent="0">
+            <a:pPr marL="0" indent="0" algn="l">
               <a:buNone/>
             </a:pPr>
             <a:r>
@@ -8516,6 +9125,7 @@
           <a:lstStyle/>
           <a:p>
             <a:pPr algn="ctr"/>
+            <a:endParaRPr/>
           </a:p>
         </p:txBody>
       </p:sp>
@@ -8562,6 +9172,7 @@
           <a:lstStyle/>
           <a:p>
             <a:pPr algn="ctr"/>
+            <a:endParaRPr/>
           </a:p>
         </p:txBody>
       </p:sp>
@@ -8606,6 +9217,7 @@
           <a:lstStyle/>
           <a:p>
             <a:pPr algn="ctr"/>
+            <a:endParaRPr/>
           </a:p>
         </p:txBody>
       </p:sp>
@@ -8626,12 +9238,12 @@
           <a:noFill/>
         </p:spPr>
         <p:txBody>
-          <a:bodyPr wrap="square" anchor="ctr" lIns="25400" rIns="25400" tIns="12700" bIns="12700">
+          <a:bodyPr wrap="square" lIns="25400" tIns="12700" rIns="25400" bIns="12700" anchor="ctr">
             <a:spAutoFit/>
           </a:bodyPr>
           <a:lstStyle/>
           <a:p>
-            <a:pPr algn="l" marL="0" indent="0">
+            <a:pPr marL="0" indent="0" algn="l">
               <a:buNone/>
             </a:pPr>
             <a:r>
@@ -8663,12 +9275,12 @@
           <a:noFill/>
         </p:spPr>
         <p:txBody>
-          <a:bodyPr wrap="square" anchor="t" lIns="25400" rIns="25400" tIns="12700" bIns="12700">
+          <a:bodyPr wrap="square" lIns="25400" tIns="12700" rIns="25400" bIns="12700" anchor="t">
             <a:spAutoFit/>
           </a:bodyPr>
           <a:lstStyle/>
           <a:p>
-            <a:pPr algn="l" marL="0" indent="0">
+            <a:pPr marL="0" indent="0" algn="l">
               <a:buNone/>
             </a:pPr>
             <a:r>
@@ -8728,6 +9340,7 @@
           <a:lstStyle/>
           <a:p>
             <a:pPr algn="ctr"/>
+            <a:endParaRPr/>
           </a:p>
         </p:txBody>
       </p:sp>
@@ -8748,12 +9361,12 @@
           <a:noFill/>
         </p:spPr>
         <p:txBody>
-          <a:bodyPr wrap="square" anchor="ctr" lIns="25400" rIns="25400" tIns="12700" bIns="12700">
+          <a:bodyPr wrap="square" lIns="25400" tIns="12700" rIns="25400" bIns="12700" anchor="ctr">
             <a:spAutoFit/>
           </a:bodyPr>
           <a:lstStyle/>
           <a:p>
-            <a:pPr algn="ctr" marL="0" indent="0">
+            <a:pPr marL="0" indent="0" algn="ctr">
               <a:buNone/>
             </a:pPr>
             <a:r>
@@ -8785,12 +9398,12 @@
           <a:noFill/>
         </p:spPr>
         <p:txBody>
-          <a:bodyPr wrap="square" anchor="ctr" lIns="25400" rIns="25400" tIns="12700" bIns="12700">
+          <a:bodyPr wrap="square" lIns="25400" tIns="12700" rIns="25400" bIns="12700" anchor="ctr">
             <a:spAutoFit/>
           </a:bodyPr>
           <a:lstStyle/>
           <a:p>
-            <a:pPr algn="l" marL="0" indent="0">
+            <a:pPr marL="0" indent="0" algn="l">
               <a:spcAft>
                 <a:spcPts val="200"/>
               </a:spcAft>
@@ -8807,7 +9420,7 @@
             </a:r>
           </a:p>
           <a:p>
-            <a:pPr algn="l" marL="0" indent="0">
+            <a:pPr marL="0" indent="0" algn="l">
               <a:spcAft>
                 <a:spcPts val="200"/>
               </a:spcAft>
@@ -8842,12 +9455,12 @@
           <a:noFill/>
         </p:spPr>
         <p:txBody>
-          <a:bodyPr wrap="square" anchor="t" lIns="25400" rIns="25400" tIns="12700" bIns="12700">
+          <a:bodyPr wrap="square" lIns="25400" tIns="12700" rIns="25400" bIns="12700" anchor="t">
             <a:spAutoFit/>
           </a:bodyPr>
           <a:lstStyle/>
           <a:p>
-            <a:pPr algn="l" marL="0" indent="0">
+            <a:pPr marL="0" indent="0" algn="l">
               <a:buNone/>
             </a:pPr>
             <a:r>
@@ -8879,12 +9492,12 @@
           <a:noFill/>
         </p:spPr>
         <p:txBody>
-          <a:bodyPr wrap="square" anchor="t" lIns="25400" rIns="25400" tIns="12700" bIns="12700">
+          <a:bodyPr wrap="square" lIns="25400" tIns="12700" rIns="25400" bIns="12700" anchor="t">
             <a:spAutoFit/>
           </a:bodyPr>
           <a:lstStyle/>
           <a:p>
-            <a:pPr algn="l" marL="0" indent="0">
+            <a:pPr marL="0" indent="0" algn="l">
               <a:buNone/>
             </a:pPr>
             <a:r>
@@ -8916,12 +9529,12 @@
           <a:noFill/>
         </p:spPr>
         <p:txBody>
-          <a:bodyPr wrap="square" anchor="ctr" lIns="25400" rIns="25400" tIns="12700" bIns="12700">
+          <a:bodyPr wrap="square" lIns="25400" tIns="12700" rIns="25400" bIns="12700" anchor="ctr">
             <a:spAutoFit/>
           </a:bodyPr>
           <a:lstStyle/>
           <a:p>
-            <a:pPr algn="ctr" marL="0" indent="0">
+            <a:pPr marL="0" indent="0" algn="ctr">
               <a:buNone/>
             </a:pPr>
             <a:r>
@@ -8981,6 +9594,7 @@
           <a:lstStyle/>
           <a:p>
             <a:pPr algn="ctr"/>
+            <a:endParaRPr/>
           </a:p>
         </p:txBody>
       </p:sp>
@@ -9027,6 +9641,7 @@
           <a:lstStyle/>
           <a:p>
             <a:pPr algn="ctr"/>
+            <a:endParaRPr/>
           </a:p>
         </p:txBody>
       </p:sp>
@@ -9071,6 +9686,7 @@
           <a:lstStyle/>
           <a:p>
             <a:pPr algn="ctr"/>
+            <a:endParaRPr/>
           </a:p>
         </p:txBody>
       </p:sp>
@@ -9091,12 +9707,12 @@
           <a:noFill/>
         </p:spPr>
         <p:txBody>
-          <a:bodyPr wrap="square" anchor="ctr" lIns="25400" rIns="25400" tIns="12700" bIns="12700">
+          <a:bodyPr wrap="square" lIns="25400" tIns="12700" rIns="25400" bIns="12700" anchor="ctr">
             <a:spAutoFit/>
           </a:bodyPr>
           <a:lstStyle/>
           <a:p>
-            <a:pPr algn="l" marL="0" indent="0">
+            <a:pPr marL="0" indent="0" algn="l">
               <a:buNone/>
             </a:pPr>
             <a:r>
@@ -9128,12 +9744,12 @@
           <a:noFill/>
         </p:spPr>
         <p:txBody>
-          <a:bodyPr wrap="square" anchor="t" lIns="25400" rIns="25400" tIns="12700" bIns="12700">
+          <a:bodyPr wrap="square" lIns="25400" tIns="12700" rIns="25400" bIns="12700" anchor="t">
             <a:spAutoFit/>
           </a:bodyPr>
           <a:lstStyle/>
           <a:p>
-            <a:pPr algn="l" marL="0" indent="0">
+            <a:pPr marL="0" indent="0" algn="l">
               <a:buNone/>
             </a:pPr>
             <a:r>
@@ -9193,6 +9809,7 @@
           <a:lstStyle/>
           <a:p>
             <a:pPr algn="ctr"/>
+            <a:endParaRPr/>
           </a:p>
         </p:txBody>
       </p:sp>
@@ -9213,12 +9830,12 @@
           <a:noFill/>
         </p:spPr>
         <p:txBody>
-          <a:bodyPr wrap="square" anchor="ctr" lIns="25400" rIns="25400" tIns="12700" bIns="12700">
+          <a:bodyPr wrap="square" lIns="25400" tIns="12700" rIns="25400" bIns="12700" anchor="ctr">
             <a:spAutoFit/>
           </a:bodyPr>
           <a:lstStyle/>
           <a:p>
-            <a:pPr algn="l" marL="0" indent="0">
+            <a:pPr marL="0" indent="0" algn="l">
               <a:buNone/>
             </a:pPr>
             <a:r>
@@ -9250,12 +9867,12 @@
           <a:noFill/>
         </p:spPr>
         <p:txBody>
-          <a:bodyPr wrap="square" anchor="t" lIns="25400" rIns="25400" tIns="12700" bIns="12700">
+          <a:bodyPr wrap="square" lIns="25400" tIns="12700" rIns="25400" bIns="12700" anchor="t">
             <a:spAutoFit/>
           </a:bodyPr>
           <a:lstStyle/>
           <a:p>
-            <a:pPr algn="l" marL="0" indent="0">
+            <a:pPr marL="0" indent="0" algn="l">
               <a:buNone/>
             </a:pPr>
             <a:r>
@@ -9287,12 +9904,12 @@
           <a:noFill/>
         </p:spPr>
         <p:txBody>
-          <a:bodyPr wrap="square" anchor="t" lIns="25400" rIns="25400" tIns="12700" bIns="12700">
+          <a:bodyPr wrap="square" lIns="25400" tIns="12700" rIns="25400" bIns="12700" anchor="t">
             <a:spAutoFit/>
           </a:bodyPr>
           <a:lstStyle/>
           <a:p>
-            <a:pPr algn="l" marL="0" indent="0">
+            <a:pPr marL="0" indent="0" algn="l">
               <a:buNone/>
             </a:pPr>
             <a:r>
@@ -9350,6 +9967,7 @@
           <a:lstStyle/>
           <a:p>
             <a:pPr algn="ctr"/>
+            <a:endParaRPr/>
           </a:p>
         </p:txBody>
       </p:sp>
@@ -9394,6 +10012,7 @@
           <a:lstStyle/>
           <a:p>
             <a:pPr algn="ctr"/>
+            <a:endParaRPr/>
           </a:p>
         </p:txBody>
       </p:sp>
@@ -9414,12 +10033,12 @@
           <a:noFill/>
         </p:spPr>
         <p:txBody>
-          <a:bodyPr wrap="square" anchor="ctr" lIns="25400" rIns="25400" tIns="12700" bIns="12700">
+          <a:bodyPr wrap="square" lIns="25400" tIns="12700" rIns="25400" bIns="12700" anchor="ctr">
             <a:spAutoFit/>
           </a:bodyPr>
           <a:lstStyle/>
           <a:p>
-            <a:pPr algn="l" marL="0" indent="0">
+            <a:pPr marL="0" indent="0" algn="l">
               <a:buNone/>
             </a:pPr>
             <a:r>
@@ -9460,12 +10079,12 @@
           <a:noFill/>
         </p:spPr>
         <p:txBody>
-          <a:bodyPr wrap="square" anchor="ctr" lIns="25400" rIns="25400" tIns="12700" bIns="12700">
+          <a:bodyPr wrap="square" lIns="25400" tIns="12700" rIns="25400" bIns="12700" anchor="ctr">
             <a:spAutoFit/>
           </a:bodyPr>
           <a:lstStyle/>
           <a:p>
-            <a:pPr algn="l" marL="0" indent="0">
+            <a:pPr marL="0" indent="0" algn="l">
               <a:buNone/>
             </a:pPr>
             <a:r>
@@ -9497,12 +10116,12 @@
           <a:noFill/>
         </p:spPr>
         <p:txBody>
-          <a:bodyPr wrap="square" anchor="ctr" lIns="25400" rIns="25400" tIns="12700" bIns="12700">
+          <a:bodyPr wrap="square" lIns="25400" tIns="12700" rIns="25400" bIns="12700" anchor="ctr">
             <a:spAutoFit/>
           </a:bodyPr>
           <a:lstStyle/>
           <a:p>
-            <a:pPr algn="r" marL="0" indent="0">
+            <a:pPr marL="0" indent="0" algn="r">
               <a:buNone/>
             </a:pPr>
             <a:r>
@@ -9526,7 +10145,7 @@
 </file>
 
 <file path=ppt/slides/slide4.xml><?xml version="1.0" encoding="utf-8"?>
-<p:sld xmlns:a="http://schemas.openxmlformats.org/drawingml/2006/main" xmlns:p="http://schemas.openxmlformats.org/presentationml/2006/main" xmlns:r="http://schemas.openxmlformats.org/officeDocument/2006/relationships">
+<p:sld xmlns:a="http://schemas.openxmlformats.org/drawingml/2006/main" xmlns:r="http://schemas.openxmlformats.org/officeDocument/2006/relationships" xmlns:p="http://schemas.openxmlformats.org/presentationml/2006/main">
   <p:cSld>
     <p:spTree>
       <p:nvGrpSpPr>
@@ -9534,7 +10153,14 @@
         <p:cNvGrpSpPr/>
         <p:nvPr/>
       </p:nvGrpSpPr>
-      <p:grpSpPr/>
+      <p:grpSpPr>
+        <a:xfrm>
+          <a:off x="0" y="0"/>
+          <a:ext cx="0" cy="0"/>
+          <a:chOff x="0" y="0"/>
+          <a:chExt cx="0" cy="0"/>
+        </a:xfrm>
+      </p:grpSpPr>
       <p:sp>
         <p:nvSpPr>
           <p:cNvPr id="2" name="Rectangle 1"/>
@@ -9576,6 +10202,7 @@
           <a:lstStyle/>
           <a:p>
             <a:pPr algn="ctr"/>
+            <a:endParaRPr/>
           </a:p>
         </p:txBody>
       </p:sp>
@@ -9620,6 +10247,7 @@
           <a:lstStyle/>
           <a:p>
             <a:pPr algn="ctr"/>
+            <a:endParaRPr/>
           </a:p>
         </p:txBody>
       </p:sp>
@@ -9664,6 +10292,7 @@
           <a:lstStyle/>
           <a:p>
             <a:pPr algn="ctr"/>
+            <a:endParaRPr/>
           </a:p>
         </p:txBody>
       </p:sp>
@@ -9708,6 +10337,7 @@
           <a:lstStyle/>
           <a:p>
             <a:pPr algn="ctr"/>
+            <a:endParaRPr/>
           </a:p>
         </p:txBody>
       </p:sp>
@@ -9728,12 +10358,12 @@
           <a:noFill/>
         </p:spPr>
         <p:txBody>
-          <a:bodyPr wrap="square" anchor="ctr" lIns="25400" rIns="25400" tIns="12700" bIns="12700">
+          <a:bodyPr wrap="square" lIns="25400" tIns="12700" rIns="25400" bIns="12700" anchor="ctr">
             <a:spAutoFit/>
           </a:bodyPr>
           <a:lstStyle/>
           <a:p>
-            <a:pPr algn="ctr" marL="0" indent="0">
+            <a:pPr marL="0" indent="0" algn="ctr">
               <a:buNone/>
             </a:pPr>
             <a:r>
@@ -9756,8 +10386,8 @@
         </p:nvSpPr>
         <p:spPr>
           <a:xfrm>
-            <a:off x="1389888" y="365760"/>
-            <a:ext cx="5056632" cy="1005840"/>
+            <a:off x="1389888" y="709662"/>
+            <a:ext cx="5056632" cy="318036"/>
           </a:xfrm>
           <a:prstGeom prst="rect">
             <a:avLst/>
@@ -9765,23 +10395,74 @@
           <a:noFill/>
         </p:spPr>
         <p:txBody>
-          <a:bodyPr wrap="square" anchor="ctr" lIns="25400" rIns="25400" tIns="12700" bIns="12700">
+          <a:bodyPr wrap="square" lIns="25400" tIns="12700" rIns="25400" bIns="12700" anchor="ctr">
             <a:spAutoFit/>
           </a:bodyPr>
           <a:lstStyle/>
           <a:p>
-            <a:pPr algn="l" marL="0" indent="0">
-              <a:buNone/>
-            </a:pPr>
-            <a:r>
-              <a:rPr sz="1900" b="1" i="0">
+            <a:pPr marL="0" indent="0" algn="l">
+              <a:buNone/>
+            </a:pPr>
+            <a:r>
+              <a:rPr sz="1900" b="1" i="0" dirty="0">
                 <a:solidFill>
                   <a:srgbClr val="3B2A20"/>
                 </a:solidFill>
                 <a:latin typeface="Malgun Gothic"/>
               </a:rPr>
-              <a:t>☕  Bean(커피빈 토큰) 이해하기</a:t>
-            </a:r>
+              <a:t>☕  Bean(</a:t>
+            </a:r>
+            <a:r>
+              <a:rPr lang="ko-KR" altLang="en-US" sz="1900" b="1" i="0" dirty="0" err="1">
+                <a:solidFill>
+                  <a:srgbClr val="3B2A20"/>
+                </a:solidFill>
+                <a:latin typeface="Malgun Gothic"/>
+              </a:rPr>
+              <a:t>카페빈</a:t>
+            </a:r>
+            <a:r>
+              <a:rPr sz="1900" b="1" i="0" dirty="0">
+                <a:solidFill>
+                  <a:srgbClr val="3B2A20"/>
+                </a:solidFill>
+                <a:latin typeface="Malgun Gothic"/>
+              </a:rPr>
+              <a:t> </a:t>
+            </a:r>
+            <a:r>
+              <a:rPr sz="1900" b="1" i="0" dirty="0" err="1">
+                <a:solidFill>
+                  <a:srgbClr val="3B2A20"/>
+                </a:solidFill>
+                <a:latin typeface="Malgun Gothic"/>
+              </a:rPr>
+              <a:t>토큰</a:t>
+            </a:r>
+            <a:r>
+              <a:rPr sz="1900" b="1" i="0" dirty="0">
+                <a:solidFill>
+                  <a:srgbClr val="3B2A20"/>
+                </a:solidFill>
+                <a:latin typeface="Malgun Gothic"/>
+              </a:rPr>
+              <a:t>) </a:t>
+            </a:r>
+            <a:r>
+              <a:rPr sz="1900" b="1" i="0" dirty="0" err="1">
+                <a:solidFill>
+                  <a:srgbClr val="3B2A20"/>
+                </a:solidFill>
+                <a:latin typeface="Malgun Gothic"/>
+              </a:rPr>
+              <a:t>이해하기</a:t>
+            </a:r>
+            <a:endParaRPr sz="1900" b="1" i="0" dirty="0">
+              <a:solidFill>
+                <a:srgbClr val="3B2A20"/>
+              </a:solidFill>
+              <a:latin typeface="Malgun Gothic"/>
+            </a:endParaRPr>
           </a:p>
         </p:txBody>
       </p:sp>
@@ -9793,8 +10474,8 @@
         </p:nvSpPr>
         <p:spPr>
           <a:xfrm>
-            <a:off x="411480" y="1188720"/>
-            <a:ext cx="6035040" cy="502920"/>
+            <a:off x="411480" y="1242690"/>
+            <a:ext cx="6035040" cy="394980"/>
           </a:xfrm>
           <a:prstGeom prst="rect">
             <a:avLst/>
@@ -9802,22 +10483,229 @@
           <a:noFill/>
         </p:spPr>
         <p:txBody>
-          <a:bodyPr wrap="square" anchor="ctr" lIns="25400" rIns="25400" tIns="12700" bIns="12700">
+          <a:bodyPr wrap="square" lIns="25400" tIns="12700" rIns="25400" bIns="12700" anchor="ctr">
             <a:spAutoFit/>
           </a:bodyPr>
           <a:lstStyle/>
           <a:p>
-            <a:pPr algn="l" marL="0" indent="0">
-              <a:buNone/>
-            </a:pPr>
-            <a:r>
-              <a:rPr sz="1200" b="0" i="0">
+            <a:pPr marL="0" indent="0" algn="l">
+              <a:buNone/>
+            </a:pPr>
+            <a:r>
+              <a:rPr lang="ko-KR" altLang="en-US" sz="1200" b="0" i="0" dirty="0" err="1">
                 <a:solidFill>
                   <a:srgbClr val="8A7A6D"/>
                 </a:solidFill>
                 <a:latin typeface="Malgun Gothic"/>
               </a:rPr>
-              <a:t>커피빈 토큰은 앱 안에서 마음을 전하는 작은 토큰이에요. 충전해서 쓰고, 고마운 사람에게 보냅니다.</a:t>
+              <a:t>카페빈</a:t>
+            </a:r>
+            <a:r>
+              <a:rPr sz="1200" b="0" i="0" dirty="0">
+                <a:solidFill>
+                  <a:srgbClr val="8A7A6D"/>
+                </a:solidFill>
+                <a:latin typeface="Malgun Gothic"/>
+              </a:rPr>
+              <a:t> </a:t>
+            </a:r>
+            <a:r>
+              <a:rPr sz="1200" b="0" i="0" dirty="0" err="1">
+                <a:solidFill>
+                  <a:srgbClr val="8A7A6D"/>
+                </a:solidFill>
+                <a:latin typeface="Malgun Gothic"/>
+              </a:rPr>
+              <a:t>토큰은</a:t>
+            </a:r>
+            <a:r>
+              <a:rPr sz="1200" b="0" i="0" dirty="0">
+                <a:solidFill>
+                  <a:srgbClr val="8A7A6D"/>
+                </a:solidFill>
+                <a:latin typeface="Malgun Gothic"/>
+              </a:rPr>
+              <a:t> 앱 </a:t>
+            </a:r>
+            <a:r>
+              <a:rPr sz="1200" b="0" i="0" dirty="0" err="1">
+                <a:solidFill>
+                  <a:srgbClr val="8A7A6D"/>
+                </a:solidFill>
+                <a:latin typeface="Malgun Gothic"/>
+              </a:rPr>
+              <a:t>안에서</a:t>
+            </a:r>
+            <a:r>
+              <a:rPr sz="1200" b="0" i="0" dirty="0">
+                <a:solidFill>
+                  <a:srgbClr val="8A7A6D"/>
+                </a:solidFill>
+                <a:latin typeface="Malgun Gothic"/>
+              </a:rPr>
+              <a:t> </a:t>
+            </a:r>
+            <a:r>
+              <a:rPr sz="1200" b="0" i="0" dirty="0" err="1">
+                <a:solidFill>
+                  <a:srgbClr val="8A7A6D"/>
+                </a:solidFill>
+                <a:latin typeface="Malgun Gothic"/>
+              </a:rPr>
+              <a:t>마음을</a:t>
+            </a:r>
+            <a:r>
+              <a:rPr sz="1200" b="0" i="0" dirty="0">
+                <a:solidFill>
+                  <a:srgbClr val="8A7A6D"/>
+                </a:solidFill>
+                <a:latin typeface="Malgun Gothic"/>
+              </a:rPr>
+              <a:t> </a:t>
+            </a:r>
+            <a:r>
+              <a:rPr sz="1200" b="0" i="0" dirty="0" err="1">
+                <a:solidFill>
+                  <a:srgbClr val="8A7A6D"/>
+                </a:solidFill>
+                <a:latin typeface="Malgun Gothic"/>
+              </a:rPr>
+              <a:t>전하는</a:t>
+            </a:r>
+            <a:r>
+              <a:rPr sz="1200" b="0" i="0" dirty="0">
+                <a:solidFill>
+                  <a:srgbClr val="8A7A6D"/>
+                </a:solidFill>
+                <a:latin typeface="Malgun Gothic"/>
+              </a:rPr>
+              <a:t> </a:t>
+            </a:r>
+            <a:r>
+              <a:rPr sz="1200" b="0" i="0" dirty="0" err="1">
+                <a:solidFill>
+                  <a:srgbClr val="8A7A6D"/>
+                </a:solidFill>
+                <a:latin typeface="Malgun Gothic"/>
+              </a:rPr>
+              <a:t>작은</a:t>
+            </a:r>
+            <a:r>
+              <a:rPr sz="1200" b="0" i="0" dirty="0">
+                <a:solidFill>
+                  <a:srgbClr val="8A7A6D"/>
+                </a:solidFill>
+                <a:latin typeface="Malgun Gothic"/>
+              </a:rPr>
+              <a:t> </a:t>
+            </a:r>
+            <a:r>
+              <a:rPr sz="1200" b="0" i="0" dirty="0" err="1">
+                <a:solidFill>
+                  <a:srgbClr val="8A7A6D"/>
+                </a:solidFill>
+                <a:latin typeface="Malgun Gothic"/>
+              </a:rPr>
+              <a:t>토큰이에요</a:t>
+            </a:r>
+            <a:r>
+              <a:rPr sz="1200" b="0" i="0" dirty="0">
+                <a:solidFill>
+                  <a:srgbClr val="8A7A6D"/>
+                </a:solidFill>
+                <a:latin typeface="Malgun Gothic"/>
+              </a:rPr>
+              <a:t>. </a:t>
+            </a:r>
+            <a:r>
+              <a:rPr sz="1200" b="0" i="0" dirty="0" err="1">
+                <a:solidFill>
+                  <a:srgbClr val="8A7A6D"/>
+                </a:solidFill>
+                <a:latin typeface="Malgun Gothic"/>
+              </a:rPr>
+              <a:t>충전해서</a:t>
+            </a:r>
+            <a:r>
+              <a:rPr sz="1200" b="0" i="0" dirty="0">
+                <a:solidFill>
+                  <a:srgbClr val="8A7A6D"/>
+                </a:solidFill>
+                <a:latin typeface="Malgun Gothic"/>
+              </a:rPr>
+              <a:t> </a:t>
+            </a:r>
+            <a:r>
+              <a:rPr sz="1200" b="0" i="0" dirty="0" err="1">
+                <a:solidFill>
+                  <a:srgbClr val="8A7A6D"/>
+                </a:solidFill>
+                <a:latin typeface="Malgun Gothic"/>
+              </a:rPr>
+              <a:t>쓰고</a:t>
+            </a:r>
+            <a:r>
+              <a:rPr sz="1200" b="0" i="0" dirty="0">
+                <a:solidFill>
+                  <a:srgbClr val="8A7A6D"/>
+                </a:solidFill>
+                <a:latin typeface="Malgun Gothic"/>
+              </a:rPr>
+              <a:t>, </a:t>
+            </a:r>
+            <a:r>
+              <a:rPr sz="1200" b="0" i="0" dirty="0" err="1">
+                <a:solidFill>
+                  <a:srgbClr val="8A7A6D"/>
+                </a:solidFill>
+                <a:latin typeface="Malgun Gothic"/>
+              </a:rPr>
+              <a:t>고마운</a:t>
+            </a:r>
+            <a:r>
+              <a:rPr sz="1200" b="0" i="0" dirty="0">
+                <a:solidFill>
+                  <a:srgbClr val="8A7A6D"/>
+                </a:solidFill>
+                <a:latin typeface="Malgun Gothic"/>
+              </a:rPr>
+              <a:t> </a:t>
+            </a:r>
+            <a:r>
+              <a:rPr sz="1200" b="0" i="0" dirty="0" err="1">
+                <a:solidFill>
+                  <a:srgbClr val="8A7A6D"/>
+                </a:solidFill>
+                <a:latin typeface="Malgun Gothic"/>
+              </a:rPr>
+              <a:t>사람에게</a:t>
+            </a:r>
+            <a:r>
+              <a:rPr sz="1200" b="0" i="0" dirty="0">
+                <a:solidFill>
+                  <a:srgbClr val="8A7A6D"/>
+                </a:solidFill>
+                <a:latin typeface="Malgun Gothic"/>
+              </a:rPr>
+              <a:t> </a:t>
+            </a:r>
+            <a:r>
+              <a:rPr sz="1200" b="0" i="0" dirty="0" err="1">
+                <a:solidFill>
+                  <a:srgbClr val="8A7A6D"/>
+                </a:solidFill>
+                <a:latin typeface="Malgun Gothic"/>
+              </a:rPr>
+              <a:t>보냅니다</a:t>
+            </a:r>
+            <a:r>
+              <a:rPr sz="1200" b="0" i="0" dirty="0">
+                <a:solidFill>
+                  <a:srgbClr val="8A7A6D"/>
+                </a:solidFill>
+                <a:latin typeface="Malgun Gothic"/>
+              </a:rPr>
+              <a:t>.</a:t>
             </a:r>
           </a:p>
         </p:txBody>
@@ -9867,6 +10755,7 @@
           <a:lstStyle/>
           <a:p>
             <a:pPr algn="ctr"/>
+            <a:endParaRPr/>
           </a:p>
         </p:txBody>
       </p:sp>
@@ -9911,6 +10800,7 @@
           <a:lstStyle/>
           <a:p>
             <a:pPr algn="ctr"/>
+            <a:endParaRPr/>
           </a:p>
         </p:txBody>
       </p:sp>
@@ -9931,12 +10821,12 @@
           <a:noFill/>
         </p:spPr>
         <p:txBody>
-          <a:bodyPr wrap="square" anchor="ctr" lIns="25400" rIns="25400" tIns="12700" bIns="12700">
+          <a:bodyPr wrap="square" lIns="25400" tIns="12700" rIns="25400" bIns="12700" anchor="ctr">
             <a:spAutoFit/>
           </a:bodyPr>
           <a:lstStyle/>
           <a:p>
-            <a:pPr algn="ctr" marL="0" indent="0">
+            <a:pPr marL="0" indent="0" algn="ctr">
               <a:buNone/>
             </a:pPr>
             <a:r>
@@ -9959,8 +10849,8 @@
         </p:nvSpPr>
         <p:spPr>
           <a:xfrm>
-            <a:off x="1280160" y="2286000"/>
-            <a:ext cx="4892040" cy="2011680"/>
+            <a:off x="1280160" y="2935332"/>
+            <a:ext cx="4892040" cy="713016"/>
           </a:xfrm>
           <a:prstGeom prst="rect">
             <a:avLst/>
@@ -9968,42 +10858,276 @@
           <a:noFill/>
         </p:spPr>
         <p:txBody>
-          <a:bodyPr wrap="square" anchor="ctr" lIns="25400" rIns="25400" tIns="12700" bIns="12700">
+          <a:bodyPr wrap="square" lIns="25400" tIns="12700" rIns="25400" bIns="12700" anchor="ctr">
             <a:spAutoFit/>
           </a:bodyPr>
           <a:lstStyle/>
           <a:p>
-            <a:pPr algn="l" marL="0" indent="0">
+            <a:pPr marL="0" indent="0" algn="l">
               <a:spcAft>
                 <a:spcPts val="500"/>
               </a:spcAft>
               <a:buNone/>
             </a:pPr>
             <a:r>
-              <a:rPr sz="1550" b="1" i="0">
+              <a:rPr sz="1550" b="1" i="0" dirty="0" err="1">
                 <a:solidFill>
                   <a:srgbClr val="3B2A20"/>
                 </a:solidFill>
                 <a:latin typeface="Malgun Gothic"/>
               </a:rPr>
-              <a:t>Bean이 뭐예요?</a:t>
-            </a:r>
-          </a:p>
-          <a:p>
-            <a:pPr algn="l" marL="0" indent="0">
+              <a:t>Bean이</a:t>
+            </a:r>
+            <a:r>
+              <a:rPr sz="1550" b="1" i="0" dirty="0">
+                <a:solidFill>
+                  <a:srgbClr val="3B2A20"/>
+                </a:solidFill>
+                <a:latin typeface="Malgun Gothic"/>
+              </a:rPr>
+              <a:t> </a:t>
+            </a:r>
+            <a:r>
+              <a:rPr sz="1550" b="1" i="0" dirty="0" err="1">
+                <a:solidFill>
+                  <a:srgbClr val="3B2A20"/>
+                </a:solidFill>
+                <a:latin typeface="Malgun Gothic"/>
+              </a:rPr>
+              <a:t>뭐예요</a:t>
+            </a:r>
+            <a:r>
+              <a:rPr sz="1550" b="1" i="0" dirty="0">
+                <a:solidFill>
+                  <a:srgbClr val="3B2A20"/>
+                </a:solidFill>
+                <a:latin typeface="Malgun Gothic"/>
+              </a:rPr>
+              <a:t>?</a:t>
+            </a:r>
+          </a:p>
+          <a:p>
+            <a:pPr marL="0" indent="0" algn="l">
               <a:spcAft>
                 <a:spcPts val="500"/>
               </a:spcAft>
               <a:buNone/>
             </a:pPr>
             <a:r>
-              <a:rPr sz="1250" b="0" i="0">
+              <a:rPr sz="1250" b="0" i="0" dirty="0" err="1">
                 <a:solidFill>
                   <a:srgbClr val="2B2018"/>
                 </a:solidFill>
                 <a:latin typeface="Malgun Gothic"/>
               </a:rPr>
-              <a:t>카페에서 고마운 사람에게 보내는 “커피빈 토큰(☕)”이에요. 칭찬·응원·감사를 숫자 대신 커피빈으로 표현합니다.</a:t>
+              <a:t>카페에서</a:t>
+            </a:r>
+            <a:r>
+              <a:rPr sz="1250" b="0" i="0" dirty="0">
+                <a:solidFill>
+                  <a:srgbClr val="2B2018"/>
+                </a:solidFill>
+                <a:latin typeface="Malgun Gothic"/>
+              </a:rPr>
+              <a:t> </a:t>
+            </a:r>
+            <a:r>
+              <a:rPr sz="1250" b="0" i="0" dirty="0" err="1">
+                <a:solidFill>
+                  <a:srgbClr val="2B2018"/>
+                </a:solidFill>
+                <a:latin typeface="Malgun Gothic"/>
+              </a:rPr>
+              <a:t>고마운</a:t>
+            </a:r>
+            <a:r>
+              <a:rPr sz="1250" b="0" i="0" dirty="0">
+                <a:solidFill>
+                  <a:srgbClr val="2B2018"/>
+                </a:solidFill>
+                <a:latin typeface="Malgun Gothic"/>
+              </a:rPr>
+              <a:t> </a:t>
+            </a:r>
+            <a:r>
+              <a:rPr sz="1250" b="0" i="0" dirty="0" err="1">
+                <a:solidFill>
+                  <a:srgbClr val="2B2018"/>
+                </a:solidFill>
+                <a:latin typeface="Malgun Gothic"/>
+              </a:rPr>
+              <a:t>사람에게</a:t>
+            </a:r>
+            <a:r>
+              <a:rPr sz="1250" b="0" i="0" dirty="0">
+                <a:solidFill>
+                  <a:srgbClr val="2B2018"/>
+                </a:solidFill>
+                <a:latin typeface="Malgun Gothic"/>
+              </a:rPr>
+              <a:t> </a:t>
+            </a:r>
+            <a:r>
+              <a:rPr sz="1250" b="0" i="0" dirty="0" err="1">
+                <a:solidFill>
+                  <a:srgbClr val="2B2018"/>
+                </a:solidFill>
+                <a:latin typeface="Malgun Gothic"/>
+              </a:rPr>
+              <a:t>보내는</a:t>
+            </a:r>
+            <a:r>
+              <a:rPr sz="1250" b="0" i="0" dirty="0">
+                <a:solidFill>
+                  <a:srgbClr val="2B2018"/>
+                </a:solidFill>
+                <a:latin typeface="Malgun Gothic"/>
+              </a:rPr>
+              <a:t> “</a:t>
+            </a:r>
+            <a:r>
+              <a:rPr lang="ko-KR" altLang="en-US" sz="1250" b="0" i="0" dirty="0" err="1">
+                <a:solidFill>
+                  <a:srgbClr val="2B2018"/>
+                </a:solidFill>
+                <a:latin typeface="Malgun Gothic"/>
+              </a:rPr>
+              <a:t>카페빈</a:t>
+            </a:r>
+            <a:r>
+              <a:rPr sz="1250" b="0" i="0" dirty="0">
+                <a:solidFill>
+                  <a:srgbClr val="2B2018"/>
+                </a:solidFill>
+                <a:latin typeface="Malgun Gothic"/>
+              </a:rPr>
+              <a:t> </a:t>
+            </a:r>
+            <a:r>
+              <a:rPr sz="1250" b="0" i="0" dirty="0" err="1">
+                <a:solidFill>
+                  <a:srgbClr val="2B2018"/>
+                </a:solidFill>
+                <a:latin typeface="Malgun Gothic"/>
+              </a:rPr>
+              <a:t>토큰</a:t>
+            </a:r>
+            <a:r>
+              <a:rPr sz="1250" b="0" i="0" dirty="0">
+                <a:solidFill>
+                  <a:srgbClr val="2B2018"/>
+                </a:solidFill>
+                <a:latin typeface="Malgun Gothic"/>
+              </a:rPr>
+              <a:t>(☕)”</a:t>
+            </a:r>
+            <a:r>
+              <a:rPr sz="1250" b="0" i="0" dirty="0" err="1">
+                <a:solidFill>
+                  <a:srgbClr val="2B2018"/>
+                </a:solidFill>
+                <a:latin typeface="Malgun Gothic"/>
+              </a:rPr>
+              <a:t>이에요</a:t>
+            </a:r>
+            <a:r>
+              <a:rPr sz="1250" b="0" i="0" dirty="0">
+                <a:solidFill>
+                  <a:srgbClr val="2B2018"/>
+                </a:solidFill>
+                <a:latin typeface="Malgun Gothic"/>
+              </a:rPr>
+              <a:t>. </a:t>
+            </a:r>
+            <a:r>
+              <a:rPr sz="1250" b="0" i="0" dirty="0" err="1">
+                <a:solidFill>
+                  <a:srgbClr val="2B2018"/>
+                </a:solidFill>
+                <a:latin typeface="Malgun Gothic"/>
+              </a:rPr>
+              <a:t>칭찬·응원·감사를</a:t>
+            </a:r>
+            <a:r>
+              <a:rPr sz="1250" b="0" i="0" dirty="0">
+                <a:solidFill>
+                  <a:srgbClr val="2B2018"/>
+                </a:solidFill>
+                <a:latin typeface="Malgun Gothic"/>
+              </a:rPr>
+              <a:t> </a:t>
+            </a:r>
+            <a:r>
+              <a:rPr sz="1250" b="0" i="0" dirty="0" err="1">
+                <a:solidFill>
+                  <a:srgbClr val="2B2018"/>
+                </a:solidFill>
+                <a:latin typeface="Malgun Gothic"/>
+              </a:rPr>
+              <a:t>숫자</a:t>
+            </a:r>
+            <a:r>
+              <a:rPr sz="1250" b="0" i="0" dirty="0">
+                <a:solidFill>
+                  <a:srgbClr val="2B2018"/>
+                </a:solidFill>
+                <a:latin typeface="Malgun Gothic"/>
+              </a:rPr>
+              <a:t> </a:t>
+            </a:r>
+            <a:r>
+              <a:rPr sz="1250" b="0" i="0" dirty="0" err="1">
+                <a:solidFill>
+                  <a:srgbClr val="2B2018"/>
+                </a:solidFill>
+                <a:latin typeface="Malgun Gothic"/>
+              </a:rPr>
+              <a:t>대신</a:t>
+            </a:r>
+            <a:r>
+              <a:rPr sz="1250" b="0" i="0" dirty="0">
+                <a:solidFill>
+                  <a:srgbClr val="2B2018"/>
+                </a:solidFill>
+                <a:latin typeface="Malgun Gothic"/>
+              </a:rPr>
+              <a:t> </a:t>
+            </a:r>
+            <a:r>
+              <a:rPr lang="ko-KR" altLang="en-US" sz="1250" b="0" i="0" dirty="0">
+                <a:solidFill>
+                  <a:srgbClr val="2B2018"/>
+                </a:solidFill>
+                <a:latin typeface="Malgun Gothic"/>
+              </a:rPr>
+              <a:t>카페빈으로</a:t>
+            </a:r>
+            <a:r>
+              <a:rPr sz="1250" b="0" i="0" dirty="0">
+                <a:solidFill>
+                  <a:srgbClr val="2B2018"/>
+                </a:solidFill>
+                <a:latin typeface="Malgun Gothic"/>
+              </a:rPr>
+              <a:t> </a:t>
+            </a:r>
+            <a:r>
+              <a:rPr sz="1250" b="0" i="0" dirty="0" err="1">
+                <a:solidFill>
+                  <a:srgbClr val="2B2018"/>
+                </a:solidFill>
+                <a:latin typeface="Malgun Gothic"/>
+              </a:rPr>
+              <a:t>표현합니다</a:t>
+            </a:r>
+            <a:r>
+              <a:rPr sz="1250" b="0" i="0" dirty="0">
+                <a:solidFill>
+                  <a:srgbClr val="2B2018"/>
+                </a:solidFill>
+                <a:latin typeface="Malgun Gothic"/>
+              </a:rPr>
+              <a:t>.</a:t>
             </a:r>
           </a:p>
         </p:txBody>
@@ -10053,6 +11177,7 @@
           <a:lstStyle/>
           <a:p>
             <a:pPr algn="ctr"/>
+            <a:endParaRPr/>
           </a:p>
         </p:txBody>
       </p:sp>
@@ -10097,6 +11222,7 @@
           <a:lstStyle/>
           <a:p>
             <a:pPr algn="ctr"/>
+            <a:endParaRPr/>
           </a:p>
         </p:txBody>
       </p:sp>
@@ -10117,12 +11243,12 @@
           <a:noFill/>
         </p:spPr>
         <p:txBody>
-          <a:bodyPr wrap="square" anchor="ctr" lIns="25400" rIns="25400" tIns="12700" bIns="12700">
+          <a:bodyPr wrap="square" lIns="25400" tIns="12700" rIns="25400" bIns="12700" anchor="ctr">
             <a:spAutoFit/>
           </a:bodyPr>
           <a:lstStyle/>
           <a:p>
-            <a:pPr algn="ctr" marL="0" indent="0">
+            <a:pPr marL="0" indent="0" algn="ctr">
               <a:buNone/>
             </a:pPr>
             <a:r>
@@ -10145,8 +11271,8 @@
         </p:nvSpPr>
         <p:spPr>
           <a:xfrm>
-            <a:off x="1280160" y="5432907"/>
-            <a:ext cx="4892040" cy="2011680"/>
+            <a:off x="1280160" y="6082239"/>
+            <a:ext cx="4892040" cy="713016"/>
           </a:xfrm>
           <a:prstGeom prst="rect">
             <a:avLst/>
@@ -10154,42 +11280,354 @@
           <a:noFill/>
         </p:spPr>
         <p:txBody>
-          <a:bodyPr wrap="square" anchor="ctr" lIns="25400" rIns="25400" tIns="12700" bIns="12700">
+          <a:bodyPr wrap="square" lIns="25400" tIns="12700" rIns="25400" bIns="12700" anchor="ctr">
             <a:spAutoFit/>
           </a:bodyPr>
           <a:lstStyle/>
           <a:p>
-            <a:pPr algn="l" marL="0" indent="0">
+            <a:pPr marL="0" indent="0" algn="l">
               <a:spcAft>
                 <a:spcPts val="500"/>
               </a:spcAft>
               <a:buNone/>
             </a:pPr>
             <a:r>
-              <a:rPr sz="1550" b="1" i="0">
+              <a:rPr sz="1550" b="1" i="0" dirty="0">
                 <a:solidFill>
                   <a:srgbClr val="3B2A20"/>
                 </a:solidFill>
                 <a:latin typeface="Malgun Gothic"/>
               </a:rPr>
-              <a:t>Bean 충전(적립)하기</a:t>
-            </a:r>
-          </a:p>
-          <a:p>
-            <a:pPr algn="l" marL="0" indent="0">
+              <a:t>Bean </a:t>
+            </a:r>
+            <a:r>
+              <a:rPr sz="1550" b="1" i="0" dirty="0" err="1">
+                <a:solidFill>
+                  <a:srgbClr val="3B2A20"/>
+                </a:solidFill>
+                <a:latin typeface="Malgun Gothic"/>
+              </a:rPr>
+              <a:t>충전</a:t>
+            </a:r>
+            <a:r>
+              <a:rPr sz="1550" b="1" i="0" dirty="0">
+                <a:solidFill>
+                  <a:srgbClr val="3B2A20"/>
+                </a:solidFill>
+                <a:latin typeface="Malgun Gothic"/>
+              </a:rPr>
+              <a:t>(</a:t>
+            </a:r>
+            <a:r>
+              <a:rPr sz="1550" b="1" i="0" dirty="0" err="1">
+                <a:solidFill>
+                  <a:srgbClr val="3B2A20"/>
+                </a:solidFill>
+                <a:latin typeface="Malgun Gothic"/>
+              </a:rPr>
+              <a:t>적립</a:t>
+            </a:r>
+            <a:r>
+              <a:rPr sz="1550" b="1" i="0" dirty="0">
+                <a:solidFill>
+                  <a:srgbClr val="3B2A20"/>
+                </a:solidFill>
+                <a:latin typeface="Malgun Gothic"/>
+              </a:rPr>
+              <a:t>)</a:t>
+            </a:r>
+            <a:r>
+              <a:rPr sz="1550" b="1" i="0" dirty="0" err="1">
+                <a:solidFill>
+                  <a:srgbClr val="3B2A20"/>
+                </a:solidFill>
+                <a:latin typeface="Malgun Gothic"/>
+              </a:rPr>
+              <a:t>하기</a:t>
+            </a:r>
+            <a:endParaRPr sz="1550" b="1" i="0" dirty="0">
+              <a:solidFill>
+                <a:srgbClr val="3B2A20"/>
+              </a:solidFill>
+              <a:latin typeface="Malgun Gothic"/>
+            </a:endParaRPr>
+          </a:p>
+          <a:p>
+            <a:pPr marL="0" indent="0" algn="l">
               <a:spcAft>
                 <a:spcPts val="500"/>
               </a:spcAft>
               <a:buNone/>
             </a:pPr>
             <a:r>
-              <a:rPr sz="1250" b="0" i="0">
+              <a:rPr sz="1250" b="0" i="0" dirty="0" err="1">
                 <a:solidFill>
                   <a:srgbClr val="2B2018"/>
                 </a:solidFill>
                 <a:latin typeface="Malgun Gothic"/>
               </a:rPr>
-              <a:t>Pi로 커피빈 토큰을 충전해요. 충전 버튼을 누르고 원하는 만큼 고른 뒤 Pi로 결제하면 내 커피빈 토큰이 쌓입니다.</a:t>
+              <a:t>Pi로</a:t>
+            </a:r>
+            <a:r>
+              <a:rPr sz="1250" b="0" i="0" dirty="0">
+                <a:solidFill>
+                  <a:srgbClr val="2B2018"/>
+                </a:solidFill>
+                <a:latin typeface="Malgun Gothic"/>
+              </a:rPr>
+              <a:t> </a:t>
+            </a:r>
+            <a:r>
+              <a:rPr lang="ko-KR" altLang="en-US" sz="1250" b="0" i="0" dirty="0" err="1">
+                <a:solidFill>
+                  <a:srgbClr val="2B2018"/>
+                </a:solidFill>
+                <a:latin typeface="Malgun Gothic"/>
+              </a:rPr>
+              <a:t>카페빈</a:t>
+            </a:r>
+            <a:r>
+              <a:rPr sz="1250" b="0" i="0" dirty="0">
+                <a:solidFill>
+                  <a:srgbClr val="2B2018"/>
+                </a:solidFill>
+                <a:latin typeface="Malgun Gothic"/>
+              </a:rPr>
+              <a:t> </a:t>
+            </a:r>
+            <a:r>
+              <a:rPr sz="1250" b="0" i="0" dirty="0" err="1">
+                <a:solidFill>
+                  <a:srgbClr val="2B2018"/>
+                </a:solidFill>
+                <a:latin typeface="Malgun Gothic"/>
+              </a:rPr>
+              <a:t>토큰을</a:t>
+            </a:r>
+            <a:r>
+              <a:rPr sz="1250" b="0" i="0" dirty="0">
+                <a:solidFill>
+                  <a:srgbClr val="2B2018"/>
+                </a:solidFill>
+                <a:latin typeface="Malgun Gothic"/>
+              </a:rPr>
+              <a:t> </a:t>
+            </a:r>
+            <a:r>
+              <a:rPr sz="1250" b="0" i="0" dirty="0" err="1">
+                <a:solidFill>
+                  <a:srgbClr val="2B2018"/>
+                </a:solidFill>
+                <a:latin typeface="Malgun Gothic"/>
+              </a:rPr>
+              <a:t>충전해요</a:t>
+            </a:r>
+            <a:r>
+              <a:rPr sz="1250" b="0" i="0" dirty="0">
+                <a:solidFill>
+                  <a:srgbClr val="2B2018"/>
+                </a:solidFill>
+                <a:latin typeface="Malgun Gothic"/>
+              </a:rPr>
+              <a:t>. </a:t>
+            </a:r>
+            <a:r>
+              <a:rPr sz="1250" b="0" i="0" dirty="0" err="1">
+                <a:solidFill>
+                  <a:srgbClr val="2B2018"/>
+                </a:solidFill>
+                <a:latin typeface="Malgun Gothic"/>
+              </a:rPr>
+              <a:t>충전</a:t>
+            </a:r>
+            <a:r>
+              <a:rPr sz="1250" b="0" i="0" dirty="0">
+                <a:solidFill>
+                  <a:srgbClr val="2B2018"/>
+                </a:solidFill>
+                <a:latin typeface="Malgun Gothic"/>
+              </a:rPr>
+              <a:t> </a:t>
+            </a:r>
+            <a:r>
+              <a:rPr sz="1250" b="0" i="0" dirty="0" err="1">
+                <a:solidFill>
+                  <a:srgbClr val="2B2018"/>
+                </a:solidFill>
+                <a:latin typeface="Malgun Gothic"/>
+              </a:rPr>
+              <a:t>버튼을</a:t>
+            </a:r>
+            <a:r>
+              <a:rPr sz="1250" b="0" i="0" dirty="0">
+                <a:solidFill>
+                  <a:srgbClr val="2B2018"/>
+                </a:solidFill>
+                <a:latin typeface="Malgun Gothic"/>
+              </a:rPr>
+              <a:t> </a:t>
+            </a:r>
+            <a:r>
+              <a:rPr sz="1250" b="0" i="0" dirty="0" err="1">
+                <a:solidFill>
+                  <a:srgbClr val="2B2018"/>
+                </a:solidFill>
+                <a:latin typeface="Malgun Gothic"/>
+              </a:rPr>
+              <a:t>누르고</a:t>
+            </a:r>
+            <a:r>
+              <a:rPr sz="1250" b="0" i="0" dirty="0">
+                <a:solidFill>
+                  <a:srgbClr val="2B2018"/>
+                </a:solidFill>
+                <a:latin typeface="Malgun Gothic"/>
+              </a:rPr>
+              <a:t> </a:t>
+            </a:r>
+            <a:r>
+              <a:rPr sz="1250" b="0" i="0" dirty="0" err="1">
+                <a:solidFill>
+                  <a:srgbClr val="2B2018"/>
+                </a:solidFill>
+                <a:latin typeface="Malgun Gothic"/>
+              </a:rPr>
+              <a:t>원하는</a:t>
+            </a:r>
+            <a:r>
+              <a:rPr sz="1250" b="0" i="0" dirty="0">
+                <a:solidFill>
+                  <a:srgbClr val="2B2018"/>
+                </a:solidFill>
+                <a:latin typeface="Malgun Gothic"/>
+              </a:rPr>
+              <a:t> </a:t>
+            </a:r>
+            <a:r>
+              <a:rPr sz="1250" b="0" i="0" dirty="0" err="1">
+                <a:solidFill>
+                  <a:srgbClr val="2B2018"/>
+                </a:solidFill>
+                <a:latin typeface="Malgun Gothic"/>
+              </a:rPr>
+              <a:t>만큼</a:t>
+            </a:r>
+            <a:r>
+              <a:rPr sz="1250" b="0" i="0" dirty="0">
+                <a:solidFill>
+                  <a:srgbClr val="2B2018"/>
+                </a:solidFill>
+                <a:latin typeface="Malgun Gothic"/>
+              </a:rPr>
+              <a:t> </a:t>
+            </a:r>
+            <a:r>
+              <a:rPr sz="1250" b="0" i="0" dirty="0" err="1">
+                <a:solidFill>
+                  <a:srgbClr val="2B2018"/>
+                </a:solidFill>
+                <a:latin typeface="Malgun Gothic"/>
+              </a:rPr>
+              <a:t>고른</a:t>
+            </a:r>
+            <a:r>
+              <a:rPr sz="1250" b="0" i="0" dirty="0">
+                <a:solidFill>
+                  <a:srgbClr val="2B2018"/>
+                </a:solidFill>
+                <a:latin typeface="Malgun Gothic"/>
+              </a:rPr>
+              <a:t> 뒤 </a:t>
+            </a:r>
+            <a:r>
+              <a:rPr sz="1250" b="0" i="0" dirty="0" err="1">
+                <a:solidFill>
+                  <a:srgbClr val="2B2018"/>
+                </a:solidFill>
+                <a:latin typeface="Malgun Gothic"/>
+              </a:rPr>
+              <a:t>Pi로</a:t>
+            </a:r>
+            <a:r>
+              <a:rPr sz="1250" b="0" i="0" dirty="0">
+                <a:solidFill>
+                  <a:srgbClr val="2B2018"/>
+                </a:solidFill>
+                <a:latin typeface="Malgun Gothic"/>
+              </a:rPr>
+              <a:t> </a:t>
+            </a:r>
+            <a:r>
+              <a:rPr sz="1250" b="0" i="0" dirty="0" err="1">
+                <a:solidFill>
+                  <a:srgbClr val="2B2018"/>
+                </a:solidFill>
+                <a:latin typeface="Malgun Gothic"/>
+              </a:rPr>
+              <a:t>결제하면</a:t>
+            </a:r>
+            <a:r>
+              <a:rPr sz="1250" b="0" i="0" dirty="0">
+                <a:solidFill>
+                  <a:srgbClr val="2B2018"/>
+                </a:solidFill>
+                <a:latin typeface="Malgun Gothic"/>
+              </a:rPr>
+              <a:t> 내 </a:t>
+            </a:r>
+            <a:r>
+              <a:rPr lang="ko-KR" altLang="en-US" sz="1250" b="0" i="0" dirty="0" err="1">
+                <a:solidFill>
+                  <a:srgbClr val="2B2018"/>
+                </a:solidFill>
+                <a:latin typeface="Malgun Gothic"/>
+              </a:rPr>
+              <a:t>카페빈</a:t>
+            </a:r>
+            <a:r>
+              <a:rPr sz="1250" b="0" i="0" dirty="0">
+                <a:solidFill>
+                  <a:srgbClr val="2B2018"/>
+                </a:solidFill>
+                <a:latin typeface="Malgun Gothic"/>
+              </a:rPr>
+              <a:t> </a:t>
+            </a:r>
+            <a:r>
+              <a:rPr sz="1250" b="0" i="0" dirty="0" err="1">
+                <a:solidFill>
+                  <a:srgbClr val="2B2018"/>
+                </a:solidFill>
+                <a:latin typeface="Malgun Gothic"/>
+              </a:rPr>
+              <a:t>토큰이</a:t>
+            </a:r>
+            <a:r>
+              <a:rPr sz="1250" b="0" i="0" dirty="0">
+                <a:solidFill>
+                  <a:srgbClr val="2B2018"/>
+                </a:solidFill>
+                <a:latin typeface="Malgun Gothic"/>
+              </a:rPr>
+              <a:t> </a:t>
+            </a:r>
+            <a:r>
+              <a:rPr sz="1250" b="0" i="0" dirty="0" err="1">
+                <a:solidFill>
+                  <a:srgbClr val="2B2018"/>
+                </a:solidFill>
+                <a:latin typeface="Malgun Gothic"/>
+              </a:rPr>
+              <a:t>쌓입니다</a:t>
+            </a:r>
+            <a:r>
+              <a:rPr sz="1250" b="0" i="0" dirty="0">
+                <a:solidFill>
+                  <a:srgbClr val="2B2018"/>
+                </a:solidFill>
+                <a:latin typeface="Malgun Gothic"/>
+              </a:rPr>
+              <a:t>.</a:t>
             </a:r>
           </a:p>
         </p:txBody>
@@ -10237,6 +11675,7 @@
           <a:lstStyle/>
           <a:p>
             <a:pPr algn="ctr"/>
+            <a:endParaRPr/>
           </a:p>
         </p:txBody>
       </p:sp>
@@ -10257,12 +11696,12 @@
           <a:noFill/>
         </p:spPr>
         <p:txBody>
-          <a:bodyPr wrap="square" anchor="ctr" lIns="25400" rIns="25400" tIns="12700" bIns="12700">
+          <a:bodyPr wrap="square" lIns="25400" tIns="12700" rIns="25400" bIns="12700" anchor="ctr">
             <a:spAutoFit/>
           </a:bodyPr>
           <a:lstStyle/>
           <a:p>
-            <a:pPr algn="ctr" marL="0" indent="0">
+            <a:pPr marL="0" indent="0" algn="ctr">
               <a:buNone/>
             </a:pPr>
             <a:r>
@@ -10322,6 +11761,7 @@
           <a:lstStyle/>
           <a:p>
             <a:pPr algn="ctr"/>
+            <a:endParaRPr/>
           </a:p>
         </p:txBody>
       </p:sp>
@@ -10366,6 +11806,7 @@
           <a:lstStyle/>
           <a:p>
             <a:pPr algn="ctr"/>
+            <a:endParaRPr/>
           </a:p>
         </p:txBody>
       </p:sp>
@@ -10386,12 +11827,12 @@
           <a:noFill/>
         </p:spPr>
         <p:txBody>
-          <a:bodyPr wrap="square" anchor="ctr" lIns="25400" rIns="25400" tIns="12700" bIns="12700">
+          <a:bodyPr wrap="square" lIns="25400" tIns="12700" rIns="25400" bIns="12700" anchor="ctr">
             <a:spAutoFit/>
           </a:bodyPr>
           <a:lstStyle/>
           <a:p>
-            <a:pPr algn="ctr" marL="0" indent="0">
+            <a:pPr marL="0" indent="0" algn="ctr">
               <a:buNone/>
             </a:pPr>
             <a:r>
@@ -10414,8 +11855,8 @@
         </p:nvSpPr>
         <p:spPr>
           <a:xfrm>
-            <a:off x="1280160" y="8579814"/>
-            <a:ext cx="4892040" cy="2011680"/>
+            <a:off x="1280160" y="9229146"/>
+            <a:ext cx="4892040" cy="713016"/>
           </a:xfrm>
           <a:prstGeom prst="rect">
             <a:avLst/>
@@ -10423,42 +11864,390 @@
           <a:noFill/>
         </p:spPr>
         <p:txBody>
-          <a:bodyPr wrap="square" anchor="ctr" lIns="25400" rIns="25400" tIns="12700" bIns="12700">
+          <a:bodyPr wrap="square" lIns="25400" tIns="12700" rIns="25400" bIns="12700" anchor="ctr">
             <a:spAutoFit/>
           </a:bodyPr>
           <a:lstStyle/>
           <a:p>
-            <a:pPr algn="l" marL="0" indent="0">
+            <a:pPr marL="0" indent="0" algn="l">
               <a:spcAft>
                 <a:spcPts val="500"/>
               </a:spcAft>
               <a:buNone/>
             </a:pPr>
             <a:r>
-              <a:rPr sz="1550" b="1" i="0">
+              <a:rPr sz="1550" b="1" i="0" dirty="0">
                 <a:solidFill>
                   <a:srgbClr val="3B2A20"/>
                 </a:solidFill>
                 <a:latin typeface="Malgun Gothic"/>
               </a:rPr>
-              <a:t>Bean 사용(보내기)하기</a:t>
-            </a:r>
-          </a:p>
-          <a:p>
-            <a:pPr algn="l" marL="0" indent="0">
+              <a:t>Bean </a:t>
+            </a:r>
+            <a:r>
+              <a:rPr sz="1550" b="1" i="0" dirty="0" err="1">
+                <a:solidFill>
+                  <a:srgbClr val="3B2A20"/>
+                </a:solidFill>
+                <a:latin typeface="Malgun Gothic"/>
+              </a:rPr>
+              <a:t>사용</a:t>
+            </a:r>
+            <a:r>
+              <a:rPr sz="1550" b="1" i="0" dirty="0">
+                <a:solidFill>
+                  <a:srgbClr val="3B2A20"/>
+                </a:solidFill>
+                <a:latin typeface="Malgun Gothic"/>
+              </a:rPr>
+              <a:t>(</a:t>
+            </a:r>
+            <a:r>
+              <a:rPr sz="1550" b="1" i="0" dirty="0" err="1">
+                <a:solidFill>
+                  <a:srgbClr val="3B2A20"/>
+                </a:solidFill>
+                <a:latin typeface="Malgun Gothic"/>
+              </a:rPr>
+              <a:t>보내기</a:t>
+            </a:r>
+            <a:r>
+              <a:rPr sz="1550" b="1" i="0" dirty="0">
+                <a:solidFill>
+                  <a:srgbClr val="3B2A20"/>
+                </a:solidFill>
+                <a:latin typeface="Malgun Gothic"/>
+              </a:rPr>
+              <a:t>)</a:t>
+            </a:r>
+            <a:r>
+              <a:rPr sz="1550" b="1" i="0" dirty="0" err="1">
+                <a:solidFill>
+                  <a:srgbClr val="3B2A20"/>
+                </a:solidFill>
+                <a:latin typeface="Malgun Gothic"/>
+              </a:rPr>
+              <a:t>하기</a:t>
+            </a:r>
+            <a:endParaRPr sz="1550" b="1" i="0" dirty="0">
+              <a:solidFill>
+                <a:srgbClr val="3B2A20"/>
+              </a:solidFill>
+              <a:latin typeface="Malgun Gothic"/>
+            </a:endParaRPr>
+          </a:p>
+          <a:p>
+            <a:pPr marL="0" indent="0" algn="l">
               <a:spcAft>
                 <a:spcPts val="500"/>
               </a:spcAft>
               <a:buNone/>
             </a:pPr>
             <a:r>
-              <a:rPr sz="1250" b="0" i="0">
+              <a:rPr sz="1250" b="0" i="0" dirty="0" err="1">
                 <a:solidFill>
                   <a:srgbClr val="2B2018"/>
                 </a:solidFill>
                 <a:latin typeface="Malgun Gothic"/>
               </a:rPr>
-              <a:t>대화방에서 ☕ 선물 버튼을 누르고 10·50·100 Bean 중 골라 보내요. 누구나 보낼 수 있고, 받은 사람은 알림으로 확인합니다.</a:t>
+              <a:t>대화방에서</a:t>
+            </a:r>
+            <a:r>
+              <a:rPr sz="1250" b="0" i="0" dirty="0">
+                <a:solidFill>
+                  <a:srgbClr val="2B2018"/>
+                </a:solidFill>
+                <a:latin typeface="Malgun Gothic"/>
+              </a:rPr>
+              <a:t> ☕ </a:t>
+            </a:r>
+            <a:r>
+              <a:rPr sz="1250" b="0" i="0" dirty="0" err="1">
+                <a:solidFill>
+                  <a:srgbClr val="2B2018"/>
+                </a:solidFill>
+                <a:latin typeface="Malgun Gothic"/>
+              </a:rPr>
+              <a:t>선물</a:t>
+            </a:r>
+            <a:r>
+              <a:rPr sz="1250" b="0" i="0" dirty="0">
+                <a:solidFill>
+                  <a:srgbClr val="2B2018"/>
+                </a:solidFill>
+                <a:latin typeface="Malgun Gothic"/>
+              </a:rPr>
+              <a:t> </a:t>
+            </a:r>
+            <a:r>
+              <a:rPr sz="1250" b="0" i="0" dirty="0" err="1">
+                <a:solidFill>
+                  <a:srgbClr val="2B2018"/>
+                </a:solidFill>
+                <a:latin typeface="Malgun Gothic"/>
+              </a:rPr>
+              <a:t>버튼을</a:t>
+            </a:r>
+            <a:r>
+              <a:rPr sz="1250" b="0" i="0" dirty="0">
+                <a:solidFill>
+                  <a:srgbClr val="2B2018"/>
+                </a:solidFill>
+                <a:latin typeface="Malgun Gothic"/>
+              </a:rPr>
+              <a:t> </a:t>
+            </a:r>
+            <a:r>
+              <a:rPr sz="1250" b="0" i="0" dirty="0" err="1">
+                <a:solidFill>
+                  <a:srgbClr val="2B2018"/>
+                </a:solidFill>
+                <a:latin typeface="Malgun Gothic"/>
+              </a:rPr>
+              <a:t>누르고</a:t>
+            </a:r>
+            <a:r>
+              <a:rPr sz="1250" b="0" i="0" dirty="0">
+                <a:solidFill>
+                  <a:srgbClr val="2B2018"/>
+                </a:solidFill>
+                <a:latin typeface="Malgun Gothic"/>
+              </a:rPr>
+              <a:t> 1</a:t>
+            </a:r>
+            <a:r>
+              <a:rPr lang="en-US" sz="1250" b="0" i="0" dirty="0">
+                <a:solidFill>
+                  <a:srgbClr val="2B2018"/>
+                </a:solidFill>
+                <a:latin typeface="Malgun Gothic"/>
+              </a:rPr>
+              <a:t>0</a:t>
+            </a:r>
+            <a:r>
+              <a:rPr sz="1250" b="0" i="0" dirty="0">
+                <a:solidFill>
+                  <a:srgbClr val="2B2018"/>
+                </a:solidFill>
+                <a:latin typeface="Malgun Gothic"/>
+              </a:rPr>
+              <a:t>0·50</a:t>
+            </a:r>
+            <a:r>
+              <a:rPr lang="en-US" sz="1250" b="0" i="0" dirty="0">
+                <a:solidFill>
+                  <a:srgbClr val="2B2018"/>
+                </a:solidFill>
+                <a:latin typeface="Malgun Gothic"/>
+              </a:rPr>
+              <a:t>0</a:t>
+            </a:r>
+            <a:r>
+              <a:rPr sz="1250" b="0" i="0" dirty="0">
+                <a:solidFill>
+                  <a:srgbClr val="2B2018"/>
+                </a:solidFill>
+                <a:latin typeface="Malgun Gothic"/>
+              </a:rPr>
+              <a:t>·1</a:t>
+            </a:r>
+            <a:r>
+              <a:rPr lang="en-US" sz="1250" b="0" i="0" dirty="0">
+                <a:solidFill>
+                  <a:srgbClr val="2B2018"/>
+                </a:solidFill>
+                <a:latin typeface="Malgun Gothic"/>
+              </a:rPr>
+              <a:t>,</a:t>
+            </a:r>
+            <a:r>
+              <a:rPr sz="1250" b="0" i="0" dirty="0">
+                <a:solidFill>
+                  <a:srgbClr val="2B2018"/>
+                </a:solidFill>
+                <a:latin typeface="Malgun Gothic"/>
+              </a:rPr>
+              <a:t>0</a:t>
+            </a:r>
+            <a:r>
+              <a:rPr lang="en-US" sz="1250" b="0" i="0" dirty="0">
+                <a:solidFill>
+                  <a:srgbClr val="2B2018"/>
+                </a:solidFill>
+                <a:latin typeface="Malgun Gothic"/>
+              </a:rPr>
+              <a:t>0</a:t>
+            </a:r>
+            <a:r>
+              <a:rPr sz="1250" b="0" i="0" dirty="0">
+                <a:solidFill>
+                  <a:srgbClr val="2B2018"/>
+                </a:solidFill>
+                <a:latin typeface="Malgun Gothic"/>
+              </a:rPr>
+              <a:t>0 Bean 중 </a:t>
+            </a:r>
+            <a:r>
+              <a:rPr sz="1250" b="0" i="0" dirty="0" err="1">
+                <a:solidFill>
+                  <a:srgbClr val="2B2018"/>
+                </a:solidFill>
+                <a:latin typeface="Malgun Gothic"/>
+              </a:rPr>
+              <a:t>골라</a:t>
+            </a:r>
+            <a:r>
+              <a:rPr sz="1250" b="0" i="0" dirty="0">
+                <a:solidFill>
+                  <a:srgbClr val="2B2018"/>
+                </a:solidFill>
+                <a:latin typeface="Malgun Gothic"/>
+              </a:rPr>
+              <a:t> </a:t>
+            </a:r>
+            <a:r>
+              <a:rPr sz="1250" b="0" i="0" dirty="0" err="1">
+                <a:solidFill>
+                  <a:srgbClr val="2B2018"/>
+                </a:solidFill>
+                <a:latin typeface="Malgun Gothic"/>
+              </a:rPr>
+              <a:t>보내요</a:t>
+            </a:r>
+            <a:r>
+              <a:rPr sz="1250" b="0" i="0" dirty="0">
+                <a:solidFill>
+                  <a:srgbClr val="2B2018"/>
+                </a:solidFill>
+                <a:latin typeface="Malgun Gothic"/>
+              </a:rPr>
+              <a:t>. </a:t>
+            </a:r>
+            <a:r>
+              <a:rPr sz="1250" b="0" i="0" dirty="0" err="1">
+                <a:solidFill>
+                  <a:srgbClr val="2B2018"/>
+                </a:solidFill>
+                <a:latin typeface="Malgun Gothic"/>
+              </a:rPr>
+              <a:t>누구나</a:t>
+            </a:r>
+            <a:r>
+              <a:rPr sz="1250" b="0" i="0" dirty="0">
+                <a:solidFill>
+                  <a:srgbClr val="2B2018"/>
+                </a:solidFill>
+                <a:latin typeface="Malgun Gothic"/>
+              </a:rPr>
+              <a:t> </a:t>
+            </a:r>
+            <a:r>
+              <a:rPr sz="1250" b="0" i="0" dirty="0" err="1">
+                <a:solidFill>
+                  <a:srgbClr val="2B2018"/>
+                </a:solidFill>
+                <a:latin typeface="Malgun Gothic"/>
+              </a:rPr>
+              <a:t>보낼</a:t>
+            </a:r>
+            <a:r>
+              <a:rPr sz="1250" b="0" i="0" dirty="0">
+                <a:solidFill>
+                  <a:srgbClr val="2B2018"/>
+                </a:solidFill>
+                <a:latin typeface="Malgun Gothic"/>
+              </a:rPr>
+              <a:t> 수 </a:t>
+            </a:r>
+            <a:r>
+              <a:rPr sz="1250" b="0" i="0" dirty="0" err="1">
+                <a:solidFill>
+                  <a:srgbClr val="2B2018"/>
+                </a:solidFill>
+                <a:latin typeface="Malgun Gothic"/>
+              </a:rPr>
+              <a:t>있고</a:t>
+            </a:r>
+            <a:r>
+              <a:rPr sz="1250" b="0" i="0" dirty="0">
+                <a:solidFill>
+                  <a:srgbClr val="2B2018"/>
+                </a:solidFill>
+                <a:latin typeface="Malgun Gothic"/>
+              </a:rPr>
+              <a:t>, </a:t>
+            </a:r>
+            <a:r>
+              <a:rPr sz="1250" b="0" i="0" dirty="0" err="1">
+                <a:solidFill>
+                  <a:srgbClr val="2B2018"/>
+                </a:solidFill>
+                <a:latin typeface="Malgun Gothic"/>
+              </a:rPr>
+              <a:t>받은</a:t>
+            </a:r>
+            <a:r>
+              <a:rPr sz="1250" b="0" i="0" dirty="0">
+                <a:solidFill>
+                  <a:srgbClr val="2B2018"/>
+                </a:solidFill>
+                <a:latin typeface="Malgun Gothic"/>
+              </a:rPr>
+              <a:t> </a:t>
+            </a:r>
+            <a:r>
+              <a:rPr sz="1250" b="0" i="0" dirty="0" err="1">
+                <a:solidFill>
+                  <a:srgbClr val="2B2018"/>
+                </a:solidFill>
+                <a:latin typeface="Malgun Gothic"/>
+              </a:rPr>
+              <a:t>사람은</a:t>
+            </a:r>
+            <a:r>
+              <a:rPr sz="1250" b="0" i="0" dirty="0">
+                <a:solidFill>
+                  <a:srgbClr val="2B2018"/>
+                </a:solidFill>
+                <a:latin typeface="Malgun Gothic"/>
+              </a:rPr>
+              <a:t> </a:t>
+            </a:r>
+            <a:r>
+              <a:rPr sz="1250" b="0" i="0" dirty="0" err="1">
+                <a:solidFill>
+                  <a:srgbClr val="2B2018"/>
+                </a:solidFill>
+                <a:latin typeface="Malgun Gothic"/>
+              </a:rPr>
+              <a:t>알림으로</a:t>
+            </a:r>
+            <a:r>
+              <a:rPr sz="1250" b="0" i="0" dirty="0">
+                <a:solidFill>
+                  <a:srgbClr val="2B2018"/>
+                </a:solidFill>
+                <a:latin typeface="Malgun Gothic"/>
+              </a:rPr>
+              <a:t> </a:t>
+            </a:r>
+            <a:r>
+              <a:rPr sz="1250" b="0" i="0" dirty="0" err="1">
+                <a:solidFill>
+                  <a:srgbClr val="2B2018"/>
+                </a:solidFill>
+                <a:latin typeface="Malgun Gothic"/>
+              </a:rPr>
+              <a:t>확인합니다</a:t>
+            </a:r>
+            <a:r>
+              <a:rPr sz="1250" b="0" i="0" dirty="0">
+                <a:solidFill>
+                  <a:srgbClr val="2B2018"/>
+                </a:solidFill>
+                <a:latin typeface="Malgun Gothic"/>
+              </a:rPr>
+              <a:t>.</a:t>
             </a:r>
           </a:p>
         </p:txBody>
@@ -10506,6 +12295,7 @@
           <a:lstStyle/>
           <a:p>
             <a:pPr algn="ctr"/>
+            <a:endParaRPr/>
           </a:p>
         </p:txBody>
       </p:sp>
@@ -10550,6 +12340,7 @@
           <a:lstStyle/>
           <a:p>
             <a:pPr algn="ctr"/>
+            <a:endParaRPr/>
           </a:p>
         </p:txBody>
       </p:sp>
@@ -10561,8 +12352,8 @@
         </p:nvSpPr>
         <p:spPr>
           <a:xfrm>
-            <a:off x="685800" y="10820095"/>
-            <a:ext cx="5577840" cy="914400"/>
+            <a:off x="685800" y="11079805"/>
+            <a:ext cx="5577840" cy="394980"/>
           </a:xfrm>
           <a:prstGeom prst="rect">
             <a:avLst/>
@@ -10570,31 +12361,238 @@
           <a:noFill/>
         </p:spPr>
         <p:txBody>
-          <a:bodyPr wrap="square" anchor="ctr" lIns="25400" rIns="25400" tIns="12700" bIns="12700">
+          <a:bodyPr wrap="square" lIns="25400" tIns="12700" rIns="25400" bIns="12700" anchor="ctr">
             <a:spAutoFit/>
           </a:bodyPr>
           <a:lstStyle/>
           <a:p>
-            <a:pPr algn="l" marL="0" indent="0">
-              <a:buNone/>
-            </a:pPr>
-            <a:r>
-              <a:rPr sz="1200" b="1" i="0">
+            <a:pPr marL="0" indent="0" algn="l">
+              <a:buNone/>
+            </a:pPr>
+            <a:r>
+              <a:rPr sz="1200" b="1" i="0" dirty="0">
                 <a:solidFill>
                   <a:srgbClr val="B9740A"/>
                 </a:solidFill>
                 <a:latin typeface="Malgun Gothic"/>
               </a:rPr>
-              <a:t>💡 쉽게 말하면  </a:t>
-            </a:r>
-            <a:r>
-              <a:rPr sz="1200" b="0" i="0">
+              <a:t>💡 </a:t>
+            </a:r>
+            <a:r>
+              <a:rPr sz="1200" b="1" i="0" dirty="0" err="1">
+                <a:solidFill>
+                  <a:srgbClr val="B9740A"/>
+                </a:solidFill>
+                <a:latin typeface="Malgun Gothic"/>
+              </a:rPr>
+              <a:t>쉽게</a:t>
+            </a:r>
+            <a:r>
+              <a:rPr sz="1200" b="1" i="0" dirty="0">
+                <a:solidFill>
+                  <a:srgbClr val="B9740A"/>
+                </a:solidFill>
+                <a:latin typeface="Malgun Gothic"/>
+              </a:rPr>
+              <a:t> </a:t>
+            </a:r>
+            <a:r>
+              <a:rPr sz="1200" b="1" i="0" dirty="0" err="1">
+                <a:solidFill>
+                  <a:srgbClr val="B9740A"/>
+                </a:solidFill>
+                <a:latin typeface="Malgun Gothic"/>
+              </a:rPr>
+              <a:t>말하면</a:t>
+            </a:r>
+            <a:r>
+              <a:rPr sz="1200" b="1" i="0" dirty="0">
+                <a:solidFill>
+                  <a:srgbClr val="B9740A"/>
+                </a:solidFill>
+                <a:latin typeface="Malgun Gothic"/>
+              </a:rPr>
+              <a:t>  </a:t>
+            </a:r>
+            <a:r>
+              <a:rPr sz="1200" b="0" i="0" dirty="0" err="1">
                 <a:solidFill>
                   <a:srgbClr val="2B2018"/>
                 </a:solidFill>
                 <a:latin typeface="Malgun Gothic"/>
               </a:rPr>
-              <a:t>커피 한 잔 대접하듯, 앱 안에서 “커피빈 토큰(Bean)”으로 따뜻한 마음을 건네는 거예요. ☕</a:t>
+              <a:t>커피</a:t>
+            </a:r>
+            <a:r>
+              <a:rPr sz="1200" b="0" i="0" dirty="0">
+                <a:solidFill>
+                  <a:srgbClr val="2B2018"/>
+                </a:solidFill>
+                <a:latin typeface="Malgun Gothic"/>
+              </a:rPr>
+              <a:t> 한 잔 </a:t>
+            </a:r>
+            <a:r>
+              <a:rPr sz="1200" b="0" i="0" dirty="0" err="1">
+                <a:solidFill>
+                  <a:srgbClr val="2B2018"/>
+                </a:solidFill>
+                <a:latin typeface="Malgun Gothic"/>
+              </a:rPr>
+              <a:t>대접하듯</a:t>
+            </a:r>
+            <a:r>
+              <a:rPr sz="1200" b="0" i="0" dirty="0">
+                <a:solidFill>
+                  <a:srgbClr val="2B2018"/>
+                </a:solidFill>
+                <a:latin typeface="Malgun Gothic"/>
+              </a:rPr>
+              <a:t>, 앱 </a:t>
+            </a:r>
+            <a:r>
+              <a:rPr sz="1200" b="0" i="0" dirty="0" err="1">
+                <a:solidFill>
+                  <a:srgbClr val="2B2018"/>
+                </a:solidFill>
+                <a:latin typeface="Malgun Gothic"/>
+              </a:rPr>
+              <a:t>안에서</a:t>
+            </a:r>
+            <a:r>
+              <a:rPr sz="1200" b="0" i="0" dirty="0">
+                <a:solidFill>
+                  <a:srgbClr val="2B2018"/>
+                </a:solidFill>
+                <a:latin typeface="Malgun Gothic"/>
+              </a:rPr>
+              <a:t> “</a:t>
+            </a:r>
+            <a:r>
+              <a:rPr lang="ko-KR" altLang="en-US" sz="1200" b="0" i="0" dirty="0" err="1">
+                <a:solidFill>
+                  <a:srgbClr val="2B2018"/>
+                </a:solidFill>
+                <a:latin typeface="Malgun Gothic"/>
+              </a:rPr>
+              <a:t>카페빈</a:t>
+            </a:r>
+            <a:r>
+              <a:rPr sz="1200" b="0" i="0" dirty="0">
+                <a:solidFill>
+                  <a:srgbClr val="2B2018"/>
+                </a:solidFill>
+                <a:latin typeface="Malgun Gothic"/>
+              </a:rPr>
+              <a:t> </a:t>
+            </a:r>
+            <a:r>
+              <a:rPr sz="1200" b="0" i="0" dirty="0" err="1">
+                <a:solidFill>
+                  <a:srgbClr val="2B2018"/>
+                </a:solidFill>
+                <a:latin typeface="Malgun Gothic"/>
+              </a:rPr>
+              <a:t>토큰</a:t>
+            </a:r>
+            <a:r>
+              <a:rPr sz="1200" b="0" i="0" dirty="0">
+                <a:solidFill>
+                  <a:srgbClr val="2B2018"/>
+                </a:solidFill>
+                <a:latin typeface="Malgun Gothic"/>
+              </a:rPr>
+              <a:t>(Bean)”</a:t>
+            </a:r>
+            <a:r>
+              <a:rPr sz="1200" b="0" i="0" dirty="0" err="1">
+                <a:solidFill>
+                  <a:srgbClr val="2B2018"/>
+                </a:solidFill>
+                <a:latin typeface="Malgun Gothic"/>
+              </a:rPr>
+              <a:t>으로</a:t>
+            </a:r>
+            <a:r>
+              <a:rPr sz="1200" b="0" i="0" dirty="0">
+                <a:solidFill>
+                  <a:srgbClr val="2B2018"/>
+                </a:solidFill>
+                <a:latin typeface="Malgun Gothic"/>
+              </a:rPr>
+              <a:t> </a:t>
+            </a:r>
+            <a:r>
+              <a:rPr sz="1200" b="0" i="0" dirty="0" err="1">
+                <a:solidFill>
+                  <a:srgbClr val="2B2018"/>
+                </a:solidFill>
+                <a:latin typeface="Malgun Gothic"/>
+              </a:rPr>
+              <a:t>따뜻한</a:t>
+            </a:r>
+            <a:r>
+              <a:rPr sz="1200" b="0" i="0" dirty="0">
+                <a:solidFill>
+                  <a:srgbClr val="2B2018"/>
+                </a:solidFill>
+                <a:latin typeface="Malgun Gothic"/>
+              </a:rPr>
+              <a:t> </a:t>
+            </a:r>
+            <a:r>
+              <a:rPr sz="1200" b="0" i="0" dirty="0" err="1">
+                <a:solidFill>
+                  <a:srgbClr val="2B2018"/>
+                </a:solidFill>
+                <a:latin typeface="Malgun Gothic"/>
+              </a:rPr>
+              <a:t>마음을</a:t>
+            </a:r>
+            <a:r>
+              <a:rPr sz="1200" b="0" i="0" dirty="0">
+                <a:solidFill>
+                  <a:srgbClr val="2B2018"/>
+                </a:solidFill>
+                <a:latin typeface="Malgun Gothic"/>
+              </a:rPr>
+              <a:t> </a:t>
+            </a:r>
+            <a:r>
+              <a:rPr sz="1200" b="0" i="0" dirty="0" err="1">
+                <a:solidFill>
+                  <a:srgbClr val="2B2018"/>
+                </a:solidFill>
+                <a:latin typeface="Malgun Gothic"/>
+              </a:rPr>
+              <a:t>건네는</a:t>
+            </a:r>
+            <a:r>
+              <a:rPr sz="1200" b="0" i="0" dirty="0">
+                <a:solidFill>
+                  <a:srgbClr val="2B2018"/>
+                </a:solidFill>
+                <a:latin typeface="Malgun Gothic"/>
+              </a:rPr>
+              <a:t> </a:t>
+            </a:r>
+            <a:r>
+              <a:rPr sz="1200" b="0" i="0" dirty="0" err="1">
+                <a:solidFill>
+                  <a:srgbClr val="2B2018"/>
+                </a:solidFill>
+                <a:latin typeface="Malgun Gothic"/>
+              </a:rPr>
+              <a:t>거예요</a:t>
+            </a:r>
+            <a:r>
+              <a:rPr sz="1200" b="0" i="0" dirty="0">
+                <a:solidFill>
+                  <a:srgbClr val="2B2018"/>
+                </a:solidFill>
+                <a:latin typeface="Malgun Gothic"/>
+              </a:rPr>
+              <a:t>. ☕</a:t>
             </a:r>
           </a:p>
         </p:txBody>
@@ -10616,12 +12614,12 @@
           <a:noFill/>
         </p:spPr>
         <p:txBody>
-          <a:bodyPr wrap="square" anchor="ctr" lIns="25400" rIns="25400" tIns="12700" bIns="12700">
+          <a:bodyPr wrap="square" lIns="25400" tIns="12700" rIns="25400" bIns="12700" anchor="ctr">
             <a:spAutoFit/>
           </a:bodyPr>
           <a:lstStyle/>
           <a:p>
-            <a:pPr algn="l" marL="0" indent="0">
+            <a:pPr marL="0" indent="0" algn="l">
               <a:buNone/>
             </a:pPr>
             <a:r>
@@ -10653,12 +12651,12 @@
           <a:noFill/>
         </p:spPr>
         <p:txBody>
-          <a:bodyPr wrap="square" anchor="ctr" lIns="25400" rIns="25400" tIns="12700" bIns="12700">
+          <a:bodyPr wrap="square" lIns="25400" tIns="12700" rIns="25400" bIns="12700" anchor="ctr">
             <a:spAutoFit/>
           </a:bodyPr>
           <a:lstStyle/>
           <a:p>
-            <a:pPr algn="r" marL="0" indent="0">
+            <a:pPr marL="0" indent="0" algn="r">
               <a:buNone/>
             </a:pPr>
             <a:r>
@@ -10682,7 +12680,7 @@
 </file>
 
 <file path=ppt/slides/slide5.xml><?xml version="1.0" encoding="utf-8"?>
-<p:sld xmlns:a="http://schemas.openxmlformats.org/drawingml/2006/main" xmlns:p="http://schemas.openxmlformats.org/presentationml/2006/main" xmlns:r="http://schemas.openxmlformats.org/officeDocument/2006/relationships">
+<p:sld xmlns:a="http://schemas.openxmlformats.org/drawingml/2006/main" xmlns:r="http://schemas.openxmlformats.org/officeDocument/2006/relationships" xmlns:p="http://schemas.openxmlformats.org/presentationml/2006/main">
   <p:cSld>
     <p:spTree>
       <p:nvGrpSpPr>
@@ -10690,7 +12688,14 @@
         <p:cNvGrpSpPr/>
         <p:nvPr/>
       </p:nvGrpSpPr>
-      <p:grpSpPr/>
+      <p:grpSpPr>
+        <a:xfrm>
+          <a:off x="0" y="0"/>
+          <a:ext cx="0" cy="0"/>
+          <a:chOff x="0" y="0"/>
+          <a:chExt cx="0" cy="0"/>
+        </a:xfrm>
+      </p:grpSpPr>
       <p:sp>
         <p:nvSpPr>
           <p:cNvPr id="2" name="Rectangle 1"/>
@@ -10732,6 +12737,7 @@
           <a:lstStyle/>
           <a:p>
             <a:pPr algn="ctr"/>
+            <a:endParaRPr/>
           </a:p>
         </p:txBody>
       </p:sp>
@@ -10776,6 +12782,7 @@
           <a:lstStyle/>
           <a:p>
             <a:pPr algn="ctr"/>
+            <a:endParaRPr/>
           </a:p>
         </p:txBody>
       </p:sp>
@@ -10820,6 +12827,7 @@
           <a:lstStyle/>
           <a:p>
             <a:pPr algn="ctr"/>
+            <a:endParaRPr/>
           </a:p>
         </p:txBody>
       </p:sp>
@@ -10864,6 +12872,7 @@
           <a:lstStyle/>
           <a:p>
             <a:pPr algn="ctr"/>
+            <a:endParaRPr/>
           </a:p>
         </p:txBody>
       </p:sp>
@@ -10884,12 +12893,12 @@
           <a:noFill/>
         </p:spPr>
         <p:txBody>
-          <a:bodyPr wrap="square" anchor="ctr" lIns="25400" rIns="25400" tIns="12700" bIns="12700">
+          <a:bodyPr wrap="square" lIns="25400" tIns="12700" rIns="25400" bIns="12700" anchor="ctr">
             <a:spAutoFit/>
           </a:bodyPr>
           <a:lstStyle/>
           <a:p>
-            <a:pPr algn="ctr" marL="0" indent="0">
+            <a:pPr marL="0" indent="0" algn="ctr">
               <a:buNone/>
             </a:pPr>
             <a:r>
@@ -10947,6 +12956,7 @@
           <a:lstStyle/>
           <a:p>
             <a:pPr algn="ctr"/>
+            <a:endParaRPr/>
           </a:p>
         </p:txBody>
       </p:sp>
@@ -10967,12 +12977,12 @@
           <a:noFill/>
         </p:spPr>
         <p:txBody>
-          <a:bodyPr wrap="square" anchor="ctr" lIns="25400" rIns="25400" tIns="12700" bIns="12700">
+          <a:bodyPr wrap="square" lIns="25400" tIns="12700" rIns="25400" bIns="12700" anchor="ctr">
             <a:spAutoFit/>
           </a:bodyPr>
           <a:lstStyle/>
           <a:p>
-            <a:pPr algn="ctr" marL="0" indent="0">
+            <a:pPr marL="0" indent="0" algn="ctr">
               <a:buNone/>
             </a:pPr>
             <a:r>
@@ -11004,12 +13014,12 @@
           <a:noFill/>
         </p:spPr>
         <p:txBody>
-          <a:bodyPr wrap="square" anchor="ctr" lIns="25400" rIns="25400" tIns="12700" bIns="12700">
+          <a:bodyPr wrap="square" lIns="25400" tIns="12700" rIns="25400" bIns="12700" anchor="ctr">
             <a:spAutoFit/>
           </a:bodyPr>
           <a:lstStyle/>
           <a:p>
-            <a:pPr algn="l" marL="0" indent="0">
+            <a:pPr marL="0" indent="0" algn="l">
               <a:buNone/>
             </a:pPr>
             <a:r>
@@ -11041,12 +13051,12 @@
           <a:noFill/>
         </p:spPr>
         <p:txBody>
-          <a:bodyPr wrap="square" anchor="ctr" lIns="25400" rIns="25400" tIns="12700" bIns="12700">
+          <a:bodyPr wrap="square" lIns="25400" tIns="12700" rIns="25400" bIns="12700" anchor="ctr">
             <a:spAutoFit/>
           </a:bodyPr>
           <a:lstStyle/>
           <a:p>
-            <a:pPr algn="l" marL="0" indent="0">
+            <a:pPr marL="0" indent="0" algn="l">
               <a:buNone/>
             </a:pPr>
             <a:r>
@@ -11106,6 +13116,7 @@
           <a:lstStyle/>
           <a:p>
             <a:pPr algn="ctr"/>
+            <a:endParaRPr/>
           </a:p>
         </p:txBody>
       </p:sp>
@@ -11150,6 +13161,7 @@
           <a:lstStyle/>
           <a:p>
             <a:pPr algn="ctr"/>
+            <a:endParaRPr/>
           </a:p>
         </p:txBody>
       </p:sp>
@@ -11170,12 +13182,12 @@
           <a:noFill/>
         </p:spPr>
         <p:txBody>
-          <a:bodyPr wrap="square" anchor="ctr" lIns="25400" rIns="25400" tIns="12700" bIns="12700">
+          <a:bodyPr wrap="square" lIns="25400" tIns="12700" rIns="25400" bIns="12700" anchor="ctr">
             <a:spAutoFit/>
           </a:bodyPr>
           <a:lstStyle/>
           <a:p>
-            <a:pPr algn="l" marL="0" indent="0">
+            <a:pPr marL="0" indent="0" algn="l">
               <a:buNone/>
             </a:pPr>
             <a:r>
@@ -11207,12 +13219,12 @@
           <a:noFill/>
         </p:spPr>
         <p:txBody>
-          <a:bodyPr wrap="square" anchor="ctr" lIns="25400" rIns="25400" tIns="12700" bIns="12700">
+          <a:bodyPr wrap="square" lIns="25400" tIns="12700" rIns="25400" bIns="12700" anchor="ctr">
             <a:spAutoFit/>
           </a:bodyPr>
           <a:lstStyle/>
           <a:p>
-            <a:pPr algn="r" marL="0" indent="0">
+            <a:pPr marL="0" indent="0" algn="r">
               <a:buNone/>
             </a:pPr>
             <a:r>
@@ -11244,12 +13256,12 @@
           <a:noFill/>
         </p:spPr>
         <p:txBody>
-          <a:bodyPr wrap="square" anchor="t" lIns="25400" rIns="25400" tIns="12700" bIns="12700">
+          <a:bodyPr wrap="square" lIns="25400" tIns="12700" rIns="25400" bIns="12700" anchor="t">
             <a:spAutoFit/>
           </a:bodyPr>
           <a:lstStyle/>
           <a:p>
-            <a:pPr algn="r" marL="0" indent="0">
+            <a:pPr marL="0" indent="0" algn="r">
               <a:buNone/>
             </a:pPr>
             <a:r>
@@ -11305,6 +13317,7 @@
           <a:lstStyle/>
           <a:p>
             <a:pPr algn="ctr"/>
+            <a:endParaRPr/>
           </a:p>
         </p:txBody>
       </p:sp>
@@ -11325,12 +13338,12 @@
           <a:noFill/>
         </p:spPr>
         <p:txBody>
-          <a:bodyPr wrap="square" anchor="ctr" lIns="25400" rIns="25400" tIns="12700" bIns="12700">
+          <a:bodyPr wrap="square" lIns="25400" tIns="12700" rIns="25400" bIns="12700" anchor="ctr">
             <a:spAutoFit/>
           </a:bodyPr>
           <a:lstStyle/>
           <a:p>
-            <a:pPr algn="l" marL="0" indent="0">
+            <a:pPr marL="0" indent="0" algn="l">
               <a:buNone/>
             </a:pPr>
             <a:r>
@@ -11390,6 +13403,7 @@
           <a:lstStyle/>
           <a:p>
             <a:pPr algn="ctr"/>
+            <a:endParaRPr/>
           </a:p>
         </p:txBody>
       </p:sp>
@@ -11434,6 +13448,7 @@
           <a:lstStyle/>
           <a:p>
             <a:pPr algn="ctr"/>
+            <a:endParaRPr/>
           </a:p>
         </p:txBody>
       </p:sp>
@@ -11454,12 +13469,12 @@
           <a:noFill/>
         </p:spPr>
         <p:txBody>
-          <a:bodyPr wrap="square" anchor="ctr" lIns="25400" rIns="25400" tIns="12700" bIns="12700">
+          <a:bodyPr wrap="square" lIns="25400" tIns="12700" rIns="25400" bIns="12700" anchor="ctr">
             <a:spAutoFit/>
           </a:bodyPr>
           <a:lstStyle/>
           <a:p>
-            <a:pPr algn="l" marL="0" indent="0">
+            <a:pPr marL="0" indent="0" algn="l">
               <a:buNone/>
             </a:pPr>
             <a:r>
@@ -11491,12 +13506,12 @@
           <a:noFill/>
         </p:spPr>
         <p:txBody>
-          <a:bodyPr wrap="square" anchor="ctr" lIns="25400" rIns="25400" tIns="12700" bIns="12700">
+          <a:bodyPr wrap="square" lIns="25400" tIns="12700" rIns="25400" bIns="12700" anchor="ctr">
             <a:spAutoFit/>
           </a:bodyPr>
           <a:lstStyle/>
           <a:p>
-            <a:pPr algn="r" marL="0" indent="0">
+            <a:pPr marL="0" indent="0" algn="r">
               <a:buNone/>
             </a:pPr>
             <a:r>
@@ -11528,12 +13543,12 @@
           <a:noFill/>
         </p:spPr>
         <p:txBody>
-          <a:bodyPr wrap="square" anchor="t" lIns="25400" rIns="25400" tIns="12700" bIns="12700">
+          <a:bodyPr wrap="square" lIns="25400" tIns="12700" rIns="25400" bIns="12700" anchor="t">
             <a:spAutoFit/>
           </a:bodyPr>
           <a:lstStyle/>
           <a:p>
-            <a:pPr algn="r" marL="0" indent="0">
+            <a:pPr marL="0" indent="0" algn="r">
               <a:buNone/>
             </a:pPr>
             <a:r>
@@ -11589,6 +13604,7 @@
           <a:lstStyle/>
           <a:p>
             <a:pPr algn="ctr"/>
+            <a:endParaRPr/>
           </a:p>
         </p:txBody>
       </p:sp>
@@ -11609,12 +13625,12 @@
           <a:noFill/>
         </p:spPr>
         <p:txBody>
-          <a:bodyPr wrap="square" anchor="ctr" lIns="25400" rIns="25400" tIns="12700" bIns="12700">
+          <a:bodyPr wrap="square" lIns="25400" tIns="12700" rIns="25400" bIns="12700" anchor="ctr">
             <a:spAutoFit/>
           </a:bodyPr>
           <a:lstStyle/>
           <a:p>
-            <a:pPr algn="l" marL="0" indent="0">
+            <a:pPr marL="0" indent="0" algn="l">
               <a:buNone/>
             </a:pPr>
             <a:r>
@@ -11672,6 +13688,7 @@
           <a:lstStyle/>
           <a:p>
             <a:pPr algn="ctr"/>
+            <a:endParaRPr/>
           </a:p>
         </p:txBody>
       </p:sp>
@@ -11692,12 +13709,12 @@
           <a:noFill/>
         </p:spPr>
         <p:txBody>
-          <a:bodyPr wrap="square" anchor="ctr" lIns="25400" rIns="25400" tIns="12700" bIns="12700">
+          <a:bodyPr wrap="square" lIns="25400" tIns="12700" rIns="25400" bIns="12700" anchor="ctr">
             <a:spAutoFit/>
           </a:bodyPr>
           <a:lstStyle/>
           <a:p>
-            <a:pPr algn="ctr" marL="0" indent="0">
+            <a:pPr marL="0" indent="0" algn="ctr">
               <a:buNone/>
             </a:pPr>
             <a:r>
@@ -11757,6 +13774,7 @@
           <a:lstStyle/>
           <a:p>
             <a:pPr algn="ctr"/>
+            <a:endParaRPr/>
           </a:p>
         </p:txBody>
       </p:sp>
@@ -11801,6 +13819,7 @@
           <a:lstStyle/>
           <a:p>
             <a:pPr algn="ctr"/>
+            <a:endParaRPr/>
           </a:p>
         </p:txBody>
       </p:sp>
@@ -11821,23 +13840,38 @@
           <a:noFill/>
         </p:spPr>
         <p:txBody>
-          <a:bodyPr wrap="square" anchor="ctr" lIns="25400" rIns="25400" tIns="12700" bIns="12700">
+          <a:bodyPr wrap="square" lIns="25400" tIns="12700" rIns="25400" bIns="12700" anchor="ctr">
             <a:spAutoFit/>
           </a:bodyPr>
           <a:lstStyle/>
           <a:p>
-            <a:pPr algn="l" marL="0" indent="0">
-              <a:buNone/>
-            </a:pPr>
-            <a:r>
-              <a:rPr sz="1700" b="1" i="0">
+            <a:pPr marL="0" indent="0" algn="l">
+              <a:buNone/>
+            </a:pPr>
+            <a:r>
+              <a:rPr sz="1700" b="1" i="0" dirty="0">
                 <a:solidFill>
                   <a:srgbClr val="3B2A20"/>
                 </a:solidFill>
                 <a:latin typeface="Malgun Gothic"/>
               </a:rPr>
-              <a:t>🏪 PiShop</a:t>
-            </a:r>
+              <a:t>🏪 </a:t>
+            </a:r>
+            <a:r>
+              <a:rPr sz="1700" b="1" i="0" dirty="0" err="1">
+                <a:solidFill>
+                  <a:srgbClr val="3B2A20"/>
+                </a:solidFill>
+                <a:latin typeface="Malgun Gothic"/>
+              </a:rPr>
+              <a:t>PiShop</a:t>
+            </a:r>
+            <a:endParaRPr sz="1700" b="1" i="0" dirty="0">
+              <a:solidFill>
+                <a:srgbClr val="3B2A20"/>
+              </a:solidFill>
+              <a:latin typeface="Malgun Gothic"/>
+            </a:endParaRPr>
           </a:p>
         </p:txBody>
       </p:sp>
@@ -11849,8 +13883,8 @@
         </p:nvSpPr>
         <p:spPr>
           <a:xfrm>
-            <a:off x="3749040" y="6844588"/>
-            <a:ext cx="2377440" cy="548640"/>
+            <a:off x="3749040" y="6929112"/>
+            <a:ext cx="2377440" cy="379591"/>
           </a:xfrm>
           <a:prstGeom prst="rect">
             <a:avLst/>
@@ -11858,22 +13892,31 @@
           <a:noFill/>
         </p:spPr>
         <p:txBody>
-          <a:bodyPr wrap="square" anchor="ctr" lIns="25400" rIns="25400" tIns="12700" bIns="12700">
+          <a:bodyPr wrap="square" lIns="25400" tIns="12700" rIns="25400" bIns="12700" anchor="ctr">
             <a:spAutoFit/>
           </a:bodyPr>
           <a:lstStyle/>
           <a:p>
-            <a:pPr algn="r" marL="0" indent="0">
-              <a:buNone/>
-            </a:pPr>
-            <a:r>
-              <a:rPr sz="2300" b="1" i="0">
+            <a:pPr marL="0" indent="0" algn="r">
+              <a:buNone/>
+            </a:pPr>
+            <a:r>
+              <a:rPr lang="en-US" sz="2300" b="1" dirty="0">
                 <a:solidFill>
                   <a:srgbClr val="B9740A"/>
                 </a:solidFill>
                 <a:latin typeface="Malgun Gothic"/>
               </a:rPr>
-              <a:t>3,000~</a:t>
+              <a:t>5</a:t>
+            </a:r>
+            <a:r>
+              <a:rPr sz="2300" b="1" i="0" dirty="0">
+                <a:solidFill>
+                  <a:srgbClr val="B9740A"/>
+                </a:solidFill>
+                <a:latin typeface="Malgun Gothic"/>
+              </a:rPr>
+              <a:t>,000~</a:t>
             </a:r>
           </a:p>
         </p:txBody>
@@ -11887,7 +13930,7 @@
         <p:spPr>
           <a:xfrm>
             <a:off x="3749040" y="7393228"/>
-            <a:ext cx="2377440" cy="320040"/>
+            <a:ext cx="2377440" cy="187231"/>
           </a:xfrm>
           <a:prstGeom prst="rect">
             <a:avLst/>
@@ -11895,22 +13938,40 @@
           <a:noFill/>
         </p:spPr>
         <p:txBody>
-          <a:bodyPr wrap="square" anchor="t" lIns="25400" rIns="25400" tIns="12700" bIns="12700">
+          <a:bodyPr wrap="square" lIns="25400" tIns="12700" rIns="25400" bIns="12700" anchor="t">
             <a:spAutoFit/>
           </a:bodyPr>
           <a:lstStyle/>
           <a:p>
-            <a:pPr algn="r" marL="0" indent="0">
-              <a:buNone/>
-            </a:pPr>
-            <a:r>
-              <a:rPr sz="1050" b="0" i="0">
+            <a:pPr marL="0" indent="0" algn="r">
+              <a:buNone/>
+            </a:pPr>
+            <a:r>
+              <a:rPr sz="1050" b="0" i="0" dirty="0">
                 <a:solidFill>
                   <a:srgbClr val="8A7A6D"/>
                 </a:solidFill>
                 <a:latin typeface="Malgun Gothic"/>
               </a:rPr>
-              <a:t>Bean/월 · 연 30,000~</a:t>
+              <a:t>Bean/월 · 연 </a:t>
+            </a:r>
+            <a:r>
+              <a:rPr lang="en-US" sz="1050" b="0" i="0" dirty="0">
+                <a:solidFill>
+                  <a:srgbClr val="8A7A6D"/>
+                </a:solidFill>
+                <a:latin typeface="Malgun Gothic"/>
+              </a:rPr>
+              <a:t>5</a:t>
+            </a:r>
+            <a:r>
+              <a:rPr sz="1050" b="0" i="0" dirty="0">
+                <a:solidFill>
+                  <a:srgbClr val="8A7A6D"/>
+                </a:solidFill>
+                <a:latin typeface="Malgun Gothic"/>
+              </a:rPr>
+              <a:t>0,000~</a:t>
             </a:r>
           </a:p>
         </p:txBody>
@@ -11956,6 +14017,7 @@
           <a:lstStyle/>
           <a:p>
             <a:pPr algn="ctr"/>
+            <a:endParaRPr/>
           </a:p>
         </p:txBody>
       </p:sp>
@@ -11967,8 +14029,8 @@
         </p:nvSpPr>
         <p:spPr>
           <a:xfrm>
-            <a:off x="777240" y="7850428"/>
-            <a:ext cx="5394960" cy="502920"/>
+            <a:off x="777240" y="7996731"/>
+            <a:ext cx="5394960" cy="210314"/>
           </a:xfrm>
           <a:prstGeom prst="rect">
             <a:avLst/>
@@ -11976,23 +14038,200 @@
           <a:noFill/>
         </p:spPr>
         <p:txBody>
-          <a:bodyPr wrap="square" anchor="ctr" lIns="25400" rIns="25400" tIns="12700" bIns="12700">
+          <a:bodyPr wrap="square" lIns="25400" tIns="12700" rIns="25400" bIns="12700" anchor="ctr">
             <a:spAutoFit/>
           </a:bodyPr>
           <a:lstStyle/>
           <a:p>
-            <a:pPr algn="l" marL="0" indent="0">
-              <a:buNone/>
-            </a:pPr>
-            <a:r>
-              <a:rPr sz="1200" b="0" i="0">
+            <a:pPr marL="0" indent="0" algn="l">
+              <a:buNone/>
+            </a:pPr>
+            <a:r>
+              <a:rPr sz="1200" b="0" i="0" dirty="0">
                 <a:solidFill>
                   <a:srgbClr val="2B2018"/>
                 </a:solidFill>
                 <a:latin typeface="Malgun Gothic"/>
               </a:rPr>
-              <a:t>S 상품 30개 · M 상품 50개 · L 무제한·통계</a:t>
-            </a:r>
+              <a:t>S </a:t>
+            </a:r>
+            <a:r>
+              <a:rPr sz="1200" b="0" i="0" dirty="0" err="1">
+                <a:solidFill>
+                  <a:srgbClr val="2B2018"/>
+                </a:solidFill>
+                <a:latin typeface="Malgun Gothic"/>
+              </a:rPr>
+              <a:t>상품</a:t>
+            </a:r>
+            <a:r>
+              <a:rPr sz="1200" b="0" i="0" dirty="0">
+                <a:solidFill>
+                  <a:srgbClr val="2B2018"/>
+                </a:solidFill>
+                <a:latin typeface="Malgun Gothic"/>
+              </a:rPr>
+              <a:t> </a:t>
+            </a:r>
+            <a:r>
+              <a:rPr lang="en-US" sz="1200" b="0" i="0" dirty="0">
+                <a:solidFill>
+                  <a:srgbClr val="2B2018"/>
+                </a:solidFill>
+                <a:latin typeface="Malgun Gothic"/>
+              </a:rPr>
+              <a:t>1</a:t>
+            </a:r>
+            <a:r>
+              <a:rPr sz="1200" b="0" i="0" dirty="0">
+                <a:solidFill>
+                  <a:srgbClr val="2B2018"/>
+                </a:solidFill>
+                <a:latin typeface="Malgun Gothic"/>
+              </a:rPr>
+              <a:t>0개</a:t>
+            </a:r>
+            <a:r>
+              <a:rPr lang="en-US" sz="1200" b="0" i="0" dirty="0">
+                <a:solidFill>
+                  <a:srgbClr val="2B2018"/>
+                </a:solidFill>
+                <a:latin typeface="Malgun Gothic"/>
+              </a:rPr>
+              <a:t> </a:t>
+            </a:r>
+            <a:r>
+              <a:rPr lang="ko-KR" altLang="en-US" sz="1200" b="0" i="0" dirty="0">
+                <a:solidFill>
+                  <a:srgbClr val="2B2018"/>
+                </a:solidFill>
+                <a:latin typeface="Malgun Gothic"/>
+              </a:rPr>
+              <a:t>등록</a:t>
+            </a:r>
+            <a:r>
+              <a:rPr sz="1200" b="0" i="0" dirty="0">
+                <a:solidFill>
+                  <a:srgbClr val="2B2018"/>
+                </a:solidFill>
+                <a:latin typeface="Malgun Gothic"/>
+              </a:rPr>
+              <a:t> · M </a:t>
+            </a:r>
+            <a:r>
+              <a:rPr sz="1200" b="0" i="0" dirty="0" err="1">
+                <a:solidFill>
+                  <a:srgbClr val="2B2018"/>
+                </a:solidFill>
+                <a:latin typeface="Malgun Gothic"/>
+              </a:rPr>
+              <a:t>상품</a:t>
+            </a:r>
+            <a:r>
+              <a:rPr sz="1200" b="0" i="0" dirty="0">
+                <a:solidFill>
+                  <a:srgbClr val="2B2018"/>
+                </a:solidFill>
+                <a:latin typeface="Malgun Gothic"/>
+              </a:rPr>
+              <a:t> </a:t>
+            </a:r>
+            <a:r>
+              <a:rPr lang="en-US" sz="1200" b="0" i="0" dirty="0">
+                <a:solidFill>
+                  <a:srgbClr val="2B2018"/>
+                </a:solidFill>
+                <a:latin typeface="Malgun Gothic"/>
+              </a:rPr>
+              <a:t>3</a:t>
+            </a:r>
+            <a:r>
+              <a:rPr sz="1200" b="0" i="0" dirty="0">
+                <a:solidFill>
+                  <a:srgbClr val="2B2018"/>
+                </a:solidFill>
+                <a:latin typeface="Malgun Gothic"/>
+              </a:rPr>
+              <a:t>0개</a:t>
+            </a:r>
+            <a:r>
+              <a:rPr lang="en-US" sz="1200" b="0" i="0" dirty="0">
+                <a:solidFill>
+                  <a:srgbClr val="2B2018"/>
+                </a:solidFill>
+                <a:latin typeface="Malgun Gothic"/>
+              </a:rPr>
+              <a:t> </a:t>
+            </a:r>
+            <a:r>
+              <a:rPr lang="ko-KR" altLang="en-US" sz="1200" dirty="0">
+                <a:solidFill>
+                  <a:srgbClr val="2B2018"/>
+                </a:solidFill>
+                <a:latin typeface="Malgun Gothic"/>
+              </a:rPr>
+              <a:t>등록</a:t>
+            </a:r>
+            <a:r>
+              <a:rPr sz="1200" b="0" i="0" dirty="0">
+                <a:solidFill>
+                  <a:srgbClr val="2B2018"/>
+                </a:solidFill>
+                <a:latin typeface="Malgun Gothic"/>
+              </a:rPr>
+              <a:t> · L </a:t>
+            </a:r>
+            <a:r>
+              <a:rPr lang="ko-KR" altLang="en-US" sz="1200" dirty="0">
+                <a:solidFill>
+                  <a:srgbClr val="2B2018"/>
+                </a:solidFill>
+                <a:latin typeface="Malgun Gothic"/>
+              </a:rPr>
+              <a:t>상</a:t>
+            </a:r>
+            <a:r>
+              <a:rPr lang="ko-KR" altLang="en-US" sz="1200" b="0" i="0" dirty="0">
+                <a:solidFill>
+                  <a:srgbClr val="2B2018"/>
+                </a:solidFill>
+                <a:latin typeface="Malgun Gothic"/>
+              </a:rPr>
+              <a:t>품 </a:t>
+            </a:r>
+            <a:r>
+              <a:rPr sz="1200" b="0" i="0" dirty="0" err="1">
+                <a:solidFill>
+                  <a:srgbClr val="2B2018"/>
+                </a:solidFill>
+                <a:latin typeface="Malgun Gothic"/>
+              </a:rPr>
+              <a:t>무제한</a:t>
+            </a:r>
+            <a:r>
+              <a:rPr lang="en-US" sz="1200" b="0" i="0" dirty="0">
+                <a:solidFill>
+                  <a:srgbClr val="2B2018"/>
+                </a:solidFill>
+                <a:latin typeface="Malgun Gothic"/>
+              </a:rPr>
+              <a:t> </a:t>
+            </a:r>
+            <a:r>
+              <a:rPr lang="ko-KR" altLang="en-US" sz="1200" b="0" i="0" dirty="0">
+                <a:solidFill>
+                  <a:srgbClr val="2B2018"/>
+                </a:solidFill>
+                <a:latin typeface="Malgun Gothic"/>
+              </a:rPr>
+              <a:t>등록</a:t>
+            </a:r>
+            <a:endParaRPr sz="1200" b="0" i="0" dirty="0">
+              <a:solidFill>
+                <a:srgbClr val="2B2018"/>
+              </a:solidFill>
+              <a:latin typeface="Malgun Gothic"/>
+            </a:endParaRPr>
           </a:p>
         </p:txBody>
       </p:sp>
@@ -12041,6 +14280,7 @@
           <a:lstStyle/>
           <a:p>
             <a:pPr algn="ctr"/>
+            <a:endParaRPr/>
           </a:p>
         </p:txBody>
       </p:sp>
@@ -12085,6 +14325,7 @@
           <a:lstStyle/>
           <a:p>
             <a:pPr algn="ctr"/>
+            <a:endParaRPr/>
           </a:p>
         </p:txBody>
       </p:sp>
@@ -12096,8 +14337,8 @@
         </p:nvSpPr>
         <p:spPr>
           <a:xfrm>
-            <a:off x="777240" y="9146742"/>
-            <a:ext cx="2651760" cy="548640"/>
+            <a:off x="777240" y="9277433"/>
+            <a:ext cx="2651760" cy="287258"/>
           </a:xfrm>
           <a:prstGeom prst="rect">
             <a:avLst/>
@@ -12105,23 +14346,38 @@
           <a:noFill/>
         </p:spPr>
         <p:txBody>
-          <a:bodyPr wrap="square" anchor="ctr" lIns="25400" rIns="25400" tIns="12700" bIns="12700">
+          <a:bodyPr wrap="square" lIns="25400" tIns="12700" rIns="25400" bIns="12700" anchor="ctr">
             <a:spAutoFit/>
           </a:bodyPr>
           <a:lstStyle/>
           <a:p>
-            <a:pPr algn="l" marL="0" indent="0">
-              <a:buNone/>
-            </a:pPr>
-            <a:r>
-              <a:rPr sz="1700" b="1" i="0">
+            <a:pPr marL="0" indent="0" algn="l">
+              <a:buNone/>
+            </a:pPr>
+            <a:r>
+              <a:rPr sz="1700" b="1" i="0" dirty="0">
                 <a:solidFill>
                   <a:srgbClr val="3B2A20"/>
                 </a:solidFill>
                 <a:latin typeface="Malgun Gothic"/>
               </a:rPr>
-              <a:t>💬 자동번역</a:t>
-            </a:r>
+              <a:t>💬 </a:t>
+            </a:r>
+            <a:r>
+              <a:rPr lang="en-US" sz="1700" b="1" i="0" dirty="0" err="1">
+                <a:solidFill>
+                  <a:srgbClr val="3B2A20"/>
+                </a:solidFill>
+                <a:latin typeface="Malgun Gothic"/>
+              </a:rPr>
+              <a:t>PiTranslate</a:t>
+            </a:r>
+            <a:endParaRPr sz="1700" b="1" i="0" dirty="0">
+              <a:solidFill>
+                <a:srgbClr val="3B2A20"/>
+              </a:solidFill>
+              <a:latin typeface="Malgun Gothic"/>
+            </a:endParaRPr>
           </a:p>
         </p:txBody>
       </p:sp>
@@ -12133,8 +14389,8 @@
         </p:nvSpPr>
         <p:spPr>
           <a:xfrm>
-            <a:off x="3749040" y="9110166"/>
-            <a:ext cx="2377440" cy="548640"/>
+            <a:off x="3749040" y="9194690"/>
+            <a:ext cx="2377440" cy="379591"/>
           </a:xfrm>
           <a:prstGeom prst="rect">
             <a:avLst/>
@@ -12142,22 +14398,31 @@
           <a:noFill/>
         </p:spPr>
         <p:txBody>
-          <a:bodyPr wrap="square" anchor="ctr" lIns="25400" rIns="25400" tIns="12700" bIns="12700">
+          <a:bodyPr wrap="square" lIns="25400" tIns="12700" rIns="25400" bIns="12700" anchor="ctr">
             <a:spAutoFit/>
           </a:bodyPr>
           <a:lstStyle/>
           <a:p>
-            <a:pPr algn="r" marL="0" indent="0">
-              <a:buNone/>
-            </a:pPr>
-            <a:r>
-              <a:rPr sz="2300" b="1" i="0">
+            <a:pPr marL="0" indent="0" algn="r">
+              <a:buNone/>
+            </a:pPr>
+            <a:r>
+              <a:rPr lang="en-US" sz="2300" b="1" dirty="0">
                 <a:solidFill>
                   <a:srgbClr val="2E7D6F"/>
                 </a:solidFill>
                 <a:latin typeface="Malgun Gothic"/>
               </a:rPr>
-              <a:t>1,000</a:t>
+              <a:t>3</a:t>
+            </a:r>
+            <a:r>
+              <a:rPr sz="2300" b="1" i="0" dirty="0">
+                <a:solidFill>
+                  <a:srgbClr val="2E7D6F"/>
+                </a:solidFill>
+                <a:latin typeface="Malgun Gothic"/>
+              </a:rPr>
+              <a:t>,000</a:t>
             </a:r>
           </a:p>
         </p:txBody>
@@ -12171,7 +14436,7 @@
         <p:spPr>
           <a:xfrm>
             <a:off x="3749040" y="9658806"/>
-            <a:ext cx="2377440" cy="320040"/>
+            <a:ext cx="2377440" cy="187231"/>
           </a:xfrm>
           <a:prstGeom prst="rect">
             <a:avLst/>
@@ -12179,22 +14444,40 @@
           <a:noFill/>
         </p:spPr>
         <p:txBody>
-          <a:bodyPr wrap="square" anchor="t" lIns="25400" rIns="25400" tIns="12700" bIns="12700">
+          <a:bodyPr wrap="square" lIns="25400" tIns="12700" rIns="25400" bIns="12700" anchor="t">
             <a:spAutoFit/>
           </a:bodyPr>
           <a:lstStyle/>
           <a:p>
-            <a:pPr algn="r" marL="0" indent="0">
-              <a:buNone/>
-            </a:pPr>
-            <a:r>
-              <a:rPr sz="1050" b="0" i="0">
+            <a:pPr marL="0" indent="0" algn="r">
+              <a:buNone/>
+            </a:pPr>
+            <a:r>
+              <a:rPr sz="1050" b="0" i="0" dirty="0">
                 <a:solidFill>
                   <a:srgbClr val="8A7A6D"/>
                 </a:solidFill>
                 <a:latin typeface="Malgun Gothic"/>
               </a:rPr>
-              <a:t>Bean/월 · 연 10,000</a:t>
+              <a:t>Bean/월 · 연 </a:t>
+            </a:r>
+            <a:r>
+              <a:rPr lang="en-US" sz="1050" b="0" i="0" dirty="0">
+                <a:solidFill>
+                  <a:srgbClr val="8A7A6D"/>
+                </a:solidFill>
+                <a:latin typeface="Malgun Gothic"/>
+              </a:rPr>
+              <a:t>3</a:t>
+            </a:r>
+            <a:r>
+              <a:rPr sz="1050" b="0" i="0" dirty="0">
+                <a:solidFill>
+                  <a:srgbClr val="8A7A6D"/>
+                </a:solidFill>
+                <a:latin typeface="Malgun Gothic"/>
+              </a:rPr>
+              <a:t>0,000</a:t>
             </a:r>
           </a:p>
         </p:txBody>
@@ -12240,6 +14523,7 @@
           <a:lstStyle/>
           <a:p>
             <a:pPr algn="ctr"/>
+            <a:endParaRPr/>
           </a:p>
         </p:txBody>
       </p:sp>
@@ -12260,12 +14544,12 @@
           <a:noFill/>
         </p:spPr>
         <p:txBody>
-          <a:bodyPr wrap="square" anchor="ctr" lIns="25400" rIns="25400" tIns="12700" bIns="12700">
+          <a:bodyPr wrap="square" lIns="25400" tIns="12700" rIns="25400" bIns="12700" anchor="ctr">
             <a:spAutoFit/>
           </a:bodyPr>
           <a:lstStyle/>
           <a:p>
-            <a:pPr algn="l" marL="0" indent="0">
+            <a:pPr marL="0" indent="0" algn="l">
               <a:buNone/>
             </a:pPr>
             <a:r>
@@ -12323,6 +14607,7 @@
           <a:lstStyle/>
           <a:p>
             <a:pPr algn="ctr"/>
+            <a:endParaRPr/>
           </a:p>
         </p:txBody>
       </p:sp>
@@ -12367,6 +14652,7 @@
           <a:lstStyle/>
           <a:p>
             <a:pPr algn="ctr"/>
+            <a:endParaRPr/>
           </a:p>
         </p:txBody>
       </p:sp>
@@ -12387,12 +14673,12 @@
           <a:noFill/>
         </p:spPr>
         <p:txBody>
-          <a:bodyPr wrap="square" anchor="ctr" lIns="25400" rIns="25400" tIns="12700" bIns="12700">
+          <a:bodyPr wrap="square" lIns="25400" tIns="12700" rIns="25400" bIns="12700" anchor="ctr">
             <a:spAutoFit/>
           </a:bodyPr>
           <a:lstStyle/>
           <a:p>
-            <a:pPr algn="l" marL="0" indent="0">
+            <a:pPr marL="0" indent="0" algn="l">
               <a:buNone/>
             </a:pPr>
             <a:r>
@@ -12433,12 +14719,12 @@
           <a:noFill/>
         </p:spPr>
         <p:txBody>
-          <a:bodyPr wrap="square" anchor="ctr" lIns="25400" rIns="25400" tIns="12700" bIns="12700">
+          <a:bodyPr wrap="square" lIns="25400" tIns="12700" rIns="25400" bIns="12700" anchor="ctr">
             <a:spAutoFit/>
           </a:bodyPr>
           <a:lstStyle/>
           <a:p>
-            <a:pPr algn="l" marL="0" indent="0">
+            <a:pPr marL="0" indent="0" algn="l">
               <a:buNone/>
             </a:pPr>
             <a:r>
@@ -12470,12 +14756,12 @@
           <a:noFill/>
         </p:spPr>
         <p:txBody>
-          <a:bodyPr wrap="square" anchor="ctr" lIns="25400" rIns="25400" tIns="12700" bIns="12700">
+          <a:bodyPr wrap="square" lIns="25400" tIns="12700" rIns="25400" bIns="12700" anchor="ctr">
             <a:spAutoFit/>
           </a:bodyPr>
           <a:lstStyle/>
           <a:p>
-            <a:pPr algn="r" marL="0" indent="0">
+            <a:pPr marL="0" indent="0" algn="r">
               <a:buNone/>
             </a:pPr>
             <a:r>
@@ -12499,7 +14785,7 @@
 </file>
 
 <file path=ppt/slides/slide6.xml><?xml version="1.0" encoding="utf-8"?>
-<p:sld xmlns:a="http://schemas.openxmlformats.org/drawingml/2006/main" xmlns:p="http://schemas.openxmlformats.org/presentationml/2006/main" xmlns:r="http://schemas.openxmlformats.org/officeDocument/2006/relationships">
+<p:sld xmlns:a="http://schemas.openxmlformats.org/drawingml/2006/main" xmlns:r="http://schemas.openxmlformats.org/officeDocument/2006/relationships" xmlns:p="http://schemas.openxmlformats.org/presentationml/2006/main">
   <p:cSld>
     <p:spTree>
       <p:nvGrpSpPr>
@@ -12507,7 +14793,14 @@
         <p:cNvGrpSpPr/>
         <p:nvPr/>
       </p:nvGrpSpPr>
-      <p:grpSpPr/>
+      <p:grpSpPr>
+        <a:xfrm>
+          <a:off x="0" y="0"/>
+          <a:ext cx="0" cy="0"/>
+          <a:chOff x="0" y="0"/>
+          <a:chExt cx="0" cy="0"/>
+        </a:xfrm>
+      </p:grpSpPr>
       <p:sp>
         <p:nvSpPr>
           <p:cNvPr id="2" name="Rectangle 1"/>
@@ -12549,6 +14842,7 @@
           <a:lstStyle/>
           <a:p>
             <a:pPr algn="ctr"/>
+            <a:endParaRPr/>
           </a:p>
         </p:txBody>
       </p:sp>
@@ -12593,6 +14887,7 @@
           <a:lstStyle/>
           <a:p>
             <a:pPr algn="ctr"/>
+            <a:endParaRPr/>
           </a:p>
         </p:txBody>
       </p:sp>
@@ -12637,6 +14932,7 @@
           <a:lstStyle/>
           <a:p>
             <a:pPr algn="ctr"/>
+            <a:endParaRPr/>
           </a:p>
         </p:txBody>
       </p:sp>
@@ -12681,6 +14977,7 @@
           <a:lstStyle/>
           <a:p>
             <a:pPr algn="ctr"/>
+            <a:endParaRPr/>
           </a:p>
         </p:txBody>
       </p:sp>
@@ -12701,12 +14998,12 @@
           <a:noFill/>
         </p:spPr>
         <p:txBody>
-          <a:bodyPr wrap="square" anchor="ctr" lIns="25400" rIns="25400" tIns="12700" bIns="12700">
+          <a:bodyPr wrap="square" lIns="25400" tIns="12700" rIns="25400" bIns="12700" anchor="ctr">
             <a:spAutoFit/>
           </a:bodyPr>
           <a:lstStyle/>
           <a:p>
-            <a:pPr algn="ctr" marL="0" indent="0">
+            <a:pPr marL="0" indent="0" algn="ctr">
               <a:buNone/>
             </a:pPr>
             <a:r>
@@ -12738,12 +15035,12 @@
           <a:noFill/>
         </p:spPr>
         <p:txBody>
-          <a:bodyPr wrap="square" anchor="ctr" lIns="25400" rIns="25400" tIns="12700" bIns="12700">
+          <a:bodyPr wrap="square" lIns="25400" tIns="12700" rIns="25400" bIns="12700" anchor="ctr">
             <a:spAutoFit/>
           </a:bodyPr>
           <a:lstStyle/>
           <a:p>
-            <a:pPr algn="l" marL="0" indent="0">
+            <a:pPr marL="0" indent="0" algn="l">
               <a:buNone/>
             </a:pPr>
             <a:r>
@@ -12775,12 +15072,12 @@
           <a:noFill/>
         </p:spPr>
         <p:txBody>
-          <a:bodyPr wrap="square" anchor="ctr" lIns="25400" rIns="25400" tIns="12700" bIns="12700">
+          <a:bodyPr wrap="square" lIns="25400" tIns="12700" rIns="25400" bIns="12700" anchor="ctr">
             <a:spAutoFit/>
           </a:bodyPr>
           <a:lstStyle/>
           <a:p>
-            <a:pPr algn="l" marL="0" indent="0">
+            <a:pPr marL="0" indent="0" algn="l">
               <a:buNone/>
             </a:pPr>
             <a:r>
@@ -12840,6 +15137,7 @@
           <a:lstStyle/>
           <a:p>
             <a:pPr algn="ctr"/>
+            <a:endParaRPr/>
           </a:p>
         </p:txBody>
       </p:sp>
@@ -12884,6 +15182,7 @@
           <a:lstStyle/>
           <a:p>
             <a:pPr algn="ctr"/>
+            <a:endParaRPr/>
           </a:p>
         </p:txBody>
       </p:sp>
@@ -12904,12 +15203,12 @@
           <a:noFill/>
         </p:spPr>
         <p:txBody>
-          <a:bodyPr wrap="square" anchor="ctr" lIns="25400" rIns="25400" tIns="12700" bIns="12700">
+          <a:bodyPr wrap="square" lIns="25400" tIns="12700" rIns="25400" bIns="12700" anchor="ctr">
             <a:spAutoFit/>
           </a:bodyPr>
           <a:lstStyle/>
           <a:p>
-            <a:pPr algn="ctr" marL="0" indent="0">
+            <a:pPr marL="0" indent="0" algn="ctr">
               <a:buNone/>
             </a:pPr>
             <a:r>
@@ -12941,12 +15240,12 @@
           <a:noFill/>
         </p:spPr>
         <p:txBody>
-          <a:bodyPr wrap="square" anchor="ctr" lIns="25400" rIns="25400" tIns="12700" bIns="12700">
+          <a:bodyPr wrap="square" lIns="25400" tIns="12700" rIns="25400" bIns="12700" anchor="ctr">
             <a:spAutoFit/>
           </a:bodyPr>
           <a:lstStyle/>
           <a:p>
-            <a:pPr algn="l" marL="0" indent="0">
+            <a:pPr marL="0" indent="0" algn="l">
               <a:spcAft>
                 <a:spcPts val="500"/>
               </a:spcAft>
@@ -12963,7 +15262,7 @@
             </a:r>
           </a:p>
           <a:p>
-            <a:pPr algn="l" marL="0" indent="0">
+            <a:pPr marL="0" indent="0" algn="l">
               <a:spcAft>
                 <a:spcPts val="500"/>
               </a:spcAft>
@@ -13026,6 +15325,7 @@
           <a:lstStyle/>
           <a:p>
             <a:pPr algn="ctr"/>
+            <a:endParaRPr/>
           </a:p>
         </p:txBody>
       </p:sp>
@@ -13070,6 +15370,7 @@
           <a:lstStyle/>
           <a:p>
             <a:pPr algn="ctr"/>
+            <a:endParaRPr/>
           </a:p>
         </p:txBody>
       </p:sp>
@@ -13090,12 +15391,12 @@
           <a:noFill/>
         </p:spPr>
         <p:txBody>
-          <a:bodyPr wrap="square" anchor="ctr" lIns="25400" rIns="25400" tIns="12700" bIns="12700">
+          <a:bodyPr wrap="square" lIns="25400" tIns="12700" rIns="25400" bIns="12700" anchor="ctr">
             <a:spAutoFit/>
           </a:bodyPr>
           <a:lstStyle/>
           <a:p>
-            <a:pPr algn="ctr" marL="0" indent="0">
+            <a:pPr marL="0" indent="0" algn="ctr">
               <a:buNone/>
             </a:pPr>
             <a:r>
@@ -13127,12 +15428,12 @@
           <a:noFill/>
         </p:spPr>
         <p:txBody>
-          <a:bodyPr wrap="square" anchor="ctr" lIns="25400" rIns="25400" tIns="12700" bIns="12700">
+          <a:bodyPr wrap="square" lIns="25400" tIns="12700" rIns="25400" bIns="12700" anchor="ctr">
             <a:spAutoFit/>
           </a:bodyPr>
           <a:lstStyle/>
           <a:p>
-            <a:pPr algn="l" marL="0" indent="0">
+            <a:pPr marL="0" indent="0" algn="l">
               <a:spcAft>
                 <a:spcPts val="500"/>
               </a:spcAft>
@@ -13149,7 +15450,7 @@
             </a:r>
           </a:p>
           <a:p>
-            <a:pPr algn="l" marL="0" indent="0">
+            <a:pPr marL="0" indent="0" algn="l">
               <a:spcAft>
                 <a:spcPts val="500"/>
               </a:spcAft>
@@ -13212,6 +15513,7 @@
           <a:lstStyle/>
           <a:p>
             <a:pPr algn="ctr"/>
+            <a:endParaRPr/>
           </a:p>
         </p:txBody>
       </p:sp>
@@ -13256,6 +15558,7 @@
           <a:lstStyle/>
           <a:p>
             <a:pPr algn="ctr"/>
+            <a:endParaRPr/>
           </a:p>
         </p:txBody>
       </p:sp>
@@ -13276,12 +15579,12 @@
           <a:noFill/>
         </p:spPr>
         <p:txBody>
-          <a:bodyPr wrap="square" anchor="ctr" lIns="25400" rIns="25400" tIns="12700" bIns="12700">
+          <a:bodyPr wrap="square" lIns="25400" tIns="12700" rIns="25400" bIns="12700" anchor="ctr">
             <a:spAutoFit/>
           </a:bodyPr>
           <a:lstStyle/>
           <a:p>
-            <a:pPr algn="ctr" marL="0" indent="0">
+            <a:pPr marL="0" indent="0" algn="ctr">
               <a:buNone/>
             </a:pPr>
             <a:r>
@@ -13313,12 +15616,12 @@
           <a:noFill/>
         </p:spPr>
         <p:txBody>
-          <a:bodyPr wrap="square" anchor="ctr" lIns="25400" rIns="25400" tIns="12700" bIns="12700">
+          <a:bodyPr wrap="square" lIns="25400" tIns="12700" rIns="25400" bIns="12700" anchor="ctr">
             <a:spAutoFit/>
           </a:bodyPr>
           <a:lstStyle/>
           <a:p>
-            <a:pPr algn="l" marL="0" indent="0">
+            <a:pPr marL="0" indent="0" algn="l">
               <a:spcAft>
                 <a:spcPts val="500"/>
               </a:spcAft>
@@ -13335,7 +15638,7 @@
             </a:r>
           </a:p>
           <a:p>
-            <a:pPr algn="l" marL="0" indent="0">
+            <a:pPr marL="0" indent="0" algn="l">
               <a:spcAft>
                 <a:spcPts val="500"/>
               </a:spcAft>
@@ -13396,6 +15699,7 @@
           <a:lstStyle/>
           <a:p>
             <a:pPr algn="ctr"/>
+            <a:endParaRPr/>
           </a:p>
         </p:txBody>
       </p:sp>
@@ -13440,6 +15744,7 @@
           <a:lstStyle/>
           <a:p>
             <a:pPr algn="ctr"/>
+            <a:endParaRPr/>
           </a:p>
         </p:txBody>
       </p:sp>
@@ -13460,12 +15765,12 @@
           <a:noFill/>
         </p:spPr>
         <p:txBody>
-          <a:bodyPr wrap="square" anchor="ctr" lIns="25400" rIns="25400" tIns="12700" bIns="12700">
+          <a:bodyPr wrap="square" lIns="25400" tIns="12700" rIns="25400" bIns="12700" anchor="ctr">
             <a:spAutoFit/>
           </a:bodyPr>
           <a:lstStyle/>
           <a:p>
-            <a:pPr algn="l" marL="0" indent="0">
+            <a:pPr marL="0" indent="0" algn="l">
               <a:buNone/>
             </a:pPr>
             <a:r>
@@ -13506,12 +15811,12 @@
           <a:noFill/>
         </p:spPr>
         <p:txBody>
-          <a:bodyPr wrap="square" anchor="ctr" lIns="25400" rIns="25400" tIns="12700" bIns="12700">
+          <a:bodyPr wrap="square" lIns="25400" tIns="12700" rIns="25400" bIns="12700" anchor="ctr">
             <a:spAutoFit/>
           </a:bodyPr>
           <a:lstStyle/>
           <a:p>
-            <a:pPr algn="l" marL="0" indent="0">
+            <a:pPr marL="0" indent="0" algn="l">
               <a:buNone/>
             </a:pPr>
             <a:r>
@@ -13543,12 +15848,12 @@
           <a:noFill/>
         </p:spPr>
         <p:txBody>
-          <a:bodyPr wrap="square" anchor="ctr" lIns="25400" rIns="25400" tIns="12700" bIns="12700">
+          <a:bodyPr wrap="square" lIns="25400" tIns="12700" rIns="25400" bIns="12700" anchor="ctr">
             <a:spAutoFit/>
           </a:bodyPr>
           <a:lstStyle/>
           <a:p>
-            <a:pPr algn="r" marL="0" indent="0">
+            <a:pPr marL="0" indent="0" algn="r">
               <a:buNone/>
             </a:pPr>
             <a:r>
@@ -13572,7 +15877,7 @@
 </file>
 
 <file path=ppt/slides/slide7.xml><?xml version="1.0" encoding="utf-8"?>
-<p:sld xmlns:a="http://schemas.openxmlformats.org/drawingml/2006/main" xmlns:p="http://schemas.openxmlformats.org/presentationml/2006/main" xmlns:r="http://schemas.openxmlformats.org/officeDocument/2006/relationships">
+<p:sld xmlns:a="http://schemas.openxmlformats.org/drawingml/2006/main" xmlns:r="http://schemas.openxmlformats.org/officeDocument/2006/relationships" xmlns:p="http://schemas.openxmlformats.org/presentationml/2006/main">
   <p:cSld>
     <p:spTree>
       <p:nvGrpSpPr>
@@ -13580,7 +15885,14 @@
         <p:cNvGrpSpPr/>
         <p:nvPr/>
       </p:nvGrpSpPr>
-      <p:grpSpPr/>
+      <p:grpSpPr>
+        <a:xfrm>
+          <a:off x="0" y="0"/>
+          <a:ext cx="0" cy="0"/>
+          <a:chOff x="0" y="0"/>
+          <a:chExt cx="0" cy="0"/>
+        </a:xfrm>
+      </p:grpSpPr>
       <p:sp>
         <p:nvSpPr>
           <p:cNvPr id="2" name="Rectangle 1"/>
@@ -13622,6 +15934,7 @@
           <a:lstStyle/>
           <a:p>
             <a:pPr algn="ctr"/>
+            <a:endParaRPr/>
           </a:p>
         </p:txBody>
       </p:sp>
@@ -13666,6 +15979,7 @@
           <a:lstStyle/>
           <a:p>
             <a:pPr algn="ctr"/>
+            <a:endParaRPr/>
           </a:p>
         </p:txBody>
       </p:sp>
@@ -13710,6 +16024,7 @@
           <a:lstStyle/>
           <a:p>
             <a:pPr algn="ctr"/>
+            <a:endParaRPr/>
           </a:p>
         </p:txBody>
       </p:sp>
@@ -13754,6 +16069,7 @@
           <a:lstStyle/>
           <a:p>
             <a:pPr algn="ctr"/>
+            <a:endParaRPr/>
           </a:p>
         </p:txBody>
       </p:sp>
@@ -13774,12 +16090,12 @@
           <a:noFill/>
         </p:spPr>
         <p:txBody>
-          <a:bodyPr wrap="square" anchor="ctr" lIns="25400" rIns="25400" tIns="12700" bIns="12700">
+          <a:bodyPr wrap="square" lIns="25400" tIns="12700" rIns="25400" bIns="12700" anchor="ctr">
             <a:spAutoFit/>
           </a:bodyPr>
           <a:lstStyle/>
           <a:p>
-            <a:pPr algn="ctr" marL="0" indent="0">
+            <a:pPr marL="0" indent="0" algn="ctr">
               <a:buNone/>
             </a:pPr>
             <a:r>
@@ -13837,6 +16153,7 @@
           <a:lstStyle/>
           <a:p>
             <a:pPr algn="ctr"/>
+            <a:endParaRPr/>
           </a:p>
         </p:txBody>
       </p:sp>
@@ -13857,12 +16174,12 @@
           <a:noFill/>
         </p:spPr>
         <p:txBody>
-          <a:bodyPr wrap="square" anchor="ctr" lIns="25400" rIns="25400" tIns="12700" bIns="12700">
+          <a:bodyPr wrap="square" lIns="25400" tIns="12700" rIns="25400" bIns="12700" anchor="ctr">
             <a:spAutoFit/>
           </a:bodyPr>
           <a:lstStyle/>
           <a:p>
-            <a:pPr algn="ctr" marL="0" indent="0">
+            <a:pPr marL="0" indent="0" algn="ctr">
               <a:buNone/>
             </a:pPr>
             <a:r>
@@ -13894,12 +16211,12 @@
           <a:noFill/>
         </p:spPr>
         <p:txBody>
-          <a:bodyPr wrap="square" anchor="ctr" lIns="25400" rIns="25400" tIns="12700" bIns="12700">
+          <a:bodyPr wrap="square" lIns="25400" tIns="12700" rIns="25400" bIns="12700" anchor="ctr">
             <a:spAutoFit/>
           </a:bodyPr>
           <a:lstStyle/>
           <a:p>
-            <a:pPr algn="l" marL="0" indent="0">
+            <a:pPr marL="0" indent="0" algn="l">
               <a:buNone/>
             </a:pPr>
             <a:r>
@@ -13931,12 +16248,12 @@
           <a:noFill/>
         </p:spPr>
         <p:txBody>
-          <a:bodyPr wrap="square" anchor="ctr" lIns="25400" rIns="25400" tIns="12700" bIns="12700">
+          <a:bodyPr wrap="square" lIns="25400" tIns="12700" rIns="25400" bIns="12700" anchor="ctr">
             <a:spAutoFit/>
           </a:bodyPr>
           <a:lstStyle/>
           <a:p>
-            <a:pPr algn="l" marL="0" indent="0">
+            <a:pPr marL="0" indent="0" algn="l">
               <a:buNone/>
             </a:pPr>
             <a:r>
@@ -13996,6 +16313,7 @@
           <a:lstStyle/>
           <a:p>
             <a:pPr algn="ctr"/>
+            <a:endParaRPr/>
           </a:p>
         </p:txBody>
       </p:sp>
@@ -14040,6 +16358,7 @@
           <a:lstStyle/>
           <a:p>
             <a:pPr algn="ctr"/>
+            <a:endParaRPr/>
           </a:p>
         </p:txBody>
       </p:sp>
@@ -14060,12 +16379,12 @@
           <a:noFill/>
         </p:spPr>
         <p:txBody>
-          <a:bodyPr wrap="square" anchor="ctr" lIns="25400" rIns="25400" tIns="12700" bIns="12700">
+          <a:bodyPr wrap="square" lIns="25400" tIns="12700" rIns="25400" bIns="12700" anchor="ctr">
             <a:spAutoFit/>
           </a:bodyPr>
           <a:lstStyle/>
           <a:p>
-            <a:pPr algn="ctr" marL="0" indent="0">
+            <a:pPr marL="0" indent="0" algn="ctr">
               <a:buNone/>
             </a:pPr>
             <a:r>
@@ -14097,12 +16416,12 @@
           <a:noFill/>
         </p:spPr>
         <p:txBody>
-          <a:bodyPr wrap="square" anchor="ctr" lIns="25400" rIns="25400" tIns="12700" bIns="12700">
+          <a:bodyPr wrap="square" lIns="25400" tIns="12700" rIns="25400" bIns="12700" anchor="ctr">
             <a:spAutoFit/>
           </a:bodyPr>
           <a:lstStyle/>
           <a:p>
-            <a:pPr algn="l" marL="0" indent="0">
+            <a:pPr marL="0" indent="0" algn="l">
               <a:spcAft>
                 <a:spcPts val="500"/>
               </a:spcAft>
@@ -14119,7 +16438,7 @@
             </a:r>
           </a:p>
           <a:p>
-            <a:pPr algn="l" marL="0" indent="0">
+            <a:pPr marL="0" indent="0" algn="l">
               <a:spcAft>
                 <a:spcPts val="500"/>
               </a:spcAft>
@@ -14182,6 +16501,7 @@
           <a:lstStyle/>
           <a:p>
             <a:pPr algn="ctr"/>
+            <a:endParaRPr/>
           </a:p>
         </p:txBody>
       </p:sp>
@@ -14226,6 +16546,7 @@
           <a:lstStyle/>
           <a:p>
             <a:pPr algn="ctr"/>
+            <a:endParaRPr/>
           </a:p>
         </p:txBody>
       </p:sp>
@@ -14246,12 +16567,12 @@
           <a:noFill/>
         </p:spPr>
         <p:txBody>
-          <a:bodyPr wrap="square" anchor="ctr" lIns="25400" rIns="25400" tIns="12700" bIns="12700">
+          <a:bodyPr wrap="square" lIns="25400" tIns="12700" rIns="25400" bIns="12700" anchor="ctr">
             <a:spAutoFit/>
           </a:bodyPr>
           <a:lstStyle/>
           <a:p>
-            <a:pPr algn="ctr" marL="0" indent="0">
+            <a:pPr marL="0" indent="0" algn="ctr">
               <a:buNone/>
             </a:pPr>
             <a:r>
@@ -14283,12 +16604,12 @@
           <a:noFill/>
         </p:spPr>
         <p:txBody>
-          <a:bodyPr wrap="square" anchor="ctr" lIns="25400" rIns="25400" tIns="12700" bIns="12700">
+          <a:bodyPr wrap="square" lIns="25400" tIns="12700" rIns="25400" bIns="12700" anchor="ctr">
             <a:spAutoFit/>
           </a:bodyPr>
           <a:lstStyle/>
           <a:p>
-            <a:pPr algn="l" marL="0" indent="0">
+            <a:pPr marL="0" indent="0" algn="l">
               <a:spcAft>
                 <a:spcPts val="500"/>
               </a:spcAft>
@@ -14305,7 +16626,7 @@
             </a:r>
           </a:p>
           <a:p>
-            <a:pPr algn="l" marL="0" indent="0">
+            <a:pPr marL="0" indent="0" algn="l">
               <a:spcAft>
                 <a:spcPts val="500"/>
               </a:spcAft>
@@ -14368,6 +16689,7 @@
           <a:lstStyle/>
           <a:p>
             <a:pPr algn="ctr"/>
+            <a:endParaRPr/>
           </a:p>
         </p:txBody>
       </p:sp>
@@ -14412,6 +16734,7 @@
           <a:lstStyle/>
           <a:p>
             <a:pPr algn="ctr"/>
+            <a:endParaRPr/>
           </a:p>
         </p:txBody>
       </p:sp>
@@ -14432,12 +16755,12 @@
           <a:noFill/>
         </p:spPr>
         <p:txBody>
-          <a:bodyPr wrap="square" anchor="ctr" lIns="25400" rIns="25400" tIns="12700" bIns="12700">
+          <a:bodyPr wrap="square" lIns="25400" tIns="12700" rIns="25400" bIns="12700" anchor="ctr">
             <a:spAutoFit/>
           </a:bodyPr>
           <a:lstStyle/>
           <a:p>
-            <a:pPr algn="ctr" marL="0" indent="0">
+            <a:pPr marL="0" indent="0" algn="ctr">
               <a:buNone/>
             </a:pPr>
             <a:r>
@@ -14469,12 +16792,12 @@
           <a:noFill/>
         </p:spPr>
         <p:txBody>
-          <a:bodyPr wrap="square" anchor="ctr" lIns="25400" rIns="25400" tIns="12700" bIns="12700">
+          <a:bodyPr wrap="square" lIns="25400" tIns="12700" rIns="25400" bIns="12700" anchor="ctr">
             <a:spAutoFit/>
           </a:bodyPr>
           <a:lstStyle/>
           <a:p>
-            <a:pPr algn="l" marL="0" indent="0">
+            <a:pPr marL="0" indent="0" algn="l">
               <a:spcAft>
                 <a:spcPts val="500"/>
               </a:spcAft>
@@ -14491,7 +16814,7 @@
             </a:r>
           </a:p>
           <a:p>
-            <a:pPr algn="l" marL="0" indent="0">
+            <a:pPr marL="0" indent="0" algn="l">
               <a:spcAft>
                 <a:spcPts val="500"/>
               </a:spcAft>
@@ -14552,6 +16875,7 @@
           <a:lstStyle/>
           <a:p>
             <a:pPr algn="ctr"/>
+            <a:endParaRPr/>
           </a:p>
         </p:txBody>
       </p:sp>
@@ -14596,6 +16920,7 @@
           <a:lstStyle/>
           <a:p>
             <a:pPr algn="ctr"/>
+            <a:endParaRPr/>
           </a:p>
         </p:txBody>
       </p:sp>
@@ -14616,12 +16941,12 @@
           <a:noFill/>
         </p:spPr>
         <p:txBody>
-          <a:bodyPr wrap="square" anchor="ctr" lIns="25400" rIns="25400" tIns="12700" bIns="12700">
+          <a:bodyPr wrap="square" lIns="25400" tIns="12700" rIns="25400" bIns="12700" anchor="ctr">
             <a:spAutoFit/>
           </a:bodyPr>
           <a:lstStyle/>
           <a:p>
-            <a:pPr algn="l" marL="0" indent="0">
+            <a:pPr marL="0" indent="0" algn="l">
               <a:buNone/>
             </a:pPr>
             <a:r>
@@ -14662,12 +16987,12 @@
           <a:noFill/>
         </p:spPr>
         <p:txBody>
-          <a:bodyPr wrap="square" anchor="ctr" lIns="25400" rIns="25400" tIns="12700" bIns="12700">
+          <a:bodyPr wrap="square" lIns="25400" tIns="12700" rIns="25400" bIns="12700" anchor="ctr">
             <a:spAutoFit/>
           </a:bodyPr>
           <a:lstStyle/>
           <a:p>
-            <a:pPr algn="l" marL="0" indent="0">
+            <a:pPr marL="0" indent="0" algn="l">
               <a:buNone/>
             </a:pPr>
             <a:r>
@@ -14699,12 +17024,12 @@
           <a:noFill/>
         </p:spPr>
         <p:txBody>
-          <a:bodyPr wrap="square" anchor="ctr" lIns="25400" rIns="25400" tIns="12700" bIns="12700">
+          <a:bodyPr wrap="square" lIns="25400" tIns="12700" rIns="25400" bIns="12700" anchor="ctr">
             <a:spAutoFit/>
           </a:bodyPr>
           <a:lstStyle/>
           <a:p>
-            <a:pPr algn="r" marL="0" indent="0">
+            <a:pPr marL="0" indent="0" algn="r">
               <a:buNone/>
             </a:pPr>
             <a:r>
@@ -14728,7 +17053,7 @@
 </file>
 
 <file path=ppt/slides/slide8.xml><?xml version="1.0" encoding="utf-8"?>
-<p:sld xmlns:a="http://schemas.openxmlformats.org/drawingml/2006/main" xmlns:p="http://schemas.openxmlformats.org/presentationml/2006/main" xmlns:r="http://schemas.openxmlformats.org/officeDocument/2006/relationships">
+<p:sld xmlns:a="http://schemas.openxmlformats.org/drawingml/2006/main" xmlns:r="http://schemas.openxmlformats.org/officeDocument/2006/relationships" xmlns:p="http://schemas.openxmlformats.org/presentationml/2006/main">
   <p:cSld>
     <p:spTree>
       <p:nvGrpSpPr>
@@ -14736,7 +17061,14 @@
         <p:cNvGrpSpPr/>
         <p:nvPr/>
       </p:nvGrpSpPr>
-      <p:grpSpPr/>
+      <p:grpSpPr>
+        <a:xfrm>
+          <a:off x="0" y="0"/>
+          <a:ext cx="0" cy="0"/>
+          <a:chOff x="0" y="0"/>
+          <a:chExt cx="0" cy="0"/>
+        </a:xfrm>
+      </p:grpSpPr>
       <p:sp>
         <p:nvSpPr>
           <p:cNvPr id="2" name="Rectangle 1"/>
@@ -14778,6 +17110,7 @@
           <a:lstStyle/>
           <a:p>
             <a:pPr algn="ctr"/>
+            <a:endParaRPr/>
           </a:p>
         </p:txBody>
       </p:sp>
@@ -14822,6 +17155,7 @@
           <a:lstStyle/>
           <a:p>
             <a:pPr algn="ctr"/>
+            <a:endParaRPr/>
           </a:p>
         </p:txBody>
       </p:sp>
@@ -14866,6 +17200,7 @@
           <a:lstStyle/>
           <a:p>
             <a:pPr algn="ctr"/>
+            <a:endParaRPr/>
           </a:p>
         </p:txBody>
       </p:sp>
@@ -14910,6 +17245,7 @@
           <a:lstStyle/>
           <a:p>
             <a:pPr algn="ctr"/>
+            <a:endParaRPr/>
           </a:p>
         </p:txBody>
       </p:sp>
@@ -14930,12 +17266,12 @@
           <a:noFill/>
         </p:spPr>
         <p:txBody>
-          <a:bodyPr wrap="square" anchor="ctr" lIns="25400" rIns="25400" tIns="12700" bIns="12700">
+          <a:bodyPr wrap="square" lIns="25400" tIns="12700" rIns="25400" bIns="12700" anchor="ctr">
             <a:spAutoFit/>
           </a:bodyPr>
           <a:lstStyle/>
           <a:p>
-            <a:pPr algn="ctr" marL="0" indent="0">
+            <a:pPr marL="0" indent="0" algn="ctr">
               <a:buNone/>
             </a:pPr>
             <a:r>
@@ -14967,12 +17303,12 @@
           <a:noFill/>
         </p:spPr>
         <p:txBody>
-          <a:bodyPr wrap="square" anchor="ctr" lIns="25400" rIns="25400" tIns="12700" bIns="12700">
+          <a:bodyPr wrap="square" lIns="25400" tIns="12700" rIns="25400" bIns="12700" anchor="ctr">
             <a:spAutoFit/>
           </a:bodyPr>
           <a:lstStyle/>
           <a:p>
-            <a:pPr algn="l" marL="0" indent="0">
+            <a:pPr marL="0" indent="0" algn="l">
               <a:buNone/>
             </a:pPr>
             <a:r>
@@ -15004,12 +17340,12 @@
           <a:noFill/>
         </p:spPr>
         <p:txBody>
-          <a:bodyPr wrap="square" anchor="ctr" lIns="25400" rIns="25400" tIns="12700" bIns="12700">
+          <a:bodyPr wrap="square" lIns="25400" tIns="12700" rIns="25400" bIns="12700" anchor="ctr">
             <a:spAutoFit/>
           </a:bodyPr>
           <a:lstStyle/>
           <a:p>
-            <a:pPr algn="l" marL="0" indent="0">
+            <a:pPr marL="0" indent="0" algn="l">
               <a:buNone/>
             </a:pPr>
             <a:r>
@@ -15069,6 +17405,7 @@
           <a:lstStyle/>
           <a:p>
             <a:pPr algn="ctr"/>
+            <a:endParaRPr/>
           </a:p>
         </p:txBody>
       </p:sp>
@@ -15113,6 +17450,7 @@
           <a:lstStyle/>
           <a:p>
             <a:pPr algn="ctr"/>
+            <a:endParaRPr/>
           </a:p>
         </p:txBody>
       </p:sp>
@@ -15133,12 +17471,12 @@
           <a:noFill/>
         </p:spPr>
         <p:txBody>
-          <a:bodyPr wrap="square" anchor="ctr" lIns="25400" rIns="25400" tIns="12700" bIns="12700">
+          <a:bodyPr wrap="square" lIns="25400" tIns="12700" rIns="25400" bIns="12700" anchor="ctr">
             <a:spAutoFit/>
           </a:bodyPr>
           <a:lstStyle/>
           <a:p>
-            <a:pPr algn="ctr" marL="0" indent="0">
+            <a:pPr marL="0" indent="0" algn="ctr">
               <a:buNone/>
             </a:pPr>
             <a:r>
@@ -15170,12 +17508,12 @@
           <a:noFill/>
         </p:spPr>
         <p:txBody>
-          <a:bodyPr wrap="square" anchor="ctr" lIns="25400" rIns="25400" tIns="12700" bIns="12700">
+          <a:bodyPr wrap="square" lIns="25400" tIns="12700" rIns="25400" bIns="12700" anchor="ctr">
             <a:spAutoFit/>
           </a:bodyPr>
           <a:lstStyle/>
           <a:p>
-            <a:pPr algn="l" marL="0" indent="0">
+            <a:pPr marL="0" indent="0" algn="l">
               <a:spcAft>
                 <a:spcPts val="500"/>
               </a:spcAft>
@@ -15192,7 +17530,7 @@
             </a:r>
           </a:p>
           <a:p>
-            <a:pPr algn="l" marL="0" indent="0">
+            <a:pPr marL="0" indent="0" algn="l">
               <a:spcAft>
                 <a:spcPts val="500"/>
               </a:spcAft>
@@ -15255,6 +17593,7 @@
           <a:lstStyle/>
           <a:p>
             <a:pPr algn="ctr"/>
+            <a:endParaRPr/>
           </a:p>
         </p:txBody>
       </p:sp>
@@ -15299,6 +17638,7 @@
           <a:lstStyle/>
           <a:p>
             <a:pPr algn="ctr"/>
+            <a:endParaRPr/>
           </a:p>
         </p:txBody>
       </p:sp>
@@ -15319,12 +17659,12 @@
           <a:noFill/>
         </p:spPr>
         <p:txBody>
-          <a:bodyPr wrap="square" anchor="ctr" lIns="25400" rIns="25400" tIns="12700" bIns="12700">
+          <a:bodyPr wrap="square" lIns="25400" tIns="12700" rIns="25400" bIns="12700" anchor="ctr">
             <a:spAutoFit/>
           </a:bodyPr>
           <a:lstStyle/>
           <a:p>
-            <a:pPr algn="ctr" marL="0" indent="0">
+            <a:pPr marL="0" indent="0" algn="ctr">
               <a:buNone/>
             </a:pPr>
             <a:r>
@@ -15356,12 +17696,12 @@
           <a:noFill/>
         </p:spPr>
         <p:txBody>
-          <a:bodyPr wrap="square" anchor="ctr" lIns="25400" rIns="25400" tIns="12700" bIns="12700">
+          <a:bodyPr wrap="square" lIns="25400" tIns="12700" rIns="25400" bIns="12700" anchor="ctr">
             <a:spAutoFit/>
           </a:bodyPr>
           <a:lstStyle/>
           <a:p>
-            <a:pPr algn="l" marL="0" indent="0">
+            <a:pPr marL="0" indent="0" algn="l">
               <a:spcAft>
                 <a:spcPts val="500"/>
               </a:spcAft>
@@ -15378,7 +17718,7 @@
             </a:r>
           </a:p>
           <a:p>
-            <a:pPr algn="l" marL="0" indent="0">
+            <a:pPr marL="0" indent="0" algn="l">
               <a:spcAft>
                 <a:spcPts val="500"/>
               </a:spcAft>
@@ -15441,6 +17781,7 @@
           <a:lstStyle/>
           <a:p>
             <a:pPr algn="ctr"/>
+            <a:endParaRPr/>
           </a:p>
         </p:txBody>
       </p:sp>
@@ -15485,6 +17826,7 @@
           <a:lstStyle/>
           <a:p>
             <a:pPr algn="ctr"/>
+            <a:endParaRPr/>
           </a:p>
         </p:txBody>
       </p:sp>
@@ -15505,12 +17847,12 @@
           <a:noFill/>
         </p:spPr>
         <p:txBody>
-          <a:bodyPr wrap="square" anchor="ctr" lIns="25400" rIns="25400" tIns="12700" bIns="12700">
+          <a:bodyPr wrap="square" lIns="25400" tIns="12700" rIns="25400" bIns="12700" anchor="ctr">
             <a:spAutoFit/>
           </a:bodyPr>
           <a:lstStyle/>
           <a:p>
-            <a:pPr algn="ctr" marL="0" indent="0">
+            <a:pPr marL="0" indent="0" algn="ctr">
               <a:buNone/>
             </a:pPr>
             <a:r>
@@ -15542,12 +17884,12 @@
           <a:noFill/>
         </p:spPr>
         <p:txBody>
-          <a:bodyPr wrap="square" anchor="ctr" lIns="25400" rIns="25400" tIns="12700" bIns="12700">
+          <a:bodyPr wrap="square" lIns="25400" tIns="12700" rIns="25400" bIns="12700" anchor="ctr">
             <a:spAutoFit/>
           </a:bodyPr>
           <a:lstStyle/>
           <a:p>
-            <a:pPr algn="l" marL="0" indent="0">
+            <a:pPr marL="0" indent="0" algn="l">
               <a:spcAft>
                 <a:spcPts val="500"/>
               </a:spcAft>
@@ -15564,7 +17906,7 @@
             </a:r>
           </a:p>
           <a:p>
-            <a:pPr algn="l" marL="0" indent="0">
+            <a:pPr marL="0" indent="0" algn="l">
               <a:spcAft>
                 <a:spcPts val="500"/>
               </a:spcAft>
@@ -15627,6 +17969,7 @@
           <a:lstStyle/>
           <a:p>
             <a:pPr algn="ctr"/>
+            <a:endParaRPr/>
           </a:p>
         </p:txBody>
       </p:sp>
@@ -15671,6 +18014,7 @@
           <a:lstStyle/>
           <a:p>
             <a:pPr algn="ctr"/>
+            <a:endParaRPr/>
           </a:p>
         </p:txBody>
       </p:sp>
@@ -15691,12 +18035,12 @@
           <a:noFill/>
         </p:spPr>
         <p:txBody>
-          <a:bodyPr wrap="square" anchor="ctr" lIns="25400" rIns="25400" tIns="12700" bIns="12700">
+          <a:bodyPr wrap="square" lIns="25400" tIns="12700" rIns="25400" bIns="12700" anchor="ctr">
             <a:spAutoFit/>
           </a:bodyPr>
           <a:lstStyle/>
           <a:p>
-            <a:pPr algn="ctr" marL="0" indent="0">
+            <a:pPr marL="0" indent="0" algn="ctr">
               <a:buNone/>
             </a:pPr>
             <a:r>
@@ -15728,12 +18072,12 @@
           <a:noFill/>
         </p:spPr>
         <p:txBody>
-          <a:bodyPr wrap="square" anchor="ctr" lIns="25400" rIns="25400" tIns="12700" bIns="12700">
+          <a:bodyPr wrap="square" lIns="25400" tIns="12700" rIns="25400" bIns="12700" anchor="ctr">
             <a:spAutoFit/>
           </a:bodyPr>
           <a:lstStyle/>
           <a:p>
-            <a:pPr algn="l" marL="0" indent="0">
+            <a:pPr marL="0" indent="0" algn="l">
               <a:spcAft>
                 <a:spcPts val="500"/>
               </a:spcAft>
@@ -15750,7 +18094,7 @@
             </a:r>
           </a:p>
           <a:p>
-            <a:pPr algn="l" marL="0" indent="0">
+            <a:pPr marL="0" indent="0" algn="l">
               <a:spcAft>
                 <a:spcPts val="500"/>
               </a:spcAft>
@@ -15811,6 +18155,7 @@
           <a:lstStyle/>
           <a:p>
             <a:pPr algn="ctr"/>
+            <a:endParaRPr/>
           </a:p>
         </p:txBody>
       </p:sp>
@@ -15855,6 +18200,7 @@
           <a:lstStyle/>
           <a:p>
             <a:pPr algn="ctr"/>
+            <a:endParaRPr/>
           </a:p>
         </p:txBody>
       </p:sp>
@@ -15875,12 +18221,12 @@
           <a:noFill/>
         </p:spPr>
         <p:txBody>
-          <a:bodyPr wrap="square" anchor="ctr" lIns="25400" rIns="25400" tIns="12700" bIns="12700">
+          <a:bodyPr wrap="square" lIns="25400" tIns="12700" rIns="25400" bIns="12700" anchor="ctr">
             <a:spAutoFit/>
           </a:bodyPr>
           <a:lstStyle/>
           <a:p>
-            <a:pPr algn="l" marL="0" indent="0">
+            <a:pPr marL="0" indent="0" algn="l">
               <a:buNone/>
             </a:pPr>
             <a:r>
@@ -15921,12 +18267,12 @@
           <a:noFill/>
         </p:spPr>
         <p:txBody>
-          <a:bodyPr wrap="square" anchor="ctr" lIns="25400" rIns="25400" tIns="12700" bIns="12700">
+          <a:bodyPr wrap="square" lIns="25400" tIns="12700" rIns="25400" bIns="12700" anchor="ctr">
             <a:spAutoFit/>
           </a:bodyPr>
           <a:lstStyle/>
           <a:p>
-            <a:pPr algn="l" marL="0" indent="0">
+            <a:pPr marL="0" indent="0" algn="l">
               <a:buNone/>
             </a:pPr>
             <a:r>
@@ -15958,12 +18304,12 @@
           <a:noFill/>
         </p:spPr>
         <p:txBody>
-          <a:bodyPr wrap="square" anchor="ctr" lIns="25400" rIns="25400" tIns="12700" bIns="12700">
+          <a:bodyPr wrap="square" lIns="25400" tIns="12700" rIns="25400" bIns="12700" anchor="ctr">
             <a:spAutoFit/>
           </a:bodyPr>
           <a:lstStyle/>
           <a:p>
-            <a:pPr algn="r" marL="0" indent="0">
+            <a:pPr marL="0" indent="0" algn="r">
               <a:buNone/>
             </a:pPr>
             <a:r>
@@ -15987,7 +18333,7 @@
 </file>
 
 <file path=ppt/slides/slide9.xml><?xml version="1.0" encoding="utf-8"?>
-<p:sld xmlns:a="http://schemas.openxmlformats.org/drawingml/2006/main" xmlns:p="http://schemas.openxmlformats.org/presentationml/2006/main" xmlns:r="http://schemas.openxmlformats.org/officeDocument/2006/relationships">
+<p:sld xmlns:a="http://schemas.openxmlformats.org/drawingml/2006/main" xmlns:r="http://schemas.openxmlformats.org/officeDocument/2006/relationships" xmlns:p="http://schemas.openxmlformats.org/presentationml/2006/main">
   <p:cSld>
     <p:spTree>
       <p:nvGrpSpPr>
@@ -15995,7 +18341,14 @@
         <p:cNvGrpSpPr/>
         <p:nvPr/>
       </p:nvGrpSpPr>
-      <p:grpSpPr/>
+      <p:grpSpPr>
+        <a:xfrm>
+          <a:off x="0" y="0"/>
+          <a:ext cx="0" cy="0"/>
+          <a:chOff x="0" y="0"/>
+          <a:chExt cx="0" cy="0"/>
+        </a:xfrm>
+      </p:grpSpPr>
       <p:sp>
         <p:nvSpPr>
           <p:cNvPr id="2" name="Rectangle 1"/>
@@ -16037,6 +18390,7 @@
           <a:lstStyle/>
           <a:p>
             <a:pPr algn="ctr"/>
+            <a:endParaRPr/>
           </a:p>
         </p:txBody>
       </p:sp>
@@ -16081,6 +18435,7 @@
           <a:lstStyle/>
           <a:p>
             <a:pPr algn="ctr"/>
+            <a:endParaRPr/>
           </a:p>
         </p:txBody>
       </p:sp>
@@ -16125,6 +18480,7 @@
           <a:lstStyle/>
           <a:p>
             <a:pPr algn="ctr"/>
+            <a:endParaRPr/>
           </a:p>
         </p:txBody>
       </p:sp>
@@ -16145,12 +18501,12 @@
           <a:noFill/>
         </p:spPr>
         <p:txBody>
-          <a:bodyPr wrap="square" anchor="t" lIns="25400" rIns="25400" tIns="12700" bIns="12700">
+          <a:bodyPr wrap="square" lIns="25400" tIns="12700" rIns="25400" bIns="12700" anchor="t">
             <a:spAutoFit/>
           </a:bodyPr>
           <a:lstStyle/>
           <a:p>
-            <a:pPr algn="l" marL="0" indent="0">
+            <a:pPr marL="0" indent="0" algn="l">
               <a:buNone/>
             </a:pPr>
             <a:r>
@@ -16182,12 +18538,12 @@
           <a:noFill/>
         </p:spPr>
         <p:txBody>
-          <a:bodyPr wrap="square" anchor="t" lIns="25400" rIns="25400" tIns="12700" bIns="12700">
+          <a:bodyPr wrap="square" lIns="25400" tIns="12700" rIns="25400" bIns="12700" anchor="t">
             <a:spAutoFit/>
           </a:bodyPr>
           <a:lstStyle/>
           <a:p>
-            <a:pPr algn="l" marL="0" indent="0">
+            <a:pPr marL="0" indent="0" algn="l">
               <a:buNone/>
             </a:pPr>
             <a:r>
@@ -16247,6 +18603,7 @@
           <a:lstStyle/>
           <a:p>
             <a:pPr algn="ctr"/>
+            <a:endParaRPr/>
           </a:p>
         </p:txBody>
       </p:sp>
@@ -16293,6 +18650,7 @@
           <a:lstStyle/>
           <a:p>
             <a:pPr algn="ctr"/>
+            <a:endParaRPr/>
           </a:p>
         </p:txBody>
       </p:sp>
@@ -16337,6 +18695,7 @@
           <a:lstStyle/>
           <a:p>
             <a:pPr algn="ctr"/>
+            <a:endParaRPr/>
           </a:p>
         </p:txBody>
       </p:sp>
@@ -16357,12 +18716,12 @@
           <a:noFill/>
         </p:spPr>
         <p:txBody>
-          <a:bodyPr wrap="square" anchor="ctr" lIns="25400" rIns="25400" tIns="12700" bIns="12700">
+          <a:bodyPr wrap="square" lIns="25400" tIns="12700" rIns="25400" bIns="12700" anchor="ctr">
             <a:spAutoFit/>
           </a:bodyPr>
           <a:lstStyle/>
           <a:p>
-            <a:pPr algn="l" marL="0" indent="0">
+            <a:pPr marL="0" indent="0" algn="l">
               <a:buNone/>
             </a:pPr>
             <a:r>
@@ -16394,12 +18753,12 @@
           <a:noFill/>
         </p:spPr>
         <p:txBody>
-          <a:bodyPr wrap="square" anchor="t" lIns="25400" rIns="25400" tIns="12700" bIns="12700">
+          <a:bodyPr wrap="square" lIns="25400" tIns="12700" rIns="25400" bIns="12700" anchor="t">
             <a:spAutoFit/>
           </a:bodyPr>
           <a:lstStyle/>
           <a:p>
-            <a:pPr algn="l" marL="0" indent="0">
+            <a:pPr marL="0" indent="0" algn="l">
               <a:buNone/>
             </a:pPr>
             <a:r>
@@ -16455,6 +18814,7 @@
           <a:lstStyle/>
           <a:p>
             <a:pPr algn="ctr"/>
+            <a:endParaRPr/>
           </a:p>
         </p:txBody>
       </p:sp>
@@ -16475,12 +18835,12 @@
           <a:noFill/>
         </p:spPr>
         <p:txBody>
-          <a:bodyPr wrap="square" anchor="t" lIns="25400" rIns="25400" tIns="12700" bIns="12700">
+          <a:bodyPr wrap="square" lIns="25400" tIns="12700" rIns="25400" bIns="12700" anchor="t">
             <a:spAutoFit/>
           </a:bodyPr>
           <a:lstStyle/>
           <a:p>
-            <a:pPr algn="l" marL="0" indent="0">
+            <a:pPr marL="0" indent="0" algn="l">
               <a:buNone/>
             </a:pPr>
             <a:r>
@@ -16536,6 +18896,7 @@
           <a:lstStyle/>
           <a:p>
             <a:pPr algn="ctr"/>
+            <a:endParaRPr/>
           </a:p>
         </p:txBody>
       </p:sp>
@@ -16556,12 +18917,12 @@
           <a:noFill/>
         </p:spPr>
         <p:txBody>
-          <a:bodyPr wrap="square" anchor="t" lIns="25400" rIns="25400" tIns="12700" bIns="12700">
+          <a:bodyPr wrap="square" lIns="25400" tIns="12700" rIns="25400" bIns="12700" anchor="t">
             <a:spAutoFit/>
           </a:bodyPr>
           <a:lstStyle/>
           <a:p>
-            <a:pPr algn="l" marL="0" indent="0">
+            <a:pPr marL="0" indent="0" algn="l">
               <a:buNone/>
             </a:pPr>
             <a:r>
@@ -16617,6 +18978,7 @@
           <a:lstStyle/>
           <a:p>
             <a:pPr algn="ctr"/>
+            <a:endParaRPr/>
           </a:p>
         </p:txBody>
       </p:sp>
@@ -16637,12 +18999,12 @@
           <a:noFill/>
         </p:spPr>
         <p:txBody>
-          <a:bodyPr wrap="square" anchor="t" lIns="25400" rIns="25400" tIns="12700" bIns="12700">
+          <a:bodyPr wrap="square" lIns="25400" tIns="12700" rIns="25400" bIns="12700" anchor="t">
             <a:spAutoFit/>
           </a:bodyPr>
           <a:lstStyle/>
           <a:p>
-            <a:pPr algn="l" marL="0" indent="0">
+            <a:pPr marL="0" indent="0" algn="l">
               <a:buNone/>
             </a:pPr>
             <a:r>
@@ -16698,6 +19060,7 @@
           <a:lstStyle/>
           <a:p>
             <a:pPr algn="ctr"/>
+            <a:endParaRPr/>
           </a:p>
         </p:txBody>
       </p:sp>
@@ -16718,12 +19081,12 @@
           <a:noFill/>
         </p:spPr>
         <p:txBody>
-          <a:bodyPr wrap="square" anchor="t" lIns="25400" rIns="25400" tIns="12700" bIns="12700">
+          <a:bodyPr wrap="square" lIns="25400" tIns="12700" rIns="25400" bIns="12700" anchor="t">
             <a:spAutoFit/>
           </a:bodyPr>
           <a:lstStyle/>
           <a:p>
-            <a:pPr algn="l" marL="0" indent="0">
+            <a:pPr marL="0" indent="0" algn="l">
               <a:buNone/>
             </a:pPr>
             <a:r>
@@ -16783,6 +19146,7 @@
           <a:lstStyle/>
           <a:p>
             <a:pPr algn="ctr"/>
+            <a:endParaRPr/>
           </a:p>
         </p:txBody>
       </p:sp>
@@ -16829,6 +19193,7 @@
           <a:lstStyle/>
           <a:p>
             <a:pPr algn="ctr"/>
+            <a:endParaRPr/>
           </a:p>
         </p:txBody>
       </p:sp>
@@ -16873,6 +19238,7 @@
           <a:lstStyle/>
           <a:p>
             <a:pPr algn="ctr"/>
+            <a:endParaRPr/>
           </a:p>
         </p:txBody>
       </p:sp>
@@ -16893,12 +19259,12 @@
           <a:noFill/>
         </p:spPr>
         <p:txBody>
-          <a:bodyPr wrap="square" anchor="ctr" lIns="25400" rIns="25400" tIns="12700" bIns="12700">
+          <a:bodyPr wrap="square" lIns="25400" tIns="12700" rIns="25400" bIns="12700" anchor="ctr">
             <a:spAutoFit/>
           </a:bodyPr>
           <a:lstStyle/>
           <a:p>
-            <a:pPr algn="l" marL="0" indent="0">
+            <a:pPr marL="0" indent="0" algn="l">
               <a:buNone/>
             </a:pPr>
             <a:r>
@@ -16930,12 +19296,12 @@
           <a:noFill/>
         </p:spPr>
         <p:txBody>
-          <a:bodyPr wrap="square" anchor="t" lIns="25400" rIns="25400" tIns="12700" bIns="12700">
+          <a:bodyPr wrap="square" lIns="25400" tIns="12700" rIns="25400" bIns="12700" anchor="t">
             <a:spAutoFit/>
           </a:bodyPr>
           <a:lstStyle/>
           <a:p>
-            <a:pPr algn="l" marL="0" indent="0">
+            <a:pPr marL="0" indent="0" algn="l">
               <a:buNone/>
             </a:pPr>
             <a:r>
@@ -16991,6 +19357,7 @@
           <a:lstStyle/>
           <a:p>
             <a:pPr algn="ctr"/>
+            <a:endParaRPr/>
           </a:p>
         </p:txBody>
       </p:sp>
@@ -17011,12 +19378,12 @@
           <a:noFill/>
         </p:spPr>
         <p:txBody>
-          <a:bodyPr wrap="square" anchor="t" lIns="25400" rIns="25400" tIns="12700" bIns="12700">
+          <a:bodyPr wrap="square" lIns="25400" tIns="12700" rIns="25400" bIns="12700" anchor="t">
             <a:spAutoFit/>
           </a:bodyPr>
           <a:lstStyle/>
           <a:p>
-            <a:pPr algn="l" marL="0" indent="0">
+            <a:pPr marL="0" indent="0" algn="l">
               <a:buNone/>
             </a:pPr>
             <a:r>
@@ -17072,6 +19439,7 @@
           <a:lstStyle/>
           <a:p>
             <a:pPr algn="ctr"/>
+            <a:endParaRPr/>
           </a:p>
         </p:txBody>
       </p:sp>
@@ -17092,12 +19460,12 @@
           <a:noFill/>
         </p:spPr>
         <p:txBody>
-          <a:bodyPr wrap="square" anchor="t" lIns="25400" rIns="25400" tIns="12700" bIns="12700">
+          <a:bodyPr wrap="square" lIns="25400" tIns="12700" rIns="25400" bIns="12700" anchor="t">
             <a:spAutoFit/>
           </a:bodyPr>
           <a:lstStyle/>
           <a:p>
-            <a:pPr algn="l" marL="0" indent="0">
+            <a:pPr marL="0" indent="0" algn="l">
               <a:buNone/>
             </a:pPr>
             <a:r>
@@ -17153,6 +19521,7 @@
           <a:lstStyle/>
           <a:p>
             <a:pPr algn="ctr"/>
+            <a:endParaRPr/>
           </a:p>
         </p:txBody>
       </p:sp>
@@ -17173,12 +19542,12 @@
           <a:noFill/>
         </p:spPr>
         <p:txBody>
-          <a:bodyPr wrap="square" anchor="t" lIns="25400" rIns="25400" tIns="12700" bIns="12700">
+          <a:bodyPr wrap="square" lIns="25400" tIns="12700" rIns="25400" bIns="12700" anchor="t">
             <a:spAutoFit/>
           </a:bodyPr>
           <a:lstStyle/>
           <a:p>
-            <a:pPr algn="l" marL="0" indent="0">
+            <a:pPr marL="0" indent="0" algn="l">
               <a:buNone/>
             </a:pPr>
             <a:r>
@@ -17234,6 +19603,7 @@
           <a:lstStyle/>
           <a:p>
             <a:pPr algn="ctr"/>
+            <a:endParaRPr/>
           </a:p>
         </p:txBody>
       </p:sp>
@@ -17254,12 +19624,12 @@
           <a:noFill/>
         </p:spPr>
         <p:txBody>
-          <a:bodyPr wrap="square" anchor="t" lIns="25400" rIns="25400" tIns="12700" bIns="12700">
+          <a:bodyPr wrap="square" lIns="25400" tIns="12700" rIns="25400" bIns="12700" anchor="t">
             <a:spAutoFit/>
           </a:bodyPr>
           <a:lstStyle/>
           <a:p>
-            <a:pPr algn="l" marL="0" indent="0">
+            <a:pPr marL="0" indent="0" algn="l">
               <a:buNone/>
             </a:pPr>
             <a:r>
@@ -17291,12 +19661,12 @@
           <a:noFill/>
         </p:spPr>
         <p:txBody>
-          <a:bodyPr wrap="square" anchor="ctr" lIns="25400" rIns="25400" tIns="12700" bIns="12700">
+          <a:bodyPr wrap="square" lIns="25400" tIns="12700" rIns="25400" bIns="12700" anchor="ctr">
             <a:spAutoFit/>
           </a:bodyPr>
           <a:lstStyle/>
           <a:p>
-            <a:pPr algn="l" marL="0" indent="0">
+            <a:pPr marL="0" indent="0" algn="l">
               <a:buNone/>
             </a:pPr>
             <a:r>
@@ -17328,12 +19698,12 @@
           <a:noFill/>
         </p:spPr>
         <p:txBody>
-          <a:bodyPr wrap="square" anchor="ctr" lIns="25400" rIns="25400" tIns="12700" bIns="12700">
+          <a:bodyPr wrap="square" lIns="25400" tIns="12700" rIns="25400" bIns="12700" anchor="ctr">
             <a:spAutoFit/>
           </a:bodyPr>
           <a:lstStyle/>
           <a:p>
-            <a:pPr algn="r" marL="0" indent="0">
+            <a:pPr marL="0" indent="0" algn="r">
               <a:buNone/>
             </a:pPr>
             <a:r>

--- a/docs/Cafe.pi_쉬운_사용자매뉴얼_세로.pptx
+++ b/docs/Cafe.pi_쉬운_사용자매뉴얼_세로.pptx
@@ -3978,7 +3978,7 @@
         </p:nvSpPr>
         <p:spPr>
           <a:xfrm>
-            <a:off x="411480" y="9430207"/>
+            <a:off x="411480" y="7520386"/>
             <a:ext cx="6035040" cy="2194560"/>
           </a:xfrm>
           <a:prstGeom prst="roundRect">
@@ -4025,7 +4025,7 @@
         </p:nvSpPr>
         <p:spPr>
           <a:xfrm>
-            <a:off x="411480" y="9722815"/>
+            <a:off x="411480" y="7812994"/>
             <a:ext cx="6035040" cy="411480"/>
           </a:xfrm>
           <a:prstGeom prst="rect">
@@ -4062,7 +4062,7 @@
         </p:nvSpPr>
         <p:spPr>
           <a:xfrm>
-            <a:off x="411480" y="10161727"/>
+            <a:off x="411480" y="8251906"/>
             <a:ext cx="6035040" cy="960120"/>
           </a:xfrm>
           <a:prstGeom prst="rect">
@@ -4099,7 +4099,7 @@
         </p:nvSpPr>
         <p:spPr>
           <a:xfrm>
-            <a:off x="411480" y="11094415"/>
+            <a:off x="411480" y="9184594"/>
             <a:ext cx="6035040" cy="411480"/>
           </a:xfrm>
           <a:prstGeom prst="rect">
@@ -4324,7 +4324,7 @@
         </p:nvSpPr>
         <p:spPr>
           <a:xfrm>
-            <a:off x="411480" y="7052767"/>
+            <a:off x="411480" y="4784130"/>
             <a:ext cx="6035040" cy="2103120"/>
           </a:xfrm>
           <a:prstGeom prst="roundRect">
@@ -4373,7 +4373,7 @@
         </p:nvSpPr>
         <p:spPr>
           <a:xfrm>
-            <a:off x="612648" y="7875727"/>
+            <a:off x="612648" y="5607090"/>
             <a:ext cx="457200" cy="457200"/>
           </a:xfrm>
           <a:prstGeom prst="ellipse">
@@ -4418,7 +4418,7 @@
         </p:nvSpPr>
         <p:spPr>
           <a:xfrm>
-            <a:off x="612648" y="7875727"/>
+            <a:off x="612648" y="5607090"/>
             <a:ext cx="457200" cy="457200"/>
           </a:xfrm>
           <a:prstGeom prst="rect">
@@ -4455,7 +4455,7 @@
         </p:nvSpPr>
         <p:spPr>
           <a:xfrm>
-            <a:off x="1280160" y="7189927"/>
+            <a:off x="1280160" y="4921290"/>
             <a:ext cx="4892040" cy="1828800"/>
           </a:xfrm>
           <a:prstGeom prst="rect">
@@ -6492,8 +6492,8 @@
         </p:nvSpPr>
         <p:spPr>
           <a:xfrm>
-            <a:off x="411480" y="8823960"/>
-            <a:ext cx="6035040" cy="914400"/>
+            <a:off x="424791" y="8823959"/>
+            <a:ext cx="6035040" cy="2133295"/>
           </a:xfrm>
           <a:prstGeom prst="roundRect">
             <a:avLst>
@@ -6539,8 +6539,8 @@
         </p:nvSpPr>
         <p:spPr>
           <a:xfrm>
-            <a:off x="685800" y="8823960"/>
-            <a:ext cx="5486400" cy="914400"/>
+            <a:off x="685800" y="9177661"/>
+            <a:ext cx="5486400" cy="1364476"/>
           </a:xfrm>
           <a:prstGeom prst="rect">
             <a:avLst/>
@@ -6560,14 +6560,38 @@
               <a:buNone/>
             </a:pPr>
             <a:r>
-              <a:rPr sz="1450" b="1" i="0">
+              <a:rPr sz="1450" b="1" i="0" dirty="0">
                 <a:solidFill>
                   <a:srgbClr val="3B2A20"/>
                 </a:solidFill>
                 <a:latin typeface="Malgun Gothic"/>
               </a:rPr>
-              <a:t>🎁 지금 내 가게를 열면</a:t>
-            </a:r>
+              <a:t>🎁 </a:t>
+            </a:r>
+            <a:r>
+              <a:rPr lang="en-US" sz="1450" b="1" i="0" dirty="0">
+                <a:solidFill>
+                  <a:srgbClr val="3B2A20"/>
+                </a:solidFill>
+                <a:latin typeface="Malgun Gothic"/>
+              </a:rPr>
+              <a:t>10</a:t>
+            </a:r>
+            <a:r>
+              <a:rPr lang="ko-KR" altLang="en-US" sz="1450" b="1" i="0" dirty="0">
+                <a:solidFill>
+                  <a:srgbClr val="3B2A20"/>
+                </a:solidFill>
+                <a:latin typeface="Malgun Gothic"/>
+              </a:rPr>
+              <a:t>개 미션을 성공하면</a:t>
+            </a:r>
+            <a:endParaRPr sz="1450" b="1" i="0" dirty="0">
+              <a:solidFill>
+                <a:srgbClr val="3B2A20"/>
+              </a:solidFill>
+              <a:latin typeface="Malgun Gothic"/>
+            </a:endParaRPr>
           </a:p>
           <a:p>
             <a:pPr marL="0" indent="0" algn="ctr">
@@ -6577,13 +6601,173 @@
               <a:buNone/>
             </a:pPr>
             <a:r>
-              <a:rPr sz="1600" b="1" i="0">
+              <a:rPr sz="1600" b="1" i="0" dirty="0" err="1">
                 <a:solidFill>
                   <a:srgbClr val="3B2A20"/>
                 </a:solidFill>
                 <a:latin typeface="Malgun Gothic"/>
               </a:rPr>
-              <a:t>선착순 100곳에 10,000 Bean 증정!</a:t>
+              <a:t>선착순</a:t>
+            </a:r>
+            <a:r>
+              <a:rPr sz="1600" b="1" i="0" dirty="0">
+                <a:solidFill>
+                  <a:srgbClr val="3B2A20"/>
+                </a:solidFill>
+                <a:latin typeface="Malgun Gothic"/>
+              </a:rPr>
+              <a:t> 100</a:t>
+            </a:r>
+            <a:r>
+              <a:rPr lang="ko-KR" altLang="en-US" sz="1600" b="1" i="0" dirty="0">
+                <a:solidFill>
+                  <a:srgbClr val="3B2A20"/>
+                </a:solidFill>
+                <a:latin typeface="Malgun Gothic"/>
+              </a:rPr>
+              <a:t>명</a:t>
+            </a:r>
+            <a:r>
+              <a:rPr sz="1600" b="1" i="0" dirty="0">
+                <a:solidFill>
+                  <a:srgbClr val="3B2A20"/>
+                </a:solidFill>
+                <a:latin typeface="Malgun Gothic"/>
+              </a:rPr>
+              <a:t>에 </a:t>
+            </a:r>
+            <a:r>
+              <a:rPr lang="en-US" sz="1600" b="1" i="0" dirty="0">
+                <a:solidFill>
+                  <a:srgbClr val="3B2A20"/>
+                </a:solidFill>
+                <a:latin typeface="Malgun Gothic"/>
+              </a:rPr>
+              <a:t>5</a:t>
+            </a:r>
+            <a:r>
+              <a:rPr sz="1600" b="1" i="0" dirty="0">
+                <a:solidFill>
+                  <a:srgbClr val="3B2A20"/>
+                </a:solidFill>
+                <a:latin typeface="Malgun Gothic"/>
+              </a:rPr>
+              <a:t>,000 Bean </a:t>
+            </a:r>
+            <a:r>
+              <a:rPr sz="1600" b="1" i="0" dirty="0" err="1">
+                <a:solidFill>
+                  <a:srgbClr val="3B2A20"/>
+                </a:solidFill>
+                <a:latin typeface="Malgun Gothic"/>
+              </a:rPr>
+              <a:t>증정</a:t>
+            </a:r>
+            <a:r>
+              <a:rPr sz="1600" b="1" i="0" dirty="0">
+                <a:solidFill>
+                  <a:srgbClr val="3B2A20"/>
+                </a:solidFill>
+                <a:latin typeface="Malgun Gothic"/>
+              </a:rPr>
+              <a:t>!</a:t>
+            </a:r>
+            <a:endParaRPr lang="en-US" sz="1600" b="1" i="0" dirty="0">
+              <a:solidFill>
+                <a:srgbClr val="3B2A20"/>
+              </a:solidFill>
+              <a:latin typeface="Malgun Gothic"/>
+            </a:endParaRPr>
+          </a:p>
+          <a:p>
+            <a:pPr marL="0" indent="0" algn="ctr">
+              <a:spcAft>
+                <a:spcPts val="300"/>
+              </a:spcAft>
+              <a:buNone/>
+            </a:pPr>
+            <a:endParaRPr lang="en-US" sz="1600" b="1" dirty="0">
+              <a:solidFill>
+                <a:srgbClr val="3B2A20"/>
+              </a:solidFill>
+              <a:latin typeface="Malgun Gothic"/>
+            </a:endParaRPr>
+          </a:p>
+          <a:p>
+            <a:pPr algn="ctr">
+              <a:spcAft>
+                <a:spcPts val="300"/>
+              </a:spcAft>
+            </a:pPr>
+            <a:r>
+              <a:rPr lang="ko-KR" altLang="en-US" sz="1450" b="1" dirty="0">
+                <a:solidFill>
+                  <a:srgbClr val="3B2A20"/>
+                </a:solidFill>
+                <a:latin typeface="Malgun Gothic"/>
+              </a:rPr>
+              <a:t>🎁 지금 내 가게를 열면</a:t>
+            </a:r>
+          </a:p>
+          <a:p>
+            <a:pPr algn="ctr">
+              <a:spcAft>
+                <a:spcPts val="300"/>
+              </a:spcAft>
+            </a:pPr>
+            <a:r>
+              <a:rPr lang="ko-KR" altLang="en-US" sz="1600" b="1" dirty="0">
+                <a:solidFill>
+                  <a:srgbClr val="3B2A20"/>
+                </a:solidFill>
+                <a:latin typeface="Malgun Gothic"/>
+              </a:rPr>
+              <a:t>선착순 </a:t>
+            </a:r>
+            <a:r>
+              <a:rPr lang="en-US" altLang="ko-KR" sz="1600" b="1" dirty="0">
+                <a:solidFill>
+                  <a:srgbClr val="3B2A20"/>
+                </a:solidFill>
+                <a:latin typeface="Malgun Gothic"/>
+              </a:rPr>
+              <a:t>100</a:t>
+            </a:r>
+            <a:r>
+              <a:rPr lang="ko-KR" altLang="en-US" sz="1600" b="1" dirty="0">
+                <a:solidFill>
+                  <a:srgbClr val="3B2A20"/>
+                </a:solidFill>
+                <a:latin typeface="Malgun Gothic"/>
+              </a:rPr>
+              <a:t>곳에 </a:t>
+            </a:r>
+            <a:r>
+              <a:rPr lang="en-US" altLang="ko-KR" sz="1600" b="1" dirty="0">
+                <a:solidFill>
+                  <a:srgbClr val="3B2A20"/>
+                </a:solidFill>
+                <a:latin typeface="Malgun Gothic"/>
+              </a:rPr>
+              <a:t>10,000 Bean </a:t>
+            </a:r>
+            <a:r>
+              <a:rPr lang="ko-KR" altLang="en-US" sz="1600" b="1" dirty="0">
+                <a:solidFill>
+                  <a:srgbClr val="3B2A20"/>
+                </a:solidFill>
+                <a:latin typeface="Malgun Gothic"/>
+              </a:rPr>
+              <a:t>증정</a:t>
+            </a:r>
+            <a:r>
+              <a:rPr lang="en-US" altLang="ko-KR" sz="1600" b="1" dirty="0">
+                <a:solidFill>
+                  <a:srgbClr val="3B2A20"/>
+                </a:solidFill>
+                <a:latin typeface="Malgun Gothic"/>
+              </a:rPr>
+              <a:t>!</a:t>
             </a:r>
           </a:p>
         </p:txBody>
@@ -13005,8 +13189,8 @@
         </p:nvSpPr>
         <p:spPr>
           <a:xfrm>
-            <a:off x="1389888" y="365760"/>
-            <a:ext cx="3822192" cy="1005840"/>
+            <a:off x="1389888" y="709662"/>
+            <a:ext cx="4032504" cy="318036"/>
           </a:xfrm>
           <a:prstGeom prst="rect">
             <a:avLst/>
@@ -13023,14 +13207,83 @@
               <a:buNone/>
             </a:pPr>
             <a:r>
-              <a:rPr sz="1900" b="1" i="0">
+              <a:rPr sz="1900" b="1" i="0" dirty="0">
                 <a:solidFill>
                   <a:srgbClr val="3B2A20"/>
                 </a:solidFill>
                 <a:latin typeface="Malgun Gothic"/>
               </a:rPr>
-              <a:t>🎫  구독 요금제 — Bean으로 결제</a:t>
-            </a:r>
+              <a:t>🎫  </a:t>
+            </a:r>
+            <a:r>
+              <a:rPr sz="1900" b="1" i="0" dirty="0" err="1">
+                <a:solidFill>
+                  <a:srgbClr val="3B2A20"/>
+                </a:solidFill>
+                <a:latin typeface="Malgun Gothic"/>
+              </a:rPr>
+              <a:t>구독</a:t>
+            </a:r>
+            <a:r>
+              <a:rPr sz="1900" b="1" i="0" dirty="0">
+                <a:solidFill>
+                  <a:srgbClr val="3B2A20"/>
+                </a:solidFill>
+                <a:latin typeface="Malgun Gothic"/>
+              </a:rPr>
+              <a:t> </a:t>
+            </a:r>
+            <a:r>
+              <a:rPr sz="1900" b="1" i="0" dirty="0" err="1">
+                <a:solidFill>
+                  <a:srgbClr val="3B2A20"/>
+                </a:solidFill>
+                <a:latin typeface="Malgun Gothic"/>
+              </a:rPr>
+              <a:t>요금제</a:t>
+            </a:r>
+            <a:r>
+              <a:rPr sz="1900" b="1" i="0" dirty="0">
+                <a:solidFill>
+                  <a:srgbClr val="3B2A20"/>
+                </a:solidFill>
+                <a:latin typeface="Malgun Gothic"/>
+              </a:rPr>
+              <a:t> — </a:t>
+            </a:r>
+            <a:r>
+              <a:rPr sz="1900" b="1" i="0" dirty="0" err="1">
+                <a:solidFill>
+                  <a:srgbClr val="3B2A20"/>
+                </a:solidFill>
+                <a:latin typeface="Malgun Gothic"/>
+              </a:rPr>
+              <a:t>Bean으로</a:t>
+            </a:r>
+            <a:r>
+              <a:rPr sz="1900" b="1" i="0" dirty="0">
+                <a:solidFill>
+                  <a:srgbClr val="3B2A20"/>
+                </a:solidFill>
+                <a:latin typeface="Malgun Gothic"/>
+              </a:rPr>
+              <a:t> </a:t>
+            </a:r>
+            <a:r>
+              <a:rPr sz="1900" b="1" i="0" dirty="0" err="1">
+                <a:solidFill>
+                  <a:srgbClr val="3B2A20"/>
+                </a:solidFill>
+                <a:latin typeface="Malgun Gothic"/>
+              </a:rPr>
+              <a:t>결제</a:t>
+            </a:r>
+            <a:endParaRPr sz="1900" b="1" i="0" dirty="0">
+              <a:solidFill>
+                <a:srgbClr val="3B2A20"/>
+              </a:solidFill>
+              <a:latin typeface="Malgun Gothic"/>
+            </a:endParaRPr>
           </a:p>
         </p:txBody>
       </p:sp>
@@ -13497,8 +13750,8 @@
         </p:nvSpPr>
         <p:spPr>
           <a:xfrm>
-            <a:off x="3749040" y="4579010"/>
-            <a:ext cx="2377440" cy="548640"/>
+            <a:off x="3749040" y="4663534"/>
+            <a:ext cx="2377440" cy="379591"/>
           </a:xfrm>
           <a:prstGeom prst="rect">
             <a:avLst/>
@@ -13515,13 +13768,22 @@
               <a:buNone/>
             </a:pPr>
             <a:r>
-              <a:rPr sz="2300" b="1" i="0">
+              <a:rPr lang="en-US" sz="2300" b="1" i="0" dirty="0">
                 <a:solidFill>
                   <a:srgbClr val="F4A52A"/>
                 </a:solidFill>
                 <a:latin typeface="Malgun Gothic"/>
               </a:rPr>
-              <a:t>3,000</a:t>
+              <a:t>2</a:t>
+            </a:r>
+            <a:r>
+              <a:rPr sz="2300" b="1" i="0" dirty="0">
+                <a:solidFill>
+                  <a:srgbClr val="F4A52A"/>
+                </a:solidFill>
+                <a:latin typeface="Malgun Gothic"/>
+              </a:rPr>
+              <a:t>,000</a:t>
             </a:r>
           </a:p>
         </p:txBody>
@@ -13535,7 +13797,7 @@
         <p:spPr>
           <a:xfrm>
             <a:off x="3749040" y="5127650"/>
-            <a:ext cx="2377440" cy="320040"/>
+            <a:ext cx="2377440" cy="187231"/>
           </a:xfrm>
           <a:prstGeom prst="rect">
             <a:avLst/>
@@ -13552,13 +13814,31 @@
               <a:buNone/>
             </a:pPr>
             <a:r>
-              <a:rPr sz="1050" b="0" i="0">
+              <a:rPr sz="1050" b="0" i="0" dirty="0">
                 <a:solidFill>
                   <a:srgbClr val="8A7A6D"/>
                 </a:solidFill>
                 <a:latin typeface="Malgun Gothic"/>
               </a:rPr>
-              <a:t>Bean/월 · 연 30,000</a:t>
+              <a:t>Bean/월 · 연 </a:t>
+            </a:r>
+            <a:r>
+              <a:rPr lang="en-US" sz="1050" b="0" i="0" dirty="0">
+                <a:solidFill>
+                  <a:srgbClr val="8A7A6D"/>
+                </a:solidFill>
+                <a:latin typeface="Malgun Gothic"/>
+              </a:rPr>
+              <a:t>2</a:t>
+            </a:r>
+            <a:r>
+              <a:rPr sz="1050" b="0" i="0" dirty="0">
+                <a:solidFill>
+                  <a:srgbClr val="8A7A6D"/>
+                </a:solidFill>
+                <a:latin typeface="Malgun Gothic"/>
+              </a:rPr>
+              <a:t>0,000</a:t>
             </a:r>
           </a:p>
         </p:txBody>
@@ -13907,7 +14187,7 @@
                 </a:solidFill>
                 <a:latin typeface="Malgun Gothic"/>
               </a:rPr>
-              <a:t>5</a:t>
+              <a:t>3</a:t>
             </a:r>
             <a:r>
               <a:rPr sz="2300" b="1" i="0" dirty="0">
@@ -13962,7 +14242,7 @@
                 </a:solidFill>
                 <a:latin typeface="Malgun Gothic"/>
               </a:rPr>
-              <a:t>5</a:t>
+              <a:t>3</a:t>
             </a:r>
             <a:r>
               <a:rPr sz="1050" b="0" i="0" dirty="0">
@@ -14407,13 +14687,13 @@
               <a:buNone/>
             </a:pPr>
             <a:r>
-              <a:rPr lang="en-US" sz="2300" b="1" dirty="0">
+              <a:rPr lang="en-US" sz="2300" b="1" i="0" dirty="0">
                 <a:solidFill>
                   <a:srgbClr val="2E7D6F"/>
                 </a:solidFill>
                 <a:latin typeface="Malgun Gothic"/>
               </a:rPr>
-              <a:t>3</a:t>
+              <a:t>1</a:t>
             </a:r>
             <a:r>
               <a:rPr sz="2300" b="1" i="0" dirty="0">
@@ -14462,13 +14742,13 @@
               <a:t>Bean/월 · 연 </a:t>
             </a:r>
             <a:r>
-              <a:rPr lang="en-US" sz="1050" b="0" i="0" dirty="0">
+              <a:rPr lang="en-US" sz="1050" dirty="0">
                 <a:solidFill>
                   <a:srgbClr val="8A7A6D"/>
                 </a:solidFill>
                 <a:latin typeface="Malgun Gothic"/>
               </a:rPr>
-              <a:t>3</a:t>
+              <a:t>1</a:t>
             </a:r>
             <a:r>
               <a:rPr sz="1050" b="0" i="0" dirty="0">
